--- a/Aula02_Pensamento_Indutivo/Aula02_Teoria.pptx
+++ b/Aula02_Pensamento_Indutivo/Aula02_Teoria.pptx
@@ -2320,6 +2320,10 @@
           </a:solidFill>
           <a:ln/>
         </p:spPr>
+        <p:txBody>
+          <a:bodyPr/>
+          <a:p/>
+        </p:txBody>
       </p:sp>
       <p:sp>
         <p:nvSpPr>
@@ -2342,6 +2346,10 @@
           </a:solidFill>
           <a:ln/>
         </p:spPr>
+        <p:txBody>
+          <a:bodyPr/>
+          <a:p/>
+        </p:txBody>
       </p:sp>
       <p:sp>
         <p:nvSpPr>
@@ -2362,6 +2370,10 @@
           </a:solidFill>
           <a:ln/>
         </p:spPr>
+        <p:txBody>
+          <a:bodyPr/>
+          <a:p/>
+        </p:txBody>
       </p:sp>
       <p:pic>
         <p:nvPicPr>
@@ -2600,6 +2612,10 @@
           </a:solidFill>
           <a:ln/>
         </p:spPr>
+        <p:txBody>
+          <a:bodyPr/>
+          <a:p/>
+        </p:txBody>
       </p:sp>
       <p:sp>
         <p:nvSpPr>
@@ -2912,6 +2928,10 @@
             </a:outerShdw>
           </a:effectLst>
         </p:spPr>
+        <p:txBody>
+          <a:bodyPr/>
+          <a:p/>
+        </p:txBody>
       </p:sp>
       <p:sp>
         <p:nvSpPr>
@@ -3669,6 +3689,10 @@
             </a:outerShdw>
           </a:effectLst>
         </p:spPr>
+        <p:txBody>
+          <a:bodyPr/>
+          <a:p/>
+        </p:txBody>
       </p:sp>
       <p:sp>
         <p:nvSpPr>
@@ -3767,7 +3791,7 @@
                 <a:ea typeface="Calibri" pitchFamily="34" charset="-122"/>
                 <a:cs typeface="Calibri" pitchFamily="34" charset="-120"/>
               </a:rPr>
-              <a:t>Wessels: múltiplas representações indicam modelagem mais bem-sucedida.</a:t>
+              <a:t>Múltiplas representações indicam modelagem mais bem-sucedida.</a:t>
             </a:r>
             <a:endParaRPr lang="en-US" sz="1100" dirty="0"/>
           </a:p>
@@ -3788,7 +3812,7 @@
                 <a:ea typeface="Calibri" pitchFamily="34" charset="-122"/>
                 <a:cs typeface="Calibri" pitchFamily="34" charset="-120"/>
               </a:rPr>
-              <a:t>Queiroz: a análise qualitativa observa invariantes e relações mobilizadas na ação.</a:t>
+              <a:t>A análise qualitativa observa invariantes e relações mobilizadas na ação.</a:t>
             </a:r>
             <a:endParaRPr lang="en-US" sz="1100" dirty="0"/>
           </a:p>
@@ -3809,7 +3833,7 @@
                 <a:ea typeface="Calibri" pitchFamily="34" charset="-122"/>
                 <a:cs typeface="Calibri" pitchFamily="34" charset="-120"/>
               </a:rPr>
-              <a:t>Relato: permitir manipulação de parâmetros e comparação de estados.</a:t>
+              <a:t>Permitir manipulação de parâmetros e comparação de estados.</a:t>
             </a:r>
             <a:endParaRPr lang="en-US" sz="1100" dirty="0"/>
           </a:p>
@@ -3843,6 +3867,10 @@
             </a:outerShdw>
           </a:effectLst>
         </p:spPr>
+        <p:txBody>
+          <a:bodyPr/>
+          <a:p/>
+        </p:txBody>
       </p:sp>
       <p:sp>
         <p:nvSpPr>
@@ -4077,6 +4105,10 @@
           </a:solidFill>
           <a:ln/>
         </p:spPr>
+        <p:txBody>
+          <a:bodyPr/>
+          <a:p/>
+        </p:txBody>
       </p:sp>
       <p:sp>
         <p:nvSpPr>
@@ -4389,6 +4421,10 @@
             </a:outerShdw>
           </a:effectLst>
         </p:spPr>
+        <p:txBody>
+          <a:bodyPr/>
+          <a:p/>
+        </p:txBody>
       </p:sp>
       <p:sp>
         <p:nvSpPr>
@@ -4922,6 +4958,10 @@
             </a:outerShdw>
           </a:effectLst>
         </p:spPr>
+        <p:txBody>
+          <a:bodyPr/>
+          <a:p/>
+        </p:txBody>
       </p:sp>
       <p:sp>
         <p:nvSpPr>
@@ -4999,7 +5039,7 @@
                 <a:ea typeface="Calibri" pitchFamily="34" charset="-122"/>
                 <a:cs typeface="Calibri" pitchFamily="34" charset="-120"/>
               </a:rPr>
-              <a:t>Wessels: representações idiossincráticas revelam pensamento.</a:t>
+              <a:t>Representações idiossincráticas revelam pensamento.</a:t>
             </a:r>
             <a:endParaRPr lang="en-US" sz="1100" dirty="0"/>
           </a:p>
@@ -5020,7 +5060,7 @@
                 <a:ea typeface="Calibri" pitchFamily="34" charset="-122"/>
                 <a:cs typeface="Calibri" pitchFamily="34" charset="-120"/>
               </a:rPr>
-              <a:t>Wessels: respostas idiossincráticas também revelam modos de pensar.</a:t>
+              <a:t>Respostas idiossincráticas também revelam modos de pensar.</a:t>
             </a:r>
             <a:endParaRPr lang="en-US" sz="1100" dirty="0"/>
           </a:p>
@@ -5041,7 +5081,7 @@
                 <a:ea typeface="Calibri" pitchFamily="34" charset="-122"/>
                 <a:cs typeface="Calibri" pitchFamily="34" charset="-120"/>
               </a:rPr>
-              <a:t>Queiroz: múltiplas expressões exibem aspectos distintos do mesmo conceito.</a:t>
+              <a:t>Múltiplas expressões exibem aspectos distintos do mesmo conceito.</a:t>
             </a:r>
             <a:endParaRPr lang="en-US" sz="1100" dirty="0"/>
           </a:p>
@@ -5062,7 +5102,7 @@
                 <a:ea typeface="Calibri" pitchFamily="34" charset="-122"/>
                 <a:cs typeface="Calibri" pitchFamily="34" charset="-120"/>
               </a:rPr>
-              <a:t>Relato: articular código, texto, tabela, gráfico e interpretação.</a:t>
+              <a:t>Articular código, texto, tabela, gráfico e interpretação.</a:t>
             </a:r>
             <a:endParaRPr lang="en-US" sz="1100" dirty="0"/>
           </a:p>
@@ -5096,6 +5136,10 @@
             </a:outerShdw>
           </a:effectLst>
         </p:spPr>
+        <p:txBody>
+          <a:bodyPr/>
+          <a:p/>
+        </p:txBody>
       </p:sp>
       <p:sp>
         <p:nvSpPr>
@@ -5330,6 +5374,10 @@
           </a:solidFill>
           <a:ln/>
         </p:spPr>
+        <p:txBody>
+          <a:bodyPr/>
+          <a:p/>
+        </p:txBody>
       </p:sp>
       <p:sp>
         <p:nvSpPr>
@@ -5642,6 +5690,10 @@
             </a:outerShdw>
           </a:effectLst>
         </p:spPr>
+        <p:txBody>
+          <a:bodyPr/>
+          <a:p/>
+        </p:txBody>
       </p:sp>
       <p:sp>
         <p:nvSpPr>
@@ -6532,6 +6584,10 @@
             </a:outerShdw>
           </a:effectLst>
         </p:spPr>
+        <p:txBody>
+          <a:bodyPr/>
+          <a:p/>
+        </p:txBody>
       </p:sp>
       <p:sp>
         <p:nvSpPr>
@@ -6630,7 +6686,7 @@
                 <a:ea typeface="Calibri" pitchFamily="34" charset="-122"/>
                 <a:cs typeface="Calibri" pitchFamily="34" charset="-120"/>
               </a:rPr>
-              <a:t>Wessels: o contexto e o tipo de dado influenciam a representação escolhida.</a:t>
+              <a:t>O contexto e o tipo de dado influenciam a representação escolhida.</a:t>
             </a:r>
             <a:endParaRPr lang="en-US" sz="1100" dirty="0"/>
           </a:p>
@@ -6651,7 +6707,7 @@
                 <a:ea typeface="Calibri" pitchFamily="34" charset="-122"/>
                 <a:cs typeface="Calibri" pitchFamily="34" charset="-120"/>
               </a:rPr>
-              <a:t>Queiroz: a forma de representação influencia erros, antecipações e reorganizações.</a:t>
+              <a:t>A forma de representação influencia erros, antecipações e reorganizações.</a:t>
             </a:r>
             <a:endParaRPr lang="en-US" sz="1100" dirty="0"/>
           </a:p>
@@ -6672,7 +6728,7 @@
                 <a:ea typeface="Calibri" pitchFamily="34" charset="-122"/>
                 <a:cs typeface="Calibri" pitchFamily="34" charset="-120"/>
               </a:rPr>
-              <a:t>Relato: explicitar variáveis, relações e restrições.</a:t>
+              <a:t>Explicitar variáveis, relações e restrições.</a:t>
             </a:r>
             <a:endParaRPr lang="en-US" sz="1100" dirty="0"/>
           </a:p>
@@ -6706,6 +6762,10 @@
             </a:outerShdw>
           </a:effectLst>
         </p:spPr>
+        <p:txBody>
+          <a:bodyPr/>
+          <a:p/>
+        </p:txBody>
       </p:sp>
       <p:sp>
         <p:nvSpPr>
@@ -6940,6 +7000,10 @@
           </a:solidFill>
           <a:ln/>
         </p:spPr>
+        <p:txBody>
+          <a:bodyPr/>
+          <a:p/>
+        </p:txBody>
       </p:sp>
       <p:sp>
         <p:nvSpPr>
@@ -7252,6 +7316,10 @@
             </a:outerShdw>
           </a:effectLst>
         </p:spPr>
+        <p:txBody>
+          <a:bodyPr/>
+          <a:p/>
+        </p:txBody>
       </p:sp>
       <p:sp>
         <p:nvSpPr>
@@ -7734,6 +7802,10 @@
             </a:outerShdw>
           </a:effectLst>
         </p:spPr>
+        <p:txBody>
+          <a:bodyPr/>
+          <a:p/>
+        </p:txBody>
       </p:sp>
       <p:sp>
         <p:nvSpPr>
@@ -7832,7 +7904,7 @@
                 <a:ea typeface="Calibri" pitchFamily="34" charset="-122"/>
                 <a:cs typeface="Calibri" pitchFamily="34" charset="-120"/>
               </a:rPr>
-              <a:t>Wessels: apoio icônico favorece análise em modos concretos e simbólicos.</a:t>
+              <a:t>Apoio icônico favorece análise em modos concretos e simbólicos.</a:t>
             </a:r>
             <a:endParaRPr lang="en-US" sz="1100" dirty="0"/>
           </a:p>
@@ -7853,7 +7925,7 @@
                 <a:ea typeface="Calibri" pitchFamily="34" charset="-122"/>
                 <a:cs typeface="Calibri" pitchFamily="34" charset="-120"/>
               </a:rPr>
-              <a:t>Queiroz: representações ampliam a percepção de propriedades e relações.</a:t>
+              <a:t>Representações ampliam a percepção de propriedades e relações.</a:t>
             </a:r>
             <a:endParaRPr lang="en-US" sz="1100" dirty="0"/>
           </a:p>
@@ -7874,7 +7946,7 @@
                 <a:ea typeface="Calibri" pitchFamily="34" charset="-122"/>
                 <a:cs typeface="Calibri" pitchFamily="34" charset="-120"/>
               </a:rPr>
-              <a:t>Relato: articular código, texto, tabela, gráfico e interpretação.</a:t>
+              <a:t>Articular código, texto, tabela, gráfico e interpretação.</a:t>
             </a:r>
             <a:endParaRPr lang="en-US" sz="1100" dirty="0"/>
           </a:p>
@@ -7908,6 +7980,10 @@
             </a:outerShdw>
           </a:effectLst>
         </p:spPr>
+        <p:txBody>
+          <a:bodyPr/>
+          <a:p/>
+        </p:txBody>
       </p:sp>
       <p:sp>
         <p:nvSpPr>
@@ -8142,6 +8218,10 @@
           </a:solidFill>
           <a:ln/>
         </p:spPr>
+        <p:txBody>
+          <a:bodyPr/>
+          <a:p/>
+        </p:txBody>
       </p:sp>
       <p:sp>
         <p:nvSpPr>
@@ -8454,6 +8534,10 @@
             </a:outerShdw>
           </a:effectLst>
         </p:spPr>
+        <p:txBody>
+          <a:bodyPr/>
+          <a:p/>
+        </p:txBody>
       </p:sp>
       <p:sp>
         <p:nvSpPr>
@@ -9058,6 +9142,10 @@
             </a:outerShdw>
           </a:effectLst>
         </p:spPr>
+        <p:txBody>
+          <a:bodyPr/>
+          <a:p/>
+        </p:txBody>
       </p:sp>
       <p:sp>
         <p:nvSpPr>
@@ -9156,7 +9244,7 @@
                 <a:ea typeface="Calibri" pitchFamily="34" charset="-122"/>
                 <a:cs typeface="Calibri" pitchFamily="34" charset="-120"/>
               </a:rPr>
-              <a:t>Wessels: níveis SOLO ajudam a observar respostas de menor a maior integração.</a:t>
+              <a:t>Níveis SOLO ajudam a observar respostas de menor a maior integração.</a:t>
             </a:r>
             <a:endParaRPr lang="en-US" sz="1100" dirty="0"/>
           </a:p>
@@ -9177,7 +9265,7 @@
                 <a:ea typeface="Calibri" pitchFamily="34" charset="-122"/>
                 <a:cs typeface="Calibri" pitchFamily="34" charset="-120"/>
               </a:rPr>
-              <a:t>Queiroz: o resultado final não esgota a aprendizagem do conceito.</a:t>
+              <a:t>O resultado final não esgota a aprendizagem do conceito.</a:t>
             </a:r>
             <a:endParaRPr lang="en-US" sz="1100" dirty="0"/>
           </a:p>
@@ -9198,7 +9286,7 @@
                 <a:ea typeface="Calibri" pitchFamily="34" charset="-122"/>
                 <a:cs typeface="Calibri" pitchFamily="34" charset="-120"/>
               </a:rPr>
-              <a:t>Relato: reconhecer limites da ferramenta e do modelo.</a:t>
+              <a:t>Reconhecer limites da ferramenta e do modelo.</a:t>
             </a:r>
             <a:endParaRPr lang="en-US" sz="1100" dirty="0"/>
           </a:p>
@@ -9232,6 +9320,10 @@
             </a:outerShdw>
           </a:effectLst>
         </p:spPr>
+        <p:txBody>
+          <a:bodyPr/>
+          <a:p/>
+        </p:txBody>
       </p:sp>
       <p:sp>
         <p:nvSpPr>
@@ -9466,6 +9558,10 @@
           </a:solidFill>
           <a:ln/>
         </p:spPr>
+        <p:txBody>
+          <a:bodyPr/>
+          <a:p/>
+        </p:txBody>
       </p:sp>
       <p:sp>
         <p:nvSpPr>
@@ -9778,6 +9874,10 @@
             </a:outerShdw>
           </a:effectLst>
         </p:spPr>
+        <p:txBody>
+          <a:bodyPr/>
+          <a:p/>
+        </p:txBody>
       </p:sp>
       <p:sp>
         <p:nvSpPr>
@@ -10348,6 +10448,10 @@
             </a:outerShdw>
           </a:effectLst>
         </p:spPr>
+        <p:txBody>
+          <a:bodyPr/>
+          <a:p/>
+        </p:txBody>
       </p:sp>
       <p:sp>
         <p:nvSpPr>
@@ -10446,7 +10550,7 @@
                 <a:ea typeface="Calibri" pitchFamily="34" charset="-122"/>
                 <a:cs typeface="Calibri" pitchFamily="34" charset="-120"/>
               </a:rPr>
-              <a:t>Wessels: múltiplas representações indicam modelagem mais bem-sucedida.</a:t>
+              <a:t>Múltiplas representações indicam modelagem mais bem-sucedida.</a:t>
             </a:r>
             <a:endParaRPr lang="en-US" sz="1100" dirty="0"/>
           </a:p>
@@ -10467,7 +10571,7 @@
                 <a:ea typeface="Calibri" pitchFamily="34" charset="-122"/>
                 <a:cs typeface="Calibri" pitchFamily="34" charset="-120"/>
               </a:rPr>
-              <a:t>Queiroz: múltiplas expressões exibem aspectos distintos do mesmo conceito.</a:t>
+              <a:t>Múltiplas expressões exibem aspectos distintos do mesmo conceito.</a:t>
             </a:r>
             <a:endParaRPr lang="en-US" sz="1100" dirty="0"/>
           </a:p>
@@ -10488,7 +10592,7 @@
                 <a:ea typeface="Calibri" pitchFamily="34" charset="-122"/>
                 <a:cs typeface="Calibri" pitchFamily="34" charset="-120"/>
               </a:rPr>
-              <a:t>Relato: solicitar explicação do raciocínio desenvolvido.</a:t>
+              <a:t>Solicitar explicação do raciocínio desenvolvido.</a:t>
             </a:r>
             <a:endParaRPr lang="en-US" sz="1100" dirty="0"/>
           </a:p>
@@ -10522,6 +10626,10 @@
             </a:outerShdw>
           </a:effectLst>
         </p:spPr>
+        <p:txBody>
+          <a:bodyPr/>
+          <a:p/>
+        </p:txBody>
       </p:sp>
       <p:sp>
         <p:nvSpPr>
@@ -10756,6 +10864,10 @@
           </a:solidFill>
           <a:ln/>
         </p:spPr>
+        <p:txBody>
+          <a:bodyPr/>
+          <a:p/>
+        </p:txBody>
       </p:sp>
       <p:sp>
         <p:nvSpPr>
@@ -11068,6 +11180,10 @@
             </a:outerShdw>
           </a:effectLst>
         </p:spPr>
+        <p:txBody>
+          <a:bodyPr/>
+          <a:p/>
+        </p:txBody>
       </p:sp>
       <p:sp>
         <p:nvSpPr>
@@ -11445,6 +11561,10 @@
             </a:outerShdw>
           </a:effectLst>
         </p:spPr>
+        <p:txBody>
+          <a:bodyPr/>
+          <a:p/>
+        </p:txBody>
       </p:sp>
       <p:sp>
         <p:nvSpPr>
@@ -11543,7 +11663,7 @@
                 <a:ea typeface="Calibri" pitchFamily="34" charset="-122"/>
                 <a:cs typeface="Calibri" pitchFamily="34" charset="-120"/>
               </a:rPr>
-              <a:t>Wessels: níveis SOLO ajudam a observar respostas de menor a maior integração.</a:t>
+              <a:t>Níveis SOLO ajudam a observar respostas de menor a maior integração.</a:t>
             </a:r>
             <a:endParaRPr lang="en-US" sz="1100" dirty="0"/>
           </a:p>
@@ -11564,7 +11684,7 @@
                 <a:ea typeface="Calibri" pitchFamily="34" charset="-122"/>
                 <a:cs typeface="Calibri" pitchFamily="34" charset="-120"/>
               </a:rPr>
-              <a:t>Queiroz: o percurso da tarefa revela mudanças no discurso e na ação.</a:t>
+              <a:t>O percurso da tarefa revela mudanças no discurso e na ação.</a:t>
             </a:r>
             <a:endParaRPr lang="en-US" sz="1100" dirty="0"/>
           </a:p>
@@ -11585,7 +11705,7 @@
                 <a:ea typeface="Calibri" pitchFamily="34" charset="-122"/>
                 <a:cs typeface="Calibri" pitchFamily="34" charset="-120"/>
               </a:rPr>
-              <a:t>Relato: avaliar o percurso de pensamento, não apenas o código final.</a:t>
+              <a:t>Avaliar o percurso de pensamento, não apenas o código final.</a:t>
             </a:r>
             <a:endParaRPr lang="en-US" sz="1100" dirty="0"/>
           </a:p>
@@ -11619,6 +11739,10 @@
             </a:outerShdw>
           </a:effectLst>
         </p:spPr>
+        <p:txBody>
+          <a:bodyPr/>
+          <a:p/>
+        </p:txBody>
       </p:sp>
       <p:sp>
         <p:nvSpPr>
@@ -11855,6 +11979,10 @@
           </a:solidFill>
           <a:ln/>
         </p:spPr>
+        <p:txBody>
+          <a:bodyPr/>
+          <a:p/>
+        </p:txBody>
       </p:sp>
       <p:sp>
         <p:nvSpPr>
@@ -11877,6 +12005,10 @@
           </a:solidFill>
           <a:ln/>
         </p:spPr>
+        <p:txBody>
+          <a:bodyPr/>
+          <a:p/>
+        </p:txBody>
       </p:sp>
       <p:sp>
         <p:nvSpPr>
@@ -11978,6 +12110,10 @@
           </a:solidFill>
           <a:ln/>
         </p:spPr>
+        <p:txBody>
+          <a:bodyPr/>
+          <a:p/>
+        </p:txBody>
       </p:sp>
       <p:sp>
         <p:nvSpPr>
@@ -12079,6 +12215,10 @@
           </a:solidFill>
           <a:ln/>
         </p:spPr>
+        <p:txBody>
+          <a:bodyPr/>
+          <a:p/>
+        </p:txBody>
       </p:sp>
       <p:sp>
         <p:nvSpPr>
@@ -12182,6 +12322,10 @@
           </a:solidFill>
           <a:ln/>
         </p:spPr>
+        <p:txBody>
+          <a:bodyPr/>
+          <a:p/>
+        </p:txBody>
       </p:sp>
       <p:sp>
         <p:nvSpPr>
@@ -12202,6 +12346,10 @@
           </a:solidFill>
           <a:ln/>
         </p:spPr>
+        <p:txBody>
+          <a:bodyPr/>
+          <a:p/>
+        </p:txBody>
       </p:sp>
       <p:pic>
         <p:nvPicPr>
@@ -12473,6 +12621,10 @@
           </a:solidFill>
           <a:ln/>
         </p:spPr>
+        <p:txBody>
+          <a:bodyPr/>
+          <a:p/>
+        </p:txBody>
       </p:sp>
       <p:pic>
         <p:nvPicPr>
@@ -12561,6 +12713,10 @@
           </a:solidFill>
           <a:ln/>
         </p:spPr>
+        <p:txBody>
+          <a:bodyPr/>
+          <a:p/>
+        </p:txBody>
       </p:sp>
       <p:sp>
         <p:nvSpPr>
@@ -12634,6 +12790,10 @@
             </a:outerShdw>
           </a:effectLst>
         </p:spPr>
+        <p:txBody>
+          <a:bodyPr/>
+          <a:p/>
+        </p:txBody>
       </p:sp>
       <p:sp>
         <p:nvSpPr>
@@ -12973,6 +13133,10 @@
           </a:solidFill>
           <a:ln/>
         </p:spPr>
+        <p:txBody>
+          <a:bodyPr/>
+          <a:p/>
+        </p:txBody>
       </p:sp>
       <p:pic>
         <p:nvPicPr>
@@ -13073,6 +13237,10 @@
             </a:outerShdw>
           </a:effectLst>
         </p:spPr>
+        <p:txBody>
+          <a:bodyPr/>
+          <a:p/>
+        </p:txBody>
       </p:sp>
       <p:sp>
         <p:nvSpPr>
@@ -13210,6 +13378,10 @@
             </a:outerShdw>
           </a:effectLst>
         </p:spPr>
+        <p:txBody>
+          <a:bodyPr/>
+          <a:p/>
+        </p:txBody>
       </p:sp>
       <p:sp>
         <p:nvSpPr>
@@ -13524,6 +13696,10 @@
           </a:solidFill>
           <a:ln/>
         </p:spPr>
+        <p:txBody>
+          <a:bodyPr/>
+          <a:p/>
+        </p:txBody>
       </p:sp>
       <p:pic>
         <p:nvPicPr>
@@ -13624,6 +13800,10 @@
             </a:outerShdw>
           </a:effectLst>
         </p:spPr>
+        <p:txBody>
+          <a:bodyPr/>
+          <a:p/>
+        </p:txBody>
       </p:sp>
       <p:sp>
         <p:nvSpPr>
@@ -13761,6 +13941,10 @@
             </a:outerShdw>
           </a:effectLst>
         </p:spPr>
+        <p:txBody>
+          <a:bodyPr/>
+          <a:p/>
+        </p:txBody>
       </p:sp>
       <p:sp>
         <p:nvSpPr>
@@ -14075,6 +14259,10 @@
           </a:solidFill>
           <a:ln/>
         </p:spPr>
+        <p:txBody>
+          <a:bodyPr/>
+          <a:p/>
+        </p:txBody>
       </p:sp>
       <p:pic>
         <p:nvPicPr>
@@ -14175,6 +14363,10 @@
             </a:outerShdw>
           </a:effectLst>
         </p:spPr>
+        <p:txBody>
+          <a:bodyPr/>
+          <a:p/>
+        </p:txBody>
       </p:sp>
       <p:sp>
         <p:nvSpPr>
@@ -14291,6 +14483,10 @@
             </a:outerShdw>
           </a:effectLst>
         </p:spPr>
+        <p:txBody>
+          <a:bodyPr/>
+          <a:p/>
+        </p:txBody>
       </p:sp>
       <p:sp>
         <p:nvSpPr>
@@ -14586,6 +14782,10 @@
           </a:solidFill>
           <a:ln/>
         </p:spPr>
+        <p:txBody>
+          <a:bodyPr/>
+          <a:p/>
+        </p:txBody>
       </p:sp>
       <p:sp>
         <p:nvSpPr>
@@ -14696,6 +14896,10 @@
             </a:outerShdw>
           </a:effectLst>
         </p:spPr>
+        <p:txBody>
+          <a:bodyPr/>
+          <a:p/>
+        </p:txBody>
       </p:sp>
       <p:sp>
         <p:nvSpPr>
@@ -14991,6 +15195,10 @@
           </a:solidFill>
           <a:ln/>
         </p:spPr>
+        <p:txBody>
+          <a:bodyPr/>
+          <a:p/>
+        </p:txBody>
       </p:sp>
       <p:sp>
         <p:nvSpPr>
@@ -15303,6 +15511,10 @@
             </a:outerShdw>
           </a:effectLst>
         </p:spPr>
+        <p:txBody>
+          <a:bodyPr/>
+          <a:p/>
+        </p:txBody>
       </p:sp>
       <p:sp>
         <p:nvSpPr>
@@ -15805,6 +16017,10 @@
             </a:outerShdw>
           </a:effectLst>
         </p:spPr>
+        <p:txBody>
+          <a:bodyPr/>
+          <a:p/>
+        </p:txBody>
       </p:sp>
       <p:sp>
         <p:nvSpPr>
@@ -15903,7 +16119,7 @@
                 <a:ea typeface="Calibri" pitchFamily="34" charset="-122"/>
                 <a:cs typeface="Calibri" pitchFamily="34" charset="-120"/>
               </a:rPr>
-              <a:t>Wessels: organizar dados é componente crítico da representação.</a:t>
+              <a:t>Organizar dados é componente crítico da representação.</a:t>
             </a:r>
             <a:endParaRPr lang="en-US" sz="1100" dirty="0"/>
           </a:p>
@@ -15924,7 +16140,7 @@
                 <a:ea typeface="Calibri" pitchFamily="34" charset="-122"/>
                 <a:cs typeface="Calibri" pitchFamily="34" charset="-120"/>
               </a:rPr>
-              <a:t>Queiroz: representações ampliam a percepção de propriedades e relações.</a:t>
+              <a:t>Representações ampliam a percepção de propriedades e relações.</a:t>
             </a:r>
             <a:endParaRPr lang="en-US" sz="1100" dirty="0"/>
           </a:p>
@@ -15945,7 +16161,7 @@
                 <a:ea typeface="Calibri" pitchFamily="34" charset="-122"/>
                 <a:cs typeface="Calibri" pitchFamily="34" charset="-120"/>
               </a:rPr>
-              <a:t>Relato: favorecer investigação antes da formalização.</a:t>
+              <a:t>Favorecer investigação antes da formalização.</a:t>
             </a:r>
             <a:endParaRPr lang="en-US" sz="1100" dirty="0"/>
           </a:p>
@@ -15979,6 +16195,10 @@
             </a:outerShdw>
           </a:effectLst>
         </p:spPr>
+        <p:txBody>
+          <a:bodyPr/>
+          <a:p/>
+        </p:txBody>
       </p:sp>
       <p:sp>
         <p:nvSpPr>
@@ -16213,6 +16433,10 @@
           </a:solidFill>
           <a:ln/>
         </p:spPr>
+        <p:txBody>
+          <a:bodyPr/>
+          <a:p/>
+        </p:txBody>
       </p:sp>
       <p:sp>
         <p:nvSpPr>
@@ -16525,6 +16749,10 @@
             </a:outerShdw>
           </a:effectLst>
         </p:spPr>
+        <p:txBody>
+          <a:bodyPr/>
+          <a:p/>
+        </p:txBody>
       </p:sp>
       <p:sp>
         <p:nvSpPr>
@@ -16990,6 +17218,10 @@
             </a:outerShdw>
           </a:effectLst>
         </p:spPr>
+        <p:txBody>
+          <a:bodyPr/>
+          <a:p/>
+        </p:txBody>
       </p:sp>
       <p:sp>
         <p:nvSpPr>
@@ -17088,7 +17320,7 @@
                 <a:ea typeface="Calibri" pitchFamily="34" charset="-122"/>
                 <a:cs typeface="Calibri" pitchFamily="34" charset="-120"/>
               </a:rPr>
-              <a:t>Wessels: organizar dados é componente crítico da representação.</a:t>
+              <a:t>Organizar dados é componente crítico da representação.</a:t>
             </a:r>
             <a:endParaRPr lang="en-US" sz="1100" dirty="0"/>
           </a:p>
@@ -17109,7 +17341,7 @@
                 <a:ea typeface="Calibri" pitchFamily="34" charset="-122"/>
                 <a:cs typeface="Calibri" pitchFamily="34" charset="-120"/>
               </a:rPr>
-              <a:t>Queiroz: múltiplas expressões exibem aspectos distintos do mesmo conceito.</a:t>
+              <a:t>Múltiplas expressões exibem aspectos distintos do mesmo conceito.</a:t>
             </a:r>
             <a:endParaRPr lang="en-US" sz="1100" dirty="0"/>
           </a:p>
@@ -17130,7 +17362,7 @@
                 <a:ea typeface="Calibri" pitchFamily="34" charset="-122"/>
                 <a:cs typeface="Calibri" pitchFamily="34" charset="-120"/>
               </a:rPr>
-              <a:t>Relato: articular código, texto, tabela, gráfico e interpretação.</a:t>
+              <a:t>Articular código, texto, tabela, gráfico e interpretação.</a:t>
             </a:r>
             <a:endParaRPr lang="en-US" sz="1100" dirty="0"/>
           </a:p>
@@ -17164,6 +17396,10 @@
             </a:outerShdw>
           </a:effectLst>
         </p:spPr>
+        <p:txBody>
+          <a:bodyPr/>
+          <a:p/>
+        </p:txBody>
       </p:sp>
       <p:sp>
         <p:nvSpPr>
@@ -17398,6 +17634,10 @@
           </a:solidFill>
           <a:ln/>
         </p:spPr>
+        <p:txBody>
+          <a:bodyPr/>
+          <a:p/>
+        </p:txBody>
       </p:sp>
       <p:sp>
         <p:nvSpPr>
@@ -17710,6 +17950,10 @@
             </a:outerShdw>
           </a:effectLst>
         </p:spPr>
+        <p:txBody>
+          <a:bodyPr/>
+          <a:p/>
+        </p:txBody>
       </p:sp>
       <p:sp>
         <p:nvSpPr>
@@ -18311,6 +18555,10 @@
             </a:outerShdw>
           </a:effectLst>
         </p:spPr>
+        <p:txBody>
+          <a:bodyPr/>
+          <a:p/>
+        </p:txBody>
       </p:sp>
       <p:sp>
         <p:nvSpPr>
@@ -18409,7 +18657,7 @@
                 <a:ea typeface="Calibri" pitchFamily="34" charset="-122"/>
                 <a:cs typeface="Calibri" pitchFamily="34" charset="-120"/>
               </a:rPr>
-              <a:t>Relato: incluir revisão, depuração e reconstrução.</a:t>
+              <a:t>Incluir revisão, depuração e reconstrução.</a:t>
             </a:r>
             <a:endParaRPr lang="en-US" sz="1100" dirty="0"/>
           </a:p>
@@ -18430,7 +18678,7 @@
                 <a:ea typeface="Calibri" pitchFamily="34" charset="-122"/>
                 <a:cs typeface="Calibri" pitchFamily="34" charset="-120"/>
               </a:rPr>
-              <a:t>Queiroz: a forma de representação influencia erros, antecipações e reorganizações.</a:t>
+              <a:t>A forma de representação influencia erros, antecipações e reorganizações.</a:t>
             </a:r>
             <a:endParaRPr lang="en-US" sz="1100" dirty="0"/>
           </a:p>
@@ -18451,7 +18699,7 @@
                 <a:ea typeface="Calibri" pitchFamily="34" charset="-122"/>
                 <a:cs typeface="Calibri" pitchFamily="34" charset="-120"/>
               </a:rPr>
-              <a:t>Wessels: respostas idiossincráticas também revelam modos de pensar.</a:t>
+              <a:t>Respostas idiossincráticas também revelam modos de pensar.</a:t>
             </a:r>
             <a:endParaRPr lang="en-US" sz="1100" dirty="0"/>
           </a:p>
@@ -18485,6 +18733,10 @@
             </a:outerShdw>
           </a:effectLst>
         </p:spPr>
+        <p:txBody>
+          <a:bodyPr/>
+          <a:p/>
+        </p:txBody>
       </p:sp>
       <p:sp>
         <p:nvSpPr>

--- a/Aula02_Pensamento_Indutivo/Aula02_Teoria.pptx
+++ b/Aula02_Pensamento_Indutivo/Aula02_Teoria.pptx
@@ -12,15 +12,25 @@
     <p:sldId id="260" r:id="rId6"/>
     <p:sldId id="261" r:id="rId7"/>
     <p:sldId id="262" r:id="rId8"/>
+    <p:sldId id="282" r:id="rId33"/>
     <p:sldId id="263" r:id="rId9"/>
+    <p:sldId id="281" r:id="rId32"/>
     <p:sldId id="264" r:id="rId10"/>
+    <p:sldId id="280" r:id="rId31"/>
     <p:sldId id="265" r:id="rId11"/>
+    <p:sldId id="279" r:id="rId30"/>
     <p:sldId id="266" r:id="rId12"/>
+    <p:sldId id="278" r:id="rId29"/>
     <p:sldId id="267" r:id="rId13"/>
+    <p:sldId id="277" r:id="rId28"/>
     <p:sldId id="268" r:id="rId14"/>
+    <p:sldId id="276" r:id="rId27"/>
     <p:sldId id="269" r:id="rId15"/>
+    <p:sldId id="275" r:id="rId26"/>
     <p:sldId id="270" r:id="rId16"/>
+    <p:sldId id="274" r:id="rId25"/>
     <p:sldId id="271" r:id="rId17"/>
+    <p:sldId id="273" r:id="rId24"/>
     <p:sldId id="272" r:id="rId18"/>
   </p:sldIdLst>
   <p:notesMasterIdLst>
@@ -4048,7 +4058,7 @@
                 <a:ea typeface="Calibri" pitchFamily="34" charset="-122"/>
                 <a:cs typeface="Calibri" pitchFamily="34" charset="-120"/>
               </a:rPr>
-              <a:t>10 / 17</a:t>
+              <a:t>13 / 27</a:t>
             </a:r>
             <a:endParaRPr lang="en-US" sz="1000" dirty="0"/>
           </a:p>
@@ -5317,7 +5327,7 @@
                 <a:ea typeface="Calibri" pitchFamily="34" charset="-122"/>
                 <a:cs typeface="Calibri" pitchFamily="34" charset="-120"/>
               </a:rPr>
-              <a:t>11 / 17</a:t>
+              <a:t>15 / 27</a:t>
             </a:r>
             <a:endParaRPr lang="en-US" sz="1000" dirty="0"/>
           </a:p>
@@ -6943,7 +6953,7 @@
                 <a:ea typeface="Calibri" pitchFamily="34" charset="-122"/>
                 <a:cs typeface="Calibri" pitchFamily="34" charset="-120"/>
               </a:rPr>
-              <a:t>12 / 17</a:t>
+              <a:t>17 / 27</a:t>
             </a:r>
             <a:endParaRPr lang="en-US" sz="1000" dirty="0"/>
           </a:p>
@@ -8161,7 +8171,7 @@
                 <a:ea typeface="Calibri" pitchFamily="34" charset="-122"/>
                 <a:cs typeface="Calibri" pitchFamily="34" charset="-120"/>
               </a:rPr>
-              <a:t>13 / 17</a:t>
+              <a:t>19 / 27</a:t>
             </a:r>
             <a:endParaRPr lang="en-US" sz="1000" dirty="0"/>
           </a:p>
@@ -9501,7 +9511,7 @@
                 <a:ea typeface="Calibri" pitchFamily="34" charset="-122"/>
                 <a:cs typeface="Calibri" pitchFamily="34" charset="-120"/>
               </a:rPr>
-              <a:t>14 / 17</a:t>
+              <a:t>21 / 27</a:t>
             </a:r>
             <a:endParaRPr lang="en-US" sz="1000" dirty="0"/>
           </a:p>
@@ -10807,7 +10817,7 @@
                 <a:ea typeface="Calibri" pitchFamily="34" charset="-122"/>
                 <a:cs typeface="Calibri" pitchFamily="34" charset="-120"/>
               </a:rPr>
-              <a:t>15 / 17</a:t>
+              <a:t>23 / 27</a:t>
             </a:r>
             <a:endParaRPr lang="en-US" sz="1000" dirty="0"/>
           </a:p>
@@ -11920,7 +11930,7 @@
                 <a:ea typeface="Calibri" pitchFamily="34" charset="-122"/>
                 <a:cs typeface="Calibri" pitchFamily="34" charset="-120"/>
               </a:rPr>
-              <a:t>16 / 17</a:t>
+              <a:t>25 / 27</a:t>
             </a:r>
             <a:endParaRPr lang="en-US" sz="1000" dirty="0"/>
           </a:p>
@@ -12525,9 +12535,1741 @@
                 <a:ea typeface="Calibri" pitchFamily="34" charset="-122"/>
                 <a:cs typeface="Calibri" pitchFamily="34" charset="-120"/>
               </a:rPr>
-              <a:t>17 / 17</a:t>
+              <a:t>27 / 27</a:t>
             </a:r>
             <a:endParaRPr lang="en-US" sz="1000" dirty="0"/>
+          </a:p>
+        </p:txBody>
+      </p:sp>
+    </p:spTree>
+  </p:cSld>
+  <p:clrMapOvr>
+    <a:masterClrMapping/>
+  </p:clrMapOvr>
+</p:sld>
+</file>
+
+<file path=ppt/slides/slide18.xml><?xml version="1.0" encoding="utf-8"?>
+<p:sld xmlns:a="http://schemas.openxmlformats.org/drawingml/2006/main" xmlns:p="http://schemas.openxmlformats.org/presentationml/2006/main" xmlns:r="http://schemas.openxmlformats.org/officeDocument/2006/relationships">
+  <p:cSld>
+    <p:spTree>
+      <p:nvGrpSpPr>
+        <p:cNvPr id="1" name=""/>
+        <p:cNvGrpSpPr/>
+        <p:nvPr/>
+      </p:nvGrpSpPr>
+      <p:grpSpPr/>
+      <p:sp>
+        <p:nvSpPr>
+          <p:cNvPr id="2" name="TextBox 1"/>
+          <p:cNvSpPr txBox="1"/>
+          <p:nvPr/>
+        </p:nvSpPr>
+        <p:spPr>
+          <a:xfrm>
+            <a:off x="548640" y="457200"/>
+            <a:ext cx="11094415" cy="320040"/>
+          </a:xfrm>
+          <a:prstGeom prst="rect">
+            <a:avLst/>
+          </a:prstGeom>
+          <a:noFill/>
+        </p:spPr>
+        <p:txBody>
+          <a:bodyPr wrap="square">
+            <a:spAutoFit/>
+          </a:bodyPr>
+          <a:lstStyle/>
+          <a:p>
+            <a:pPr algn="l"/>
+            <a:r>
+              <a:rPr sz="1200" b="1" i="0">
+                <a:solidFill>
+                  <a:srgbClr val="2C7A8C"/>
+                </a:solidFill>
+                <a:latin typeface="Calibri"/>
+              </a:rPr>
+              <a:t>TAREFA 10 DE 10  ·  2.10  ·  RESULTADO</a:t>
+            </a:r>
+          </a:p>
+        </p:txBody>
+      </p:sp>
+      <p:sp>
+        <p:nvSpPr>
+          <p:cNvPr id="3" name="TextBox 2"/>
+          <p:cNvSpPr txBox="1"/>
+          <p:nvPr/>
+        </p:nvSpPr>
+        <p:spPr>
+          <a:xfrm>
+            <a:off x="548640" y="800000"/>
+            <a:ext cx="11094415" cy="700000"/>
+          </a:xfrm>
+          <a:prstGeom prst="rect">
+            <a:avLst/>
+          </a:prstGeom>
+          <a:noFill/>
+        </p:spPr>
+        <p:txBody>
+          <a:bodyPr wrap="square">
+            <a:spAutoFit/>
+          </a:bodyPr>
+          <a:lstStyle/>
+          <a:p>
+            <a:pPr algn="l"/>
+            <a:r>
+              <a:rPr sz="2500" b="1" i="0">
+                <a:solidFill>
+                  <a:srgbClr val="1B3A5C"/>
+                </a:solidFill>
+                <a:latin typeface="Cambria"/>
+              </a:rPr>
+              <a:t>O que cada parte devolve?</a:t>
+            </a:r>
+          </a:p>
+        </p:txBody>
+      </p:sp>
+      <p:sp>
+        <p:nvSpPr>
+          <p:cNvPr id="8" name="Text 6"/>
+          <p:cNvSpPr/>
+          <p:nvPr/>
+        </p:nvSpPr>
+        <p:spPr>
+          <a:xfrm>
+            <a:off x="548640" y="1650000"/>
+            <a:ext cx="11094415" cy="274320"/>
+          </a:xfrm>
+          <a:prstGeom prst="rect">
+            <a:avLst/>
+          </a:prstGeom>
+          <a:noFill/>
+          <a:ln/>
+        </p:spPr>
+        <p:txBody>
+          <a:bodyPr wrap="square" lIns="0" tIns="0" rIns="0" bIns="0" rtlCol="0" anchor="ctr"/>
+          <a:lstStyle/>
+          <a:p>
+            <a:pPr indent="0" marL="0">
+              <a:buNone/>
+            </a:pPr>
+            <a:r>
+              <a:rPr lang="en-US" sz="1150" b="1" spc="120" kern="0" dirty="0">
+                <a:solidFill>
+                  <a:srgbClr val="44546A"/>
+                </a:solidFill>
+                <a:latin typeface="Calibri" pitchFamily="34" charset="0"/>
+                <a:ea typeface="Calibri" pitchFamily="34" charset="-122"/>
+                <a:cs typeface="Calibri" pitchFamily="34" charset="-120"/>
+              </a:rPr>
+              <a:t>EXEMPLO EM JULIA</a:t>
+            </a:r>
+            <a:endParaRPr lang="en-US" sz="1150" dirty="0"/>
+          </a:p>
+        </p:txBody>
+      </p:sp>
+      <p:sp>
+        <p:nvSpPr>
+          <p:cNvPr id="9" name="Shape 7"/>
+          <p:cNvSpPr/>
+          <p:nvPr/>
+        </p:nvSpPr>
+        <p:spPr>
+          <a:xfrm>
+            <a:off x="548640" y="2015760"/>
+            <a:ext cx="11094415" cy="900000"/>
+          </a:xfrm>
+          <a:prstGeom prst="roundRect">
+            <a:avLst>
+              <a:gd name="adj" fmla="val 3721"/>
+            </a:avLst>
+          </a:prstGeom>
+          <a:solidFill>
+            <a:srgbClr val="12233B"/>
+          </a:solidFill>
+          <a:ln/>
+          <a:effectLst>
+            <a:outerShdw sx="100000" sy="100000" kx="0" ky="0" algn="bl" rotWithShape="0" blurRad="76200" dist="25400" dir="5400000">
+              <a:srgbClr val="1B3A5C">
+                <a:alpha val="15000"/>
+              </a:srgbClr>
+            </a:outerShdw>
+          </a:effectLst>
+        </p:spPr>
+        <p:txBody>
+          <a:bodyPr/>
+          <a:p/>
+        </p:txBody>
+      </p:sp>
+      <p:sp>
+        <p:nvSpPr>
+          <p:cNvPr id="10" name="Text 8"/>
+          <p:cNvSpPr/>
+          <p:nvPr/>
+        </p:nvSpPr>
+        <p:spPr>
+          <a:xfrm>
+            <a:off x="804672" y="2253504"/>
+            <a:ext cx="10582351" cy="424512"/>
+          </a:xfrm>
+          <a:prstGeom prst="rect">
+            <a:avLst/>
+          </a:prstGeom>
+          <a:noFill/>
+          <a:ln/>
+        </p:spPr>
+        <p:txBody>
+          <a:bodyPr wrap="square" lIns="0" tIns="0" rIns="0" bIns="0" rtlCol="0" anchor="t"/>
+          <a:lstStyle/>
+          <a:p>
+            <a:pPr indent="0" marL="0">
+              <a:lnSpc>
+                <a:spcPct val="130000"/>
+              </a:lnSpc>
+              <a:buNone/>
+            </a:pPr>
+            <a:r>
+              <a:rPr lang="en-US" sz="1300" dirty="0">
+                <a:solidFill>
+                  <a:srgbClr val="E9EEF3"/>
+                </a:solidFill>
+                <a:latin typeface="Consolas" pitchFamily="34" charset="0"/>
+                <a:ea typeface="Consolas" pitchFamily="34" charset="-122"/>
+                <a:cs typeface="Consolas" pitchFamily="34" charset="-120"/>
+              </a:rPr>
+              <a:t>avaliacao</a:t>
+            </a:r>
+            <a:pPr indent="0" marL="0">
+              <a:lnSpc>
+                <a:spcPct val="130000"/>
+              </a:lnSpc>
+              <a:buNone/>
+            </a:pPr>
+            <a:r>
+              <a:rPr lang="en-US" sz="1300" dirty="0">
+                <a:solidFill>
+                  <a:srgbClr val="E9EEF3"/>
+                </a:solidFill>
+                <a:latin typeface="Consolas" pitchFamily="34" charset="0"/>
+                <a:ea typeface="Consolas" pitchFamily="34" charset="-122"/>
+                <a:cs typeface="Consolas" pitchFamily="34" charset="-120"/>
+              </a:rPr>
+              <a:t> </a:t>
+            </a:r>
+            <a:pPr indent="0" marL="0">
+              <a:lnSpc>
+                <a:spcPct val="130000"/>
+              </a:lnSpc>
+              <a:buNone/>
+            </a:pPr>
+            <a:r>
+              <a:rPr lang="en-US" sz="1300" dirty="0">
+                <a:solidFill>
+                  <a:srgbClr val="E9EEF3"/>
+                </a:solidFill>
+                <a:latin typeface="Consolas" pitchFamily="34" charset="0"/>
+                <a:ea typeface="Consolas" pitchFamily="34" charset="-122"/>
+                <a:cs typeface="Consolas" pitchFamily="34" charset="-120"/>
+              </a:rPr>
+              <a:t>=</a:t>
+            </a:r>
+            <a:pPr indent="0" marL="0">
+              <a:lnSpc>
+                <a:spcPct val="130000"/>
+              </a:lnSpc>
+              <a:buNone/>
+            </a:pPr>
+            <a:r>
+              <a:rPr lang="en-US" sz="1300" dirty="0">
+                <a:solidFill>
+                  <a:srgbClr val="E9EEF3"/>
+                </a:solidFill>
+                <a:latin typeface="Consolas" pitchFamily="34" charset="0"/>
+                <a:ea typeface="Consolas" pitchFamily="34" charset="-122"/>
+                <a:cs typeface="Consolas" pitchFamily="34" charset="-120"/>
+              </a:rPr>
+              <a:t> </a:t>
+            </a:r>
+            <a:pPr indent="0" marL="0">
+              <a:lnSpc>
+                <a:spcPct val="130000"/>
+              </a:lnSpc>
+              <a:buNone/>
+            </a:pPr>
+            <a:r>
+              <a:rPr lang="en-US" sz="1300" dirty="0">
+                <a:solidFill>
+                  <a:srgbClr val="E9EEF3"/>
+                </a:solidFill>
+                <a:latin typeface="Consolas" pitchFamily="34" charset="0"/>
+                <a:ea typeface="Consolas" pitchFamily="34" charset="-122"/>
+                <a:cs typeface="Consolas" pitchFamily="34" charset="-120"/>
+              </a:rPr>
+              <a:t>(</a:t>
+            </a:r>
+            <a:pPr indent="0" marL="0">
+              <a:lnSpc>
+                <a:spcPct val="130000"/>
+              </a:lnSpc>
+              <a:buNone/>
+            </a:pPr>
+            <a:r>
+              <a:rPr lang="en-US" sz="1300" dirty="0">
+                <a:solidFill>
+                  <a:srgbClr val="E9EEF3"/>
+                </a:solidFill>
+                <a:latin typeface="Consolas" pitchFamily="34" charset="0"/>
+                <a:ea typeface="Consolas" pitchFamily="34" charset="-122"/>
+                <a:cs typeface="Consolas" pitchFamily="34" charset="-120"/>
+              </a:rPr>
+              <a:t>hipotese</a:t>
+            </a:r>
+            <a:pPr indent="0" marL="0">
+              <a:lnSpc>
+                <a:spcPct val="130000"/>
+              </a:lnSpc>
+              <a:buNone/>
+            </a:pPr>
+            <a:r>
+              <a:rPr lang="en-US" sz="1300" dirty="0">
+                <a:solidFill>
+                  <a:srgbClr val="E9EEF3"/>
+                </a:solidFill>
+                <a:latin typeface="Consolas" pitchFamily="34" charset="0"/>
+                <a:ea typeface="Consolas" pitchFamily="34" charset="-122"/>
+                <a:cs typeface="Consolas" pitchFamily="34" charset="-120"/>
+              </a:rPr>
+              <a:t>=</a:t>
+            </a:r>
+            <a:pPr indent="0" marL="0">
+              <a:lnSpc>
+                <a:spcPct val="130000"/>
+              </a:lnSpc>
+              <a:buNone/>
+            </a:pPr>
+            <a:r>
+              <a:rPr lang="en-US" sz="1300" dirty="0">
+                <a:solidFill>
+                  <a:srgbClr val="8FD6C4"/>
+                </a:solidFill>
+                <a:latin typeface="Consolas" pitchFamily="34" charset="0"/>
+                <a:ea typeface="Consolas" pitchFamily="34" charset="-122"/>
+                <a:cs typeface="Consolas" pitchFamily="34" charset="-120"/>
+              </a:rPr>
+              <a:t>"2n"</a:t>
+            </a:r>
+            <a:pPr indent="0" marL="0">
+              <a:lnSpc>
+                <a:spcPct val="130000"/>
+              </a:lnSpc>
+              <a:buNone/>
+            </a:pPr>
+            <a:r>
+              <a:rPr lang="en-US" sz="1300" dirty="0">
+                <a:solidFill>
+                  <a:srgbClr val="E9EEF3"/>
+                </a:solidFill>
+                <a:latin typeface="Consolas" pitchFamily="34" charset="0"/>
+                <a:ea typeface="Consolas" pitchFamily="34" charset="-122"/>
+                <a:cs typeface="Consolas" pitchFamily="34" charset="-120"/>
+              </a:rPr>
+              <a:t>,</a:t>
+            </a:r>
+            <a:pPr indent="0" marL="0">
+              <a:lnSpc>
+                <a:spcPct val="130000"/>
+              </a:lnSpc>
+              <a:buNone/>
+            </a:pPr>
+            <a:r>
+              <a:rPr lang="en-US" sz="1300" dirty="0">
+                <a:solidFill>
+                  <a:srgbClr val="E9EEF3"/>
+                </a:solidFill>
+                <a:latin typeface="Consolas" pitchFamily="34" charset="0"/>
+                <a:ea typeface="Consolas" pitchFamily="34" charset="-122"/>
+                <a:cs typeface="Consolas" pitchFamily="34" charset="-120"/>
+              </a:rPr>
+              <a:t> </a:t>
+            </a:r>
+            <a:pPr indent="0" marL="0">
+              <a:lnSpc>
+                <a:spcPct val="130000"/>
+              </a:lnSpc>
+              <a:buNone/>
+            </a:pPr>
+            <a:r>
+              <a:rPr lang="en-US" sz="1300" dirty="0">
+                <a:solidFill>
+                  <a:srgbClr val="E9EEF3"/>
+                </a:solidFill>
+                <a:latin typeface="Consolas" pitchFamily="34" charset="0"/>
+                <a:ea typeface="Consolas" pitchFamily="34" charset="-122"/>
+                <a:cs typeface="Consolas" pitchFamily="34" charset="-120"/>
+              </a:rPr>
+              <a:t>teste</a:t>
+            </a:r>
+            <a:pPr indent="0" marL="0">
+              <a:lnSpc>
+                <a:spcPct val="130000"/>
+              </a:lnSpc>
+              <a:buNone/>
+            </a:pPr>
+            <a:r>
+              <a:rPr lang="en-US" sz="1300" dirty="0">
+                <a:solidFill>
+                  <a:srgbClr val="E9EEF3"/>
+                </a:solidFill>
+                <a:latin typeface="Consolas" pitchFamily="34" charset="0"/>
+                <a:ea typeface="Consolas" pitchFamily="34" charset="-122"/>
+                <a:cs typeface="Consolas" pitchFamily="34" charset="-120"/>
+              </a:rPr>
+              <a:t>=</a:t>
+            </a:r>
+            <a:pPr indent="0" marL="0">
+              <a:lnSpc>
+                <a:spcPct val="130000"/>
+              </a:lnSpc>
+              <a:buNone/>
+            </a:pPr>
+            <a:r>
+              <a:rPr lang="en-US" sz="1300" b="1" dirty="0">
+                <a:solidFill>
+                  <a:srgbClr val="E8963C"/>
+                </a:solidFill>
+                <a:latin typeface="Consolas" pitchFamily="34" charset="0"/>
+                <a:ea typeface="Consolas" pitchFamily="34" charset="-122"/>
+                <a:cs typeface="Consolas" pitchFamily="34" charset="-120"/>
+              </a:rPr>
+              <a:t>true</a:t>
+            </a:r>
+            <a:pPr indent="0" marL="0">
+              <a:lnSpc>
+                <a:spcPct val="130000"/>
+              </a:lnSpc>
+              <a:buNone/>
+            </a:pPr>
+            <a:r>
+              <a:rPr lang="en-US" sz="1300" dirty="0">
+                <a:solidFill>
+                  <a:srgbClr val="E9EEF3"/>
+                </a:solidFill>
+                <a:latin typeface="Consolas" pitchFamily="34" charset="0"/>
+                <a:ea typeface="Consolas" pitchFamily="34" charset="-122"/>
+                <a:cs typeface="Consolas" pitchFamily="34" charset="-120"/>
+              </a:rPr>
+              <a:t>,</a:t>
+            </a:r>
+            <a:pPr indent="0" marL="0">
+              <a:lnSpc>
+                <a:spcPct val="130000"/>
+              </a:lnSpc>
+              <a:buNone/>
+            </a:pPr>
+            <a:r>
+              <a:rPr lang="en-US" sz="1300" dirty="0">
+                <a:solidFill>
+                  <a:srgbClr val="E9EEF3"/>
+                </a:solidFill>
+                <a:latin typeface="Consolas" pitchFamily="34" charset="0"/>
+                <a:ea typeface="Consolas" pitchFamily="34" charset="-122"/>
+                <a:cs typeface="Consolas" pitchFamily="34" charset="-120"/>
+              </a:rPr>
+              <a:t> </a:t>
+            </a:r>
+            <a:pPr indent="0" marL="0">
+              <a:lnSpc>
+                <a:spcPct val="130000"/>
+              </a:lnSpc>
+              <a:buNone/>
+            </a:pPr>
+            <a:r>
+              <a:rPr lang="en-US" sz="1300" dirty="0">
+                <a:solidFill>
+                  <a:srgbClr val="E9EEF3"/>
+                </a:solidFill>
+                <a:latin typeface="Consolas" pitchFamily="34" charset="0"/>
+                <a:ea typeface="Consolas" pitchFamily="34" charset="-122"/>
+                <a:cs typeface="Consolas" pitchFamily="34" charset="-120"/>
+              </a:rPr>
+              <a:t>revisao</a:t>
+            </a:r>
+            <a:pPr indent="0" marL="0">
+              <a:lnSpc>
+                <a:spcPct val="130000"/>
+              </a:lnSpc>
+              <a:buNone/>
+            </a:pPr>
+            <a:r>
+              <a:rPr lang="en-US" sz="1300" dirty="0">
+                <a:solidFill>
+                  <a:srgbClr val="E9EEF3"/>
+                </a:solidFill>
+                <a:latin typeface="Consolas" pitchFamily="34" charset="0"/>
+                <a:ea typeface="Consolas" pitchFamily="34" charset="-122"/>
+                <a:cs typeface="Consolas" pitchFamily="34" charset="-120"/>
+              </a:rPr>
+              <a:t>=</a:t>
+            </a:r>
+            <a:pPr indent="0" marL="0">
+              <a:lnSpc>
+                <a:spcPct val="130000"/>
+              </a:lnSpc>
+              <a:buNone/>
+            </a:pPr>
+            <a:r>
+              <a:rPr lang="en-US" sz="1300" dirty="0">
+                <a:solidFill>
+                  <a:srgbClr val="8FD6C4"/>
+                </a:solidFill>
+                <a:latin typeface="Consolas" pitchFamily="34" charset="0"/>
+                <a:ea typeface="Consolas" pitchFamily="34" charset="-122"/>
+                <a:cs typeface="Consolas" pitchFamily="34" charset="-120"/>
+              </a:rPr>
+              <a:t>"incluir mais casos"</a:t>
+            </a:r>
+            <a:pPr indent="0" marL="0">
+              <a:lnSpc>
+                <a:spcPct val="130000"/>
+              </a:lnSpc>
+              <a:buNone/>
+            </a:pPr>
+            <a:r>
+              <a:rPr lang="en-US" sz="1300" dirty="0">
+                <a:solidFill>
+                  <a:srgbClr val="E9EEF3"/>
+                </a:solidFill>
+                <a:latin typeface="Consolas" pitchFamily="34" charset="0"/>
+                <a:ea typeface="Consolas" pitchFamily="34" charset="-122"/>
+                <a:cs typeface="Consolas" pitchFamily="34" charset="-120"/>
+              </a:rPr>
+              <a:t>)</a:t>
+            </a:r>
+            <a:endParaRPr lang="en-US" sz="1300" dirty="0"/>
+          </a:p>
+        </p:txBody>
+      </p:sp>
+      <p:sp>
+        <p:nvSpPr>
+          <p:cNvPr id="11" name="TextBox 10"/>
+          <p:cNvSpPr txBox="1"/>
+          <p:nvPr/>
+        </p:nvSpPr>
+        <p:spPr>
+          <a:xfrm>
+            <a:off x="548640" y="2915760"/>
+            <a:ext cx="11094415" cy="274320"/>
+          </a:xfrm>
+          <a:prstGeom prst="rect">
+            <a:avLst/>
+          </a:prstGeom>
+          <a:noFill/>
+        </p:spPr>
+        <p:txBody>
+          <a:bodyPr wrap="square">
+            <a:spAutoFit/>
+          </a:bodyPr>
+          <a:lstStyle/>
+          <a:p>
+            <a:pPr algn="l"/>
+            <a:r>
+              <a:rPr sz="1100" b="1" i="0">
+                <a:solidFill>
+                  <a:srgbClr val="2C7A8C"/>
+                </a:solidFill>
+                <a:latin typeface="Calibri"/>
+              </a:rPr>
+              <a:t>RESULTADO DE CADA PARTE</a:t>
+            </a:r>
+          </a:p>
+        </p:txBody>
+      </p:sp>
+      <p:sp>
+        <p:nvSpPr>
+          <p:cNvPr id="12" name="Rounded Rectangle 11"/>
+          <p:cNvSpPr/>
+          <p:nvPr/>
+        </p:nvSpPr>
+        <p:spPr>
+          <a:xfrm>
+            <a:off x="548640" y="3235800"/>
+            <a:ext cx="11094415" cy="1554480"/>
+          </a:xfrm>
+          <a:prstGeom prst="roundRect">
+            <a:avLst>
+              <a:gd name="adj" fmla="val 5882"/>
+            </a:avLst>
+          </a:prstGeom>
+          <a:solidFill>
+            <a:srgbClr val="E9F2F3"/>
+          </a:solidFill>
+          <a:ln>
+            <a:noFill/>
+          </a:ln>
+          <a:effectLst/>
+        </p:spPr>
+        <p:style>
+          <a:lnRef idx="1">
+            <a:schemeClr val="accent1"/>
+          </a:lnRef>
+          <a:fillRef idx="3">
+            <a:schemeClr val="accent1"/>
+          </a:fillRef>
+          <a:effectRef idx="2">
+            <a:schemeClr val="accent1"/>
+          </a:effectRef>
+          <a:fontRef idx="minor">
+            <a:schemeClr val="lt1"/>
+          </a:fontRef>
+        </p:style>
+        <p:txBody>
+          <a:bodyPr rtlCol="0" anchor="ctr"/>
+          <a:lstStyle/>
+          <a:p>
+            <a:pPr algn="ctr"/>
+          </a:p>
+        </p:txBody>
+      </p:sp>
+      <p:sp>
+        <p:nvSpPr>
+          <p:cNvPr id="13" name="TextBox 12"/>
+          <p:cNvSpPr txBox="1"/>
+          <p:nvPr/>
+        </p:nvSpPr>
+        <p:spPr>
+          <a:xfrm>
+            <a:off x="822960" y="3372960"/>
+            <a:ext cx="10545775" cy="1417320"/>
+          </a:xfrm>
+          <a:prstGeom prst="rect">
+            <a:avLst/>
+          </a:prstGeom>
+          <a:noFill/>
+        </p:spPr>
+        <p:txBody>
+          <a:bodyPr wrap="square">
+            <a:spAutoFit/>
+          </a:bodyPr>
+          <a:lstStyle/>
+          <a:p>
+            <a:pPr>
+              <a:lnSpc>
+                <a:spcPct val="125000"/>
+              </a:lnSpc>
+            </a:pPr>
+            <a:r>
+              <a:rPr sz="1250" b="1">
+                <a:solidFill>
+                  <a:srgbClr val="2C7A8C"/>
+                </a:solidFill>
+                <a:latin typeface="Consolas"/>
+              </a:rPr>
+              <a:t>avaliacao</a:t>
+            </a:r>
+            <a:r>
+              <a:rPr sz="1250" b="0">
+                <a:solidFill>
+                  <a:srgbClr val="1B2733"/>
+                </a:solidFill>
+                <a:latin typeface="Consolas"/>
+              </a:rPr>
+              <a:t>  →  NamedTuple com 3 campos</a:t>
+            </a:r>
+          </a:p>
+          <a:p>
+            <a:pPr>
+              <a:lnSpc>
+                <a:spcPct val="125000"/>
+              </a:lnSpc>
+            </a:pPr>
+            <a:r>
+              <a:rPr sz="1250" b="1">
+                <a:solidFill>
+                  <a:srgbClr val="2C7A8C"/>
+                </a:solidFill>
+                <a:latin typeface="Consolas"/>
+              </a:rPr>
+              <a:t>avaliacao.hipotese</a:t>
+            </a:r>
+            <a:r>
+              <a:rPr sz="1250" b="0">
+                <a:solidFill>
+                  <a:srgbClr val="1B2733"/>
+                </a:solidFill>
+                <a:latin typeface="Consolas"/>
+              </a:rPr>
+              <a:t>  →  "2n"</a:t>
+            </a:r>
+          </a:p>
+          <a:p>
+            <a:pPr>
+              <a:lnSpc>
+                <a:spcPct val="125000"/>
+              </a:lnSpc>
+            </a:pPr>
+            <a:r>
+              <a:rPr sz="1250" b="1">
+                <a:solidFill>
+                  <a:srgbClr val="2C7A8C"/>
+                </a:solidFill>
+                <a:latin typeface="Consolas"/>
+              </a:rPr>
+              <a:t>avaliacao.teste</a:t>
+            </a:r>
+            <a:r>
+              <a:rPr sz="1250" b="0">
+                <a:solidFill>
+                  <a:srgbClr val="1B2733"/>
+                </a:solidFill>
+                <a:latin typeface="Consolas"/>
+              </a:rPr>
+              <a:t>  →  true</a:t>
+            </a:r>
+          </a:p>
+          <a:p>
+            <a:pPr>
+              <a:lnSpc>
+                <a:spcPct val="125000"/>
+              </a:lnSpc>
+            </a:pPr>
+            <a:r>
+              <a:rPr sz="1250" b="1">
+                <a:solidFill>
+                  <a:srgbClr val="2C7A8C"/>
+                </a:solidFill>
+                <a:latin typeface="Consolas"/>
+              </a:rPr>
+              <a:t>avaliacao.revisao</a:t>
+            </a:r>
+            <a:r>
+              <a:rPr sz="1250" b="0">
+                <a:solidFill>
+                  <a:srgbClr val="1B2733"/>
+                </a:solidFill>
+                <a:latin typeface="Consolas"/>
+              </a:rPr>
+              <a:t>  →  "incluir mais casos"</a:t>
+            </a:r>
+          </a:p>
+        </p:txBody>
+      </p:sp>
+      <p:sp>
+        <p:nvSpPr>
+          <p:cNvPr id="14" name="TextBox 13"/>
+          <p:cNvSpPr txBox="1"/>
+          <p:nvPr/>
+        </p:nvSpPr>
+        <p:spPr>
+          <a:xfrm>
+            <a:off x="548640" y="6473952"/>
+            <a:ext cx="5486400" cy="274320"/>
+          </a:xfrm>
+          <a:prstGeom prst="rect">
+            <a:avLst/>
+          </a:prstGeom>
+          <a:noFill/>
+        </p:spPr>
+        <p:txBody>
+          <a:bodyPr wrap="square">
+            <a:spAutoFit/>
+          </a:bodyPr>
+          <a:lstStyle/>
+          <a:p>
+            <a:pPr algn="l"/>
+            <a:r>
+              <a:rPr sz="1000" b="0" i="0">
+                <a:solidFill>
+                  <a:srgbClr val="9AA5B1"/>
+                </a:solidFill>
+                <a:latin typeface="Calibri"/>
+              </a:rPr>
+              <a:t>Aula 2 · Pensamento Indutivo</a:t>
+            </a:r>
+          </a:p>
+        </p:txBody>
+      </p:sp>
+      <p:sp>
+        <p:nvSpPr>
+          <p:cNvPr id="15" name="TextBox 14"/>
+          <p:cNvSpPr txBox="1"/>
+          <p:nvPr/>
+        </p:nvSpPr>
+        <p:spPr>
+          <a:xfrm>
+            <a:off x="10271455" y="6473952"/>
+            <a:ext cx="1371600" cy="274320"/>
+          </a:xfrm>
+          <a:prstGeom prst="rect">
+            <a:avLst/>
+          </a:prstGeom>
+          <a:noFill/>
+        </p:spPr>
+        <p:txBody>
+          <a:bodyPr wrap="square">
+            <a:spAutoFit/>
+          </a:bodyPr>
+          <a:lstStyle/>
+          <a:p>
+            <a:pPr algn="l"/>
+            <a:r>
+              <a:rPr sz="1000" b="0" i="0">
+                <a:solidFill>
+                  <a:srgbClr val="9AA5B1"/>
+                </a:solidFill>
+                <a:latin typeface="Calibri"/>
+              </a:rPr>
+              <a:t>26 / 27</a:t>
+            </a:r>
+          </a:p>
+        </p:txBody>
+      </p:sp>
+    </p:spTree>
+  </p:cSld>
+  <p:clrMapOvr>
+    <a:masterClrMapping/>
+  </p:clrMapOvr>
+</p:sld>
+</file>
+
+<file path=ppt/slides/slide19.xml><?xml version="1.0" encoding="utf-8"?>
+<p:sld xmlns:a="http://schemas.openxmlformats.org/drawingml/2006/main" xmlns:p="http://schemas.openxmlformats.org/presentationml/2006/main" xmlns:r="http://schemas.openxmlformats.org/officeDocument/2006/relationships">
+  <p:cSld>
+    <p:spTree>
+      <p:nvGrpSpPr>
+        <p:cNvPr id="1" name=""/>
+        <p:cNvGrpSpPr/>
+        <p:nvPr/>
+      </p:nvGrpSpPr>
+      <p:grpSpPr/>
+      <p:sp>
+        <p:nvSpPr>
+          <p:cNvPr id="2" name="TextBox 1"/>
+          <p:cNvSpPr txBox="1"/>
+          <p:nvPr/>
+        </p:nvSpPr>
+        <p:spPr>
+          <a:xfrm>
+            <a:off x="548640" y="457200"/>
+            <a:ext cx="11094415" cy="320040"/>
+          </a:xfrm>
+          <a:prstGeom prst="rect">
+            <a:avLst/>
+          </a:prstGeom>
+          <a:noFill/>
+        </p:spPr>
+        <p:txBody>
+          <a:bodyPr wrap="square">
+            <a:spAutoFit/>
+          </a:bodyPr>
+          <a:lstStyle/>
+          <a:p>
+            <a:pPr algn="l"/>
+            <a:r>
+              <a:rPr sz="1200" b="1" i="0">
+                <a:solidFill>
+                  <a:srgbClr val="2C7A8C"/>
+                </a:solidFill>
+                <a:latin typeface="Calibri"/>
+              </a:rPr>
+              <a:t>TAREFA 9 DE 10  ·  2.9  ·  RESULTADO</a:t>
+            </a:r>
+          </a:p>
+        </p:txBody>
+      </p:sp>
+      <p:sp>
+        <p:nvSpPr>
+          <p:cNvPr id="3" name="TextBox 2"/>
+          <p:cNvSpPr txBox="1"/>
+          <p:nvPr/>
+        </p:nvSpPr>
+        <p:spPr>
+          <a:xfrm>
+            <a:off x="548640" y="800000"/>
+            <a:ext cx="11094415" cy="700000"/>
+          </a:xfrm>
+          <a:prstGeom prst="rect">
+            <a:avLst/>
+          </a:prstGeom>
+          <a:noFill/>
+        </p:spPr>
+        <p:txBody>
+          <a:bodyPr wrap="square">
+            <a:spAutoFit/>
+          </a:bodyPr>
+          <a:lstStyle/>
+          <a:p>
+            <a:pPr algn="l"/>
+            <a:r>
+              <a:rPr sz="2500" b="1" i="0">
+                <a:solidFill>
+                  <a:srgbClr val="1B3A5C"/>
+                </a:solidFill>
+                <a:latin typeface="Cambria"/>
+              </a:rPr>
+              <a:t>O que cada parte devolve?</a:t>
+            </a:r>
+          </a:p>
+        </p:txBody>
+      </p:sp>
+      <p:sp>
+        <p:nvSpPr>
+          <p:cNvPr id="8" name="Text 6"/>
+          <p:cNvSpPr/>
+          <p:nvPr/>
+        </p:nvSpPr>
+        <p:spPr>
+          <a:xfrm>
+            <a:off x="548640" y="1650000"/>
+            <a:ext cx="11094415" cy="274320"/>
+          </a:xfrm>
+          <a:prstGeom prst="rect">
+            <a:avLst/>
+          </a:prstGeom>
+          <a:noFill/>
+          <a:ln/>
+        </p:spPr>
+        <p:txBody>
+          <a:bodyPr wrap="square" lIns="0" tIns="0" rIns="0" bIns="0" rtlCol="0" anchor="ctr"/>
+          <a:lstStyle/>
+          <a:p>
+            <a:pPr indent="0" marL="0">
+              <a:buNone/>
+            </a:pPr>
+            <a:r>
+              <a:rPr lang="en-US" sz="1150" b="1" spc="120" kern="0" dirty="0">
+                <a:solidFill>
+                  <a:srgbClr val="44546A"/>
+                </a:solidFill>
+                <a:latin typeface="Calibri" pitchFamily="34" charset="0"/>
+                <a:ea typeface="Calibri" pitchFamily="34" charset="-122"/>
+                <a:cs typeface="Calibri" pitchFamily="34" charset="-120"/>
+              </a:rPr>
+              <a:t>EXEMPLO EM JULIA</a:t>
+            </a:r>
+            <a:endParaRPr lang="en-US" sz="1150" dirty="0"/>
+          </a:p>
+        </p:txBody>
+      </p:sp>
+      <p:sp>
+        <p:nvSpPr>
+          <p:cNvPr id="9" name="Shape 7"/>
+          <p:cNvSpPr/>
+          <p:nvPr/>
+        </p:nvSpPr>
+        <p:spPr>
+          <a:xfrm>
+            <a:off x="548640" y="2015760"/>
+            <a:ext cx="11094415" cy="1490600"/>
+          </a:xfrm>
+          <a:prstGeom prst="roundRect">
+            <a:avLst>
+              <a:gd name="adj" fmla="val 3721"/>
+            </a:avLst>
+          </a:prstGeom>
+          <a:solidFill>
+            <a:srgbClr val="12233B"/>
+          </a:solidFill>
+          <a:ln/>
+          <a:effectLst>
+            <a:outerShdw sx="100000" sy="100000" kx="0" ky="0" algn="bl" rotWithShape="0" blurRad="76200" dist="25400" dir="5400000">
+              <a:srgbClr val="1B3A5C">
+                <a:alpha val="15000"/>
+              </a:srgbClr>
+            </a:outerShdw>
+          </a:effectLst>
+        </p:spPr>
+        <p:txBody>
+          <a:bodyPr/>
+          <a:p/>
+        </p:txBody>
+      </p:sp>
+      <p:sp>
+        <p:nvSpPr>
+          <p:cNvPr id="10" name="Text 8"/>
+          <p:cNvSpPr/>
+          <p:nvPr/>
+        </p:nvSpPr>
+        <p:spPr>
+          <a:xfrm>
+            <a:off x="804672" y="2253504"/>
+            <a:ext cx="10582351" cy="1015112"/>
+          </a:xfrm>
+          <a:prstGeom prst="rect">
+            <a:avLst/>
+          </a:prstGeom>
+          <a:noFill/>
+          <a:ln/>
+        </p:spPr>
+        <p:txBody>
+          <a:bodyPr wrap="square" lIns="0" tIns="0" rIns="0" bIns="0" rtlCol="0" anchor="t"/>
+          <a:lstStyle/>
+          <a:p>
+            <a:pPr indent="0" marL="0">
+              <a:lnSpc>
+                <a:spcPct val="130000"/>
+              </a:lnSpc>
+              <a:buNone/>
+            </a:pPr>
+            <a:r>
+              <a:rPr lang="en-US" sz="1300" dirty="0">
+                <a:solidFill>
+                  <a:srgbClr val="E9EEF3"/>
+                </a:solidFill>
+                <a:latin typeface="Consolas" pitchFamily="34" charset="0"/>
+                <a:ea typeface="Consolas" pitchFamily="34" charset="-122"/>
+                <a:cs typeface="Consolas" pitchFamily="34" charset="-120"/>
+              </a:rPr>
+              <a:t>hipotese</a:t>
+            </a:r>
+            <a:pPr indent="0" marL="0">
+              <a:lnSpc>
+                <a:spcPct val="130000"/>
+              </a:lnSpc>
+              <a:buNone/>
+            </a:pPr>
+            <a:r>
+              <a:rPr lang="en-US" sz="1300" dirty="0">
+                <a:solidFill>
+                  <a:srgbClr val="E9EEF3"/>
+                </a:solidFill>
+                <a:latin typeface="Consolas" pitchFamily="34" charset="0"/>
+                <a:ea typeface="Consolas" pitchFamily="34" charset="-122"/>
+                <a:cs typeface="Consolas" pitchFamily="34" charset="-120"/>
+              </a:rPr>
+              <a:t> </a:t>
+            </a:r>
+            <a:pPr indent="0" marL="0">
+              <a:lnSpc>
+                <a:spcPct val="130000"/>
+              </a:lnSpc>
+              <a:buNone/>
+            </a:pPr>
+            <a:r>
+              <a:rPr lang="en-US" sz="1300" dirty="0">
+                <a:solidFill>
+                  <a:srgbClr val="E9EEF3"/>
+                </a:solidFill>
+                <a:latin typeface="Consolas" pitchFamily="34" charset="0"/>
+                <a:ea typeface="Consolas" pitchFamily="34" charset="-122"/>
+                <a:cs typeface="Consolas" pitchFamily="34" charset="-120"/>
+              </a:rPr>
+              <a:t>=</a:t>
+            </a:r>
+            <a:pPr indent="0" marL="0">
+              <a:lnSpc>
+                <a:spcPct val="130000"/>
+              </a:lnSpc>
+              <a:buNone/>
+            </a:pPr>
+            <a:r>
+              <a:rPr lang="en-US" sz="1300" dirty="0">
+                <a:solidFill>
+                  <a:srgbClr val="E9EEF3"/>
+                </a:solidFill>
+                <a:latin typeface="Consolas" pitchFamily="34" charset="0"/>
+                <a:ea typeface="Consolas" pitchFamily="34" charset="-122"/>
+                <a:cs typeface="Consolas" pitchFamily="34" charset="-120"/>
+              </a:rPr>
+              <a:t> </a:t>
+            </a:r>
+            <a:pPr indent="0" marL="0">
+              <a:lnSpc>
+                <a:spcPct val="130000"/>
+              </a:lnSpc>
+              <a:buNone/>
+            </a:pPr>
+            <a:r>
+              <a:rPr lang="en-US" sz="1300" dirty="0">
+                <a:solidFill>
+                  <a:srgbClr val="8FD6C4"/>
+                </a:solidFill>
+                <a:latin typeface="Consolas" pitchFamily="34" charset="0"/>
+                <a:ea typeface="Consolas" pitchFamily="34" charset="-122"/>
+                <a:cs typeface="Consolas" pitchFamily="34" charset="-120"/>
+              </a:rPr>
+              <a:t>"dobrar e somar 1"</a:t>
+            </a:r>
+            <a:endParaRPr lang="en-US" sz="1300" dirty="0"/>
+          </a:p>
+          <a:p>
+            <a:pPr indent="0" marL="0">
+              <a:lnSpc>
+                <a:spcPct val="130000"/>
+              </a:lnSpc>
+              <a:buNone/>
+            </a:pPr>
+            <a:r>
+              <a:rPr lang="en-US" sz="1300" dirty="0">
+                <a:solidFill>
+                  <a:srgbClr val="E9EEF3"/>
+                </a:solidFill>
+                <a:latin typeface="Consolas" pitchFamily="34" charset="0"/>
+                <a:ea typeface="Consolas" pitchFamily="34" charset="-122"/>
+                <a:cs typeface="Consolas" pitchFamily="34" charset="-120"/>
+              </a:rPr>
+              <a:t>f</a:t>
+            </a:r>
+            <a:pPr indent="0" marL="0">
+              <a:lnSpc>
+                <a:spcPct val="130000"/>
+              </a:lnSpc>
+              <a:buNone/>
+            </a:pPr>
+            <a:r>
+              <a:rPr lang="en-US" sz="1300" dirty="0">
+                <a:solidFill>
+                  <a:srgbClr val="E9EEF3"/>
+                </a:solidFill>
+                <a:latin typeface="Consolas" pitchFamily="34" charset="0"/>
+                <a:ea typeface="Consolas" pitchFamily="34" charset="-122"/>
+                <a:cs typeface="Consolas" pitchFamily="34" charset="-120"/>
+              </a:rPr>
+              <a:t>(</a:t>
+            </a:r>
+            <a:pPr indent="0" marL="0">
+              <a:lnSpc>
+                <a:spcPct val="130000"/>
+              </a:lnSpc>
+              <a:buNone/>
+            </a:pPr>
+            <a:r>
+              <a:rPr lang="en-US" sz="1300" dirty="0">
+                <a:solidFill>
+                  <a:srgbClr val="E9EEF3"/>
+                </a:solidFill>
+                <a:latin typeface="Consolas" pitchFamily="34" charset="0"/>
+                <a:ea typeface="Consolas" pitchFamily="34" charset="-122"/>
+                <a:cs typeface="Consolas" pitchFamily="34" charset="-120"/>
+              </a:rPr>
+              <a:t>n</a:t>
+            </a:r>
+            <a:pPr indent="0" marL="0">
+              <a:lnSpc>
+                <a:spcPct val="130000"/>
+              </a:lnSpc>
+              <a:buNone/>
+            </a:pPr>
+            <a:r>
+              <a:rPr lang="en-US" sz="1300" dirty="0">
+                <a:solidFill>
+                  <a:srgbClr val="E9EEF3"/>
+                </a:solidFill>
+                <a:latin typeface="Consolas" pitchFamily="34" charset="0"/>
+                <a:ea typeface="Consolas" pitchFamily="34" charset="-122"/>
+                <a:cs typeface="Consolas" pitchFamily="34" charset="-120"/>
+              </a:rPr>
+              <a:t>)</a:t>
+            </a:r>
+            <a:pPr indent="0" marL="0">
+              <a:lnSpc>
+                <a:spcPct val="130000"/>
+              </a:lnSpc>
+              <a:buNone/>
+            </a:pPr>
+            <a:r>
+              <a:rPr lang="en-US" sz="1300" dirty="0">
+                <a:solidFill>
+                  <a:srgbClr val="E9EEF3"/>
+                </a:solidFill>
+                <a:latin typeface="Consolas" pitchFamily="34" charset="0"/>
+                <a:ea typeface="Consolas" pitchFamily="34" charset="-122"/>
+                <a:cs typeface="Consolas" pitchFamily="34" charset="-120"/>
+              </a:rPr>
+              <a:t>=</a:t>
+            </a:r>
+            <a:pPr indent="0" marL="0">
+              <a:lnSpc>
+                <a:spcPct val="130000"/>
+              </a:lnSpc>
+              <a:buNone/>
+            </a:pPr>
+            <a:r>
+              <a:rPr lang="en-US" sz="1300" dirty="0">
+                <a:solidFill>
+                  <a:srgbClr val="F2C88F"/>
+                </a:solidFill>
+                <a:latin typeface="Consolas" pitchFamily="34" charset="0"/>
+                <a:ea typeface="Consolas" pitchFamily="34" charset="-122"/>
+                <a:cs typeface="Consolas" pitchFamily="34" charset="-120"/>
+              </a:rPr>
+              <a:t>2</a:t>
+            </a:r>
+            <a:pPr indent="0" marL="0">
+              <a:lnSpc>
+                <a:spcPct val="130000"/>
+              </a:lnSpc>
+              <a:buNone/>
+            </a:pPr>
+            <a:r>
+              <a:rPr lang="en-US" sz="1300" dirty="0">
+                <a:solidFill>
+                  <a:srgbClr val="E9EEF3"/>
+                </a:solidFill>
+                <a:latin typeface="Consolas" pitchFamily="34" charset="0"/>
+                <a:ea typeface="Consolas" pitchFamily="34" charset="-122"/>
+                <a:cs typeface="Consolas" pitchFamily="34" charset="-120"/>
+              </a:rPr>
+              <a:t>n</a:t>
+            </a:r>
+            <a:pPr indent="0" marL="0">
+              <a:lnSpc>
+                <a:spcPct val="130000"/>
+              </a:lnSpc>
+              <a:buNone/>
+            </a:pPr>
+            <a:r>
+              <a:rPr lang="en-US" sz="1300" dirty="0">
+                <a:solidFill>
+                  <a:srgbClr val="E9EEF3"/>
+                </a:solidFill>
+                <a:latin typeface="Consolas" pitchFamily="34" charset="0"/>
+                <a:ea typeface="Consolas" pitchFamily="34" charset="-122"/>
+                <a:cs typeface="Consolas" pitchFamily="34" charset="-120"/>
+              </a:rPr>
+              <a:t>+</a:t>
+            </a:r>
+            <a:pPr indent="0" marL="0">
+              <a:lnSpc>
+                <a:spcPct val="130000"/>
+              </a:lnSpc>
+              <a:buNone/>
+            </a:pPr>
+            <a:r>
+              <a:rPr lang="en-US" sz="1300" dirty="0">
+                <a:solidFill>
+                  <a:srgbClr val="F2C88F"/>
+                </a:solidFill>
+                <a:latin typeface="Consolas" pitchFamily="34" charset="0"/>
+                <a:ea typeface="Consolas" pitchFamily="34" charset="-122"/>
+                <a:cs typeface="Consolas" pitchFamily="34" charset="-120"/>
+              </a:rPr>
+              <a:t>1</a:t>
+            </a:r>
+            <a:endParaRPr lang="en-US" sz="1300" dirty="0"/>
+          </a:p>
+          <a:p>
+            <a:pPr indent="0" marL="0">
+              <a:lnSpc>
+                <a:spcPct val="130000"/>
+              </a:lnSpc>
+              <a:buNone/>
+            </a:pPr>
+            <a:r>
+              <a:rPr lang="en-US" sz="1300" dirty="0">
+                <a:solidFill>
+                  <a:srgbClr val="E9EEF3"/>
+                </a:solidFill>
+                <a:latin typeface="Consolas" pitchFamily="34" charset="0"/>
+                <a:ea typeface="Consolas" pitchFamily="34" charset="-122"/>
+                <a:cs typeface="Consolas" pitchFamily="34" charset="-120"/>
+              </a:rPr>
+              <a:t>[</a:t>
+            </a:r>
+            <a:pPr indent="0" marL="0">
+              <a:lnSpc>
+                <a:spcPct val="130000"/>
+              </a:lnSpc>
+              <a:buNone/>
+            </a:pPr>
+            <a:r>
+              <a:rPr lang="en-US" sz="1300" dirty="0">
+                <a:solidFill>
+                  <a:srgbClr val="E9EEF3"/>
+                </a:solidFill>
+                <a:latin typeface="Consolas" pitchFamily="34" charset="0"/>
+                <a:ea typeface="Consolas" pitchFamily="34" charset="-122"/>
+                <a:cs typeface="Consolas" pitchFamily="34" charset="-120"/>
+              </a:rPr>
+              <a:t>f</a:t>
+            </a:r>
+            <a:pPr indent="0" marL="0">
+              <a:lnSpc>
+                <a:spcPct val="130000"/>
+              </a:lnSpc>
+              <a:buNone/>
+            </a:pPr>
+            <a:r>
+              <a:rPr lang="en-US" sz="1300" dirty="0">
+                <a:solidFill>
+                  <a:srgbClr val="E9EEF3"/>
+                </a:solidFill>
+                <a:latin typeface="Consolas" pitchFamily="34" charset="0"/>
+                <a:ea typeface="Consolas" pitchFamily="34" charset="-122"/>
+                <a:cs typeface="Consolas" pitchFamily="34" charset="-120"/>
+              </a:rPr>
+              <a:t>(</a:t>
+            </a:r>
+            <a:pPr indent="0" marL="0">
+              <a:lnSpc>
+                <a:spcPct val="130000"/>
+              </a:lnSpc>
+              <a:buNone/>
+            </a:pPr>
+            <a:r>
+              <a:rPr lang="en-US" sz="1300" dirty="0">
+                <a:solidFill>
+                  <a:srgbClr val="E9EEF3"/>
+                </a:solidFill>
+                <a:latin typeface="Consolas" pitchFamily="34" charset="0"/>
+                <a:ea typeface="Consolas" pitchFamily="34" charset="-122"/>
+                <a:cs typeface="Consolas" pitchFamily="34" charset="-120"/>
+              </a:rPr>
+              <a:t>n</a:t>
+            </a:r>
+            <a:pPr indent="0" marL="0">
+              <a:lnSpc>
+                <a:spcPct val="130000"/>
+              </a:lnSpc>
+              <a:buNone/>
+            </a:pPr>
+            <a:r>
+              <a:rPr lang="en-US" sz="1300" dirty="0">
+                <a:solidFill>
+                  <a:srgbClr val="E9EEF3"/>
+                </a:solidFill>
+                <a:latin typeface="Consolas" pitchFamily="34" charset="0"/>
+                <a:ea typeface="Consolas" pitchFamily="34" charset="-122"/>
+                <a:cs typeface="Consolas" pitchFamily="34" charset="-120"/>
+              </a:rPr>
+              <a:t>)</a:t>
+            </a:r>
+            <a:pPr indent="0" marL="0">
+              <a:lnSpc>
+                <a:spcPct val="130000"/>
+              </a:lnSpc>
+              <a:buNone/>
+            </a:pPr>
+            <a:r>
+              <a:rPr lang="en-US" sz="1300" dirty="0">
+                <a:solidFill>
+                  <a:srgbClr val="E9EEF3"/>
+                </a:solidFill>
+                <a:latin typeface="Consolas" pitchFamily="34" charset="0"/>
+                <a:ea typeface="Consolas" pitchFamily="34" charset="-122"/>
+                <a:cs typeface="Consolas" pitchFamily="34" charset="-120"/>
+              </a:rPr>
+              <a:t> </a:t>
+            </a:r>
+            <a:pPr indent="0" marL="0">
+              <a:lnSpc>
+                <a:spcPct val="130000"/>
+              </a:lnSpc>
+              <a:buNone/>
+            </a:pPr>
+            <a:r>
+              <a:rPr lang="en-US" sz="1300" b="1" dirty="0">
+                <a:solidFill>
+                  <a:srgbClr val="E8963C"/>
+                </a:solidFill>
+                <a:latin typeface="Consolas" pitchFamily="34" charset="0"/>
+                <a:ea typeface="Consolas" pitchFamily="34" charset="-122"/>
+                <a:cs typeface="Consolas" pitchFamily="34" charset="-120"/>
+              </a:rPr>
+              <a:t>for</a:t>
+            </a:r>
+            <a:pPr indent="0" marL="0">
+              <a:lnSpc>
+                <a:spcPct val="130000"/>
+              </a:lnSpc>
+              <a:buNone/>
+            </a:pPr>
+            <a:r>
+              <a:rPr lang="en-US" sz="1300" dirty="0">
+                <a:solidFill>
+                  <a:srgbClr val="E9EEF3"/>
+                </a:solidFill>
+                <a:latin typeface="Consolas" pitchFamily="34" charset="0"/>
+                <a:ea typeface="Consolas" pitchFamily="34" charset="-122"/>
+                <a:cs typeface="Consolas" pitchFamily="34" charset="-120"/>
+              </a:rPr>
+              <a:t> </a:t>
+            </a:r>
+            <a:pPr indent="0" marL="0">
+              <a:lnSpc>
+                <a:spcPct val="130000"/>
+              </a:lnSpc>
+              <a:buNone/>
+            </a:pPr>
+            <a:r>
+              <a:rPr lang="en-US" sz="1300" dirty="0">
+                <a:solidFill>
+                  <a:srgbClr val="E9EEF3"/>
+                </a:solidFill>
+                <a:latin typeface="Consolas" pitchFamily="34" charset="0"/>
+                <a:ea typeface="Consolas" pitchFamily="34" charset="-122"/>
+                <a:cs typeface="Consolas" pitchFamily="34" charset="-120"/>
+              </a:rPr>
+              <a:t>n</a:t>
+            </a:r>
+            <a:pPr indent="0" marL="0">
+              <a:lnSpc>
+                <a:spcPct val="130000"/>
+              </a:lnSpc>
+              <a:buNone/>
+            </a:pPr>
+            <a:r>
+              <a:rPr lang="en-US" sz="1300" dirty="0">
+                <a:solidFill>
+                  <a:srgbClr val="E9EEF3"/>
+                </a:solidFill>
+                <a:latin typeface="Consolas" pitchFamily="34" charset="0"/>
+                <a:ea typeface="Consolas" pitchFamily="34" charset="-122"/>
+                <a:cs typeface="Consolas" pitchFamily="34" charset="-120"/>
+              </a:rPr>
+              <a:t> </a:t>
+            </a:r>
+            <a:pPr indent="0" marL="0">
+              <a:lnSpc>
+                <a:spcPct val="130000"/>
+              </a:lnSpc>
+              <a:buNone/>
+            </a:pPr>
+            <a:r>
+              <a:rPr lang="en-US" sz="1300" b="1" dirty="0">
+                <a:solidFill>
+                  <a:srgbClr val="E8963C"/>
+                </a:solidFill>
+                <a:latin typeface="Consolas" pitchFamily="34" charset="0"/>
+                <a:ea typeface="Consolas" pitchFamily="34" charset="-122"/>
+                <a:cs typeface="Consolas" pitchFamily="34" charset="-120"/>
+              </a:rPr>
+              <a:t>in</a:t>
+            </a:r>
+            <a:pPr indent="0" marL="0">
+              <a:lnSpc>
+                <a:spcPct val="130000"/>
+              </a:lnSpc>
+              <a:buNone/>
+            </a:pPr>
+            <a:r>
+              <a:rPr lang="en-US" sz="1300" dirty="0">
+                <a:solidFill>
+                  <a:srgbClr val="E9EEF3"/>
+                </a:solidFill>
+                <a:latin typeface="Consolas" pitchFamily="34" charset="0"/>
+                <a:ea typeface="Consolas" pitchFamily="34" charset="-122"/>
+                <a:cs typeface="Consolas" pitchFamily="34" charset="-120"/>
+              </a:rPr>
+              <a:t> </a:t>
+            </a:r>
+            <a:pPr indent="0" marL="0">
+              <a:lnSpc>
+                <a:spcPct val="130000"/>
+              </a:lnSpc>
+              <a:buNone/>
+            </a:pPr>
+            <a:r>
+              <a:rPr lang="en-US" sz="1300" dirty="0">
+                <a:solidFill>
+                  <a:srgbClr val="F2C88F"/>
+                </a:solidFill>
+                <a:latin typeface="Consolas" pitchFamily="34" charset="0"/>
+                <a:ea typeface="Consolas" pitchFamily="34" charset="-122"/>
+                <a:cs typeface="Consolas" pitchFamily="34" charset="-120"/>
+              </a:rPr>
+              <a:t>1</a:t>
+            </a:r>
+            <a:pPr indent="0" marL="0">
+              <a:lnSpc>
+                <a:spcPct val="130000"/>
+              </a:lnSpc>
+              <a:buNone/>
+            </a:pPr>
+            <a:r>
+              <a:rPr lang="en-US" sz="1300" dirty="0">
+                <a:solidFill>
+                  <a:srgbClr val="E9EEF3"/>
+                </a:solidFill>
+                <a:latin typeface="Consolas" pitchFamily="34" charset="0"/>
+                <a:ea typeface="Consolas" pitchFamily="34" charset="-122"/>
+                <a:cs typeface="Consolas" pitchFamily="34" charset="-120"/>
+              </a:rPr>
+              <a:t>:</a:t>
+            </a:r>
+            <a:pPr indent="0" marL="0">
+              <a:lnSpc>
+                <a:spcPct val="130000"/>
+              </a:lnSpc>
+              <a:buNone/>
+            </a:pPr>
+            <a:r>
+              <a:rPr lang="en-US" sz="1300" dirty="0">
+                <a:solidFill>
+                  <a:srgbClr val="F2C88F"/>
+                </a:solidFill>
+                <a:latin typeface="Consolas" pitchFamily="34" charset="0"/>
+                <a:ea typeface="Consolas" pitchFamily="34" charset="-122"/>
+                <a:cs typeface="Consolas" pitchFamily="34" charset="-120"/>
+              </a:rPr>
+              <a:t>5</a:t>
+            </a:r>
+            <a:pPr indent="0" marL="0">
+              <a:lnSpc>
+                <a:spcPct val="130000"/>
+              </a:lnSpc>
+              <a:buNone/>
+            </a:pPr>
+            <a:r>
+              <a:rPr lang="en-US" sz="1300" dirty="0">
+                <a:solidFill>
+                  <a:srgbClr val="E9EEF3"/>
+                </a:solidFill>
+                <a:latin typeface="Consolas" pitchFamily="34" charset="0"/>
+                <a:ea typeface="Consolas" pitchFamily="34" charset="-122"/>
+                <a:cs typeface="Consolas" pitchFamily="34" charset="-120"/>
+              </a:rPr>
+              <a:t>]</a:t>
+            </a:r>
+            <a:endParaRPr lang="en-US" sz="1300" dirty="0"/>
+          </a:p>
+        </p:txBody>
+      </p:sp>
+      <p:sp>
+        <p:nvSpPr>
+          <p:cNvPr id="11" name="TextBox 10"/>
+          <p:cNvSpPr txBox="1"/>
+          <p:nvPr/>
+        </p:nvSpPr>
+        <p:spPr>
+          <a:xfrm>
+            <a:off x="548640" y="3506360"/>
+            <a:ext cx="11094415" cy="274320"/>
+          </a:xfrm>
+          <a:prstGeom prst="rect">
+            <a:avLst/>
+          </a:prstGeom>
+          <a:noFill/>
+        </p:spPr>
+        <p:txBody>
+          <a:bodyPr wrap="square">
+            <a:spAutoFit/>
+          </a:bodyPr>
+          <a:lstStyle/>
+          <a:p>
+            <a:pPr algn="l"/>
+            <a:r>
+              <a:rPr sz="1100" b="1" i="0">
+                <a:solidFill>
+                  <a:srgbClr val="2C7A8C"/>
+                </a:solidFill>
+                <a:latin typeface="Calibri"/>
+              </a:rPr>
+              <a:t>RESULTADO DE CADA PARTE</a:t>
+            </a:r>
+          </a:p>
+        </p:txBody>
+      </p:sp>
+      <p:sp>
+        <p:nvSpPr>
+          <p:cNvPr id="12" name="Rounded Rectangle 11"/>
+          <p:cNvSpPr/>
+          <p:nvPr/>
+        </p:nvSpPr>
+        <p:spPr>
+          <a:xfrm>
+            <a:off x="548640" y="3826400"/>
+            <a:ext cx="11094415" cy="1234440"/>
+          </a:xfrm>
+          <a:prstGeom prst="roundRect">
+            <a:avLst>
+              <a:gd name="adj" fmla="val 7407"/>
+            </a:avLst>
+          </a:prstGeom>
+          <a:solidFill>
+            <a:srgbClr val="E9F2F3"/>
+          </a:solidFill>
+          <a:ln>
+            <a:noFill/>
+          </a:ln>
+          <a:effectLst/>
+        </p:spPr>
+        <p:style>
+          <a:lnRef idx="1">
+            <a:schemeClr val="accent1"/>
+          </a:lnRef>
+          <a:fillRef idx="3">
+            <a:schemeClr val="accent1"/>
+          </a:fillRef>
+          <a:effectRef idx="2">
+            <a:schemeClr val="accent1"/>
+          </a:effectRef>
+          <a:fontRef idx="minor">
+            <a:schemeClr val="lt1"/>
+          </a:fontRef>
+        </p:style>
+        <p:txBody>
+          <a:bodyPr rtlCol="0" anchor="ctr"/>
+          <a:lstStyle/>
+          <a:p>
+            <a:pPr algn="ctr"/>
+          </a:p>
+        </p:txBody>
+      </p:sp>
+      <p:sp>
+        <p:nvSpPr>
+          <p:cNvPr id="13" name="TextBox 12"/>
+          <p:cNvSpPr txBox="1"/>
+          <p:nvPr/>
+        </p:nvSpPr>
+        <p:spPr>
+          <a:xfrm>
+            <a:off x="822960" y="3963560"/>
+            <a:ext cx="10545775" cy="1097280"/>
+          </a:xfrm>
+          <a:prstGeom prst="rect">
+            <a:avLst/>
+          </a:prstGeom>
+          <a:noFill/>
+        </p:spPr>
+        <p:txBody>
+          <a:bodyPr wrap="square">
+            <a:spAutoFit/>
+          </a:bodyPr>
+          <a:lstStyle/>
+          <a:p>
+            <a:pPr>
+              <a:lnSpc>
+                <a:spcPct val="125000"/>
+              </a:lnSpc>
+            </a:pPr>
+            <a:r>
+              <a:rPr sz="1250" b="1">
+                <a:solidFill>
+                  <a:srgbClr val="2C7A8C"/>
+                </a:solidFill>
+                <a:latin typeface="Consolas"/>
+              </a:rPr>
+              <a:t>hipotese</a:t>
+            </a:r>
+            <a:r>
+              <a:rPr sz="1250" b="0">
+                <a:solidFill>
+                  <a:srgbClr val="1B2733"/>
+                </a:solidFill>
+                <a:latin typeface="Consolas"/>
+              </a:rPr>
+              <a:t>  →  "dobrar e somar 1"</a:t>
+            </a:r>
+          </a:p>
+          <a:p>
+            <a:pPr>
+              <a:lnSpc>
+                <a:spcPct val="125000"/>
+              </a:lnSpc>
+            </a:pPr>
+            <a:r>
+              <a:rPr sz="1250" b="1">
+                <a:solidFill>
+                  <a:srgbClr val="2C7A8C"/>
+                </a:solidFill>
+                <a:latin typeface="Consolas"/>
+              </a:rPr>
+              <a:t>f(n)</a:t>
+            </a:r>
+            <a:r>
+              <a:rPr sz="1250" b="0">
+                <a:solidFill>
+                  <a:srgbClr val="1B2733"/>
+                </a:solidFill>
+                <a:latin typeface="Consolas"/>
+              </a:rPr>
+              <a:t>  →  2n + 1  (dobra n e soma 1)</a:t>
+            </a:r>
+          </a:p>
+          <a:p>
+            <a:pPr>
+              <a:lnSpc>
+                <a:spcPct val="125000"/>
+              </a:lnSpc>
+            </a:pPr>
+            <a:r>
+              <a:rPr sz="1250" b="1">
+                <a:solidFill>
+                  <a:srgbClr val="2C7A8C"/>
+                </a:solidFill>
+                <a:latin typeface="Consolas"/>
+              </a:rPr>
+              <a:t>[f(n) for n in 1:5]</a:t>
+            </a:r>
+            <a:r>
+              <a:rPr sz="1250" b="0">
+                <a:solidFill>
+                  <a:srgbClr val="1B2733"/>
+                </a:solidFill>
+                <a:latin typeface="Consolas"/>
+              </a:rPr>
+              <a:t>  →  [3, 5, 7, 9, 11]  (f(1)=3, f(2)=5, ..., f(5)=11)</a:t>
+            </a:r>
+          </a:p>
+        </p:txBody>
+      </p:sp>
+      <p:sp>
+        <p:nvSpPr>
+          <p:cNvPr id="14" name="TextBox 13"/>
+          <p:cNvSpPr txBox="1"/>
+          <p:nvPr/>
+        </p:nvSpPr>
+        <p:spPr>
+          <a:xfrm>
+            <a:off x="548640" y="6473952"/>
+            <a:ext cx="5486400" cy="274320"/>
+          </a:xfrm>
+          <a:prstGeom prst="rect">
+            <a:avLst/>
+          </a:prstGeom>
+          <a:noFill/>
+        </p:spPr>
+        <p:txBody>
+          <a:bodyPr wrap="square">
+            <a:spAutoFit/>
+          </a:bodyPr>
+          <a:lstStyle/>
+          <a:p>
+            <a:pPr algn="l"/>
+            <a:r>
+              <a:rPr sz="1000" b="0" i="0">
+                <a:solidFill>
+                  <a:srgbClr val="9AA5B1"/>
+                </a:solidFill>
+                <a:latin typeface="Calibri"/>
+              </a:rPr>
+              <a:t>Aula 2 · Pensamento Indutivo</a:t>
+            </a:r>
+          </a:p>
+        </p:txBody>
+      </p:sp>
+      <p:sp>
+        <p:nvSpPr>
+          <p:cNvPr id="15" name="TextBox 14"/>
+          <p:cNvSpPr txBox="1"/>
+          <p:nvPr/>
+        </p:nvSpPr>
+        <p:spPr>
+          <a:xfrm>
+            <a:off x="10271455" y="6473952"/>
+            <a:ext cx="1371600" cy="274320"/>
+          </a:xfrm>
+          <a:prstGeom prst="rect">
+            <a:avLst/>
+          </a:prstGeom>
+          <a:noFill/>
+        </p:spPr>
+        <p:txBody>
+          <a:bodyPr wrap="square">
+            <a:spAutoFit/>
+          </a:bodyPr>
+          <a:lstStyle/>
+          <a:p>
+            <a:pPr algn="l"/>
+            <a:r>
+              <a:rPr sz="1000" b="0" i="0">
+                <a:solidFill>
+                  <a:srgbClr val="9AA5B1"/>
+                </a:solidFill>
+                <a:latin typeface="Calibri"/>
+              </a:rPr>
+              <a:t>24 / 27</a:t>
+            </a:r>
           </a:p>
         </p:txBody>
       </p:sp>
@@ -13037,9 +14779,7958 @@
                 <a:ea typeface="Calibri" pitchFamily="34" charset="-122"/>
                 <a:cs typeface="Calibri" pitchFamily="34" charset="-120"/>
               </a:rPr>
-              <a:t>02 / 17</a:t>
+              <a:t>02 / 27</a:t>
             </a:r>
             <a:endParaRPr lang="en-US" sz="1000" dirty="0"/>
+          </a:p>
+        </p:txBody>
+      </p:sp>
+    </p:spTree>
+  </p:cSld>
+  <p:clrMapOvr>
+    <a:masterClrMapping/>
+  </p:clrMapOvr>
+</p:sld>
+</file>
+
+<file path=ppt/slides/slide20.xml><?xml version="1.0" encoding="utf-8"?>
+<p:sld xmlns:a="http://schemas.openxmlformats.org/drawingml/2006/main" xmlns:p="http://schemas.openxmlformats.org/presentationml/2006/main" xmlns:r="http://schemas.openxmlformats.org/officeDocument/2006/relationships">
+  <p:cSld>
+    <p:spTree>
+      <p:nvGrpSpPr>
+        <p:cNvPr id="1" name=""/>
+        <p:cNvGrpSpPr/>
+        <p:nvPr/>
+      </p:nvGrpSpPr>
+      <p:grpSpPr/>
+      <p:sp>
+        <p:nvSpPr>
+          <p:cNvPr id="2" name="TextBox 1"/>
+          <p:cNvSpPr txBox="1"/>
+          <p:nvPr/>
+        </p:nvSpPr>
+        <p:spPr>
+          <a:xfrm>
+            <a:off x="548640" y="457200"/>
+            <a:ext cx="11094415" cy="320040"/>
+          </a:xfrm>
+          <a:prstGeom prst="rect">
+            <a:avLst/>
+          </a:prstGeom>
+          <a:noFill/>
+        </p:spPr>
+        <p:txBody>
+          <a:bodyPr wrap="square">
+            <a:spAutoFit/>
+          </a:bodyPr>
+          <a:lstStyle/>
+          <a:p>
+            <a:pPr algn="l"/>
+            <a:r>
+              <a:rPr sz="1200" b="1" i="0">
+                <a:solidFill>
+                  <a:srgbClr val="2C7A8C"/>
+                </a:solidFill>
+                <a:latin typeface="Calibri"/>
+              </a:rPr>
+              <a:t>TAREFA 8 DE 10  ·  2.8  ·  RESULTADO</a:t>
+            </a:r>
+          </a:p>
+        </p:txBody>
+      </p:sp>
+      <p:sp>
+        <p:nvSpPr>
+          <p:cNvPr id="3" name="TextBox 2"/>
+          <p:cNvSpPr txBox="1"/>
+          <p:nvPr/>
+        </p:nvSpPr>
+        <p:spPr>
+          <a:xfrm>
+            <a:off x="548640" y="800000"/>
+            <a:ext cx="11094415" cy="700000"/>
+          </a:xfrm>
+          <a:prstGeom prst="rect">
+            <a:avLst/>
+          </a:prstGeom>
+          <a:noFill/>
+        </p:spPr>
+        <p:txBody>
+          <a:bodyPr wrap="square">
+            <a:spAutoFit/>
+          </a:bodyPr>
+          <a:lstStyle/>
+          <a:p>
+            <a:pPr algn="l"/>
+            <a:r>
+              <a:rPr sz="2500" b="1" i="0">
+                <a:solidFill>
+                  <a:srgbClr val="1B3A5C"/>
+                </a:solidFill>
+                <a:latin typeface="Cambria"/>
+              </a:rPr>
+              <a:t>O que cada parte devolve?</a:t>
+            </a:r>
+          </a:p>
+        </p:txBody>
+      </p:sp>
+      <p:sp>
+        <p:nvSpPr>
+          <p:cNvPr id="8" name="Text 6"/>
+          <p:cNvSpPr/>
+          <p:nvPr/>
+        </p:nvSpPr>
+        <p:spPr>
+          <a:xfrm>
+            <a:off x="548640" y="1650000"/>
+            <a:ext cx="11094415" cy="274320"/>
+          </a:xfrm>
+          <a:prstGeom prst="rect">
+            <a:avLst/>
+          </a:prstGeom>
+          <a:noFill/>
+          <a:ln/>
+        </p:spPr>
+        <p:txBody>
+          <a:bodyPr wrap="square" lIns="0" tIns="0" rIns="0" bIns="0" rtlCol="0" anchor="ctr"/>
+          <a:lstStyle/>
+          <a:p>
+            <a:pPr indent="0" marL="0">
+              <a:buNone/>
+            </a:pPr>
+            <a:r>
+              <a:rPr lang="en-US" sz="1150" b="1" spc="120" kern="0" dirty="0">
+                <a:solidFill>
+                  <a:srgbClr val="44546A"/>
+                </a:solidFill>
+                <a:latin typeface="Calibri" pitchFamily="34" charset="0"/>
+                <a:ea typeface="Calibri" pitchFamily="34" charset="-122"/>
+                <a:cs typeface="Calibri" pitchFamily="34" charset="-120"/>
+              </a:rPr>
+              <a:t>EXEMPLO EM JULIA</a:t>
+            </a:r>
+            <a:endParaRPr lang="en-US" sz="1150" dirty="0"/>
+          </a:p>
+        </p:txBody>
+      </p:sp>
+      <p:sp>
+        <p:nvSpPr>
+          <p:cNvPr id="9" name="Shape 7"/>
+          <p:cNvSpPr/>
+          <p:nvPr/>
+        </p:nvSpPr>
+        <p:spPr>
+          <a:xfrm>
+            <a:off x="548640" y="2015760"/>
+            <a:ext cx="11094415" cy="1490600"/>
+          </a:xfrm>
+          <a:prstGeom prst="roundRect">
+            <a:avLst>
+              <a:gd name="adj" fmla="val 3721"/>
+            </a:avLst>
+          </a:prstGeom>
+          <a:solidFill>
+            <a:srgbClr val="12233B"/>
+          </a:solidFill>
+          <a:ln/>
+          <a:effectLst>
+            <a:outerShdw sx="100000" sy="100000" kx="0" ky="0" algn="bl" rotWithShape="0" blurRad="76200" dist="25400" dir="5400000">
+              <a:srgbClr val="1B3A5C">
+                <a:alpha val="15000"/>
+              </a:srgbClr>
+            </a:outerShdw>
+          </a:effectLst>
+        </p:spPr>
+        <p:txBody>
+          <a:bodyPr/>
+          <a:p/>
+        </p:txBody>
+      </p:sp>
+      <p:sp>
+        <p:nvSpPr>
+          <p:cNvPr id="10" name="Text 8"/>
+          <p:cNvSpPr/>
+          <p:nvPr/>
+        </p:nvSpPr>
+        <p:spPr>
+          <a:xfrm>
+            <a:off x="804672" y="2253504"/>
+            <a:ext cx="10582351" cy="1015112"/>
+          </a:xfrm>
+          <a:prstGeom prst="rect">
+            <a:avLst/>
+          </a:prstGeom>
+          <a:noFill/>
+          <a:ln/>
+        </p:spPr>
+        <p:txBody>
+          <a:bodyPr wrap="square" lIns="0" tIns="0" rIns="0" bIns="0" rtlCol="0" anchor="t"/>
+          <a:lstStyle/>
+          <a:p>
+            <a:pPr indent="0" marL="0">
+              <a:lnSpc>
+                <a:spcPct val="130000"/>
+              </a:lnSpc>
+              <a:buNone/>
+            </a:pPr>
+            <a:r>
+              <a:rPr lang="en-US" sz="1300" dirty="0">
+                <a:solidFill>
+                  <a:srgbClr val="E9EEF3"/>
+                </a:solidFill>
+                <a:latin typeface="Consolas" pitchFamily="34" charset="0"/>
+                <a:ea typeface="Consolas" pitchFamily="34" charset="-122"/>
+                <a:cs typeface="Consolas" pitchFamily="34" charset="-120"/>
+              </a:rPr>
+              <a:t>dados</a:t>
+            </a:r>
+            <a:pPr indent="0" marL="0">
+              <a:lnSpc>
+                <a:spcPct val="130000"/>
+              </a:lnSpc>
+              <a:buNone/>
+            </a:pPr>
+            <a:r>
+              <a:rPr lang="en-US" sz="1300" dirty="0">
+                <a:solidFill>
+                  <a:srgbClr val="E9EEF3"/>
+                </a:solidFill>
+                <a:latin typeface="Consolas" pitchFamily="34" charset="0"/>
+                <a:ea typeface="Consolas" pitchFamily="34" charset="-122"/>
+                <a:cs typeface="Consolas" pitchFamily="34" charset="-120"/>
+              </a:rPr>
+              <a:t> </a:t>
+            </a:r>
+            <a:pPr indent="0" marL="0">
+              <a:lnSpc>
+                <a:spcPct val="130000"/>
+              </a:lnSpc>
+              <a:buNone/>
+            </a:pPr>
+            <a:r>
+              <a:rPr lang="en-US" sz="1300" dirty="0">
+                <a:solidFill>
+                  <a:srgbClr val="E9EEF3"/>
+                </a:solidFill>
+                <a:latin typeface="Consolas" pitchFamily="34" charset="0"/>
+                <a:ea typeface="Consolas" pitchFamily="34" charset="-122"/>
+                <a:cs typeface="Consolas" pitchFamily="34" charset="-120"/>
+              </a:rPr>
+              <a:t>=</a:t>
+            </a:r>
+            <a:pPr indent="0" marL="0">
+              <a:lnSpc>
+                <a:spcPct val="130000"/>
+              </a:lnSpc>
+              <a:buNone/>
+            </a:pPr>
+            <a:r>
+              <a:rPr lang="en-US" sz="1300" dirty="0">
+                <a:solidFill>
+                  <a:srgbClr val="E9EEF3"/>
+                </a:solidFill>
+                <a:latin typeface="Consolas" pitchFamily="34" charset="0"/>
+                <a:ea typeface="Consolas" pitchFamily="34" charset="-122"/>
+                <a:cs typeface="Consolas" pitchFamily="34" charset="-120"/>
+              </a:rPr>
+              <a:t> </a:t>
+            </a:r>
+            <a:pPr indent="0" marL="0">
+              <a:lnSpc>
+                <a:spcPct val="130000"/>
+              </a:lnSpc>
+              <a:buNone/>
+            </a:pPr>
+            <a:r>
+              <a:rPr lang="en-US" sz="1300" dirty="0">
+                <a:solidFill>
+                  <a:srgbClr val="E9EEF3"/>
+                </a:solidFill>
+                <a:latin typeface="Consolas" pitchFamily="34" charset="0"/>
+                <a:ea typeface="Consolas" pitchFamily="34" charset="-122"/>
+                <a:cs typeface="Consolas" pitchFamily="34" charset="-120"/>
+              </a:rPr>
+              <a:t>[</a:t>
+            </a:r>
+            <a:pPr indent="0" marL="0">
+              <a:lnSpc>
+                <a:spcPct val="130000"/>
+              </a:lnSpc>
+              <a:buNone/>
+            </a:pPr>
+            <a:r>
+              <a:rPr lang="en-US" sz="1300" dirty="0">
+                <a:solidFill>
+                  <a:srgbClr val="F2C88F"/>
+                </a:solidFill>
+                <a:latin typeface="Consolas" pitchFamily="34" charset="0"/>
+                <a:ea typeface="Consolas" pitchFamily="34" charset="-122"/>
+                <a:cs typeface="Consolas" pitchFamily="34" charset="-120"/>
+              </a:rPr>
+              <a:t>2</a:t>
+            </a:r>
+            <a:pPr indent="0" marL="0">
+              <a:lnSpc>
+                <a:spcPct val="130000"/>
+              </a:lnSpc>
+              <a:buNone/>
+            </a:pPr>
+            <a:r>
+              <a:rPr lang="en-US" sz="1300" dirty="0">
+                <a:solidFill>
+                  <a:srgbClr val="E9EEF3"/>
+                </a:solidFill>
+                <a:latin typeface="Consolas" pitchFamily="34" charset="0"/>
+                <a:ea typeface="Consolas" pitchFamily="34" charset="-122"/>
+                <a:cs typeface="Consolas" pitchFamily="34" charset="-120"/>
+              </a:rPr>
+              <a:t>,</a:t>
+            </a:r>
+            <a:pPr indent="0" marL="0">
+              <a:lnSpc>
+                <a:spcPct val="130000"/>
+              </a:lnSpc>
+              <a:buNone/>
+            </a:pPr>
+            <a:r>
+              <a:rPr lang="en-US" sz="1300" dirty="0">
+                <a:solidFill>
+                  <a:srgbClr val="E9EEF3"/>
+                </a:solidFill>
+                <a:latin typeface="Consolas" pitchFamily="34" charset="0"/>
+                <a:ea typeface="Consolas" pitchFamily="34" charset="-122"/>
+                <a:cs typeface="Consolas" pitchFamily="34" charset="-120"/>
+              </a:rPr>
+              <a:t> </a:t>
+            </a:r>
+            <a:pPr indent="0" marL="0">
+              <a:lnSpc>
+                <a:spcPct val="130000"/>
+              </a:lnSpc>
+              <a:buNone/>
+            </a:pPr>
+            <a:r>
+              <a:rPr lang="en-US" sz="1300" dirty="0">
+                <a:solidFill>
+                  <a:srgbClr val="F2C88F"/>
+                </a:solidFill>
+                <a:latin typeface="Consolas" pitchFamily="34" charset="0"/>
+                <a:ea typeface="Consolas" pitchFamily="34" charset="-122"/>
+                <a:cs typeface="Consolas" pitchFamily="34" charset="-120"/>
+              </a:rPr>
+              <a:t>4</a:t>
+            </a:r>
+            <a:pPr indent="0" marL="0">
+              <a:lnSpc>
+                <a:spcPct val="130000"/>
+              </a:lnSpc>
+              <a:buNone/>
+            </a:pPr>
+            <a:r>
+              <a:rPr lang="en-US" sz="1300" dirty="0">
+                <a:solidFill>
+                  <a:srgbClr val="E9EEF3"/>
+                </a:solidFill>
+                <a:latin typeface="Consolas" pitchFamily="34" charset="0"/>
+                <a:ea typeface="Consolas" pitchFamily="34" charset="-122"/>
+                <a:cs typeface="Consolas" pitchFamily="34" charset="-120"/>
+              </a:rPr>
+              <a:t>,</a:t>
+            </a:r>
+            <a:pPr indent="0" marL="0">
+              <a:lnSpc>
+                <a:spcPct val="130000"/>
+              </a:lnSpc>
+              <a:buNone/>
+            </a:pPr>
+            <a:r>
+              <a:rPr lang="en-US" sz="1300" dirty="0">
+                <a:solidFill>
+                  <a:srgbClr val="E9EEF3"/>
+                </a:solidFill>
+                <a:latin typeface="Consolas" pitchFamily="34" charset="0"/>
+                <a:ea typeface="Consolas" pitchFamily="34" charset="-122"/>
+                <a:cs typeface="Consolas" pitchFamily="34" charset="-120"/>
+              </a:rPr>
+              <a:t> </a:t>
+            </a:r>
+            <a:pPr indent="0" marL="0">
+              <a:lnSpc>
+                <a:spcPct val="130000"/>
+              </a:lnSpc>
+              <a:buNone/>
+            </a:pPr>
+            <a:r>
+              <a:rPr lang="en-US" sz="1300" dirty="0">
+                <a:solidFill>
+                  <a:srgbClr val="F2C88F"/>
+                </a:solidFill>
+                <a:latin typeface="Consolas" pitchFamily="34" charset="0"/>
+                <a:ea typeface="Consolas" pitchFamily="34" charset="-122"/>
+                <a:cs typeface="Consolas" pitchFamily="34" charset="-120"/>
+              </a:rPr>
+              <a:t>6</a:t>
+            </a:r>
+            <a:pPr indent="0" marL="0">
+              <a:lnSpc>
+                <a:spcPct val="130000"/>
+              </a:lnSpc>
+              <a:buNone/>
+            </a:pPr>
+            <a:r>
+              <a:rPr lang="en-US" sz="1300" dirty="0">
+                <a:solidFill>
+                  <a:srgbClr val="E9EEF3"/>
+                </a:solidFill>
+                <a:latin typeface="Consolas" pitchFamily="34" charset="0"/>
+                <a:ea typeface="Consolas" pitchFamily="34" charset="-122"/>
+                <a:cs typeface="Consolas" pitchFamily="34" charset="-120"/>
+              </a:rPr>
+              <a:t>]</a:t>
+            </a:r>
+            <a:endParaRPr lang="en-US" sz="1300" dirty="0"/>
+          </a:p>
+          <a:p>
+            <a:pPr indent="0" marL="0">
+              <a:lnSpc>
+                <a:spcPct val="130000"/>
+              </a:lnSpc>
+              <a:buNone/>
+            </a:pPr>
+            <a:r>
+              <a:rPr lang="en-US" sz="1300" dirty="0">
+                <a:solidFill>
+                  <a:srgbClr val="E9EEF3"/>
+                </a:solidFill>
+                <a:latin typeface="Consolas" pitchFamily="34" charset="0"/>
+                <a:ea typeface="Consolas" pitchFamily="34" charset="-122"/>
+                <a:cs typeface="Consolas" pitchFamily="34" charset="-120"/>
+              </a:rPr>
+              <a:t>regra1</a:t>
+            </a:r>
+            <a:pPr indent="0" marL="0">
+              <a:lnSpc>
+                <a:spcPct val="130000"/>
+              </a:lnSpc>
+              <a:buNone/>
+            </a:pPr>
+            <a:r>
+              <a:rPr lang="en-US" sz="1300" dirty="0">
+                <a:solidFill>
+                  <a:srgbClr val="E9EEF3"/>
+                </a:solidFill>
+                <a:latin typeface="Consolas" pitchFamily="34" charset="0"/>
+                <a:ea typeface="Consolas" pitchFamily="34" charset="-122"/>
+                <a:cs typeface="Consolas" pitchFamily="34" charset="-120"/>
+              </a:rPr>
+              <a:t>(</a:t>
+            </a:r>
+            <a:pPr indent="0" marL="0">
+              <a:lnSpc>
+                <a:spcPct val="130000"/>
+              </a:lnSpc>
+              <a:buNone/>
+            </a:pPr>
+            <a:r>
+              <a:rPr lang="en-US" sz="1300" dirty="0">
+                <a:solidFill>
+                  <a:srgbClr val="E9EEF3"/>
+                </a:solidFill>
+                <a:latin typeface="Consolas" pitchFamily="34" charset="0"/>
+                <a:ea typeface="Consolas" pitchFamily="34" charset="-122"/>
+                <a:cs typeface="Consolas" pitchFamily="34" charset="-120"/>
+              </a:rPr>
+              <a:t>n</a:t>
+            </a:r>
+            <a:pPr indent="0" marL="0">
+              <a:lnSpc>
+                <a:spcPct val="130000"/>
+              </a:lnSpc>
+              <a:buNone/>
+            </a:pPr>
+            <a:r>
+              <a:rPr lang="en-US" sz="1300" dirty="0">
+                <a:solidFill>
+                  <a:srgbClr val="E9EEF3"/>
+                </a:solidFill>
+                <a:latin typeface="Consolas" pitchFamily="34" charset="0"/>
+                <a:ea typeface="Consolas" pitchFamily="34" charset="-122"/>
+                <a:cs typeface="Consolas" pitchFamily="34" charset="-120"/>
+              </a:rPr>
+              <a:t>)</a:t>
+            </a:r>
+            <a:pPr indent="0" marL="0">
+              <a:lnSpc>
+                <a:spcPct val="130000"/>
+              </a:lnSpc>
+              <a:buNone/>
+            </a:pPr>
+            <a:r>
+              <a:rPr lang="en-US" sz="1300" dirty="0">
+                <a:solidFill>
+                  <a:srgbClr val="E9EEF3"/>
+                </a:solidFill>
+                <a:latin typeface="Consolas" pitchFamily="34" charset="0"/>
+                <a:ea typeface="Consolas" pitchFamily="34" charset="-122"/>
+                <a:cs typeface="Consolas" pitchFamily="34" charset="-120"/>
+              </a:rPr>
+              <a:t>=</a:t>
+            </a:r>
+            <a:pPr indent="0" marL="0">
+              <a:lnSpc>
+                <a:spcPct val="130000"/>
+              </a:lnSpc>
+              <a:buNone/>
+            </a:pPr>
+            <a:r>
+              <a:rPr lang="en-US" sz="1300" dirty="0">
+                <a:solidFill>
+                  <a:srgbClr val="F2C88F"/>
+                </a:solidFill>
+                <a:latin typeface="Consolas" pitchFamily="34" charset="0"/>
+                <a:ea typeface="Consolas" pitchFamily="34" charset="-122"/>
+                <a:cs typeface="Consolas" pitchFamily="34" charset="-120"/>
+              </a:rPr>
+              <a:t>2</a:t>
+            </a:r>
+            <a:pPr indent="0" marL="0">
+              <a:lnSpc>
+                <a:spcPct val="130000"/>
+              </a:lnSpc>
+              <a:buNone/>
+            </a:pPr>
+            <a:r>
+              <a:rPr lang="en-US" sz="1300" dirty="0">
+                <a:solidFill>
+                  <a:srgbClr val="E9EEF3"/>
+                </a:solidFill>
+                <a:latin typeface="Consolas" pitchFamily="34" charset="0"/>
+                <a:ea typeface="Consolas" pitchFamily="34" charset="-122"/>
+                <a:cs typeface="Consolas" pitchFamily="34" charset="-120"/>
+              </a:rPr>
+              <a:t>n</a:t>
+            </a:r>
+            <a:endParaRPr lang="en-US" sz="1300" dirty="0"/>
+          </a:p>
+          <a:p>
+            <a:pPr indent="0" marL="0">
+              <a:lnSpc>
+                <a:spcPct val="130000"/>
+              </a:lnSpc>
+              <a:buNone/>
+            </a:pPr>
+            <a:r>
+              <a:rPr lang="en-US" sz="1300" dirty="0">
+                <a:solidFill>
+                  <a:srgbClr val="E9EEF3"/>
+                </a:solidFill>
+                <a:latin typeface="Consolas" pitchFamily="34" charset="0"/>
+                <a:ea typeface="Consolas" pitchFamily="34" charset="-122"/>
+                <a:cs typeface="Consolas" pitchFamily="34" charset="-120"/>
+              </a:rPr>
+              <a:t>regra2</a:t>
+            </a:r>
+            <a:pPr indent="0" marL="0">
+              <a:lnSpc>
+                <a:spcPct val="130000"/>
+              </a:lnSpc>
+              <a:buNone/>
+            </a:pPr>
+            <a:r>
+              <a:rPr lang="en-US" sz="1300" dirty="0">
+                <a:solidFill>
+                  <a:srgbClr val="E9EEF3"/>
+                </a:solidFill>
+                <a:latin typeface="Consolas" pitchFamily="34" charset="0"/>
+                <a:ea typeface="Consolas" pitchFamily="34" charset="-122"/>
+                <a:cs typeface="Consolas" pitchFamily="34" charset="-120"/>
+              </a:rPr>
+              <a:t>(</a:t>
+            </a:r>
+            <a:pPr indent="0" marL="0">
+              <a:lnSpc>
+                <a:spcPct val="130000"/>
+              </a:lnSpc>
+              <a:buNone/>
+            </a:pPr>
+            <a:r>
+              <a:rPr lang="en-US" sz="1300" dirty="0">
+                <a:solidFill>
+                  <a:srgbClr val="E9EEF3"/>
+                </a:solidFill>
+                <a:latin typeface="Consolas" pitchFamily="34" charset="0"/>
+                <a:ea typeface="Consolas" pitchFamily="34" charset="-122"/>
+                <a:cs typeface="Consolas" pitchFamily="34" charset="-120"/>
+              </a:rPr>
+              <a:t>n</a:t>
+            </a:r>
+            <a:pPr indent="0" marL="0">
+              <a:lnSpc>
+                <a:spcPct val="130000"/>
+              </a:lnSpc>
+              <a:buNone/>
+            </a:pPr>
+            <a:r>
+              <a:rPr lang="en-US" sz="1300" dirty="0">
+                <a:solidFill>
+                  <a:srgbClr val="E9EEF3"/>
+                </a:solidFill>
+                <a:latin typeface="Consolas" pitchFamily="34" charset="0"/>
+                <a:ea typeface="Consolas" pitchFamily="34" charset="-122"/>
+                <a:cs typeface="Consolas" pitchFamily="34" charset="-120"/>
+              </a:rPr>
+              <a:t>)</a:t>
+            </a:r>
+            <a:pPr indent="0" marL="0">
+              <a:lnSpc>
+                <a:spcPct val="130000"/>
+              </a:lnSpc>
+              <a:buNone/>
+            </a:pPr>
+            <a:r>
+              <a:rPr lang="en-US" sz="1300" dirty="0">
+                <a:solidFill>
+                  <a:srgbClr val="E9EEF3"/>
+                </a:solidFill>
+                <a:latin typeface="Consolas" pitchFamily="34" charset="0"/>
+                <a:ea typeface="Consolas" pitchFamily="34" charset="-122"/>
+                <a:cs typeface="Consolas" pitchFamily="34" charset="-120"/>
+              </a:rPr>
+              <a:t>=</a:t>
+            </a:r>
+            <a:pPr indent="0" marL="0">
+              <a:lnSpc>
+                <a:spcPct val="130000"/>
+              </a:lnSpc>
+              <a:buNone/>
+            </a:pPr>
+            <a:r>
+              <a:rPr lang="en-US" sz="1300" dirty="0">
+                <a:solidFill>
+                  <a:srgbClr val="E9EEF3"/>
+                </a:solidFill>
+                <a:latin typeface="Consolas" pitchFamily="34" charset="0"/>
+                <a:ea typeface="Consolas" pitchFamily="34" charset="-122"/>
+                <a:cs typeface="Consolas" pitchFamily="34" charset="-120"/>
+              </a:rPr>
+              <a:t>n</a:t>
+            </a:r>
+            <a:pPr indent="0" marL="0">
+              <a:lnSpc>
+                <a:spcPct val="130000"/>
+              </a:lnSpc>
+              <a:buNone/>
+            </a:pPr>
+            <a:r>
+              <a:rPr lang="en-US" sz="1300" dirty="0">
+                <a:solidFill>
+                  <a:srgbClr val="E9EEF3"/>
+                </a:solidFill>
+                <a:latin typeface="Consolas" pitchFamily="34" charset="0"/>
+                <a:ea typeface="Consolas" pitchFamily="34" charset="-122"/>
+                <a:cs typeface="Consolas" pitchFamily="34" charset="-120"/>
+              </a:rPr>
+              <a:t>^</a:t>
+            </a:r>
+            <a:pPr indent="0" marL="0">
+              <a:lnSpc>
+                <a:spcPct val="130000"/>
+              </a:lnSpc>
+              <a:buNone/>
+            </a:pPr>
+            <a:r>
+              <a:rPr lang="en-US" sz="1300" dirty="0">
+                <a:solidFill>
+                  <a:srgbClr val="F2C88F"/>
+                </a:solidFill>
+                <a:latin typeface="Consolas" pitchFamily="34" charset="0"/>
+                <a:ea typeface="Consolas" pitchFamily="34" charset="-122"/>
+                <a:cs typeface="Consolas" pitchFamily="34" charset="-120"/>
+              </a:rPr>
+              <a:t>2</a:t>
+            </a:r>
+            <a:pPr indent="0" marL="0">
+              <a:lnSpc>
+                <a:spcPct val="130000"/>
+              </a:lnSpc>
+              <a:buNone/>
+            </a:pPr>
+            <a:r>
+              <a:rPr lang="en-US" sz="1300" dirty="0">
+                <a:solidFill>
+                  <a:srgbClr val="E9EEF3"/>
+                </a:solidFill>
+                <a:latin typeface="Consolas" pitchFamily="34" charset="0"/>
+                <a:ea typeface="Consolas" pitchFamily="34" charset="-122"/>
+                <a:cs typeface="Consolas" pitchFamily="34" charset="-120"/>
+              </a:rPr>
+              <a:t>-</a:t>
+            </a:r>
+            <a:pPr indent="0" marL="0">
+              <a:lnSpc>
+                <a:spcPct val="130000"/>
+              </a:lnSpc>
+              <a:buNone/>
+            </a:pPr>
+            <a:r>
+              <a:rPr lang="en-US" sz="1300" dirty="0">
+                <a:solidFill>
+                  <a:srgbClr val="E9EEF3"/>
+                </a:solidFill>
+                <a:latin typeface="Consolas" pitchFamily="34" charset="0"/>
+                <a:ea typeface="Consolas" pitchFamily="34" charset="-122"/>
+                <a:cs typeface="Consolas" pitchFamily="34" charset="-120"/>
+              </a:rPr>
+              <a:t>n</a:t>
+            </a:r>
+            <a:pPr indent="0" marL="0">
+              <a:lnSpc>
+                <a:spcPct val="130000"/>
+              </a:lnSpc>
+              <a:buNone/>
+            </a:pPr>
+            <a:r>
+              <a:rPr lang="en-US" sz="1300" dirty="0">
+                <a:solidFill>
+                  <a:srgbClr val="E9EEF3"/>
+                </a:solidFill>
+                <a:latin typeface="Consolas" pitchFamily="34" charset="0"/>
+                <a:ea typeface="Consolas" pitchFamily="34" charset="-122"/>
+                <a:cs typeface="Consolas" pitchFamily="34" charset="-120"/>
+              </a:rPr>
+              <a:t>+</a:t>
+            </a:r>
+            <a:pPr indent="0" marL="0">
+              <a:lnSpc>
+                <a:spcPct val="130000"/>
+              </a:lnSpc>
+              <a:buNone/>
+            </a:pPr>
+            <a:r>
+              <a:rPr lang="en-US" sz="1300" dirty="0">
+                <a:solidFill>
+                  <a:srgbClr val="F2C88F"/>
+                </a:solidFill>
+                <a:latin typeface="Consolas" pitchFamily="34" charset="0"/>
+                <a:ea typeface="Consolas" pitchFamily="34" charset="-122"/>
+                <a:cs typeface="Consolas" pitchFamily="34" charset="-120"/>
+              </a:rPr>
+              <a:t>2</a:t>
+            </a:r>
+            <a:endParaRPr lang="en-US" sz="1300" dirty="0"/>
+          </a:p>
+        </p:txBody>
+      </p:sp>
+      <p:sp>
+        <p:nvSpPr>
+          <p:cNvPr id="11" name="TextBox 10"/>
+          <p:cNvSpPr txBox="1"/>
+          <p:nvPr/>
+        </p:nvSpPr>
+        <p:spPr>
+          <a:xfrm>
+            <a:off x="548640" y="3506360"/>
+            <a:ext cx="11094415" cy="274320"/>
+          </a:xfrm>
+          <a:prstGeom prst="rect">
+            <a:avLst/>
+          </a:prstGeom>
+          <a:noFill/>
+        </p:spPr>
+        <p:txBody>
+          <a:bodyPr wrap="square">
+            <a:spAutoFit/>
+          </a:bodyPr>
+          <a:lstStyle/>
+          <a:p>
+            <a:pPr algn="l"/>
+            <a:r>
+              <a:rPr sz="1100" b="1" i="0">
+                <a:solidFill>
+                  <a:srgbClr val="2C7A8C"/>
+                </a:solidFill>
+                <a:latin typeface="Calibri"/>
+              </a:rPr>
+              <a:t>RESULTADO DE CADA PARTE</a:t>
+            </a:r>
+          </a:p>
+        </p:txBody>
+      </p:sp>
+      <p:sp>
+        <p:nvSpPr>
+          <p:cNvPr id="12" name="Rounded Rectangle 11"/>
+          <p:cNvSpPr/>
+          <p:nvPr/>
+        </p:nvSpPr>
+        <p:spPr>
+          <a:xfrm>
+            <a:off x="548640" y="3826400"/>
+            <a:ext cx="11094415" cy="1554480"/>
+          </a:xfrm>
+          <a:prstGeom prst="roundRect">
+            <a:avLst>
+              <a:gd name="adj" fmla="val 5882"/>
+            </a:avLst>
+          </a:prstGeom>
+          <a:solidFill>
+            <a:srgbClr val="E9F2F3"/>
+          </a:solidFill>
+          <a:ln>
+            <a:noFill/>
+          </a:ln>
+          <a:effectLst/>
+        </p:spPr>
+        <p:style>
+          <a:lnRef idx="1">
+            <a:schemeClr val="accent1"/>
+          </a:lnRef>
+          <a:fillRef idx="3">
+            <a:schemeClr val="accent1"/>
+          </a:fillRef>
+          <a:effectRef idx="2">
+            <a:schemeClr val="accent1"/>
+          </a:effectRef>
+          <a:fontRef idx="minor">
+            <a:schemeClr val="lt1"/>
+          </a:fontRef>
+        </p:style>
+        <p:txBody>
+          <a:bodyPr rtlCol="0" anchor="ctr"/>
+          <a:lstStyle/>
+          <a:p>
+            <a:pPr algn="ctr"/>
+          </a:p>
+        </p:txBody>
+      </p:sp>
+      <p:sp>
+        <p:nvSpPr>
+          <p:cNvPr id="13" name="TextBox 12"/>
+          <p:cNvSpPr txBox="1"/>
+          <p:nvPr/>
+        </p:nvSpPr>
+        <p:spPr>
+          <a:xfrm>
+            <a:off x="822960" y="3963560"/>
+            <a:ext cx="10545775" cy="1417320"/>
+          </a:xfrm>
+          <a:prstGeom prst="rect">
+            <a:avLst/>
+          </a:prstGeom>
+          <a:noFill/>
+        </p:spPr>
+        <p:txBody>
+          <a:bodyPr wrap="square">
+            <a:spAutoFit/>
+          </a:bodyPr>
+          <a:lstStyle/>
+          <a:p>
+            <a:pPr>
+              <a:lnSpc>
+                <a:spcPct val="125000"/>
+              </a:lnSpc>
+            </a:pPr>
+            <a:r>
+              <a:rPr sz="1250" b="1">
+                <a:solidFill>
+                  <a:srgbClr val="2C7A8C"/>
+                </a:solidFill>
+                <a:latin typeface="Consolas"/>
+              </a:rPr>
+              <a:t>dados</a:t>
+            </a:r>
+            <a:r>
+              <a:rPr sz="1250" b="0">
+                <a:solidFill>
+                  <a:srgbClr val="1B2733"/>
+                </a:solidFill>
+                <a:latin typeface="Consolas"/>
+              </a:rPr>
+              <a:t>  →  [2, 4, 6]</a:t>
+            </a:r>
+          </a:p>
+          <a:p>
+            <a:pPr>
+              <a:lnSpc>
+                <a:spcPct val="125000"/>
+              </a:lnSpc>
+            </a:pPr>
+            <a:r>
+              <a:rPr sz="1250" b="1">
+                <a:solidFill>
+                  <a:srgbClr val="2C7A8C"/>
+                </a:solidFill>
+                <a:latin typeface="Consolas"/>
+              </a:rPr>
+              <a:t>regra1(n)</a:t>
+            </a:r>
+            <a:r>
+              <a:rPr sz="1250" b="0">
+                <a:solidFill>
+                  <a:srgbClr val="1B2733"/>
+                </a:solidFill>
+                <a:latin typeface="Consolas"/>
+              </a:rPr>
+              <a:t>  →  2n  (dobra n) — regra1(1)=2, regra1(2)=4, regra1(3)=6</a:t>
+            </a:r>
+          </a:p>
+          <a:p>
+            <a:pPr>
+              <a:lnSpc>
+                <a:spcPct val="125000"/>
+              </a:lnSpc>
+            </a:pPr>
+            <a:r>
+              <a:rPr sz="1250" b="1">
+                <a:solidFill>
+                  <a:srgbClr val="2C7A8C"/>
+                </a:solidFill>
+                <a:latin typeface="Consolas"/>
+              </a:rPr>
+              <a:t>regra2(n)</a:t>
+            </a:r>
+            <a:r>
+              <a:rPr sz="1250" b="0">
+                <a:solidFill>
+                  <a:srgbClr val="1B2733"/>
+                </a:solidFill>
+                <a:latin typeface="Consolas"/>
+              </a:rPr>
+              <a:t>  →  n² − n + 2 — regra2(1)=2, regra2(2)=4, regra2(3)=8</a:t>
+            </a:r>
+          </a:p>
+          <a:p>
+            <a:pPr>
+              <a:lnSpc>
+                <a:spcPct val="125000"/>
+              </a:lnSpc>
+            </a:pPr>
+            <a:r>
+              <a:rPr sz="1250" b="1">
+                <a:solidFill>
+                  <a:srgbClr val="2C7A8C"/>
+                </a:solidFill>
+                <a:latin typeface="Consolas"/>
+              </a:rPr>
+              <a:t>comparando com dados</a:t>
+            </a:r>
+            <a:r>
+              <a:rPr sz="1250" b="0">
+                <a:solidFill>
+                  <a:srgbClr val="1B2733"/>
+                </a:solidFill>
+                <a:latin typeface="Consolas"/>
+              </a:rPr>
+              <a:t>  →  regra1 bate nos 3 valores; regra2 diverge em n=3 (8 ≠ 6)</a:t>
+            </a:r>
+          </a:p>
+        </p:txBody>
+      </p:sp>
+      <p:sp>
+        <p:nvSpPr>
+          <p:cNvPr id="14" name="TextBox 13"/>
+          <p:cNvSpPr txBox="1"/>
+          <p:nvPr/>
+        </p:nvSpPr>
+        <p:spPr>
+          <a:xfrm>
+            <a:off x="548640" y="6473952"/>
+            <a:ext cx="5486400" cy="274320"/>
+          </a:xfrm>
+          <a:prstGeom prst="rect">
+            <a:avLst/>
+          </a:prstGeom>
+          <a:noFill/>
+        </p:spPr>
+        <p:txBody>
+          <a:bodyPr wrap="square">
+            <a:spAutoFit/>
+          </a:bodyPr>
+          <a:lstStyle/>
+          <a:p>
+            <a:pPr algn="l"/>
+            <a:r>
+              <a:rPr sz="1000" b="0" i="0">
+                <a:solidFill>
+                  <a:srgbClr val="9AA5B1"/>
+                </a:solidFill>
+                <a:latin typeface="Calibri"/>
+              </a:rPr>
+              <a:t>Aula 2 · Pensamento Indutivo</a:t>
+            </a:r>
+          </a:p>
+        </p:txBody>
+      </p:sp>
+      <p:sp>
+        <p:nvSpPr>
+          <p:cNvPr id="15" name="TextBox 14"/>
+          <p:cNvSpPr txBox="1"/>
+          <p:nvPr/>
+        </p:nvSpPr>
+        <p:spPr>
+          <a:xfrm>
+            <a:off x="10271455" y="6473952"/>
+            <a:ext cx="1371600" cy="274320"/>
+          </a:xfrm>
+          <a:prstGeom prst="rect">
+            <a:avLst/>
+          </a:prstGeom>
+          <a:noFill/>
+        </p:spPr>
+        <p:txBody>
+          <a:bodyPr wrap="square">
+            <a:spAutoFit/>
+          </a:bodyPr>
+          <a:lstStyle/>
+          <a:p>
+            <a:pPr algn="l"/>
+            <a:r>
+              <a:rPr sz="1000" b="0" i="0">
+                <a:solidFill>
+                  <a:srgbClr val="9AA5B1"/>
+                </a:solidFill>
+                <a:latin typeface="Calibri"/>
+              </a:rPr>
+              <a:t>22 / 27</a:t>
+            </a:r>
+          </a:p>
+        </p:txBody>
+      </p:sp>
+    </p:spTree>
+  </p:cSld>
+  <p:clrMapOvr>
+    <a:masterClrMapping/>
+  </p:clrMapOvr>
+</p:sld>
+</file>
+
+<file path=ppt/slides/slide21.xml><?xml version="1.0" encoding="utf-8"?>
+<p:sld xmlns:a="http://schemas.openxmlformats.org/drawingml/2006/main" xmlns:p="http://schemas.openxmlformats.org/presentationml/2006/main" xmlns:r="http://schemas.openxmlformats.org/officeDocument/2006/relationships">
+  <p:cSld>
+    <p:spTree>
+      <p:nvGrpSpPr>
+        <p:cNvPr id="1" name=""/>
+        <p:cNvGrpSpPr/>
+        <p:nvPr/>
+      </p:nvGrpSpPr>
+      <p:grpSpPr/>
+      <p:sp>
+        <p:nvSpPr>
+          <p:cNvPr id="2" name="TextBox 1"/>
+          <p:cNvSpPr txBox="1"/>
+          <p:nvPr/>
+        </p:nvSpPr>
+        <p:spPr>
+          <a:xfrm>
+            <a:off x="548640" y="457200"/>
+            <a:ext cx="11094415" cy="320040"/>
+          </a:xfrm>
+          <a:prstGeom prst="rect">
+            <a:avLst/>
+          </a:prstGeom>
+          <a:noFill/>
+        </p:spPr>
+        <p:txBody>
+          <a:bodyPr wrap="square">
+            <a:spAutoFit/>
+          </a:bodyPr>
+          <a:lstStyle/>
+          <a:p>
+            <a:pPr algn="l"/>
+            <a:r>
+              <a:rPr sz="1200" b="1" i="0">
+                <a:solidFill>
+                  <a:srgbClr val="2C7A8C"/>
+                </a:solidFill>
+                <a:latin typeface="Calibri"/>
+              </a:rPr>
+              <a:t>TAREFA 7 DE 10  ·  2.7  ·  RESULTADO</a:t>
+            </a:r>
+          </a:p>
+        </p:txBody>
+      </p:sp>
+      <p:sp>
+        <p:nvSpPr>
+          <p:cNvPr id="3" name="TextBox 2"/>
+          <p:cNvSpPr txBox="1"/>
+          <p:nvPr/>
+        </p:nvSpPr>
+        <p:spPr>
+          <a:xfrm>
+            <a:off x="548640" y="800000"/>
+            <a:ext cx="11094415" cy="700000"/>
+          </a:xfrm>
+          <a:prstGeom prst="rect">
+            <a:avLst/>
+          </a:prstGeom>
+          <a:noFill/>
+        </p:spPr>
+        <p:txBody>
+          <a:bodyPr wrap="square">
+            <a:spAutoFit/>
+          </a:bodyPr>
+          <a:lstStyle/>
+          <a:p>
+            <a:pPr algn="l"/>
+            <a:r>
+              <a:rPr sz="2500" b="1" i="0">
+                <a:solidFill>
+                  <a:srgbClr val="1B3A5C"/>
+                </a:solidFill>
+                <a:latin typeface="Cambria"/>
+              </a:rPr>
+              <a:t>O que cada parte devolve?</a:t>
+            </a:r>
+          </a:p>
+        </p:txBody>
+      </p:sp>
+      <p:sp>
+        <p:nvSpPr>
+          <p:cNvPr id="8" name="Text 6"/>
+          <p:cNvSpPr/>
+          <p:nvPr/>
+        </p:nvSpPr>
+        <p:spPr>
+          <a:xfrm>
+            <a:off x="548640" y="1650000"/>
+            <a:ext cx="11094415" cy="274320"/>
+          </a:xfrm>
+          <a:prstGeom prst="rect">
+            <a:avLst/>
+          </a:prstGeom>
+          <a:noFill/>
+          <a:ln/>
+        </p:spPr>
+        <p:txBody>
+          <a:bodyPr wrap="square" lIns="0" tIns="0" rIns="0" bIns="0" rtlCol="0" anchor="ctr"/>
+          <a:lstStyle/>
+          <a:p>
+            <a:pPr indent="0" marL="0">
+              <a:buNone/>
+            </a:pPr>
+            <a:r>
+              <a:rPr lang="en-US" sz="1150" b="1" spc="120" kern="0" dirty="0">
+                <a:solidFill>
+                  <a:srgbClr val="44546A"/>
+                </a:solidFill>
+                <a:latin typeface="Calibri" pitchFamily="34" charset="0"/>
+                <a:ea typeface="Calibri" pitchFamily="34" charset="-122"/>
+                <a:cs typeface="Calibri" pitchFamily="34" charset="-120"/>
+              </a:rPr>
+              <a:t>EXEMPLO EM JULIA</a:t>
+            </a:r>
+            <a:endParaRPr lang="en-US" sz="1150" dirty="0"/>
+          </a:p>
+        </p:txBody>
+      </p:sp>
+      <p:sp>
+        <p:nvSpPr>
+          <p:cNvPr id="9" name="Shape 7"/>
+          <p:cNvSpPr/>
+          <p:nvPr/>
+        </p:nvSpPr>
+        <p:spPr>
+          <a:xfrm>
+            <a:off x="548640" y="2015760"/>
+            <a:ext cx="11094415" cy="1160400"/>
+          </a:xfrm>
+          <a:prstGeom prst="roundRect">
+            <a:avLst>
+              <a:gd name="adj" fmla="val 3721"/>
+            </a:avLst>
+          </a:prstGeom>
+          <a:solidFill>
+            <a:srgbClr val="12233B"/>
+          </a:solidFill>
+          <a:ln/>
+          <a:effectLst>
+            <a:outerShdw sx="100000" sy="100000" kx="0" ky="0" algn="bl" rotWithShape="0" blurRad="76200" dist="25400" dir="5400000">
+              <a:srgbClr val="1B3A5C">
+                <a:alpha val="15000"/>
+              </a:srgbClr>
+            </a:outerShdw>
+          </a:effectLst>
+        </p:spPr>
+        <p:txBody>
+          <a:bodyPr/>
+          <a:p/>
+        </p:txBody>
+      </p:sp>
+      <p:sp>
+        <p:nvSpPr>
+          <p:cNvPr id="10" name="Text 8"/>
+          <p:cNvSpPr/>
+          <p:nvPr/>
+        </p:nvSpPr>
+        <p:spPr>
+          <a:xfrm>
+            <a:off x="804672" y="2253504"/>
+            <a:ext cx="10582351" cy="684912"/>
+          </a:xfrm>
+          <a:prstGeom prst="rect">
+            <a:avLst/>
+          </a:prstGeom>
+          <a:noFill/>
+          <a:ln/>
+        </p:spPr>
+        <p:txBody>
+          <a:bodyPr wrap="square" lIns="0" tIns="0" rIns="0" bIns="0" rtlCol="0" anchor="t"/>
+          <a:lstStyle/>
+          <a:p>
+            <a:pPr indent="0" marL="0">
+              <a:lnSpc>
+                <a:spcPct val="130000"/>
+              </a:lnSpc>
+              <a:buNone/>
+            </a:pPr>
+            <a:r>
+              <a:rPr lang="en-US" sz="1300" dirty="0">
+                <a:solidFill>
+                  <a:srgbClr val="E9EEF3"/>
+                </a:solidFill>
+                <a:latin typeface="Consolas" pitchFamily="34" charset="0"/>
+                <a:ea typeface="Consolas" pitchFamily="34" charset="-122"/>
+                <a:cs typeface="Consolas" pitchFamily="34" charset="-120"/>
+              </a:rPr>
+              <a:t>valores</a:t>
+            </a:r>
+            <a:pPr indent="0" marL="0">
+              <a:lnSpc>
+                <a:spcPct val="130000"/>
+              </a:lnSpc>
+              <a:buNone/>
+            </a:pPr>
+            <a:r>
+              <a:rPr lang="en-US" sz="1300" dirty="0">
+                <a:solidFill>
+                  <a:srgbClr val="E9EEF3"/>
+                </a:solidFill>
+                <a:latin typeface="Consolas" pitchFamily="34" charset="0"/>
+                <a:ea typeface="Consolas" pitchFamily="34" charset="-122"/>
+                <a:cs typeface="Consolas" pitchFamily="34" charset="-120"/>
+              </a:rPr>
+              <a:t> </a:t>
+            </a:r>
+            <a:pPr indent="0" marL="0">
+              <a:lnSpc>
+                <a:spcPct val="130000"/>
+              </a:lnSpc>
+              <a:buNone/>
+            </a:pPr>
+            <a:r>
+              <a:rPr lang="en-US" sz="1300" dirty="0">
+                <a:solidFill>
+                  <a:srgbClr val="E9EEF3"/>
+                </a:solidFill>
+                <a:latin typeface="Consolas" pitchFamily="34" charset="0"/>
+                <a:ea typeface="Consolas" pitchFamily="34" charset="-122"/>
+                <a:cs typeface="Consolas" pitchFamily="34" charset="-120"/>
+              </a:rPr>
+              <a:t>=</a:t>
+            </a:r>
+            <a:pPr indent="0" marL="0">
+              <a:lnSpc>
+                <a:spcPct val="130000"/>
+              </a:lnSpc>
+              <a:buNone/>
+            </a:pPr>
+            <a:r>
+              <a:rPr lang="en-US" sz="1300" dirty="0">
+                <a:solidFill>
+                  <a:srgbClr val="E9EEF3"/>
+                </a:solidFill>
+                <a:latin typeface="Consolas" pitchFamily="34" charset="0"/>
+                <a:ea typeface="Consolas" pitchFamily="34" charset="-122"/>
+                <a:cs typeface="Consolas" pitchFamily="34" charset="-120"/>
+              </a:rPr>
+              <a:t> </a:t>
+            </a:r>
+            <a:pPr indent="0" marL="0">
+              <a:lnSpc>
+                <a:spcPct val="130000"/>
+              </a:lnSpc>
+              <a:buNone/>
+            </a:pPr>
+            <a:r>
+              <a:rPr lang="en-US" sz="1300" dirty="0">
+                <a:solidFill>
+                  <a:srgbClr val="E9EEF3"/>
+                </a:solidFill>
+                <a:latin typeface="Consolas" pitchFamily="34" charset="0"/>
+                <a:ea typeface="Consolas" pitchFamily="34" charset="-122"/>
+                <a:cs typeface="Consolas" pitchFamily="34" charset="-120"/>
+              </a:rPr>
+              <a:t>[</a:t>
+            </a:r>
+            <a:pPr indent="0" marL="0">
+              <a:lnSpc>
+                <a:spcPct val="130000"/>
+              </a:lnSpc>
+              <a:buNone/>
+            </a:pPr>
+            <a:r>
+              <a:rPr lang="en-US" sz="1300" dirty="0">
+                <a:solidFill>
+                  <a:srgbClr val="F2C88F"/>
+                </a:solidFill>
+                <a:latin typeface="Consolas" pitchFamily="34" charset="0"/>
+                <a:ea typeface="Consolas" pitchFamily="34" charset="-122"/>
+                <a:cs typeface="Consolas" pitchFamily="34" charset="-120"/>
+              </a:rPr>
+              <a:t>2</a:t>
+            </a:r>
+            <a:pPr indent="0" marL="0">
+              <a:lnSpc>
+                <a:spcPct val="130000"/>
+              </a:lnSpc>
+              <a:buNone/>
+            </a:pPr>
+            <a:r>
+              <a:rPr lang="en-US" sz="1300" dirty="0">
+                <a:solidFill>
+                  <a:srgbClr val="E9EEF3"/>
+                </a:solidFill>
+                <a:latin typeface="Consolas" pitchFamily="34" charset="0"/>
+                <a:ea typeface="Consolas" pitchFamily="34" charset="-122"/>
+                <a:cs typeface="Consolas" pitchFamily="34" charset="-120"/>
+              </a:rPr>
+              <a:t>,</a:t>
+            </a:r>
+            <a:pPr indent="0" marL="0">
+              <a:lnSpc>
+                <a:spcPct val="130000"/>
+              </a:lnSpc>
+              <a:buNone/>
+            </a:pPr>
+            <a:r>
+              <a:rPr lang="en-US" sz="1300" dirty="0">
+                <a:solidFill>
+                  <a:srgbClr val="E9EEF3"/>
+                </a:solidFill>
+                <a:latin typeface="Consolas" pitchFamily="34" charset="0"/>
+                <a:ea typeface="Consolas" pitchFamily="34" charset="-122"/>
+                <a:cs typeface="Consolas" pitchFamily="34" charset="-120"/>
+              </a:rPr>
+              <a:t> </a:t>
+            </a:r>
+            <a:pPr indent="0" marL="0">
+              <a:lnSpc>
+                <a:spcPct val="130000"/>
+              </a:lnSpc>
+              <a:buNone/>
+            </a:pPr>
+            <a:r>
+              <a:rPr lang="en-US" sz="1300" dirty="0">
+                <a:solidFill>
+                  <a:srgbClr val="F2C88F"/>
+                </a:solidFill>
+                <a:latin typeface="Consolas" pitchFamily="34" charset="0"/>
+                <a:ea typeface="Consolas" pitchFamily="34" charset="-122"/>
+                <a:cs typeface="Consolas" pitchFamily="34" charset="-120"/>
+              </a:rPr>
+              <a:t>5</a:t>
+            </a:r>
+            <a:pPr indent="0" marL="0">
+              <a:lnSpc>
+                <a:spcPct val="130000"/>
+              </a:lnSpc>
+              <a:buNone/>
+            </a:pPr>
+            <a:r>
+              <a:rPr lang="en-US" sz="1300" dirty="0">
+                <a:solidFill>
+                  <a:srgbClr val="E9EEF3"/>
+                </a:solidFill>
+                <a:latin typeface="Consolas" pitchFamily="34" charset="0"/>
+                <a:ea typeface="Consolas" pitchFamily="34" charset="-122"/>
+                <a:cs typeface="Consolas" pitchFamily="34" charset="-120"/>
+              </a:rPr>
+              <a:t>,</a:t>
+            </a:r>
+            <a:pPr indent="0" marL="0">
+              <a:lnSpc>
+                <a:spcPct val="130000"/>
+              </a:lnSpc>
+              <a:buNone/>
+            </a:pPr>
+            <a:r>
+              <a:rPr lang="en-US" sz="1300" dirty="0">
+                <a:solidFill>
+                  <a:srgbClr val="E9EEF3"/>
+                </a:solidFill>
+                <a:latin typeface="Consolas" pitchFamily="34" charset="0"/>
+                <a:ea typeface="Consolas" pitchFamily="34" charset="-122"/>
+                <a:cs typeface="Consolas" pitchFamily="34" charset="-120"/>
+              </a:rPr>
+              <a:t> </a:t>
+            </a:r>
+            <a:pPr indent="0" marL="0">
+              <a:lnSpc>
+                <a:spcPct val="130000"/>
+              </a:lnSpc>
+              <a:buNone/>
+            </a:pPr>
+            <a:r>
+              <a:rPr lang="en-US" sz="1300" dirty="0">
+                <a:solidFill>
+                  <a:srgbClr val="F2C88F"/>
+                </a:solidFill>
+                <a:latin typeface="Consolas" pitchFamily="34" charset="0"/>
+                <a:ea typeface="Consolas" pitchFamily="34" charset="-122"/>
+                <a:cs typeface="Consolas" pitchFamily="34" charset="-120"/>
+              </a:rPr>
+              <a:t>3</a:t>
+            </a:r>
+            <a:pPr indent="0" marL="0">
+              <a:lnSpc>
+                <a:spcPct val="130000"/>
+              </a:lnSpc>
+              <a:buNone/>
+            </a:pPr>
+            <a:r>
+              <a:rPr lang="en-US" sz="1300" dirty="0">
+                <a:solidFill>
+                  <a:srgbClr val="E9EEF3"/>
+                </a:solidFill>
+                <a:latin typeface="Consolas" pitchFamily="34" charset="0"/>
+                <a:ea typeface="Consolas" pitchFamily="34" charset="-122"/>
+                <a:cs typeface="Consolas" pitchFamily="34" charset="-120"/>
+              </a:rPr>
+              <a:t>]</a:t>
+            </a:r>
+            <a:endParaRPr lang="en-US" sz="1300" dirty="0"/>
+          </a:p>
+          <a:p>
+            <a:pPr indent="0" marL="0">
+              <a:lnSpc>
+                <a:spcPct val="130000"/>
+              </a:lnSpc>
+              <a:buNone/>
+            </a:pPr>
+            <a:r>
+              <a:rPr lang="en-US" sz="1300" dirty="0">
+                <a:solidFill>
+                  <a:srgbClr val="E9EEF3"/>
+                </a:solidFill>
+                <a:latin typeface="Consolas" pitchFamily="34" charset="0"/>
+                <a:ea typeface="Consolas" pitchFamily="34" charset="-122"/>
+                <a:cs typeface="Consolas" pitchFamily="34" charset="-120"/>
+              </a:rPr>
+              <a:t>barras</a:t>
+            </a:r>
+            <a:pPr indent="0" marL="0">
+              <a:lnSpc>
+                <a:spcPct val="130000"/>
+              </a:lnSpc>
+              <a:buNone/>
+            </a:pPr>
+            <a:r>
+              <a:rPr lang="en-US" sz="1300" dirty="0">
+                <a:solidFill>
+                  <a:srgbClr val="E9EEF3"/>
+                </a:solidFill>
+                <a:latin typeface="Consolas" pitchFamily="34" charset="0"/>
+                <a:ea typeface="Consolas" pitchFamily="34" charset="-122"/>
+                <a:cs typeface="Consolas" pitchFamily="34" charset="-120"/>
+              </a:rPr>
+              <a:t> </a:t>
+            </a:r>
+            <a:pPr indent="0" marL="0">
+              <a:lnSpc>
+                <a:spcPct val="130000"/>
+              </a:lnSpc>
+              <a:buNone/>
+            </a:pPr>
+            <a:r>
+              <a:rPr lang="en-US" sz="1300" dirty="0">
+                <a:solidFill>
+                  <a:srgbClr val="E9EEF3"/>
+                </a:solidFill>
+                <a:latin typeface="Consolas" pitchFamily="34" charset="0"/>
+                <a:ea typeface="Consolas" pitchFamily="34" charset="-122"/>
+                <a:cs typeface="Consolas" pitchFamily="34" charset="-120"/>
+              </a:rPr>
+              <a:t>=</a:t>
+            </a:r>
+            <a:pPr indent="0" marL="0">
+              <a:lnSpc>
+                <a:spcPct val="130000"/>
+              </a:lnSpc>
+              <a:buNone/>
+            </a:pPr>
+            <a:r>
+              <a:rPr lang="en-US" sz="1300" dirty="0">
+                <a:solidFill>
+                  <a:srgbClr val="E9EEF3"/>
+                </a:solidFill>
+                <a:latin typeface="Consolas" pitchFamily="34" charset="0"/>
+                <a:ea typeface="Consolas" pitchFamily="34" charset="-122"/>
+                <a:cs typeface="Consolas" pitchFamily="34" charset="-120"/>
+              </a:rPr>
+              <a:t> </a:t>
+            </a:r>
+            <a:pPr indent="0" marL="0">
+              <a:lnSpc>
+                <a:spcPct val="130000"/>
+              </a:lnSpc>
+              <a:buNone/>
+            </a:pPr>
+            <a:r>
+              <a:rPr lang="en-US" sz="1300" dirty="0">
+                <a:solidFill>
+                  <a:srgbClr val="E9EEF3"/>
+                </a:solidFill>
+                <a:latin typeface="Consolas" pitchFamily="34" charset="0"/>
+                <a:ea typeface="Consolas" pitchFamily="34" charset="-122"/>
+                <a:cs typeface="Consolas" pitchFamily="34" charset="-120"/>
+              </a:rPr>
+              <a:t>repeat</a:t>
+            </a:r>
+            <a:pPr indent="0" marL="0">
+              <a:lnSpc>
+                <a:spcPct val="130000"/>
+              </a:lnSpc>
+              <a:buNone/>
+            </a:pPr>
+            <a:r>
+              <a:rPr lang="en-US" sz="1300" dirty="0">
+                <a:solidFill>
+                  <a:srgbClr val="E9EEF3"/>
+                </a:solidFill>
+                <a:latin typeface="Consolas" pitchFamily="34" charset="0"/>
+                <a:ea typeface="Consolas" pitchFamily="34" charset="-122"/>
+                <a:cs typeface="Consolas" pitchFamily="34" charset="-120"/>
+              </a:rPr>
+              <a:t>.</a:t>
+            </a:r>
+            <a:pPr indent="0" marL="0">
+              <a:lnSpc>
+                <a:spcPct val="130000"/>
+              </a:lnSpc>
+              <a:buNone/>
+            </a:pPr>
+            <a:r>
+              <a:rPr lang="en-US" sz="1300" dirty="0">
+                <a:solidFill>
+                  <a:srgbClr val="E9EEF3"/>
+                </a:solidFill>
+                <a:latin typeface="Consolas" pitchFamily="34" charset="0"/>
+                <a:ea typeface="Consolas" pitchFamily="34" charset="-122"/>
+                <a:cs typeface="Consolas" pitchFamily="34" charset="-120"/>
+              </a:rPr>
+              <a:t>(</a:t>
+            </a:r>
+            <a:pPr indent="0" marL="0">
+              <a:lnSpc>
+                <a:spcPct val="130000"/>
+              </a:lnSpc>
+              <a:buNone/>
+            </a:pPr>
+            <a:r>
+              <a:rPr lang="en-US" sz="1300" dirty="0">
+                <a:solidFill>
+                  <a:srgbClr val="8FD6C4"/>
+                </a:solidFill>
+                <a:latin typeface="Consolas" pitchFamily="34" charset="0"/>
+                <a:ea typeface="Consolas" pitchFamily="34" charset="-122"/>
+                <a:cs typeface="Consolas" pitchFamily="34" charset="-120"/>
+              </a:rPr>
+              <a:t>"█"</a:t>
+            </a:r>
+            <a:pPr indent="0" marL="0">
+              <a:lnSpc>
+                <a:spcPct val="130000"/>
+              </a:lnSpc>
+              <a:buNone/>
+            </a:pPr>
+            <a:r>
+              <a:rPr lang="en-US" sz="1300" dirty="0">
+                <a:solidFill>
+                  <a:srgbClr val="E9EEF3"/>
+                </a:solidFill>
+                <a:latin typeface="Consolas" pitchFamily="34" charset="0"/>
+                <a:ea typeface="Consolas" pitchFamily="34" charset="-122"/>
+                <a:cs typeface="Consolas" pitchFamily="34" charset="-120"/>
+              </a:rPr>
+              <a:t>,</a:t>
+            </a:r>
+            <a:pPr indent="0" marL="0">
+              <a:lnSpc>
+                <a:spcPct val="130000"/>
+              </a:lnSpc>
+              <a:buNone/>
+            </a:pPr>
+            <a:r>
+              <a:rPr lang="en-US" sz="1300" dirty="0">
+                <a:solidFill>
+                  <a:srgbClr val="E9EEF3"/>
+                </a:solidFill>
+                <a:latin typeface="Consolas" pitchFamily="34" charset="0"/>
+                <a:ea typeface="Consolas" pitchFamily="34" charset="-122"/>
+                <a:cs typeface="Consolas" pitchFamily="34" charset="-120"/>
+              </a:rPr>
+              <a:t> </a:t>
+            </a:r>
+            <a:pPr indent="0" marL="0">
+              <a:lnSpc>
+                <a:spcPct val="130000"/>
+              </a:lnSpc>
+              <a:buNone/>
+            </a:pPr>
+            <a:r>
+              <a:rPr lang="en-US" sz="1300" dirty="0">
+                <a:solidFill>
+                  <a:srgbClr val="E9EEF3"/>
+                </a:solidFill>
+                <a:latin typeface="Consolas" pitchFamily="34" charset="0"/>
+                <a:ea typeface="Consolas" pitchFamily="34" charset="-122"/>
+                <a:cs typeface="Consolas" pitchFamily="34" charset="-120"/>
+              </a:rPr>
+              <a:t>valores</a:t>
+            </a:r>
+            <a:pPr indent="0" marL="0">
+              <a:lnSpc>
+                <a:spcPct val="130000"/>
+              </a:lnSpc>
+              <a:buNone/>
+            </a:pPr>
+            <a:r>
+              <a:rPr lang="en-US" sz="1300" dirty="0">
+                <a:solidFill>
+                  <a:srgbClr val="E9EEF3"/>
+                </a:solidFill>
+                <a:latin typeface="Consolas" pitchFamily="34" charset="0"/>
+                <a:ea typeface="Consolas" pitchFamily="34" charset="-122"/>
+                <a:cs typeface="Consolas" pitchFamily="34" charset="-120"/>
+              </a:rPr>
+              <a:t>)</a:t>
+            </a:r>
+            <a:endParaRPr lang="en-US" sz="1300" dirty="0"/>
+          </a:p>
+        </p:txBody>
+      </p:sp>
+      <p:sp>
+        <p:nvSpPr>
+          <p:cNvPr id="11" name="TextBox 10"/>
+          <p:cNvSpPr txBox="1"/>
+          <p:nvPr/>
+        </p:nvSpPr>
+        <p:spPr>
+          <a:xfrm>
+            <a:off x="548640" y="3176160"/>
+            <a:ext cx="11094415" cy="274320"/>
+          </a:xfrm>
+          <a:prstGeom prst="rect">
+            <a:avLst/>
+          </a:prstGeom>
+          <a:noFill/>
+        </p:spPr>
+        <p:txBody>
+          <a:bodyPr wrap="square">
+            <a:spAutoFit/>
+          </a:bodyPr>
+          <a:lstStyle/>
+          <a:p>
+            <a:pPr algn="l"/>
+            <a:r>
+              <a:rPr sz="1100" b="1" i="0">
+                <a:solidFill>
+                  <a:srgbClr val="2C7A8C"/>
+                </a:solidFill>
+                <a:latin typeface="Calibri"/>
+              </a:rPr>
+              <a:t>RESULTADO DE CADA PARTE</a:t>
+            </a:r>
+          </a:p>
+        </p:txBody>
+      </p:sp>
+      <p:sp>
+        <p:nvSpPr>
+          <p:cNvPr id="12" name="Rounded Rectangle 11"/>
+          <p:cNvSpPr/>
+          <p:nvPr/>
+        </p:nvSpPr>
+        <p:spPr>
+          <a:xfrm>
+            <a:off x="548640" y="3496200"/>
+            <a:ext cx="11094415" cy="1234440"/>
+          </a:xfrm>
+          <a:prstGeom prst="roundRect">
+            <a:avLst>
+              <a:gd name="adj" fmla="val 7407"/>
+            </a:avLst>
+          </a:prstGeom>
+          <a:solidFill>
+            <a:srgbClr val="E9F2F3"/>
+          </a:solidFill>
+          <a:ln>
+            <a:noFill/>
+          </a:ln>
+          <a:effectLst/>
+        </p:spPr>
+        <p:style>
+          <a:lnRef idx="1">
+            <a:schemeClr val="accent1"/>
+          </a:lnRef>
+          <a:fillRef idx="3">
+            <a:schemeClr val="accent1"/>
+          </a:fillRef>
+          <a:effectRef idx="2">
+            <a:schemeClr val="accent1"/>
+          </a:effectRef>
+          <a:fontRef idx="minor">
+            <a:schemeClr val="lt1"/>
+          </a:fontRef>
+        </p:style>
+        <p:txBody>
+          <a:bodyPr rtlCol="0" anchor="ctr"/>
+          <a:lstStyle/>
+          <a:p>
+            <a:pPr algn="ctr"/>
+          </a:p>
+        </p:txBody>
+      </p:sp>
+      <p:sp>
+        <p:nvSpPr>
+          <p:cNvPr id="13" name="TextBox 12"/>
+          <p:cNvSpPr txBox="1"/>
+          <p:nvPr/>
+        </p:nvSpPr>
+        <p:spPr>
+          <a:xfrm>
+            <a:off x="822960" y="3633360"/>
+            <a:ext cx="10545775" cy="1097280"/>
+          </a:xfrm>
+          <a:prstGeom prst="rect">
+            <a:avLst/>
+          </a:prstGeom>
+          <a:noFill/>
+        </p:spPr>
+        <p:txBody>
+          <a:bodyPr wrap="square">
+            <a:spAutoFit/>
+          </a:bodyPr>
+          <a:lstStyle/>
+          <a:p>
+            <a:pPr>
+              <a:lnSpc>
+                <a:spcPct val="125000"/>
+              </a:lnSpc>
+            </a:pPr>
+            <a:r>
+              <a:rPr sz="1250" b="1">
+                <a:solidFill>
+                  <a:srgbClr val="2C7A8C"/>
+                </a:solidFill>
+                <a:latin typeface="Consolas"/>
+              </a:rPr>
+              <a:t>valores</a:t>
+            </a:r>
+            <a:r>
+              <a:rPr sz="1250" b="0">
+                <a:solidFill>
+                  <a:srgbClr val="1B2733"/>
+                </a:solidFill>
+                <a:latin typeface="Consolas"/>
+              </a:rPr>
+              <a:t>  →  [2, 5, 3]</a:t>
+            </a:r>
+          </a:p>
+          <a:p>
+            <a:pPr>
+              <a:lnSpc>
+                <a:spcPct val="125000"/>
+              </a:lnSpc>
+            </a:pPr>
+            <a:r>
+              <a:rPr sz="1250" b="1">
+                <a:solidFill>
+                  <a:srgbClr val="2C7A8C"/>
+                </a:solidFill>
+                <a:latin typeface="Consolas"/>
+              </a:rPr>
+              <a:t>repeat.("█", valores)</a:t>
+            </a:r>
+            <a:r>
+              <a:rPr sz="1250" b="0">
+                <a:solidFill>
+                  <a:srgbClr val="1B2733"/>
+                </a:solidFill>
+                <a:latin typeface="Consolas"/>
+              </a:rPr>
+              <a:t>  →  ["██", "█████", "███"]  (repete o bloco valores[i] vezes)</a:t>
+            </a:r>
+          </a:p>
+          <a:p>
+            <a:pPr>
+              <a:lnSpc>
+                <a:spcPct val="125000"/>
+              </a:lnSpc>
+            </a:pPr>
+            <a:r>
+              <a:rPr sz="1250" b="1">
+                <a:solidFill>
+                  <a:srgbClr val="2C7A8C"/>
+                </a:solidFill>
+                <a:latin typeface="Consolas"/>
+              </a:rPr>
+              <a:t>barras</a:t>
+            </a:r>
+            <a:r>
+              <a:rPr sz="1250" b="0">
+                <a:solidFill>
+                  <a:srgbClr val="1B2733"/>
+                </a:solidFill>
+                <a:latin typeface="Consolas"/>
+              </a:rPr>
+              <a:t>  →  ["██", "█████", "███"]</a:t>
+            </a:r>
+          </a:p>
+        </p:txBody>
+      </p:sp>
+      <p:sp>
+        <p:nvSpPr>
+          <p:cNvPr id="14" name="TextBox 13"/>
+          <p:cNvSpPr txBox="1"/>
+          <p:nvPr/>
+        </p:nvSpPr>
+        <p:spPr>
+          <a:xfrm>
+            <a:off x="548640" y="6473952"/>
+            <a:ext cx="5486400" cy="274320"/>
+          </a:xfrm>
+          <a:prstGeom prst="rect">
+            <a:avLst/>
+          </a:prstGeom>
+          <a:noFill/>
+        </p:spPr>
+        <p:txBody>
+          <a:bodyPr wrap="square">
+            <a:spAutoFit/>
+          </a:bodyPr>
+          <a:lstStyle/>
+          <a:p>
+            <a:pPr algn="l"/>
+            <a:r>
+              <a:rPr sz="1000" b="0" i="0">
+                <a:solidFill>
+                  <a:srgbClr val="9AA5B1"/>
+                </a:solidFill>
+                <a:latin typeface="Calibri"/>
+              </a:rPr>
+              <a:t>Aula 2 · Pensamento Indutivo</a:t>
+            </a:r>
+          </a:p>
+        </p:txBody>
+      </p:sp>
+      <p:sp>
+        <p:nvSpPr>
+          <p:cNvPr id="15" name="TextBox 14"/>
+          <p:cNvSpPr txBox="1"/>
+          <p:nvPr/>
+        </p:nvSpPr>
+        <p:spPr>
+          <a:xfrm>
+            <a:off x="10271455" y="6473952"/>
+            <a:ext cx="1371600" cy="274320"/>
+          </a:xfrm>
+          <a:prstGeom prst="rect">
+            <a:avLst/>
+          </a:prstGeom>
+          <a:noFill/>
+        </p:spPr>
+        <p:txBody>
+          <a:bodyPr wrap="square">
+            <a:spAutoFit/>
+          </a:bodyPr>
+          <a:lstStyle/>
+          <a:p>
+            <a:pPr algn="l"/>
+            <a:r>
+              <a:rPr sz="1000" b="0" i="0">
+                <a:solidFill>
+                  <a:srgbClr val="9AA5B1"/>
+                </a:solidFill>
+                <a:latin typeface="Calibri"/>
+              </a:rPr>
+              <a:t>20 / 27</a:t>
+            </a:r>
+          </a:p>
+        </p:txBody>
+      </p:sp>
+    </p:spTree>
+  </p:cSld>
+  <p:clrMapOvr>
+    <a:masterClrMapping/>
+  </p:clrMapOvr>
+</p:sld>
+</file>
+
+<file path=ppt/slides/slide22.xml><?xml version="1.0" encoding="utf-8"?>
+<p:sld xmlns:a="http://schemas.openxmlformats.org/drawingml/2006/main" xmlns:p="http://schemas.openxmlformats.org/presentationml/2006/main" xmlns:r="http://schemas.openxmlformats.org/officeDocument/2006/relationships">
+  <p:cSld>
+    <p:spTree>
+      <p:nvGrpSpPr>
+        <p:cNvPr id="1" name=""/>
+        <p:cNvGrpSpPr/>
+        <p:nvPr/>
+      </p:nvGrpSpPr>
+      <p:grpSpPr/>
+      <p:sp>
+        <p:nvSpPr>
+          <p:cNvPr id="2" name="TextBox 1"/>
+          <p:cNvSpPr txBox="1"/>
+          <p:nvPr/>
+        </p:nvSpPr>
+        <p:spPr>
+          <a:xfrm>
+            <a:off x="548640" y="457200"/>
+            <a:ext cx="11094415" cy="320040"/>
+          </a:xfrm>
+          <a:prstGeom prst="rect">
+            <a:avLst/>
+          </a:prstGeom>
+          <a:noFill/>
+        </p:spPr>
+        <p:txBody>
+          <a:bodyPr wrap="square">
+            <a:spAutoFit/>
+          </a:bodyPr>
+          <a:lstStyle/>
+          <a:p>
+            <a:pPr algn="l"/>
+            <a:r>
+              <a:rPr sz="1200" b="1" i="0">
+                <a:solidFill>
+                  <a:srgbClr val="2C7A8C"/>
+                </a:solidFill>
+                <a:latin typeface="Calibri"/>
+              </a:rPr>
+              <a:t>TAREFA 6 DE 10  ·  2.6  ·  RESULTADO</a:t>
+            </a:r>
+          </a:p>
+        </p:txBody>
+      </p:sp>
+      <p:sp>
+        <p:nvSpPr>
+          <p:cNvPr id="3" name="TextBox 2"/>
+          <p:cNvSpPr txBox="1"/>
+          <p:nvPr/>
+        </p:nvSpPr>
+        <p:spPr>
+          <a:xfrm>
+            <a:off x="548640" y="800000"/>
+            <a:ext cx="11094415" cy="700000"/>
+          </a:xfrm>
+          <a:prstGeom prst="rect">
+            <a:avLst/>
+          </a:prstGeom>
+          <a:noFill/>
+        </p:spPr>
+        <p:txBody>
+          <a:bodyPr wrap="square">
+            <a:spAutoFit/>
+          </a:bodyPr>
+          <a:lstStyle/>
+          <a:p>
+            <a:pPr algn="l"/>
+            <a:r>
+              <a:rPr sz="2500" b="1" i="0">
+                <a:solidFill>
+                  <a:srgbClr val="1B3A5C"/>
+                </a:solidFill>
+                <a:latin typeface="Cambria"/>
+              </a:rPr>
+              <a:t>O que cada parte devolve?</a:t>
+            </a:r>
+          </a:p>
+        </p:txBody>
+      </p:sp>
+      <p:sp>
+        <p:nvSpPr>
+          <p:cNvPr id="8" name="Text 6"/>
+          <p:cNvSpPr/>
+          <p:nvPr/>
+        </p:nvSpPr>
+        <p:spPr>
+          <a:xfrm>
+            <a:off x="548640" y="1650000"/>
+            <a:ext cx="11094415" cy="274320"/>
+          </a:xfrm>
+          <a:prstGeom prst="rect">
+            <a:avLst/>
+          </a:prstGeom>
+          <a:noFill/>
+          <a:ln/>
+        </p:spPr>
+        <p:txBody>
+          <a:bodyPr wrap="square" lIns="0" tIns="0" rIns="0" bIns="0" rtlCol="0" anchor="ctr"/>
+          <a:lstStyle/>
+          <a:p>
+            <a:pPr indent="0" marL="0">
+              <a:buNone/>
+            </a:pPr>
+            <a:r>
+              <a:rPr lang="en-US" sz="1150" b="1" spc="120" kern="0" dirty="0">
+                <a:solidFill>
+                  <a:srgbClr val="44546A"/>
+                </a:solidFill>
+                <a:latin typeface="Calibri" pitchFamily="34" charset="0"/>
+                <a:ea typeface="Calibri" pitchFamily="34" charset="-122"/>
+                <a:cs typeface="Calibri" pitchFamily="34" charset="-120"/>
+              </a:rPr>
+              <a:t>EXEMPLO EM JULIA</a:t>
+            </a:r>
+            <a:endParaRPr lang="en-US" sz="1150" dirty="0"/>
+          </a:p>
+        </p:txBody>
+      </p:sp>
+      <p:sp>
+        <p:nvSpPr>
+          <p:cNvPr id="9" name="Shape 7"/>
+          <p:cNvSpPr/>
+          <p:nvPr/>
+        </p:nvSpPr>
+        <p:spPr>
+          <a:xfrm>
+            <a:off x="548640" y="2015760"/>
+            <a:ext cx="11094415" cy="1160400"/>
+          </a:xfrm>
+          <a:prstGeom prst="roundRect">
+            <a:avLst>
+              <a:gd name="adj" fmla="val 3721"/>
+            </a:avLst>
+          </a:prstGeom>
+          <a:solidFill>
+            <a:srgbClr val="12233B"/>
+          </a:solidFill>
+          <a:ln/>
+          <a:effectLst>
+            <a:outerShdw sx="100000" sy="100000" kx="0" ky="0" algn="bl" rotWithShape="0" blurRad="76200" dist="25400" dir="5400000">
+              <a:srgbClr val="1B3A5C">
+                <a:alpha val="15000"/>
+              </a:srgbClr>
+            </a:outerShdw>
+          </a:effectLst>
+        </p:spPr>
+        <p:txBody>
+          <a:bodyPr/>
+          <a:p/>
+        </p:txBody>
+      </p:sp>
+      <p:sp>
+        <p:nvSpPr>
+          <p:cNvPr id="10" name="Text 8"/>
+          <p:cNvSpPr/>
+          <p:nvPr/>
+        </p:nvSpPr>
+        <p:spPr>
+          <a:xfrm>
+            <a:off x="804672" y="2253504"/>
+            <a:ext cx="10582351" cy="684912"/>
+          </a:xfrm>
+          <a:prstGeom prst="rect">
+            <a:avLst/>
+          </a:prstGeom>
+          <a:noFill/>
+          <a:ln/>
+        </p:spPr>
+        <p:txBody>
+          <a:bodyPr wrap="square" lIns="0" tIns="0" rIns="0" bIns="0" rtlCol="0" anchor="t"/>
+          <a:lstStyle/>
+          <a:p>
+            <a:pPr indent="0" marL="0">
+              <a:lnSpc>
+                <a:spcPct val="130000"/>
+              </a:lnSpc>
+              <a:buNone/>
+            </a:pPr>
+            <a:r>
+              <a:rPr lang="en-US" sz="1300" dirty="0">
+                <a:solidFill>
+                  <a:srgbClr val="E9EEF3"/>
+                </a:solidFill>
+                <a:latin typeface="Consolas" pitchFamily="34" charset="0"/>
+                <a:ea typeface="Consolas" pitchFamily="34" charset="-122"/>
+                <a:cs typeface="Consolas" pitchFamily="34" charset="-120"/>
+              </a:rPr>
+              <a:t>respostas</a:t>
+            </a:r>
+            <a:pPr indent="0" marL="0">
+              <a:lnSpc>
+                <a:spcPct val="130000"/>
+              </a:lnSpc>
+              <a:buNone/>
+            </a:pPr>
+            <a:r>
+              <a:rPr lang="en-US" sz="1300" dirty="0">
+                <a:solidFill>
+                  <a:srgbClr val="E9EEF3"/>
+                </a:solidFill>
+                <a:latin typeface="Consolas" pitchFamily="34" charset="0"/>
+                <a:ea typeface="Consolas" pitchFamily="34" charset="-122"/>
+                <a:cs typeface="Consolas" pitchFamily="34" charset="-120"/>
+              </a:rPr>
+              <a:t> </a:t>
+            </a:r>
+            <a:pPr indent="0" marL="0">
+              <a:lnSpc>
+                <a:spcPct val="130000"/>
+              </a:lnSpc>
+              <a:buNone/>
+            </a:pPr>
+            <a:r>
+              <a:rPr lang="en-US" sz="1300" dirty="0">
+                <a:solidFill>
+                  <a:srgbClr val="E9EEF3"/>
+                </a:solidFill>
+                <a:latin typeface="Consolas" pitchFamily="34" charset="0"/>
+                <a:ea typeface="Consolas" pitchFamily="34" charset="-122"/>
+                <a:cs typeface="Consolas" pitchFamily="34" charset="-120"/>
+              </a:rPr>
+              <a:t>=</a:t>
+            </a:r>
+            <a:pPr indent="0" marL="0">
+              <a:lnSpc>
+                <a:spcPct val="130000"/>
+              </a:lnSpc>
+              <a:buNone/>
+            </a:pPr>
+            <a:r>
+              <a:rPr lang="en-US" sz="1300" dirty="0">
+                <a:solidFill>
+                  <a:srgbClr val="E9EEF3"/>
+                </a:solidFill>
+                <a:latin typeface="Consolas" pitchFamily="34" charset="0"/>
+                <a:ea typeface="Consolas" pitchFamily="34" charset="-122"/>
+                <a:cs typeface="Consolas" pitchFamily="34" charset="-120"/>
+              </a:rPr>
+              <a:t> </a:t>
+            </a:r>
+            <a:pPr indent="0" marL="0">
+              <a:lnSpc>
+                <a:spcPct val="130000"/>
+              </a:lnSpc>
+              <a:buNone/>
+            </a:pPr>
+            <a:r>
+              <a:rPr lang="en-US" sz="1300" dirty="0">
+                <a:solidFill>
+                  <a:srgbClr val="E9EEF3"/>
+                </a:solidFill>
+                <a:latin typeface="Consolas" pitchFamily="34" charset="0"/>
+                <a:ea typeface="Consolas" pitchFamily="34" charset="-122"/>
+                <a:cs typeface="Consolas" pitchFamily="34" charset="-120"/>
+              </a:rPr>
+              <a:t>[</a:t>
+            </a:r>
+            <a:pPr indent="0" marL="0">
+              <a:lnSpc>
+                <a:spcPct val="130000"/>
+              </a:lnSpc>
+              <a:buNone/>
+            </a:pPr>
+            <a:r>
+              <a:rPr lang="en-US" sz="1300" dirty="0">
+                <a:solidFill>
+                  <a:srgbClr val="8FD6C4"/>
+                </a:solidFill>
+                <a:latin typeface="Consolas" pitchFamily="34" charset="0"/>
+                <a:ea typeface="Consolas" pitchFamily="34" charset="-122"/>
+                <a:cs typeface="Consolas" pitchFamily="34" charset="-120"/>
+              </a:rPr>
+              <a:t>"A"</a:t>
+            </a:r>
+            <a:pPr indent="0" marL="0">
+              <a:lnSpc>
+                <a:spcPct val="130000"/>
+              </a:lnSpc>
+              <a:buNone/>
+            </a:pPr>
+            <a:r>
+              <a:rPr lang="en-US" sz="1300" dirty="0">
+                <a:solidFill>
+                  <a:srgbClr val="E9EEF3"/>
+                </a:solidFill>
+                <a:latin typeface="Consolas" pitchFamily="34" charset="0"/>
+                <a:ea typeface="Consolas" pitchFamily="34" charset="-122"/>
+                <a:cs typeface="Consolas" pitchFamily="34" charset="-120"/>
+              </a:rPr>
+              <a:t>,</a:t>
+            </a:r>
+            <a:pPr indent="0" marL="0">
+              <a:lnSpc>
+                <a:spcPct val="130000"/>
+              </a:lnSpc>
+              <a:buNone/>
+            </a:pPr>
+            <a:r>
+              <a:rPr lang="en-US" sz="1300" dirty="0">
+                <a:solidFill>
+                  <a:srgbClr val="8FD6C4"/>
+                </a:solidFill>
+                <a:latin typeface="Consolas" pitchFamily="34" charset="0"/>
+                <a:ea typeface="Consolas" pitchFamily="34" charset="-122"/>
+                <a:cs typeface="Consolas" pitchFamily="34" charset="-120"/>
+              </a:rPr>
+              <a:t>"B"</a:t>
+            </a:r>
+            <a:pPr indent="0" marL="0">
+              <a:lnSpc>
+                <a:spcPct val="130000"/>
+              </a:lnSpc>
+              <a:buNone/>
+            </a:pPr>
+            <a:r>
+              <a:rPr lang="en-US" sz="1300" dirty="0">
+                <a:solidFill>
+                  <a:srgbClr val="E9EEF3"/>
+                </a:solidFill>
+                <a:latin typeface="Consolas" pitchFamily="34" charset="0"/>
+                <a:ea typeface="Consolas" pitchFamily="34" charset="-122"/>
+                <a:cs typeface="Consolas" pitchFamily="34" charset="-120"/>
+              </a:rPr>
+              <a:t>,</a:t>
+            </a:r>
+            <a:pPr indent="0" marL="0">
+              <a:lnSpc>
+                <a:spcPct val="130000"/>
+              </a:lnSpc>
+              <a:buNone/>
+            </a:pPr>
+            <a:r>
+              <a:rPr lang="en-US" sz="1300" dirty="0">
+                <a:solidFill>
+                  <a:srgbClr val="8FD6C4"/>
+                </a:solidFill>
+                <a:latin typeface="Consolas" pitchFamily="34" charset="0"/>
+                <a:ea typeface="Consolas" pitchFamily="34" charset="-122"/>
+                <a:cs typeface="Consolas" pitchFamily="34" charset="-120"/>
+              </a:rPr>
+              <a:t>"A"</a:t>
+            </a:r>
+            <a:pPr indent="0" marL="0">
+              <a:lnSpc>
+                <a:spcPct val="130000"/>
+              </a:lnSpc>
+              <a:buNone/>
+            </a:pPr>
+            <a:r>
+              <a:rPr lang="en-US" sz="1300" dirty="0">
+                <a:solidFill>
+                  <a:srgbClr val="E9EEF3"/>
+                </a:solidFill>
+                <a:latin typeface="Consolas" pitchFamily="34" charset="0"/>
+                <a:ea typeface="Consolas" pitchFamily="34" charset="-122"/>
+                <a:cs typeface="Consolas" pitchFamily="34" charset="-120"/>
+              </a:rPr>
+              <a:t>,</a:t>
+            </a:r>
+            <a:pPr indent="0" marL="0">
+              <a:lnSpc>
+                <a:spcPct val="130000"/>
+              </a:lnSpc>
+              <a:buNone/>
+            </a:pPr>
+            <a:r>
+              <a:rPr lang="en-US" sz="1300" dirty="0">
+                <a:solidFill>
+                  <a:srgbClr val="8FD6C4"/>
+                </a:solidFill>
+                <a:latin typeface="Consolas" pitchFamily="34" charset="0"/>
+                <a:ea typeface="Consolas" pitchFamily="34" charset="-122"/>
+                <a:cs typeface="Consolas" pitchFamily="34" charset="-120"/>
+              </a:rPr>
+              <a:t>"C"</a:t>
+            </a:r>
+            <a:pPr indent="0" marL="0">
+              <a:lnSpc>
+                <a:spcPct val="130000"/>
+              </a:lnSpc>
+              <a:buNone/>
+            </a:pPr>
+            <a:r>
+              <a:rPr lang="en-US" sz="1300" dirty="0">
+                <a:solidFill>
+                  <a:srgbClr val="E9EEF3"/>
+                </a:solidFill>
+                <a:latin typeface="Consolas" pitchFamily="34" charset="0"/>
+                <a:ea typeface="Consolas" pitchFamily="34" charset="-122"/>
+                <a:cs typeface="Consolas" pitchFamily="34" charset="-120"/>
+              </a:rPr>
+              <a:t>,</a:t>
+            </a:r>
+            <a:pPr indent="0" marL="0">
+              <a:lnSpc>
+                <a:spcPct val="130000"/>
+              </a:lnSpc>
+              <a:buNone/>
+            </a:pPr>
+            <a:r>
+              <a:rPr lang="en-US" sz="1300" dirty="0">
+                <a:solidFill>
+                  <a:srgbClr val="8FD6C4"/>
+                </a:solidFill>
+                <a:latin typeface="Consolas" pitchFamily="34" charset="0"/>
+                <a:ea typeface="Consolas" pitchFamily="34" charset="-122"/>
+                <a:cs typeface="Consolas" pitchFamily="34" charset="-120"/>
+              </a:rPr>
+              <a:t>"A"</a:t>
+            </a:r>
+            <a:pPr indent="0" marL="0">
+              <a:lnSpc>
+                <a:spcPct val="130000"/>
+              </a:lnSpc>
+              <a:buNone/>
+            </a:pPr>
+            <a:r>
+              <a:rPr lang="en-US" sz="1300" dirty="0">
+                <a:solidFill>
+                  <a:srgbClr val="E9EEF3"/>
+                </a:solidFill>
+                <a:latin typeface="Consolas" pitchFamily="34" charset="0"/>
+                <a:ea typeface="Consolas" pitchFamily="34" charset="-122"/>
+                <a:cs typeface="Consolas" pitchFamily="34" charset="-120"/>
+              </a:rPr>
+              <a:t>]</a:t>
+            </a:r>
+            <a:endParaRPr lang="en-US" sz="1300" dirty="0"/>
+          </a:p>
+          <a:p>
+            <a:pPr indent="0" marL="0">
+              <a:lnSpc>
+                <a:spcPct val="130000"/>
+              </a:lnSpc>
+              <a:buNone/>
+            </a:pPr>
+            <a:r>
+              <a:rPr lang="en-US" sz="1300" dirty="0">
+                <a:solidFill>
+                  <a:srgbClr val="E9EEF3"/>
+                </a:solidFill>
+                <a:latin typeface="Consolas" pitchFamily="34" charset="0"/>
+                <a:ea typeface="Consolas" pitchFamily="34" charset="-122"/>
+                <a:cs typeface="Consolas" pitchFamily="34" charset="-120"/>
+              </a:rPr>
+              <a:t>contagem</a:t>
+            </a:r>
+            <a:pPr indent="0" marL="0">
+              <a:lnSpc>
+                <a:spcPct val="130000"/>
+              </a:lnSpc>
+              <a:buNone/>
+            </a:pPr>
+            <a:r>
+              <a:rPr lang="en-US" sz="1300" dirty="0">
+                <a:solidFill>
+                  <a:srgbClr val="E9EEF3"/>
+                </a:solidFill>
+                <a:latin typeface="Consolas" pitchFamily="34" charset="0"/>
+                <a:ea typeface="Consolas" pitchFamily="34" charset="-122"/>
+                <a:cs typeface="Consolas" pitchFamily="34" charset="-120"/>
+              </a:rPr>
+              <a:t> </a:t>
+            </a:r>
+            <a:pPr indent="0" marL="0">
+              <a:lnSpc>
+                <a:spcPct val="130000"/>
+              </a:lnSpc>
+              <a:buNone/>
+            </a:pPr>
+            <a:r>
+              <a:rPr lang="en-US" sz="1300" dirty="0">
+                <a:solidFill>
+                  <a:srgbClr val="E9EEF3"/>
+                </a:solidFill>
+                <a:latin typeface="Consolas" pitchFamily="34" charset="0"/>
+                <a:ea typeface="Consolas" pitchFamily="34" charset="-122"/>
+                <a:cs typeface="Consolas" pitchFamily="34" charset="-120"/>
+              </a:rPr>
+              <a:t>=</a:t>
+            </a:r>
+            <a:pPr indent="0" marL="0">
+              <a:lnSpc>
+                <a:spcPct val="130000"/>
+              </a:lnSpc>
+              <a:buNone/>
+            </a:pPr>
+            <a:r>
+              <a:rPr lang="en-US" sz="1300" dirty="0">
+                <a:solidFill>
+                  <a:srgbClr val="E9EEF3"/>
+                </a:solidFill>
+                <a:latin typeface="Consolas" pitchFamily="34" charset="0"/>
+                <a:ea typeface="Consolas" pitchFamily="34" charset="-122"/>
+                <a:cs typeface="Consolas" pitchFamily="34" charset="-120"/>
+              </a:rPr>
+              <a:t> </a:t>
+            </a:r>
+            <a:pPr indent="0" marL="0">
+              <a:lnSpc>
+                <a:spcPct val="130000"/>
+              </a:lnSpc>
+              <a:buNone/>
+            </a:pPr>
+            <a:r>
+              <a:rPr lang="en-US" sz="1300" dirty="0">
+                <a:solidFill>
+                  <a:srgbClr val="E9EEF3"/>
+                </a:solidFill>
+                <a:latin typeface="Consolas" pitchFamily="34" charset="0"/>
+                <a:ea typeface="Consolas" pitchFamily="34" charset="-122"/>
+                <a:cs typeface="Consolas" pitchFamily="34" charset="-120"/>
+              </a:rPr>
+              <a:t>Dict</a:t>
+            </a:r>
+            <a:pPr indent="0" marL="0">
+              <a:lnSpc>
+                <a:spcPct val="130000"/>
+              </a:lnSpc>
+              <a:buNone/>
+            </a:pPr>
+            <a:r>
+              <a:rPr lang="en-US" sz="1300" dirty="0">
+                <a:solidFill>
+                  <a:srgbClr val="E9EEF3"/>
+                </a:solidFill>
+                <a:latin typeface="Consolas" pitchFamily="34" charset="0"/>
+                <a:ea typeface="Consolas" pitchFamily="34" charset="-122"/>
+                <a:cs typeface="Consolas" pitchFamily="34" charset="-120"/>
+              </a:rPr>
+              <a:t>(</a:t>
+            </a:r>
+            <a:pPr indent="0" marL="0">
+              <a:lnSpc>
+                <a:spcPct val="130000"/>
+              </a:lnSpc>
+              <a:buNone/>
+            </a:pPr>
+            <a:r>
+              <a:rPr lang="en-US" sz="1300" dirty="0">
+                <a:solidFill>
+                  <a:srgbClr val="E9EEF3"/>
+                </a:solidFill>
+                <a:latin typeface="Consolas" pitchFamily="34" charset="0"/>
+                <a:ea typeface="Consolas" pitchFamily="34" charset="-122"/>
+                <a:cs typeface="Consolas" pitchFamily="34" charset="-120"/>
+              </a:rPr>
+              <a:t>r</a:t>
+            </a:r>
+            <a:pPr indent="0" marL="0">
+              <a:lnSpc>
+                <a:spcPct val="130000"/>
+              </a:lnSpc>
+              <a:buNone/>
+            </a:pPr>
+            <a:r>
+              <a:rPr lang="en-US" sz="1300" dirty="0">
+                <a:solidFill>
+                  <a:srgbClr val="E9EEF3"/>
+                </a:solidFill>
+                <a:latin typeface="Consolas" pitchFamily="34" charset="0"/>
+                <a:ea typeface="Consolas" pitchFamily="34" charset="-122"/>
+                <a:cs typeface="Consolas" pitchFamily="34" charset="-120"/>
+              </a:rPr>
+              <a:t> </a:t>
+            </a:r>
+            <a:pPr indent="0" marL="0">
+              <a:lnSpc>
+                <a:spcPct val="130000"/>
+              </a:lnSpc>
+              <a:buNone/>
+            </a:pPr>
+            <a:r>
+              <a:rPr lang="en-US" sz="1300" dirty="0">
+                <a:solidFill>
+                  <a:srgbClr val="E9EEF3"/>
+                </a:solidFill>
+                <a:latin typeface="Consolas" pitchFamily="34" charset="0"/>
+                <a:ea typeface="Consolas" pitchFamily="34" charset="-122"/>
+                <a:cs typeface="Consolas" pitchFamily="34" charset="-120"/>
+              </a:rPr>
+              <a:t>=</a:t>
+            </a:r>
+            <a:pPr indent="0" marL="0">
+              <a:lnSpc>
+                <a:spcPct val="130000"/>
+              </a:lnSpc>
+              <a:buNone/>
+            </a:pPr>
+            <a:r>
+              <a:rPr lang="en-US" sz="1300" dirty="0">
+                <a:solidFill>
+                  <a:srgbClr val="E9EEF3"/>
+                </a:solidFill>
+                <a:latin typeface="Consolas" pitchFamily="34" charset="0"/>
+                <a:ea typeface="Consolas" pitchFamily="34" charset="-122"/>
+                <a:cs typeface="Consolas" pitchFamily="34" charset="-120"/>
+              </a:rPr>
+              <a:t>&gt;</a:t>
+            </a:r>
+            <a:pPr indent="0" marL="0">
+              <a:lnSpc>
+                <a:spcPct val="130000"/>
+              </a:lnSpc>
+              <a:buNone/>
+            </a:pPr>
+            <a:r>
+              <a:rPr lang="en-US" sz="1300" dirty="0">
+                <a:solidFill>
+                  <a:srgbClr val="E9EEF3"/>
+                </a:solidFill>
+                <a:latin typeface="Consolas" pitchFamily="34" charset="0"/>
+                <a:ea typeface="Consolas" pitchFamily="34" charset="-122"/>
+                <a:cs typeface="Consolas" pitchFamily="34" charset="-120"/>
+              </a:rPr>
+              <a:t> </a:t>
+            </a:r>
+            <a:pPr indent="0" marL="0">
+              <a:lnSpc>
+                <a:spcPct val="130000"/>
+              </a:lnSpc>
+              <a:buNone/>
+            </a:pPr>
+            <a:r>
+              <a:rPr lang="en-US" sz="1300" dirty="0">
+                <a:solidFill>
+                  <a:srgbClr val="E9EEF3"/>
+                </a:solidFill>
+                <a:latin typeface="Consolas" pitchFamily="34" charset="0"/>
+                <a:ea typeface="Consolas" pitchFamily="34" charset="-122"/>
+                <a:cs typeface="Consolas" pitchFamily="34" charset="-120"/>
+              </a:rPr>
+              <a:t>count</a:t>
+            </a:r>
+            <a:pPr indent="0" marL="0">
+              <a:lnSpc>
+                <a:spcPct val="130000"/>
+              </a:lnSpc>
+              <a:buNone/>
+            </a:pPr>
+            <a:r>
+              <a:rPr lang="en-US" sz="1300" dirty="0">
+                <a:solidFill>
+                  <a:srgbClr val="E9EEF3"/>
+                </a:solidFill>
+                <a:latin typeface="Consolas" pitchFamily="34" charset="0"/>
+                <a:ea typeface="Consolas" pitchFamily="34" charset="-122"/>
+                <a:cs typeface="Consolas" pitchFamily="34" charset="-120"/>
+              </a:rPr>
+              <a:t>(</a:t>
+            </a:r>
+            <a:pPr indent="0" marL="0">
+              <a:lnSpc>
+                <a:spcPct val="130000"/>
+              </a:lnSpc>
+              <a:buNone/>
+            </a:pPr>
+            <a:r>
+              <a:rPr lang="en-US" sz="1300" dirty="0">
+                <a:solidFill>
+                  <a:srgbClr val="E9EEF3"/>
+                </a:solidFill>
+                <a:latin typeface="Consolas" pitchFamily="34" charset="0"/>
+                <a:ea typeface="Consolas" pitchFamily="34" charset="-122"/>
+                <a:cs typeface="Consolas" pitchFamily="34" charset="-120"/>
+              </a:rPr>
+              <a:t>=</a:t>
+            </a:r>
+            <a:pPr indent="0" marL="0">
+              <a:lnSpc>
+                <a:spcPct val="130000"/>
+              </a:lnSpc>
+              <a:buNone/>
+            </a:pPr>
+            <a:r>
+              <a:rPr lang="en-US" sz="1300" dirty="0">
+                <a:solidFill>
+                  <a:srgbClr val="E9EEF3"/>
+                </a:solidFill>
+                <a:latin typeface="Consolas" pitchFamily="34" charset="0"/>
+                <a:ea typeface="Consolas" pitchFamily="34" charset="-122"/>
+                <a:cs typeface="Consolas" pitchFamily="34" charset="-120"/>
+              </a:rPr>
+              <a:t>=</a:t>
+            </a:r>
+            <a:pPr indent="0" marL="0">
+              <a:lnSpc>
+                <a:spcPct val="130000"/>
+              </a:lnSpc>
+              <a:buNone/>
+            </a:pPr>
+            <a:r>
+              <a:rPr lang="en-US" sz="1300" dirty="0">
+                <a:solidFill>
+                  <a:srgbClr val="E9EEF3"/>
+                </a:solidFill>
+                <a:latin typeface="Consolas" pitchFamily="34" charset="0"/>
+                <a:ea typeface="Consolas" pitchFamily="34" charset="-122"/>
+                <a:cs typeface="Consolas" pitchFamily="34" charset="-120"/>
+              </a:rPr>
+              <a:t>(</a:t>
+            </a:r>
+            <a:pPr indent="0" marL="0">
+              <a:lnSpc>
+                <a:spcPct val="130000"/>
+              </a:lnSpc>
+              <a:buNone/>
+            </a:pPr>
+            <a:r>
+              <a:rPr lang="en-US" sz="1300" dirty="0">
+                <a:solidFill>
+                  <a:srgbClr val="E9EEF3"/>
+                </a:solidFill>
+                <a:latin typeface="Consolas" pitchFamily="34" charset="0"/>
+                <a:ea typeface="Consolas" pitchFamily="34" charset="-122"/>
+                <a:cs typeface="Consolas" pitchFamily="34" charset="-120"/>
+              </a:rPr>
+              <a:t>r</a:t>
+            </a:r>
+            <a:pPr indent="0" marL="0">
+              <a:lnSpc>
+                <a:spcPct val="130000"/>
+              </a:lnSpc>
+              <a:buNone/>
+            </a:pPr>
+            <a:r>
+              <a:rPr lang="en-US" sz="1300" dirty="0">
+                <a:solidFill>
+                  <a:srgbClr val="E9EEF3"/>
+                </a:solidFill>
+                <a:latin typeface="Consolas" pitchFamily="34" charset="0"/>
+                <a:ea typeface="Consolas" pitchFamily="34" charset="-122"/>
+                <a:cs typeface="Consolas" pitchFamily="34" charset="-120"/>
+              </a:rPr>
+              <a:t>)</a:t>
+            </a:r>
+            <a:pPr indent="0" marL="0">
+              <a:lnSpc>
+                <a:spcPct val="130000"/>
+              </a:lnSpc>
+              <a:buNone/>
+            </a:pPr>
+            <a:r>
+              <a:rPr lang="en-US" sz="1300" dirty="0">
+                <a:solidFill>
+                  <a:srgbClr val="E9EEF3"/>
+                </a:solidFill>
+                <a:latin typeface="Consolas" pitchFamily="34" charset="0"/>
+                <a:ea typeface="Consolas" pitchFamily="34" charset="-122"/>
+                <a:cs typeface="Consolas" pitchFamily="34" charset="-120"/>
+              </a:rPr>
+              <a:t>,</a:t>
+            </a:r>
+            <a:pPr indent="0" marL="0">
+              <a:lnSpc>
+                <a:spcPct val="130000"/>
+              </a:lnSpc>
+              <a:buNone/>
+            </a:pPr>
+            <a:r>
+              <a:rPr lang="en-US" sz="1300" dirty="0">
+                <a:solidFill>
+                  <a:srgbClr val="E9EEF3"/>
+                </a:solidFill>
+                <a:latin typeface="Consolas" pitchFamily="34" charset="0"/>
+                <a:ea typeface="Consolas" pitchFamily="34" charset="-122"/>
+                <a:cs typeface="Consolas" pitchFamily="34" charset="-120"/>
+              </a:rPr>
+              <a:t> </a:t>
+            </a:r>
+            <a:pPr indent="0" marL="0">
+              <a:lnSpc>
+                <a:spcPct val="130000"/>
+              </a:lnSpc>
+              <a:buNone/>
+            </a:pPr>
+            <a:r>
+              <a:rPr lang="en-US" sz="1300" dirty="0">
+                <a:solidFill>
+                  <a:srgbClr val="E9EEF3"/>
+                </a:solidFill>
+                <a:latin typeface="Consolas" pitchFamily="34" charset="0"/>
+                <a:ea typeface="Consolas" pitchFamily="34" charset="-122"/>
+                <a:cs typeface="Consolas" pitchFamily="34" charset="-120"/>
+              </a:rPr>
+              <a:t>respostas</a:t>
+            </a:r>
+            <a:pPr indent="0" marL="0">
+              <a:lnSpc>
+                <a:spcPct val="130000"/>
+              </a:lnSpc>
+              <a:buNone/>
+            </a:pPr>
+            <a:r>
+              <a:rPr lang="en-US" sz="1300" dirty="0">
+                <a:solidFill>
+                  <a:srgbClr val="E9EEF3"/>
+                </a:solidFill>
+                <a:latin typeface="Consolas" pitchFamily="34" charset="0"/>
+                <a:ea typeface="Consolas" pitchFamily="34" charset="-122"/>
+                <a:cs typeface="Consolas" pitchFamily="34" charset="-120"/>
+              </a:rPr>
+              <a:t>)</a:t>
+            </a:r>
+            <a:pPr indent="0" marL="0">
+              <a:lnSpc>
+                <a:spcPct val="130000"/>
+              </a:lnSpc>
+              <a:buNone/>
+            </a:pPr>
+            <a:r>
+              <a:rPr lang="en-US" sz="1300" dirty="0">
+                <a:solidFill>
+                  <a:srgbClr val="E9EEF3"/>
+                </a:solidFill>
+                <a:latin typeface="Consolas" pitchFamily="34" charset="0"/>
+                <a:ea typeface="Consolas" pitchFamily="34" charset="-122"/>
+                <a:cs typeface="Consolas" pitchFamily="34" charset="-120"/>
+              </a:rPr>
+              <a:t> </a:t>
+            </a:r>
+            <a:pPr indent="0" marL="0">
+              <a:lnSpc>
+                <a:spcPct val="130000"/>
+              </a:lnSpc>
+              <a:buNone/>
+            </a:pPr>
+            <a:r>
+              <a:rPr lang="en-US" sz="1300" b="1" dirty="0">
+                <a:solidFill>
+                  <a:srgbClr val="E8963C"/>
+                </a:solidFill>
+                <a:latin typeface="Consolas" pitchFamily="34" charset="0"/>
+                <a:ea typeface="Consolas" pitchFamily="34" charset="-122"/>
+                <a:cs typeface="Consolas" pitchFamily="34" charset="-120"/>
+              </a:rPr>
+              <a:t>for</a:t>
+            </a:r>
+            <a:pPr indent="0" marL="0">
+              <a:lnSpc>
+                <a:spcPct val="130000"/>
+              </a:lnSpc>
+              <a:buNone/>
+            </a:pPr>
+            <a:r>
+              <a:rPr lang="en-US" sz="1300" dirty="0">
+                <a:solidFill>
+                  <a:srgbClr val="E9EEF3"/>
+                </a:solidFill>
+                <a:latin typeface="Consolas" pitchFamily="34" charset="0"/>
+                <a:ea typeface="Consolas" pitchFamily="34" charset="-122"/>
+                <a:cs typeface="Consolas" pitchFamily="34" charset="-120"/>
+              </a:rPr>
+              <a:t> </a:t>
+            </a:r>
+            <a:pPr indent="0" marL="0">
+              <a:lnSpc>
+                <a:spcPct val="130000"/>
+              </a:lnSpc>
+              <a:buNone/>
+            </a:pPr>
+            <a:r>
+              <a:rPr lang="en-US" sz="1300" dirty="0">
+                <a:solidFill>
+                  <a:srgbClr val="E9EEF3"/>
+                </a:solidFill>
+                <a:latin typeface="Consolas" pitchFamily="34" charset="0"/>
+                <a:ea typeface="Consolas" pitchFamily="34" charset="-122"/>
+                <a:cs typeface="Consolas" pitchFamily="34" charset="-120"/>
+              </a:rPr>
+              <a:t>r</a:t>
+            </a:r>
+            <a:pPr indent="0" marL="0">
+              <a:lnSpc>
+                <a:spcPct val="130000"/>
+              </a:lnSpc>
+              <a:buNone/>
+            </a:pPr>
+            <a:r>
+              <a:rPr lang="en-US" sz="1300" dirty="0">
+                <a:solidFill>
+                  <a:srgbClr val="E9EEF3"/>
+                </a:solidFill>
+                <a:latin typeface="Consolas" pitchFamily="34" charset="0"/>
+                <a:ea typeface="Consolas" pitchFamily="34" charset="-122"/>
+                <a:cs typeface="Consolas" pitchFamily="34" charset="-120"/>
+              </a:rPr>
+              <a:t> </a:t>
+            </a:r>
+            <a:pPr indent="0" marL="0">
+              <a:lnSpc>
+                <a:spcPct val="130000"/>
+              </a:lnSpc>
+              <a:buNone/>
+            </a:pPr>
+            <a:r>
+              <a:rPr lang="en-US" sz="1300" b="1" dirty="0">
+                <a:solidFill>
+                  <a:srgbClr val="E8963C"/>
+                </a:solidFill>
+                <a:latin typeface="Consolas" pitchFamily="34" charset="0"/>
+                <a:ea typeface="Consolas" pitchFamily="34" charset="-122"/>
+                <a:cs typeface="Consolas" pitchFamily="34" charset="-120"/>
+              </a:rPr>
+              <a:t>in</a:t>
+            </a:r>
+            <a:pPr indent="0" marL="0">
+              <a:lnSpc>
+                <a:spcPct val="130000"/>
+              </a:lnSpc>
+              <a:buNone/>
+            </a:pPr>
+            <a:r>
+              <a:rPr lang="en-US" sz="1300" dirty="0">
+                <a:solidFill>
+                  <a:srgbClr val="E9EEF3"/>
+                </a:solidFill>
+                <a:latin typeface="Consolas" pitchFamily="34" charset="0"/>
+                <a:ea typeface="Consolas" pitchFamily="34" charset="-122"/>
+                <a:cs typeface="Consolas" pitchFamily="34" charset="-120"/>
+              </a:rPr>
+              <a:t> </a:t>
+            </a:r>
+            <a:pPr indent="0" marL="0">
+              <a:lnSpc>
+                <a:spcPct val="130000"/>
+              </a:lnSpc>
+              <a:buNone/>
+            </a:pPr>
+            <a:r>
+              <a:rPr lang="en-US" sz="1300" dirty="0">
+                <a:solidFill>
+                  <a:srgbClr val="E9EEF3"/>
+                </a:solidFill>
+                <a:latin typeface="Consolas" pitchFamily="34" charset="0"/>
+                <a:ea typeface="Consolas" pitchFamily="34" charset="-122"/>
+                <a:cs typeface="Consolas" pitchFamily="34" charset="-120"/>
+              </a:rPr>
+              <a:t>unique</a:t>
+            </a:r>
+            <a:pPr indent="0" marL="0">
+              <a:lnSpc>
+                <a:spcPct val="130000"/>
+              </a:lnSpc>
+              <a:buNone/>
+            </a:pPr>
+            <a:r>
+              <a:rPr lang="en-US" sz="1300" dirty="0">
+                <a:solidFill>
+                  <a:srgbClr val="E9EEF3"/>
+                </a:solidFill>
+                <a:latin typeface="Consolas" pitchFamily="34" charset="0"/>
+                <a:ea typeface="Consolas" pitchFamily="34" charset="-122"/>
+                <a:cs typeface="Consolas" pitchFamily="34" charset="-120"/>
+              </a:rPr>
+              <a:t>(</a:t>
+            </a:r>
+            <a:pPr indent="0" marL="0">
+              <a:lnSpc>
+                <a:spcPct val="130000"/>
+              </a:lnSpc>
+              <a:buNone/>
+            </a:pPr>
+            <a:r>
+              <a:rPr lang="en-US" sz="1300" dirty="0">
+                <a:solidFill>
+                  <a:srgbClr val="E9EEF3"/>
+                </a:solidFill>
+                <a:latin typeface="Consolas" pitchFamily="34" charset="0"/>
+                <a:ea typeface="Consolas" pitchFamily="34" charset="-122"/>
+                <a:cs typeface="Consolas" pitchFamily="34" charset="-120"/>
+              </a:rPr>
+              <a:t>respostas</a:t>
+            </a:r>
+            <a:pPr indent="0" marL="0">
+              <a:lnSpc>
+                <a:spcPct val="130000"/>
+              </a:lnSpc>
+              <a:buNone/>
+            </a:pPr>
+            <a:r>
+              <a:rPr lang="en-US" sz="1300" dirty="0">
+                <a:solidFill>
+                  <a:srgbClr val="E9EEF3"/>
+                </a:solidFill>
+                <a:latin typeface="Consolas" pitchFamily="34" charset="0"/>
+                <a:ea typeface="Consolas" pitchFamily="34" charset="-122"/>
+                <a:cs typeface="Consolas" pitchFamily="34" charset="-120"/>
+              </a:rPr>
+              <a:t>)</a:t>
+            </a:r>
+            <a:pPr indent="0" marL="0">
+              <a:lnSpc>
+                <a:spcPct val="130000"/>
+              </a:lnSpc>
+              <a:buNone/>
+            </a:pPr>
+            <a:r>
+              <a:rPr lang="en-US" sz="1300" dirty="0">
+                <a:solidFill>
+                  <a:srgbClr val="E9EEF3"/>
+                </a:solidFill>
+                <a:latin typeface="Consolas" pitchFamily="34" charset="0"/>
+                <a:ea typeface="Consolas" pitchFamily="34" charset="-122"/>
+                <a:cs typeface="Consolas" pitchFamily="34" charset="-120"/>
+              </a:rPr>
+              <a:t>)</a:t>
+            </a:r>
+            <a:endParaRPr lang="en-US" sz="1300" dirty="0"/>
+          </a:p>
+        </p:txBody>
+      </p:sp>
+      <p:sp>
+        <p:nvSpPr>
+          <p:cNvPr id="11" name="TextBox 10"/>
+          <p:cNvSpPr txBox="1"/>
+          <p:nvPr/>
+        </p:nvSpPr>
+        <p:spPr>
+          <a:xfrm>
+            <a:off x="548640" y="3176160"/>
+            <a:ext cx="11094415" cy="274320"/>
+          </a:xfrm>
+          <a:prstGeom prst="rect">
+            <a:avLst/>
+          </a:prstGeom>
+          <a:noFill/>
+        </p:spPr>
+        <p:txBody>
+          <a:bodyPr wrap="square">
+            <a:spAutoFit/>
+          </a:bodyPr>
+          <a:lstStyle/>
+          <a:p>
+            <a:pPr algn="l"/>
+            <a:r>
+              <a:rPr sz="1100" b="1" i="0">
+                <a:solidFill>
+                  <a:srgbClr val="2C7A8C"/>
+                </a:solidFill>
+                <a:latin typeface="Calibri"/>
+              </a:rPr>
+              <a:t>RESULTADO DE CADA PARTE</a:t>
+            </a:r>
+          </a:p>
+        </p:txBody>
+      </p:sp>
+      <p:sp>
+        <p:nvSpPr>
+          <p:cNvPr id="12" name="Rounded Rectangle 11"/>
+          <p:cNvSpPr/>
+          <p:nvPr/>
+        </p:nvSpPr>
+        <p:spPr>
+          <a:xfrm>
+            <a:off x="548640" y="3496200"/>
+            <a:ext cx="11094415" cy="1554480"/>
+          </a:xfrm>
+          <a:prstGeom prst="roundRect">
+            <a:avLst>
+              <a:gd name="adj" fmla="val 5882"/>
+            </a:avLst>
+          </a:prstGeom>
+          <a:solidFill>
+            <a:srgbClr val="E9F2F3"/>
+          </a:solidFill>
+          <a:ln>
+            <a:noFill/>
+          </a:ln>
+          <a:effectLst/>
+        </p:spPr>
+        <p:style>
+          <a:lnRef idx="1">
+            <a:schemeClr val="accent1"/>
+          </a:lnRef>
+          <a:fillRef idx="3">
+            <a:schemeClr val="accent1"/>
+          </a:fillRef>
+          <a:effectRef idx="2">
+            <a:schemeClr val="accent1"/>
+          </a:effectRef>
+          <a:fontRef idx="minor">
+            <a:schemeClr val="lt1"/>
+          </a:fontRef>
+        </p:style>
+        <p:txBody>
+          <a:bodyPr rtlCol="0" anchor="ctr"/>
+          <a:lstStyle/>
+          <a:p>
+            <a:pPr algn="ctr"/>
+          </a:p>
+        </p:txBody>
+      </p:sp>
+      <p:sp>
+        <p:nvSpPr>
+          <p:cNvPr id="13" name="TextBox 12"/>
+          <p:cNvSpPr txBox="1"/>
+          <p:nvPr/>
+        </p:nvSpPr>
+        <p:spPr>
+          <a:xfrm>
+            <a:off x="822960" y="3633360"/>
+            <a:ext cx="10545775" cy="1417320"/>
+          </a:xfrm>
+          <a:prstGeom prst="rect">
+            <a:avLst/>
+          </a:prstGeom>
+          <a:noFill/>
+        </p:spPr>
+        <p:txBody>
+          <a:bodyPr wrap="square">
+            <a:spAutoFit/>
+          </a:bodyPr>
+          <a:lstStyle/>
+          <a:p>
+            <a:pPr>
+              <a:lnSpc>
+                <a:spcPct val="125000"/>
+              </a:lnSpc>
+            </a:pPr>
+            <a:r>
+              <a:rPr sz="1250" b="1">
+                <a:solidFill>
+                  <a:srgbClr val="2C7A8C"/>
+                </a:solidFill>
+                <a:latin typeface="Consolas"/>
+              </a:rPr>
+              <a:t>respostas</a:t>
+            </a:r>
+            <a:r>
+              <a:rPr sz="1250" b="0">
+                <a:solidFill>
+                  <a:srgbClr val="1B2733"/>
+                </a:solidFill>
+                <a:latin typeface="Consolas"/>
+              </a:rPr>
+              <a:t>  →  ["A", "B", "A", "C", "A"]</a:t>
+            </a:r>
+          </a:p>
+          <a:p>
+            <a:pPr>
+              <a:lnSpc>
+                <a:spcPct val="125000"/>
+              </a:lnSpc>
+            </a:pPr>
+            <a:r>
+              <a:rPr sz="1250" b="1">
+                <a:solidFill>
+                  <a:srgbClr val="2C7A8C"/>
+                </a:solidFill>
+                <a:latin typeface="Consolas"/>
+              </a:rPr>
+              <a:t>unique(respostas)</a:t>
+            </a:r>
+            <a:r>
+              <a:rPr sz="1250" b="0">
+                <a:solidFill>
+                  <a:srgbClr val="1B2733"/>
+                </a:solidFill>
+                <a:latin typeface="Consolas"/>
+              </a:rPr>
+              <a:t>  →  ["A", "B", "C"]  (valores distintos, na ordem em que aparecem)</a:t>
+            </a:r>
+          </a:p>
+          <a:p>
+            <a:pPr>
+              <a:lnSpc>
+                <a:spcPct val="125000"/>
+              </a:lnSpc>
+            </a:pPr>
+            <a:r>
+              <a:rPr sz="1250" b="1">
+                <a:solidFill>
+                  <a:srgbClr val="2C7A8C"/>
+                </a:solidFill>
+                <a:latin typeface="Consolas"/>
+              </a:rPr>
+              <a:t>count(==(r), respostas)</a:t>
+            </a:r>
+            <a:r>
+              <a:rPr sz="1250" b="0">
+                <a:solidFill>
+                  <a:srgbClr val="1B2733"/>
+                </a:solidFill>
+                <a:latin typeface="Consolas"/>
+              </a:rPr>
+              <a:t>  →  para cada r: A → 3, B → 1, C → 1</a:t>
+            </a:r>
+          </a:p>
+          <a:p>
+            <a:pPr>
+              <a:lnSpc>
+                <a:spcPct val="125000"/>
+              </a:lnSpc>
+            </a:pPr>
+            <a:r>
+              <a:rPr sz="1250" b="1">
+                <a:solidFill>
+                  <a:srgbClr val="2C7A8C"/>
+                </a:solidFill>
+                <a:latin typeface="Consolas"/>
+              </a:rPr>
+              <a:t>contagem</a:t>
+            </a:r>
+            <a:r>
+              <a:rPr sz="1250" b="0">
+                <a:solidFill>
+                  <a:srgbClr val="1B2733"/>
+                </a:solidFill>
+                <a:latin typeface="Consolas"/>
+              </a:rPr>
+              <a:t>  →  Dict("A" =&gt; 3, "B" =&gt; 1, "C" =&gt; 1)</a:t>
+            </a:r>
+          </a:p>
+        </p:txBody>
+      </p:sp>
+      <p:sp>
+        <p:nvSpPr>
+          <p:cNvPr id="14" name="TextBox 13"/>
+          <p:cNvSpPr txBox="1"/>
+          <p:nvPr/>
+        </p:nvSpPr>
+        <p:spPr>
+          <a:xfrm>
+            <a:off x="548640" y="6473952"/>
+            <a:ext cx="5486400" cy="274320"/>
+          </a:xfrm>
+          <a:prstGeom prst="rect">
+            <a:avLst/>
+          </a:prstGeom>
+          <a:noFill/>
+        </p:spPr>
+        <p:txBody>
+          <a:bodyPr wrap="square">
+            <a:spAutoFit/>
+          </a:bodyPr>
+          <a:lstStyle/>
+          <a:p>
+            <a:pPr algn="l"/>
+            <a:r>
+              <a:rPr sz="1000" b="0" i="0">
+                <a:solidFill>
+                  <a:srgbClr val="9AA5B1"/>
+                </a:solidFill>
+                <a:latin typeface="Calibri"/>
+              </a:rPr>
+              <a:t>Aula 2 · Pensamento Indutivo</a:t>
+            </a:r>
+          </a:p>
+        </p:txBody>
+      </p:sp>
+      <p:sp>
+        <p:nvSpPr>
+          <p:cNvPr id="15" name="TextBox 14"/>
+          <p:cNvSpPr txBox="1"/>
+          <p:nvPr/>
+        </p:nvSpPr>
+        <p:spPr>
+          <a:xfrm>
+            <a:off x="10271455" y="6473952"/>
+            <a:ext cx="1371600" cy="274320"/>
+          </a:xfrm>
+          <a:prstGeom prst="rect">
+            <a:avLst/>
+          </a:prstGeom>
+          <a:noFill/>
+        </p:spPr>
+        <p:txBody>
+          <a:bodyPr wrap="square">
+            <a:spAutoFit/>
+          </a:bodyPr>
+          <a:lstStyle/>
+          <a:p>
+            <a:pPr algn="l"/>
+            <a:r>
+              <a:rPr sz="1000" b="0" i="0">
+                <a:solidFill>
+                  <a:srgbClr val="9AA5B1"/>
+                </a:solidFill>
+                <a:latin typeface="Calibri"/>
+              </a:rPr>
+              <a:t>18 / 27</a:t>
+            </a:r>
+          </a:p>
+        </p:txBody>
+      </p:sp>
+    </p:spTree>
+  </p:cSld>
+  <p:clrMapOvr>
+    <a:masterClrMapping/>
+  </p:clrMapOvr>
+</p:sld>
+</file>
+
+<file path=ppt/slides/slide23.xml><?xml version="1.0" encoding="utf-8"?>
+<p:sld xmlns:a="http://schemas.openxmlformats.org/drawingml/2006/main" xmlns:p="http://schemas.openxmlformats.org/presentationml/2006/main" xmlns:r="http://schemas.openxmlformats.org/officeDocument/2006/relationships">
+  <p:cSld>
+    <p:spTree>
+      <p:nvGrpSpPr>
+        <p:cNvPr id="1" name=""/>
+        <p:cNvGrpSpPr/>
+        <p:nvPr/>
+      </p:nvGrpSpPr>
+      <p:grpSpPr/>
+      <p:sp>
+        <p:nvSpPr>
+          <p:cNvPr id="2" name="TextBox 1"/>
+          <p:cNvSpPr txBox="1"/>
+          <p:nvPr/>
+        </p:nvSpPr>
+        <p:spPr>
+          <a:xfrm>
+            <a:off x="548640" y="457200"/>
+            <a:ext cx="11094415" cy="320040"/>
+          </a:xfrm>
+          <a:prstGeom prst="rect">
+            <a:avLst/>
+          </a:prstGeom>
+          <a:noFill/>
+        </p:spPr>
+        <p:txBody>
+          <a:bodyPr wrap="square">
+            <a:spAutoFit/>
+          </a:bodyPr>
+          <a:lstStyle/>
+          <a:p>
+            <a:pPr algn="l"/>
+            <a:r>
+              <a:rPr sz="1200" b="1" i="0">
+                <a:solidFill>
+                  <a:srgbClr val="2C7A8C"/>
+                </a:solidFill>
+                <a:latin typeface="Calibri"/>
+              </a:rPr>
+              <a:t>TAREFA 5 DE 10  ·  2.5  ·  RESULTADO</a:t>
+            </a:r>
+          </a:p>
+        </p:txBody>
+      </p:sp>
+      <p:sp>
+        <p:nvSpPr>
+          <p:cNvPr id="3" name="TextBox 2"/>
+          <p:cNvSpPr txBox="1"/>
+          <p:nvPr/>
+        </p:nvSpPr>
+        <p:spPr>
+          <a:xfrm>
+            <a:off x="548640" y="800000"/>
+            <a:ext cx="11094415" cy="700000"/>
+          </a:xfrm>
+          <a:prstGeom prst="rect">
+            <a:avLst/>
+          </a:prstGeom>
+          <a:noFill/>
+        </p:spPr>
+        <p:txBody>
+          <a:bodyPr wrap="square">
+            <a:spAutoFit/>
+          </a:bodyPr>
+          <a:lstStyle/>
+          <a:p>
+            <a:pPr algn="l"/>
+            <a:r>
+              <a:rPr sz="2500" b="1" i="0">
+                <a:solidFill>
+                  <a:srgbClr val="1B3A5C"/>
+                </a:solidFill>
+                <a:latin typeface="Cambria"/>
+              </a:rPr>
+              <a:t>O que cada parte devolve?</a:t>
+            </a:r>
+          </a:p>
+        </p:txBody>
+      </p:sp>
+      <p:sp>
+        <p:nvSpPr>
+          <p:cNvPr id="8" name="Text 6"/>
+          <p:cNvSpPr/>
+          <p:nvPr/>
+        </p:nvSpPr>
+        <p:spPr>
+          <a:xfrm>
+            <a:off x="548640" y="1650000"/>
+            <a:ext cx="11094415" cy="274320"/>
+          </a:xfrm>
+          <a:prstGeom prst="rect">
+            <a:avLst/>
+          </a:prstGeom>
+          <a:noFill/>
+          <a:ln/>
+        </p:spPr>
+        <p:txBody>
+          <a:bodyPr wrap="square" lIns="0" tIns="0" rIns="0" bIns="0" rtlCol="0" anchor="ctr"/>
+          <a:lstStyle/>
+          <a:p>
+            <a:pPr indent="0" marL="0">
+              <a:buNone/>
+            </a:pPr>
+            <a:r>
+              <a:rPr lang="en-US" sz="1150" b="1" spc="120" kern="0" dirty="0">
+                <a:solidFill>
+                  <a:srgbClr val="44546A"/>
+                </a:solidFill>
+                <a:latin typeface="Calibri" pitchFamily="34" charset="0"/>
+                <a:ea typeface="Calibri" pitchFamily="34" charset="-122"/>
+                <a:cs typeface="Calibri" pitchFamily="34" charset="-120"/>
+              </a:rPr>
+              <a:t>EXEMPLO EM JULIA</a:t>
+            </a:r>
+            <a:endParaRPr lang="en-US" sz="1150" dirty="0"/>
+          </a:p>
+        </p:txBody>
+      </p:sp>
+      <p:sp>
+        <p:nvSpPr>
+          <p:cNvPr id="9" name="Shape 7"/>
+          <p:cNvSpPr/>
+          <p:nvPr/>
+        </p:nvSpPr>
+        <p:spPr>
+          <a:xfrm>
+            <a:off x="548640" y="2015760"/>
+            <a:ext cx="11094415" cy="1160400"/>
+          </a:xfrm>
+          <a:prstGeom prst="roundRect">
+            <a:avLst>
+              <a:gd name="adj" fmla="val 3721"/>
+            </a:avLst>
+          </a:prstGeom>
+          <a:solidFill>
+            <a:srgbClr val="12233B"/>
+          </a:solidFill>
+          <a:ln/>
+          <a:effectLst>
+            <a:outerShdw sx="100000" sy="100000" kx="0" ky="0" algn="bl" rotWithShape="0" blurRad="76200" dist="25400" dir="5400000">
+              <a:srgbClr val="1B3A5C">
+                <a:alpha val="15000"/>
+              </a:srgbClr>
+            </a:outerShdw>
+          </a:effectLst>
+        </p:spPr>
+        <p:txBody>
+          <a:bodyPr/>
+          <a:p/>
+        </p:txBody>
+      </p:sp>
+      <p:sp>
+        <p:nvSpPr>
+          <p:cNvPr id="10" name="Text 8"/>
+          <p:cNvSpPr/>
+          <p:nvPr/>
+        </p:nvSpPr>
+        <p:spPr>
+          <a:xfrm>
+            <a:off x="804672" y="2253504"/>
+            <a:ext cx="10582351" cy="684912"/>
+          </a:xfrm>
+          <a:prstGeom prst="rect">
+            <a:avLst/>
+          </a:prstGeom>
+          <a:noFill/>
+          <a:ln/>
+        </p:spPr>
+        <p:txBody>
+          <a:bodyPr wrap="square" lIns="0" tIns="0" rIns="0" bIns="0" rtlCol="0" anchor="t"/>
+          <a:lstStyle/>
+          <a:p>
+            <a:pPr indent="0" marL="0">
+              <a:lnSpc>
+                <a:spcPct val="130000"/>
+              </a:lnSpc>
+              <a:buNone/>
+            </a:pPr>
+            <a:r>
+              <a:rPr lang="en-US" sz="1300" dirty="0">
+                <a:solidFill>
+                  <a:srgbClr val="E9EEF3"/>
+                </a:solidFill>
+                <a:latin typeface="Consolas" pitchFamily="34" charset="0"/>
+                <a:ea typeface="Consolas" pitchFamily="34" charset="-122"/>
+                <a:cs typeface="Consolas" pitchFamily="34" charset="-120"/>
+              </a:rPr>
+              <a:t>seq</a:t>
+            </a:r>
+            <a:pPr indent="0" marL="0">
+              <a:lnSpc>
+                <a:spcPct val="130000"/>
+              </a:lnSpc>
+              <a:buNone/>
+            </a:pPr>
+            <a:r>
+              <a:rPr lang="en-US" sz="1300" dirty="0">
+                <a:solidFill>
+                  <a:srgbClr val="E9EEF3"/>
+                </a:solidFill>
+                <a:latin typeface="Consolas" pitchFamily="34" charset="0"/>
+                <a:ea typeface="Consolas" pitchFamily="34" charset="-122"/>
+                <a:cs typeface="Consolas" pitchFamily="34" charset="-120"/>
+              </a:rPr>
+              <a:t> </a:t>
+            </a:r>
+            <a:pPr indent="0" marL="0">
+              <a:lnSpc>
+                <a:spcPct val="130000"/>
+              </a:lnSpc>
+              <a:buNone/>
+            </a:pPr>
+            <a:r>
+              <a:rPr lang="en-US" sz="1300" dirty="0">
+                <a:solidFill>
+                  <a:srgbClr val="E9EEF3"/>
+                </a:solidFill>
+                <a:latin typeface="Consolas" pitchFamily="34" charset="0"/>
+                <a:ea typeface="Consolas" pitchFamily="34" charset="-122"/>
+                <a:cs typeface="Consolas" pitchFamily="34" charset="-120"/>
+              </a:rPr>
+              <a:t>=</a:t>
+            </a:r>
+            <a:pPr indent="0" marL="0">
+              <a:lnSpc>
+                <a:spcPct val="130000"/>
+              </a:lnSpc>
+              <a:buNone/>
+            </a:pPr>
+            <a:r>
+              <a:rPr lang="en-US" sz="1300" dirty="0">
+                <a:solidFill>
+                  <a:srgbClr val="E9EEF3"/>
+                </a:solidFill>
+                <a:latin typeface="Consolas" pitchFamily="34" charset="0"/>
+                <a:ea typeface="Consolas" pitchFamily="34" charset="-122"/>
+                <a:cs typeface="Consolas" pitchFamily="34" charset="-120"/>
+              </a:rPr>
+              <a:t> </a:t>
+            </a:r>
+            <a:pPr indent="0" marL="0">
+              <a:lnSpc>
+                <a:spcPct val="130000"/>
+              </a:lnSpc>
+              <a:buNone/>
+            </a:pPr>
+            <a:r>
+              <a:rPr lang="en-US" sz="1300" dirty="0">
+                <a:solidFill>
+                  <a:srgbClr val="E9EEF3"/>
+                </a:solidFill>
+                <a:latin typeface="Consolas" pitchFamily="34" charset="0"/>
+                <a:ea typeface="Consolas" pitchFamily="34" charset="-122"/>
+                <a:cs typeface="Consolas" pitchFamily="34" charset="-120"/>
+              </a:rPr>
+              <a:t>[</a:t>
+            </a:r>
+            <a:pPr indent="0" marL="0">
+              <a:lnSpc>
+                <a:spcPct val="130000"/>
+              </a:lnSpc>
+              <a:buNone/>
+            </a:pPr>
+            <a:r>
+              <a:rPr lang="en-US" sz="1300" dirty="0">
+                <a:solidFill>
+                  <a:srgbClr val="F2C88F"/>
+                </a:solidFill>
+                <a:latin typeface="Consolas" pitchFamily="34" charset="0"/>
+                <a:ea typeface="Consolas" pitchFamily="34" charset="-122"/>
+                <a:cs typeface="Consolas" pitchFamily="34" charset="-120"/>
+              </a:rPr>
+              <a:t>1</a:t>
+            </a:r>
+            <a:pPr indent="0" marL="0">
+              <a:lnSpc>
+                <a:spcPct val="130000"/>
+              </a:lnSpc>
+              <a:buNone/>
+            </a:pPr>
+            <a:r>
+              <a:rPr lang="en-US" sz="1300" dirty="0">
+                <a:solidFill>
+                  <a:srgbClr val="E9EEF3"/>
+                </a:solidFill>
+                <a:latin typeface="Consolas" pitchFamily="34" charset="0"/>
+                <a:ea typeface="Consolas" pitchFamily="34" charset="-122"/>
+                <a:cs typeface="Consolas" pitchFamily="34" charset="-120"/>
+              </a:rPr>
+              <a:t>,</a:t>
+            </a:r>
+            <a:pPr indent="0" marL="0">
+              <a:lnSpc>
+                <a:spcPct val="130000"/>
+              </a:lnSpc>
+              <a:buNone/>
+            </a:pPr>
+            <a:r>
+              <a:rPr lang="en-US" sz="1300" dirty="0">
+                <a:solidFill>
+                  <a:srgbClr val="E9EEF3"/>
+                </a:solidFill>
+                <a:latin typeface="Consolas" pitchFamily="34" charset="0"/>
+                <a:ea typeface="Consolas" pitchFamily="34" charset="-122"/>
+                <a:cs typeface="Consolas" pitchFamily="34" charset="-120"/>
+              </a:rPr>
+              <a:t> </a:t>
+            </a:r>
+            <a:pPr indent="0" marL="0">
+              <a:lnSpc>
+                <a:spcPct val="130000"/>
+              </a:lnSpc>
+              <a:buNone/>
+            </a:pPr>
+            <a:r>
+              <a:rPr lang="en-US" sz="1300" dirty="0">
+                <a:solidFill>
+                  <a:srgbClr val="F2C88F"/>
+                </a:solidFill>
+                <a:latin typeface="Consolas" pitchFamily="34" charset="0"/>
+                <a:ea typeface="Consolas" pitchFamily="34" charset="-122"/>
+                <a:cs typeface="Consolas" pitchFamily="34" charset="-120"/>
+              </a:rPr>
+              <a:t>3</a:t>
+            </a:r>
+            <a:pPr indent="0" marL="0">
+              <a:lnSpc>
+                <a:spcPct val="130000"/>
+              </a:lnSpc>
+              <a:buNone/>
+            </a:pPr>
+            <a:r>
+              <a:rPr lang="en-US" sz="1300" dirty="0">
+                <a:solidFill>
+                  <a:srgbClr val="E9EEF3"/>
+                </a:solidFill>
+                <a:latin typeface="Consolas" pitchFamily="34" charset="0"/>
+                <a:ea typeface="Consolas" pitchFamily="34" charset="-122"/>
+                <a:cs typeface="Consolas" pitchFamily="34" charset="-120"/>
+              </a:rPr>
+              <a:t>,</a:t>
+            </a:r>
+            <a:pPr indent="0" marL="0">
+              <a:lnSpc>
+                <a:spcPct val="130000"/>
+              </a:lnSpc>
+              <a:buNone/>
+            </a:pPr>
+            <a:r>
+              <a:rPr lang="en-US" sz="1300" dirty="0">
+                <a:solidFill>
+                  <a:srgbClr val="E9EEF3"/>
+                </a:solidFill>
+                <a:latin typeface="Consolas" pitchFamily="34" charset="0"/>
+                <a:ea typeface="Consolas" pitchFamily="34" charset="-122"/>
+                <a:cs typeface="Consolas" pitchFamily="34" charset="-120"/>
+              </a:rPr>
+              <a:t> </a:t>
+            </a:r>
+            <a:pPr indent="0" marL="0">
+              <a:lnSpc>
+                <a:spcPct val="130000"/>
+              </a:lnSpc>
+              <a:buNone/>
+            </a:pPr>
+            <a:r>
+              <a:rPr lang="en-US" sz="1300" dirty="0">
+                <a:solidFill>
+                  <a:srgbClr val="F2C88F"/>
+                </a:solidFill>
+                <a:latin typeface="Consolas" pitchFamily="34" charset="0"/>
+                <a:ea typeface="Consolas" pitchFamily="34" charset="-122"/>
+                <a:cs typeface="Consolas" pitchFamily="34" charset="-120"/>
+              </a:rPr>
+              <a:t>5</a:t>
+            </a:r>
+            <a:pPr indent="0" marL="0">
+              <a:lnSpc>
+                <a:spcPct val="130000"/>
+              </a:lnSpc>
+              <a:buNone/>
+            </a:pPr>
+            <a:r>
+              <a:rPr lang="en-US" sz="1300" dirty="0">
+                <a:solidFill>
+                  <a:srgbClr val="E9EEF3"/>
+                </a:solidFill>
+                <a:latin typeface="Consolas" pitchFamily="34" charset="0"/>
+                <a:ea typeface="Consolas" pitchFamily="34" charset="-122"/>
+                <a:cs typeface="Consolas" pitchFamily="34" charset="-120"/>
+              </a:rPr>
+              <a:t>,</a:t>
+            </a:r>
+            <a:pPr indent="0" marL="0">
+              <a:lnSpc>
+                <a:spcPct val="130000"/>
+              </a:lnSpc>
+              <a:buNone/>
+            </a:pPr>
+            <a:r>
+              <a:rPr lang="en-US" sz="1300" dirty="0">
+                <a:solidFill>
+                  <a:srgbClr val="E9EEF3"/>
+                </a:solidFill>
+                <a:latin typeface="Consolas" pitchFamily="34" charset="0"/>
+                <a:ea typeface="Consolas" pitchFamily="34" charset="-122"/>
+                <a:cs typeface="Consolas" pitchFamily="34" charset="-120"/>
+              </a:rPr>
+              <a:t> </a:t>
+            </a:r>
+            <a:pPr indent="0" marL="0">
+              <a:lnSpc>
+                <a:spcPct val="130000"/>
+              </a:lnSpc>
+              <a:buNone/>
+            </a:pPr>
+            <a:r>
+              <a:rPr lang="en-US" sz="1300" dirty="0">
+                <a:solidFill>
+                  <a:srgbClr val="F2C88F"/>
+                </a:solidFill>
+                <a:latin typeface="Consolas" pitchFamily="34" charset="0"/>
+                <a:ea typeface="Consolas" pitchFamily="34" charset="-122"/>
+                <a:cs typeface="Consolas" pitchFamily="34" charset="-120"/>
+              </a:rPr>
+              <a:t>7</a:t>
+            </a:r>
+            <a:pPr indent="0" marL="0">
+              <a:lnSpc>
+                <a:spcPct val="130000"/>
+              </a:lnSpc>
+              <a:buNone/>
+            </a:pPr>
+            <a:r>
+              <a:rPr lang="en-US" sz="1300" dirty="0">
+                <a:solidFill>
+                  <a:srgbClr val="E9EEF3"/>
+                </a:solidFill>
+                <a:latin typeface="Consolas" pitchFamily="34" charset="0"/>
+                <a:ea typeface="Consolas" pitchFamily="34" charset="-122"/>
+                <a:cs typeface="Consolas" pitchFamily="34" charset="-120"/>
+              </a:rPr>
+              <a:t>]</a:t>
+            </a:r>
+            <a:endParaRPr lang="en-US" sz="1300" dirty="0"/>
+          </a:p>
+          <a:p>
+            <a:pPr indent="0" marL="0">
+              <a:lnSpc>
+                <a:spcPct val="130000"/>
+              </a:lnSpc>
+              <a:buNone/>
+            </a:pPr>
+            <a:r>
+              <a:rPr lang="en-US" sz="1300" dirty="0">
+                <a:solidFill>
+                  <a:srgbClr val="E9EEF3"/>
+                </a:solidFill>
+                <a:latin typeface="Consolas" pitchFamily="34" charset="0"/>
+                <a:ea typeface="Consolas" pitchFamily="34" charset="-122"/>
+                <a:cs typeface="Consolas" pitchFamily="34" charset="-120"/>
+              </a:rPr>
+              <a:t>marcas</a:t>
+            </a:r>
+            <a:pPr indent="0" marL="0">
+              <a:lnSpc>
+                <a:spcPct val="130000"/>
+              </a:lnSpc>
+              <a:buNone/>
+            </a:pPr>
+            <a:r>
+              <a:rPr lang="en-US" sz="1300" dirty="0">
+                <a:solidFill>
+                  <a:srgbClr val="E9EEF3"/>
+                </a:solidFill>
+                <a:latin typeface="Consolas" pitchFamily="34" charset="0"/>
+                <a:ea typeface="Consolas" pitchFamily="34" charset="-122"/>
+                <a:cs typeface="Consolas" pitchFamily="34" charset="-120"/>
+              </a:rPr>
+              <a:t> </a:t>
+            </a:r>
+            <a:pPr indent="0" marL="0">
+              <a:lnSpc>
+                <a:spcPct val="130000"/>
+              </a:lnSpc>
+              <a:buNone/>
+            </a:pPr>
+            <a:r>
+              <a:rPr lang="en-US" sz="1300" dirty="0">
+                <a:solidFill>
+                  <a:srgbClr val="E9EEF3"/>
+                </a:solidFill>
+                <a:latin typeface="Consolas" pitchFamily="34" charset="0"/>
+                <a:ea typeface="Consolas" pitchFamily="34" charset="-122"/>
+                <a:cs typeface="Consolas" pitchFamily="34" charset="-120"/>
+              </a:rPr>
+              <a:t>=</a:t>
+            </a:r>
+            <a:pPr indent="0" marL="0">
+              <a:lnSpc>
+                <a:spcPct val="130000"/>
+              </a:lnSpc>
+              <a:buNone/>
+            </a:pPr>
+            <a:r>
+              <a:rPr lang="en-US" sz="1300" dirty="0">
+                <a:solidFill>
+                  <a:srgbClr val="E9EEF3"/>
+                </a:solidFill>
+                <a:latin typeface="Consolas" pitchFamily="34" charset="0"/>
+                <a:ea typeface="Consolas" pitchFamily="34" charset="-122"/>
+                <a:cs typeface="Consolas" pitchFamily="34" charset="-120"/>
+              </a:rPr>
+              <a:t> </a:t>
+            </a:r>
+            <a:pPr indent="0" marL="0">
+              <a:lnSpc>
+                <a:spcPct val="130000"/>
+              </a:lnSpc>
+              <a:buNone/>
+            </a:pPr>
+            <a:r>
+              <a:rPr lang="en-US" sz="1300" dirty="0">
+                <a:solidFill>
+                  <a:srgbClr val="E9EEF3"/>
+                </a:solidFill>
+                <a:latin typeface="Consolas" pitchFamily="34" charset="0"/>
+                <a:ea typeface="Consolas" pitchFamily="34" charset="-122"/>
+                <a:cs typeface="Consolas" pitchFamily="34" charset="-120"/>
+              </a:rPr>
+              <a:t>repeat</a:t>
+            </a:r>
+            <a:pPr indent="0" marL="0">
+              <a:lnSpc>
+                <a:spcPct val="130000"/>
+              </a:lnSpc>
+              <a:buNone/>
+            </a:pPr>
+            <a:r>
+              <a:rPr lang="en-US" sz="1300" dirty="0">
+                <a:solidFill>
+                  <a:srgbClr val="E9EEF3"/>
+                </a:solidFill>
+                <a:latin typeface="Consolas" pitchFamily="34" charset="0"/>
+                <a:ea typeface="Consolas" pitchFamily="34" charset="-122"/>
+                <a:cs typeface="Consolas" pitchFamily="34" charset="-120"/>
+              </a:rPr>
+              <a:t>.</a:t>
+            </a:r>
+            <a:pPr indent="0" marL="0">
+              <a:lnSpc>
+                <a:spcPct val="130000"/>
+              </a:lnSpc>
+              <a:buNone/>
+            </a:pPr>
+            <a:r>
+              <a:rPr lang="en-US" sz="1300" dirty="0">
+                <a:solidFill>
+                  <a:srgbClr val="E9EEF3"/>
+                </a:solidFill>
+                <a:latin typeface="Consolas" pitchFamily="34" charset="0"/>
+                <a:ea typeface="Consolas" pitchFamily="34" charset="-122"/>
+                <a:cs typeface="Consolas" pitchFamily="34" charset="-120"/>
+              </a:rPr>
+              <a:t>(</a:t>
+            </a:r>
+            <a:pPr indent="0" marL="0">
+              <a:lnSpc>
+                <a:spcPct val="130000"/>
+              </a:lnSpc>
+              <a:buNone/>
+            </a:pPr>
+            <a:r>
+              <a:rPr lang="en-US" sz="1300" dirty="0">
+                <a:solidFill>
+                  <a:srgbClr val="8FD6C4"/>
+                </a:solidFill>
+                <a:latin typeface="Consolas" pitchFamily="34" charset="0"/>
+                <a:ea typeface="Consolas" pitchFamily="34" charset="-122"/>
+                <a:cs typeface="Consolas" pitchFamily="34" charset="-120"/>
+              </a:rPr>
+              <a:t>"*"</a:t>
+            </a:r>
+            <a:pPr indent="0" marL="0">
+              <a:lnSpc>
+                <a:spcPct val="130000"/>
+              </a:lnSpc>
+              <a:buNone/>
+            </a:pPr>
+            <a:r>
+              <a:rPr lang="en-US" sz="1300" dirty="0">
+                <a:solidFill>
+                  <a:srgbClr val="E9EEF3"/>
+                </a:solidFill>
+                <a:latin typeface="Consolas" pitchFamily="34" charset="0"/>
+                <a:ea typeface="Consolas" pitchFamily="34" charset="-122"/>
+                <a:cs typeface="Consolas" pitchFamily="34" charset="-120"/>
+              </a:rPr>
+              <a:t>,</a:t>
+            </a:r>
+            <a:pPr indent="0" marL="0">
+              <a:lnSpc>
+                <a:spcPct val="130000"/>
+              </a:lnSpc>
+              <a:buNone/>
+            </a:pPr>
+            <a:r>
+              <a:rPr lang="en-US" sz="1300" dirty="0">
+                <a:solidFill>
+                  <a:srgbClr val="E9EEF3"/>
+                </a:solidFill>
+                <a:latin typeface="Consolas" pitchFamily="34" charset="0"/>
+                <a:ea typeface="Consolas" pitchFamily="34" charset="-122"/>
+                <a:cs typeface="Consolas" pitchFamily="34" charset="-120"/>
+              </a:rPr>
+              <a:t> </a:t>
+            </a:r>
+            <a:pPr indent="0" marL="0">
+              <a:lnSpc>
+                <a:spcPct val="130000"/>
+              </a:lnSpc>
+              <a:buNone/>
+            </a:pPr>
+            <a:r>
+              <a:rPr lang="en-US" sz="1300" dirty="0">
+                <a:solidFill>
+                  <a:srgbClr val="E9EEF3"/>
+                </a:solidFill>
+                <a:latin typeface="Consolas" pitchFamily="34" charset="0"/>
+                <a:ea typeface="Consolas" pitchFamily="34" charset="-122"/>
+                <a:cs typeface="Consolas" pitchFamily="34" charset="-120"/>
+              </a:rPr>
+              <a:t>seq</a:t>
+            </a:r>
+            <a:pPr indent="0" marL="0">
+              <a:lnSpc>
+                <a:spcPct val="130000"/>
+              </a:lnSpc>
+              <a:buNone/>
+            </a:pPr>
+            <a:r>
+              <a:rPr lang="en-US" sz="1300" dirty="0">
+                <a:solidFill>
+                  <a:srgbClr val="E9EEF3"/>
+                </a:solidFill>
+                <a:latin typeface="Consolas" pitchFamily="34" charset="0"/>
+                <a:ea typeface="Consolas" pitchFamily="34" charset="-122"/>
+                <a:cs typeface="Consolas" pitchFamily="34" charset="-120"/>
+              </a:rPr>
+              <a:t>)</a:t>
+            </a:r>
+            <a:endParaRPr lang="en-US" sz="1300" dirty="0"/>
+          </a:p>
+        </p:txBody>
+      </p:sp>
+      <p:sp>
+        <p:nvSpPr>
+          <p:cNvPr id="11" name="TextBox 10"/>
+          <p:cNvSpPr txBox="1"/>
+          <p:nvPr/>
+        </p:nvSpPr>
+        <p:spPr>
+          <a:xfrm>
+            <a:off x="548640" y="3176160"/>
+            <a:ext cx="11094415" cy="274320"/>
+          </a:xfrm>
+          <a:prstGeom prst="rect">
+            <a:avLst/>
+          </a:prstGeom>
+          <a:noFill/>
+        </p:spPr>
+        <p:txBody>
+          <a:bodyPr wrap="square">
+            <a:spAutoFit/>
+          </a:bodyPr>
+          <a:lstStyle/>
+          <a:p>
+            <a:pPr algn="l"/>
+            <a:r>
+              <a:rPr sz="1100" b="1" i="0">
+                <a:solidFill>
+                  <a:srgbClr val="2C7A8C"/>
+                </a:solidFill>
+                <a:latin typeface="Calibri"/>
+              </a:rPr>
+              <a:t>RESULTADO DE CADA PARTE</a:t>
+            </a:r>
+          </a:p>
+        </p:txBody>
+      </p:sp>
+      <p:sp>
+        <p:nvSpPr>
+          <p:cNvPr id="12" name="Rounded Rectangle 11"/>
+          <p:cNvSpPr/>
+          <p:nvPr/>
+        </p:nvSpPr>
+        <p:spPr>
+          <a:xfrm>
+            <a:off x="548640" y="3496200"/>
+            <a:ext cx="11094415" cy="1234440"/>
+          </a:xfrm>
+          <a:prstGeom prst="roundRect">
+            <a:avLst>
+              <a:gd name="adj" fmla="val 7407"/>
+            </a:avLst>
+          </a:prstGeom>
+          <a:solidFill>
+            <a:srgbClr val="E9F2F3"/>
+          </a:solidFill>
+          <a:ln>
+            <a:noFill/>
+          </a:ln>
+          <a:effectLst/>
+        </p:spPr>
+        <p:style>
+          <a:lnRef idx="1">
+            <a:schemeClr val="accent1"/>
+          </a:lnRef>
+          <a:fillRef idx="3">
+            <a:schemeClr val="accent1"/>
+          </a:fillRef>
+          <a:effectRef idx="2">
+            <a:schemeClr val="accent1"/>
+          </a:effectRef>
+          <a:fontRef idx="minor">
+            <a:schemeClr val="lt1"/>
+          </a:fontRef>
+        </p:style>
+        <p:txBody>
+          <a:bodyPr rtlCol="0" anchor="ctr"/>
+          <a:lstStyle/>
+          <a:p>
+            <a:pPr algn="ctr"/>
+          </a:p>
+        </p:txBody>
+      </p:sp>
+      <p:sp>
+        <p:nvSpPr>
+          <p:cNvPr id="13" name="TextBox 12"/>
+          <p:cNvSpPr txBox="1"/>
+          <p:nvPr/>
+        </p:nvSpPr>
+        <p:spPr>
+          <a:xfrm>
+            <a:off x="822960" y="3633360"/>
+            <a:ext cx="10545775" cy="1097280"/>
+          </a:xfrm>
+          <a:prstGeom prst="rect">
+            <a:avLst/>
+          </a:prstGeom>
+          <a:noFill/>
+        </p:spPr>
+        <p:txBody>
+          <a:bodyPr wrap="square">
+            <a:spAutoFit/>
+          </a:bodyPr>
+          <a:lstStyle/>
+          <a:p>
+            <a:pPr>
+              <a:lnSpc>
+                <a:spcPct val="125000"/>
+              </a:lnSpc>
+            </a:pPr>
+            <a:r>
+              <a:rPr sz="1250" b="1">
+                <a:solidFill>
+                  <a:srgbClr val="2C7A8C"/>
+                </a:solidFill>
+                <a:latin typeface="Consolas"/>
+              </a:rPr>
+              <a:t>seq</a:t>
+            </a:r>
+            <a:r>
+              <a:rPr sz="1250" b="0">
+                <a:solidFill>
+                  <a:srgbClr val="1B2733"/>
+                </a:solidFill>
+                <a:latin typeface="Consolas"/>
+              </a:rPr>
+              <a:t>  →  [1, 3, 5, 7]</a:t>
+            </a:r>
+          </a:p>
+          <a:p>
+            <a:pPr>
+              <a:lnSpc>
+                <a:spcPct val="125000"/>
+              </a:lnSpc>
+            </a:pPr>
+            <a:r>
+              <a:rPr sz="1250" b="1">
+                <a:solidFill>
+                  <a:srgbClr val="2C7A8C"/>
+                </a:solidFill>
+                <a:latin typeface="Consolas"/>
+              </a:rPr>
+              <a:t>repeat.("*", seq)</a:t>
+            </a:r>
+            <a:r>
+              <a:rPr sz="1250" b="0">
+                <a:solidFill>
+                  <a:srgbClr val="1B2733"/>
+                </a:solidFill>
+                <a:latin typeface="Consolas"/>
+              </a:rPr>
+              <a:t>  →  ["*", "***", "*****", "*******"]  (repete "*" seq[i] vezes)</a:t>
+            </a:r>
+          </a:p>
+          <a:p>
+            <a:pPr>
+              <a:lnSpc>
+                <a:spcPct val="125000"/>
+              </a:lnSpc>
+            </a:pPr>
+            <a:r>
+              <a:rPr sz="1250" b="1">
+                <a:solidFill>
+                  <a:srgbClr val="2C7A8C"/>
+                </a:solidFill>
+                <a:latin typeface="Consolas"/>
+              </a:rPr>
+              <a:t>marcas</a:t>
+            </a:r>
+            <a:r>
+              <a:rPr sz="1250" b="0">
+                <a:solidFill>
+                  <a:srgbClr val="1B2733"/>
+                </a:solidFill>
+                <a:latin typeface="Consolas"/>
+              </a:rPr>
+              <a:t>  →  ["*", "***", "*****", "*******"]</a:t>
+            </a:r>
+          </a:p>
+        </p:txBody>
+      </p:sp>
+      <p:sp>
+        <p:nvSpPr>
+          <p:cNvPr id="14" name="TextBox 13"/>
+          <p:cNvSpPr txBox="1"/>
+          <p:nvPr/>
+        </p:nvSpPr>
+        <p:spPr>
+          <a:xfrm>
+            <a:off x="548640" y="6473952"/>
+            <a:ext cx="5486400" cy="274320"/>
+          </a:xfrm>
+          <a:prstGeom prst="rect">
+            <a:avLst/>
+          </a:prstGeom>
+          <a:noFill/>
+        </p:spPr>
+        <p:txBody>
+          <a:bodyPr wrap="square">
+            <a:spAutoFit/>
+          </a:bodyPr>
+          <a:lstStyle/>
+          <a:p>
+            <a:pPr algn="l"/>
+            <a:r>
+              <a:rPr sz="1000" b="0" i="0">
+                <a:solidFill>
+                  <a:srgbClr val="9AA5B1"/>
+                </a:solidFill>
+                <a:latin typeface="Calibri"/>
+              </a:rPr>
+              <a:t>Aula 2 · Pensamento Indutivo</a:t>
+            </a:r>
+          </a:p>
+        </p:txBody>
+      </p:sp>
+      <p:sp>
+        <p:nvSpPr>
+          <p:cNvPr id="15" name="TextBox 14"/>
+          <p:cNvSpPr txBox="1"/>
+          <p:nvPr/>
+        </p:nvSpPr>
+        <p:spPr>
+          <a:xfrm>
+            <a:off x="10271455" y="6473952"/>
+            <a:ext cx="1371600" cy="274320"/>
+          </a:xfrm>
+          <a:prstGeom prst="rect">
+            <a:avLst/>
+          </a:prstGeom>
+          <a:noFill/>
+        </p:spPr>
+        <p:txBody>
+          <a:bodyPr wrap="square">
+            <a:spAutoFit/>
+          </a:bodyPr>
+          <a:lstStyle/>
+          <a:p>
+            <a:pPr algn="l"/>
+            <a:r>
+              <a:rPr sz="1000" b="0" i="0">
+                <a:solidFill>
+                  <a:srgbClr val="9AA5B1"/>
+                </a:solidFill>
+                <a:latin typeface="Calibri"/>
+              </a:rPr>
+              <a:t>16 / 27</a:t>
+            </a:r>
+          </a:p>
+        </p:txBody>
+      </p:sp>
+    </p:spTree>
+  </p:cSld>
+  <p:clrMapOvr>
+    <a:masterClrMapping/>
+  </p:clrMapOvr>
+</p:sld>
+</file>
+
+<file path=ppt/slides/slide24.xml><?xml version="1.0" encoding="utf-8"?>
+<p:sld xmlns:a="http://schemas.openxmlformats.org/drawingml/2006/main" xmlns:p="http://schemas.openxmlformats.org/presentationml/2006/main" xmlns:r="http://schemas.openxmlformats.org/officeDocument/2006/relationships">
+  <p:cSld>
+    <p:spTree>
+      <p:nvGrpSpPr>
+        <p:cNvPr id="1" name=""/>
+        <p:cNvGrpSpPr/>
+        <p:nvPr/>
+      </p:nvGrpSpPr>
+      <p:grpSpPr/>
+      <p:sp>
+        <p:nvSpPr>
+          <p:cNvPr id="2" name="TextBox 1"/>
+          <p:cNvSpPr txBox="1"/>
+          <p:nvPr/>
+        </p:nvSpPr>
+        <p:spPr>
+          <a:xfrm>
+            <a:off x="548640" y="457200"/>
+            <a:ext cx="11094415" cy="320040"/>
+          </a:xfrm>
+          <a:prstGeom prst="rect">
+            <a:avLst/>
+          </a:prstGeom>
+          <a:noFill/>
+        </p:spPr>
+        <p:txBody>
+          <a:bodyPr wrap="square">
+            <a:spAutoFit/>
+          </a:bodyPr>
+          <a:lstStyle/>
+          <a:p>
+            <a:pPr algn="l"/>
+            <a:r>
+              <a:rPr sz="1200" b="1" i="0">
+                <a:solidFill>
+                  <a:srgbClr val="2C7A8C"/>
+                </a:solidFill>
+                <a:latin typeface="Calibri"/>
+              </a:rPr>
+              <a:t>TAREFA 4 DE 10  ·  2.4  ·  RESULTADO</a:t>
+            </a:r>
+          </a:p>
+        </p:txBody>
+      </p:sp>
+      <p:sp>
+        <p:nvSpPr>
+          <p:cNvPr id="3" name="TextBox 2"/>
+          <p:cNvSpPr txBox="1"/>
+          <p:nvPr/>
+        </p:nvSpPr>
+        <p:spPr>
+          <a:xfrm>
+            <a:off x="548640" y="800000"/>
+            <a:ext cx="11094415" cy="700000"/>
+          </a:xfrm>
+          <a:prstGeom prst="rect">
+            <a:avLst/>
+          </a:prstGeom>
+          <a:noFill/>
+        </p:spPr>
+        <p:txBody>
+          <a:bodyPr wrap="square">
+            <a:spAutoFit/>
+          </a:bodyPr>
+          <a:lstStyle/>
+          <a:p>
+            <a:pPr algn="l"/>
+            <a:r>
+              <a:rPr sz="2500" b="1" i="0">
+                <a:solidFill>
+                  <a:srgbClr val="1B3A5C"/>
+                </a:solidFill>
+                <a:latin typeface="Cambria"/>
+              </a:rPr>
+              <a:t>O que cada parte devolve?</a:t>
+            </a:r>
+          </a:p>
+        </p:txBody>
+      </p:sp>
+      <p:sp>
+        <p:nvSpPr>
+          <p:cNvPr id="8" name="Text 6"/>
+          <p:cNvSpPr/>
+          <p:nvPr/>
+        </p:nvSpPr>
+        <p:spPr>
+          <a:xfrm>
+            <a:off x="548640" y="1650000"/>
+            <a:ext cx="11094415" cy="274320"/>
+          </a:xfrm>
+          <a:prstGeom prst="rect">
+            <a:avLst/>
+          </a:prstGeom>
+          <a:noFill/>
+          <a:ln/>
+        </p:spPr>
+        <p:txBody>
+          <a:bodyPr wrap="square" lIns="0" tIns="0" rIns="0" bIns="0" rtlCol="0" anchor="ctr"/>
+          <a:lstStyle/>
+          <a:p>
+            <a:pPr indent="0" marL="0">
+              <a:buNone/>
+            </a:pPr>
+            <a:r>
+              <a:rPr lang="en-US" sz="1150" b="1" spc="120" kern="0" dirty="0">
+                <a:solidFill>
+                  <a:srgbClr val="44546A"/>
+                </a:solidFill>
+                <a:latin typeface="Calibri" pitchFamily="34" charset="0"/>
+                <a:ea typeface="Calibri" pitchFamily="34" charset="-122"/>
+                <a:cs typeface="Calibri" pitchFamily="34" charset="-120"/>
+              </a:rPr>
+              <a:t>EXEMPLO EM JULIA</a:t>
+            </a:r>
+            <a:endParaRPr lang="en-US" sz="1150" dirty="0"/>
+          </a:p>
+        </p:txBody>
+      </p:sp>
+      <p:sp>
+        <p:nvSpPr>
+          <p:cNvPr id="9" name="Shape 7"/>
+          <p:cNvSpPr/>
+          <p:nvPr/>
+        </p:nvSpPr>
+        <p:spPr>
+          <a:xfrm>
+            <a:off x="548640" y="2015760"/>
+            <a:ext cx="11094415" cy="1490600"/>
+          </a:xfrm>
+          <a:prstGeom prst="roundRect">
+            <a:avLst>
+              <a:gd name="adj" fmla="val 3721"/>
+            </a:avLst>
+          </a:prstGeom>
+          <a:solidFill>
+            <a:srgbClr val="12233B"/>
+          </a:solidFill>
+          <a:ln/>
+          <a:effectLst>
+            <a:outerShdw sx="100000" sy="100000" kx="0" ky="0" algn="bl" rotWithShape="0" blurRad="76200" dist="25400" dir="5400000">
+              <a:srgbClr val="1B3A5C">
+                <a:alpha val="15000"/>
+              </a:srgbClr>
+            </a:outerShdw>
+          </a:effectLst>
+        </p:spPr>
+        <p:txBody>
+          <a:bodyPr/>
+          <a:p/>
+        </p:txBody>
+      </p:sp>
+      <p:sp>
+        <p:nvSpPr>
+          <p:cNvPr id="10" name="Text 8"/>
+          <p:cNvSpPr/>
+          <p:nvPr/>
+        </p:nvSpPr>
+        <p:spPr>
+          <a:xfrm>
+            <a:off x="804672" y="2253504"/>
+            <a:ext cx="10582351" cy="1015112"/>
+          </a:xfrm>
+          <a:prstGeom prst="rect">
+            <a:avLst/>
+          </a:prstGeom>
+          <a:noFill/>
+          <a:ln/>
+        </p:spPr>
+        <p:txBody>
+          <a:bodyPr wrap="square" lIns="0" tIns="0" rIns="0" bIns="0" rtlCol="0" anchor="t"/>
+          <a:lstStyle/>
+          <a:p>
+            <a:pPr indent="0" marL="0">
+              <a:lnSpc>
+                <a:spcPct val="130000"/>
+              </a:lnSpc>
+              <a:buNone/>
+            </a:pPr>
+            <a:r>
+              <a:rPr lang="en-US" sz="1300" dirty="0">
+                <a:solidFill>
+                  <a:srgbClr val="E9EEF3"/>
+                </a:solidFill>
+                <a:latin typeface="Consolas" pitchFamily="34" charset="0"/>
+                <a:ea typeface="Consolas" pitchFamily="34" charset="-122"/>
+                <a:cs typeface="Consolas" pitchFamily="34" charset="-120"/>
+              </a:rPr>
+              <a:t>observado</a:t>
+            </a:r>
+            <a:pPr indent="0" marL="0">
+              <a:lnSpc>
+                <a:spcPct val="130000"/>
+              </a:lnSpc>
+              <a:buNone/>
+            </a:pPr>
+            <a:r>
+              <a:rPr lang="en-US" sz="1300" dirty="0">
+                <a:solidFill>
+                  <a:srgbClr val="E9EEF3"/>
+                </a:solidFill>
+                <a:latin typeface="Consolas" pitchFamily="34" charset="0"/>
+                <a:ea typeface="Consolas" pitchFamily="34" charset="-122"/>
+                <a:cs typeface="Consolas" pitchFamily="34" charset="-120"/>
+              </a:rPr>
+              <a:t> </a:t>
+            </a:r>
+            <a:pPr indent="0" marL="0">
+              <a:lnSpc>
+                <a:spcPct val="130000"/>
+              </a:lnSpc>
+              <a:buNone/>
+            </a:pPr>
+            <a:r>
+              <a:rPr lang="en-US" sz="1300" dirty="0">
+                <a:solidFill>
+                  <a:srgbClr val="E9EEF3"/>
+                </a:solidFill>
+                <a:latin typeface="Consolas" pitchFamily="34" charset="0"/>
+                <a:ea typeface="Consolas" pitchFamily="34" charset="-122"/>
+                <a:cs typeface="Consolas" pitchFamily="34" charset="-120"/>
+              </a:rPr>
+              <a:t>=</a:t>
+            </a:r>
+            <a:pPr indent="0" marL="0">
+              <a:lnSpc>
+                <a:spcPct val="130000"/>
+              </a:lnSpc>
+              <a:buNone/>
+            </a:pPr>
+            <a:r>
+              <a:rPr lang="en-US" sz="1300" dirty="0">
+                <a:solidFill>
+                  <a:srgbClr val="E9EEF3"/>
+                </a:solidFill>
+                <a:latin typeface="Consolas" pitchFamily="34" charset="0"/>
+                <a:ea typeface="Consolas" pitchFamily="34" charset="-122"/>
+                <a:cs typeface="Consolas" pitchFamily="34" charset="-120"/>
+              </a:rPr>
+              <a:t> </a:t>
+            </a:r>
+            <a:pPr indent="0" marL="0">
+              <a:lnSpc>
+                <a:spcPct val="130000"/>
+              </a:lnSpc>
+              <a:buNone/>
+            </a:pPr>
+            <a:r>
+              <a:rPr lang="en-US" sz="1300" dirty="0">
+                <a:solidFill>
+                  <a:srgbClr val="E9EEF3"/>
+                </a:solidFill>
+                <a:latin typeface="Consolas" pitchFamily="34" charset="0"/>
+                <a:ea typeface="Consolas" pitchFamily="34" charset="-122"/>
+                <a:cs typeface="Consolas" pitchFamily="34" charset="-120"/>
+              </a:rPr>
+              <a:t>[</a:t>
+            </a:r>
+            <a:pPr indent="0" marL="0">
+              <a:lnSpc>
+                <a:spcPct val="130000"/>
+              </a:lnSpc>
+              <a:buNone/>
+            </a:pPr>
+            <a:r>
+              <a:rPr lang="en-US" sz="1300" dirty="0">
+                <a:solidFill>
+                  <a:srgbClr val="F2C88F"/>
+                </a:solidFill>
+                <a:latin typeface="Consolas" pitchFamily="34" charset="0"/>
+                <a:ea typeface="Consolas" pitchFamily="34" charset="-122"/>
+                <a:cs typeface="Consolas" pitchFamily="34" charset="-120"/>
+              </a:rPr>
+              <a:t>1</a:t>
+            </a:r>
+            <a:pPr indent="0" marL="0">
+              <a:lnSpc>
+                <a:spcPct val="130000"/>
+              </a:lnSpc>
+              <a:buNone/>
+            </a:pPr>
+            <a:r>
+              <a:rPr lang="en-US" sz="1300" dirty="0">
+                <a:solidFill>
+                  <a:srgbClr val="E9EEF3"/>
+                </a:solidFill>
+                <a:latin typeface="Consolas" pitchFamily="34" charset="0"/>
+                <a:ea typeface="Consolas" pitchFamily="34" charset="-122"/>
+                <a:cs typeface="Consolas" pitchFamily="34" charset="-120"/>
+              </a:rPr>
+              <a:t>,</a:t>
+            </a:r>
+            <a:pPr indent="0" marL="0">
+              <a:lnSpc>
+                <a:spcPct val="130000"/>
+              </a:lnSpc>
+              <a:buNone/>
+            </a:pPr>
+            <a:r>
+              <a:rPr lang="en-US" sz="1300" dirty="0">
+                <a:solidFill>
+                  <a:srgbClr val="E9EEF3"/>
+                </a:solidFill>
+                <a:latin typeface="Consolas" pitchFamily="34" charset="0"/>
+                <a:ea typeface="Consolas" pitchFamily="34" charset="-122"/>
+                <a:cs typeface="Consolas" pitchFamily="34" charset="-120"/>
+              </a:rPr>
+              <a:t> </a:t>
+            </a:r>
+            <a:pPr indent="0" marL="0">
+              <a:lnSpc>
+                <a:spcPct val="130000"/>
+              </a:lnSpc>
+              <a:buNone/>
+            </a:pPr>
+            <a:r>
+              <a:rPr lang="en-US" sz="1300" dirty="0">
+                <a:solidFill>
+                  <a:srgbClr val="F2C88F"/>
+                </a:solidFill>
+                <a:latin typeface="Consolas" pitchFamily="34" charset="0"/>
+                <a:ea typeface="Consolas" pitchFamily="34" charset="-122"/>
+                <a:cs typeface="Consolas" pitchFamily="34" charset="-120"/>
+              </a:rPr>
+              <a:t>4</a:t>
+            </a:r>
+            <a:pPr indent="0" marL="0">
+              <a:lnSpc>
+                <a:spcPct val="130000"/>
+              </a:lnSpc>
+              <a:buNone/>
+            </a:pPr>
+            <a:r>
+              <a:rPr lang="en-US" sz="1300" dirty="0">
+                <a:solidFill>
+                  <a:srgbClr val="E9EEF3"/>
+                </a:solidFill>
+                <a:latin typeface="Consolas" pitchFamily="34" charset="0"/>
+                <a:ea typeface="Consolas" pitchFamily="34" charset="-122"/>
+                <a:cs typeface="Consolas" pitchFamily="34" charset="-120"/>
+              </a:rPr>
+              <a:t>,</a:t>
+            </a:r>
+            <a:pPr indent="0" marL="0">
+              <a:lnSpc>
+                <a:spcPct val="130000"/>
+              </a:lnSpc>
+              <a:buNone/>
+            </a:pPr>
+            <a:r>
+              <a:rPr lang="en-US" sz="1300" dirty="0">
+                <a:solidFill>
+                  <a:srgbClr val="E9EEF3"/>
+                </a:solidFill>
+                <a:latin typeface="Consolas" pitchFamily="34" charset="0"/>
+                <a:ea typeface="Consolas" pitchFamily="34" charset="-122"/>
+                <a:cs typeface="Consolas" pitchFamily="34" charset="-120"/>
+              </a:rPr>
+              <a:t> </a:t>
+            </a:r>
+            <a:pPr indent="0" marL="0">
+              <a:lnSpc>
+                <a:spcPct val="130000"/>
+              </a:lnSpc>
+              <a:buNone/>
+            </a:pPr>
+            <a:r>
+              <a:rPr lang="en-US" sz="1300" dirty="0">
+                <a:solidFill>
+                  <a:srgbClr val="F2C88F"/>
+                </a:solidFill>
+                <a:latin typeface="Consolas" pitchFamily="34" charset="0"/>
+                <a:ea typeface="Consolas" pitchFamily="34" charset="-122"/>
+                <a:cs typeface="Consolas" pitchFamily="34" charset="-120"/>
+              </a:rPr>
+              <a:t>9</a:t>
+            </a:r>
+            <a:pPr indent="0" marL="0">
+              <a:lnSpc>
+                <a:spcPct val="130000"/>
+              </a:lnSpc>
+              <a:buNone/>
+            </a:pPr>
+            <a:r>
+              <a:rPr lang="en-US" sz="1300" dirty="0">
+                <a:solidFill>
+                  <a:srgbClr val="E9EEF3"/>
+                </a:solidFill>
+                <a:latin typeface="Consolas" pitchFamily="34" charset="0"/>
+                <a:ea typeface="Consolas" pitchFamily="34" charset="-122"/>
+                <a:cs typeface="Consolas" pitchFamily="34" charset="-120"/>
+              </a:rPr>
+              <a:t>,</a:t>
+            </a:r>
+            <a:pPr indent="0" marL="0">
+              <a:lnSpc>
+                <a:spcPct val="130000"/>
+              </a:lnSpc>
+              <a:buNone/>
+            </a:pPr>
+            <a:r>
+              <a:rPr lang="en-US" sz="1300" dirty="0">
+                <a:solidFill>
+                  <a:srgbClr val="E9EEF3"/>
+                </a:solidFill>
+                <a:latin typeface="Consolas" pitchFamily="34" charset="0"/>
+                <a:ea typeface="Consolas" pitchFamily="34" charset="-122"/>
+                <a:cs typeface="Consolas" pitchFamily="34" charset="-120"/>
+              </a:rPr>
+              <a:t> </a:t>
+            </a:r>
+            <a:pPr indent="0" marL="0">
+              <a:lnSpc>
+                <a:spcPct val="130000"/>
+              </a:lnSpc>
+              <a:buNone/>
+            </a:pPr>
+            <a:r>
+              <a:rPr lang="en-US" sz="1300" dirty="0">
+                <a:solidFill>
+                  <a:srgbClr val="F2C88F"/>
+                </a:solidFill>
+                <a:latin typeface="Consolas" pitchFamily="34" charset="0"/>
+                <a:ea typeface="Consolas" pitchFamily="34" charset="-122"/>
+                <a:cs typeface="Consolas" pitchFamily="34" charset="-120"/>
+              </a:rPr>
+              <a:t>16</a:t>
+            </a:r>
+            <a:pPr indent="0" marL="0">
+              <a:lnSpc>
+                <a:spcPct val="130000"/>
+              </a:lnSpc>
+              <a:buNone/>
+            </a:pPr>
+            <a:r>
+              <a:rPr lang="en-US" sz="1300" dirty="0">
+                <a:solidFill>
+                  <a:srgbClr val="E9EEF3"/>
+                </a:solidFill>
+                <a:latin typeface="Consolas" pitchFamily="34" charset="0"/>
+                <a:ea typeface="Consolas" pitchFamily="34" charset="-122"/>
+                <a:cs typeface="Consolas" pitchFamily="34" charset="-120"/>
+              </a:rPr>
+              <a:t>]</a:t>
+            </a:r>
+            <a:endParaRPr lang="en-US" sz="1300" dirty="0"/>
+          </a:p>
+          <a:p>
+            <a:pPr indent="0" marL="0">
+              <a:lnSpc>
+                <a:spcPct val="130000"/>
+              </a:lnSpc>
+              <a:buNone/>
+            </a:pPr>
+            <a:r>
+              <a:rPr lang="en-US" sz="1300" dirty="0">
+                <a:solidFill>
+                  <a:srgbClr val="E9EEF3"/>
+                </a:solidFill>
+                <a:latin typeface="Consolas" pitchFamily="34" charset="0"/>
+                <a:ea typeface="Consolas" pitchFamily="34" charset="-122"/>
+                <a:cs typeface="Consolas" pitchFamily="34" charset="-120"/>
+              </a:rPr>
+              <a:t>gerado</a:t>
+            </a:r>
+            <a:pPr indent="0" marL="0">
+              <a:lnSpc>
+                <a:spcPct val="130000"/>
+              </a:lnSpc>
+              <a:buNone/>
+            </a:pPr>
+            <a:r>
+              <a:rPr lang="en-US" sz="1300" dirty="0">
+                <a:solidFill>
+                  <a:srgbClr val="E9EEF3"/>
+                </a:solidFill>
+                <a:latin typeface="Consolas" pitchFamily="34" charset="0"/>
+                <a:ea typeface="Consolas" pitchFamily="34" charset="-122"/>
+                <a:cs typeface="Consolas" pitchFamily="34" charset="-120"/>
+              </a:rPr>
+              <a:t> </a:t>
+            </a:r>
+            <a:pPr indent="0" marL="0">
+              <a:lnSpc>
+                <a:spcPct val="130000"/>
+              </a:lnSpc>
+              <a:buNone/>
+            </a:pPr>
+            <a:r>
+              <a:rPr lang="en-US" sz="1300" dirty="0">
+                <a:solidFill>
+                  <a:srgbClr val="E9EEF3"/>
+                </a:solidFill>
+                <a:latin typeface="Consolas" pitchFamily="34" charset="0"/>
+                <a:ea typeface="Consolas" pitchFamily="34" charset="-122"/>
+                <a:cs typeface="Consolas" pitchFamily="34" charset="-120"/>
+              </a:rPr>
+              <a:t>=</a:t>
+            </a:r>
+            <a:pPr indent="0" marL="0">
+              <a:lnSpc>
+                <a:spcPct val="130000"/>
+              </a:lnSpc>
+              <a:buNone/>
+            </a:pPr>
+            <a:r>
+              <a:rPr lang="en-US" sz="1300" dirty="0">
+                <a:solidFill>
+                  <a:srgbClr val="E9EEF3"/>
+                </a:solidFill>
+                <a:latin typeface="Consolas" pitchFamily="34" charset="0"/>
+                <a:ea typeface="Consolas" pitchFamily="34" charset="-122"/>
+                <a:cs typeface="Consolas" pitchFamily="34" charset="-120"/>
+              </a:rPr>
+              <a:t> </a:t>
+            </a:r>
+            <a:pPr indent="0" marL="0">
+              <a:lnSpc>
+                <a:spcPct val="130000"/>
+              </a:lnSpc>
+              <a:buNone/>
+            </a:pPr>
+            <a:r>
+              <a:rPr lang="en-US" sz="1300" dirty="0">
+                <a:solidFill>
+                  <a:srgbClr val="E9EEF3"/>
+                </a:solidFill>
+                <a:latin typeface="Consolas" pitchFamily="34" charset="0"/>
+                <a:ea typeface="Consolas" pitchFamily="34" charset="-122"/>
+                <a:cs typeface="Consolas" pitchFamily="34" charset="-120"/>
+              </a:rPr>
+              <a:t>[</a:t>
+            </a:r>
+            <a:pPr indent="0" marL="0">
+              <a:lnSpc>
+                <a:spcPct val="130000"/>
+              </a:lnSpc>
+              <a:buNone/>
+            </a:pPr>
+            <a:r>
+              <a:rPr lang="en-US" sz="1300" dirty="0">
+                <a:solidFill>
+                  <a:srgbClr val="E9EEF3"/>
+                </a:solidFill>
+                <a:latin typeface="Consolas" pitchFamily="34" charset="0"/>
+                <a:ea typeface="Consolas" pitchFamily="34" charset="-122"/>
+                <a:cs typeface="Consolas" pitchFamily="34" charset="-120"/>
+              </a:rPr>
+              <a:t>n</a:t>
+            </a:r>
+            <a:pPr indent="0" marL="0">
+              <a:lnSpc>
+                <a:spcPct val="130000"/>
+              </a:lnSpc>
+              <a:buNone/>
+            </a:pPr>
+            <a:r>
+              <a:rPr lang="en-US" sz="1300" dirty="0">
+                <a:solidFill>
+                  <a:srgbClr val="E9EEF3"/>
+                </a:solidFill>
+                <a:latin typeface="Consolas" pitchFamily="34" charset="0"/>
+                <a:ea typeface="Consolas" pitchFamily="34" charset="-122"/>
+                <a:cs typeface="Consolas" pitchFamily="34" charset="-120"/>
+              </a:rPr>
+              <a:t>^</a:t>
+            </a:r>
+            <a:pPr indent="0" marL="0">
+              <a:lnSpc>
+                <a:spcPct val="130000"/>
+              </a:lnSpc>
+              <a:buNone/>
+            </a:pPr>
+            <a:r>
+              <a:rPr lang="en-US" sz="1300" dirty="0">
+                <a:solidFill>
+                  <a:srgbClr val="F2C88F"/>
+                </a:solidFill>
+                <a:latin typeface="Consolas" pitchFamily="34" charset="0"/>
+                <a:ea typeface="Consolas" pitchFamily="34" charset="-122"/>
+                <a:cs typeface="Consolas" pitchFamily="34" charset="-120"/>
+              </a:rPr>
+              <a:t>2</a:t>
+            </a:r>
+            <a:pPr indent="0" marL="0">
+              <a:lnSpc>
+                <a:spcPct val="130000"/>
+              </a:lnSpc>
+              <a:buNone/>
+            </a:pPr>
+            <a:r>
+              <a:rPr lang="en-US" sz="1300" dirty="0">
+                <a:solidFill>
+                  <a:srgbClr val="E9EEF3"/>
+                </a:solidFill>
+                <a:latin typeface="Consolas" pitchFamily="34" charset="0"/>
+                <a:ea typeface="Consolas" pitchFamily="34" charset="-122"/>
+                <a:cs typeface="Consolas" pitchFamily="34" charset="-120"/>
+              </a:rPr>
+              <a:t> </a:t>
+            </a:r>
+            <a:pPr indent="0" marL="0">
+              <a:lnSpc>
+                <a:spcPct val="130000"/>
+              </a:lnSpc>
+              <a:buNone/>
+            </a:pPr>
+            <a:r>
+              <a:rPr lang="en-US" sz="1300" b="1" dirty="0">
+                <a:solidFill>
+                  <a:srgbClr val="E8963C"/>
+                </a:solidFill>
+                <a:latin typeface="Consolas" pitchFamily="34" charset="0"/>
+                <a:ea typeface="Consolas" pitchFamily="34" charset="-122"/>
+                <a:cs typeface="Consolas" pitchFamily="34" charset="-120"/>
+              </a:rPr>
+              <a:t>for</a:t>
+            </a:r>
+            <a:pPr indent="0" marL="0">
+              <a:lnSpc>
+                <a:spcPct val="130000"/>
+              </a:lnSpc>
+              <a:buNone/>
+            </a:pPr>
+            <a:r>
+              <a:rPr lang="en-US" sz="1300" dirty="0">
+                <a:solidFill>
+                  <a:srgbClr val="E9EEF3"/>
+                </a:solidFill>
+                <a:latin typeface="Consolas" pitchFamily="34" charset="0"/>
+                <a:ea typeface="Consolas" pitchFamily="34" charset="-122"/>
+                <a:cs typeface="Consolas" pitchFamily="34" charset="-120"/>
+              </a:rPr>
+              <a:t> </a:t>
+            </a:r>
+            <a:pPr indent="0" marL="0">
+              <a:lnSpc>
+                <a:spcPct val="130000"/>
+              </a:lnSpc>
+              <a:buNone/>
+            </a:pPr>
+            <a:r>
+              <a:rPr lang="en-US" sz="1300" dirty="0">
+                <a:solidFill>
+                  <a:srgbClr val="E9EEF3"/>
+                </a:solidFill>
+                <a:latin typeface="Consolas" pitchFamily="34" charset="0"/>
+                <a:ea typeface="Consolas" pitchFamily="34" charset="-122"/>
+                <a:cs typeface="Consolas" pitchFamily="34" charset="-120"/>
+              </a:rPr>
+              <a:t>n</a:t>
+            </a:r>
+            <a:pPr indent="0" marL="0">
+              <a:lnSpc>
+                <a:spcPct val="130000"/>
+              </a:lnSpc>
+              <a:buNone/>
+            </a:pPr>
+            <a:r>
+              <a:rPr lang="en-US" sz="1300" dirty="0">
+                <a:solidFill>
+                  <a:srgbClr val="E9EEF3"/>
+                </a:solidFill>
+                <a:latin typeface="Consolas" pitchFamily="34" charset="0"/>
+                <a:ea typeface="Consolas" pitchFamily="34" charset="-122"/>
+                <a:cs typeface="Consolas" pitchFamily="34" charset="-120"/>
+              </a:rPr>
+              <a:t> </a:t>
+            </a:r>
+            <a:pPr indent="0" marL="0">
+              <a:lnSpc>
+                <a:spcPct val="130000"/>
+              </a:lnSpc>
+              <a:buNone/>
+            </a:pPr>
+            <a:r>
+              <a:rPr lang="en-US" sz="1300" b="1" dirty="0">
+                <a:solidFill>
+                  <a:srgbClr val="E8963C"/>
+                </a:solidFill>
+                <a:latin typeface="Consolas" pitchFamily="34" charset="0"/>
+                <a:ea typeface="Consolas" pitchFamily="34" charset="-122"/>
+                <a:cs typeface="Consolas" pitchFamily="34" charset="-120"/>
+              </a:rPr>
+              <a:t>in</a:t>
+            </a:r>
+            <a:pPr indent="0" marL="0">
+              <a:lnSpc>
+                <a:spcPct val="130000"/>
+              </a:lnSpc>
+              <a:buNone/>
+            </a:pPr>
+            <a:r>
+              <a:rPr lang="en-US" sz="1300" dirty="0">
+                <a:solidFill>
+                  <a:srgbClr val="E9EEF3"/>
+                </a:solidFill>
+                <a:latin typeface="Consolas" pitchFamily="34" charset="0"/>
+                <a:ea typeface="Consolas" pitchFamily="34" charset="-122"/>
+                <a:cs typeface="Consolas" pitchFamily="34" charset="-120"/>
+              </a:rPr>
+              <a:t> </a:t>
+            </a:r>
+            <a:pPr indent="0" marL="0">
+              <a:lnSpc>
+                <a:spcPct val="130000"/>
+              </a:lnSpc>
+              <a:buNone/>
+            </a:pPr>
+            <a:r>
+              <a:rPr lang="en-US" sz="1300" dirty="0">
+                <a:solidFill>
+                  <a:srgbClr val="F2C88F"/>
+                </a:solidFill>
+                <a:latin typeface="Consolas" pitchFamily="34" charset="0"/>
+                <a:ea typeface="Consolas" pitchFamily="34" charset="-122"/>
+                <a:cs typeface="Consolas" pitchFamily="34" charset="-120"/>
+              </a:rPr>
+              <a:t>1</a:t>
+            </a:r>
+            <a:pPr indent="0" marL="0">
+              <a:lnSpc>
+                <a:spcPct val="130000"/>
+              </a:lnSpc>
+              <a:buNone/>
+            </a:pPr>
+            <a:r>
+              <a:rPr lang="en-US" sz="1300" dirty="0">
+                <a:solidFill>
+                  <a:srgbClr val="E9EEF3"/>
+                </a:solidFill>
+                <a:latin typeface="Consolas" pitchFamily="34" charset="0"/>
+                <a:ea typeface="Consolas" pitchFamily="34" charset="-122"/>
+                <a:cs typeface="Consolas" pitchFamily="34" charset="-120"/>
+              </a:rPr>
+              <a:t>:</a:t>
+            </a:r>
+            <a:pPr indent="0" marL="0">
+              <a:lnSpc>
+                <a:spcPct val="130000"/>
+              </a:lnSpc>
+              <a:buNone/>
+            </a:pPr>
+            <a:r>
+              <a:rPr lang="en-US" sz="1300" dirty="0">
+                <a:solidFill>
+                  <a:srgbClr val="F2C88F"/>
+                </a:solidFill>
+                <a:latin typeface="Consolas" pitchFamily="34" charset="0"/>
+                <a:ea typeface="Consolas" pitchFamily="34" charset="-122"/>
+                <a:cs typeface="Consolas" pitchFamily="34" charset="-120"/>
+              </a:rPr>
+              <a:t>4</a:t>
+            </a:r>
+            <a:pPr indent="0" marL="0">
+              <a:lnSpc>
+                <a:spcPct val="130000"/>
+              </a:lnSpc>
+              <a:buNone/>
+            </a:pPr>
+            <a:r>
+              <a:rPr lang="en-US" sz="1300" dirty="0">
+                <a:solidFill>
+                  <a:srgbClr val="E9EEF3"/>
+                </a:solidFill>
+                <a:latin typeface="Consolas" pitchFamily="34" charset="0"/>
+                <a:ea typeface="Consolas" pitchFamily="34" charset="-122"/>
+                <a:cs typeface="Consolas" pitchFamily="34" charset="-120"/>
+              </a:rPr>
+              <a:t>]</a:t>
+            </a:r>
+            <a:endParaRPr lang="en-US" sz="1300" dirty="0"/>
+          </a:p>
+          <a:p>
+            <a:pPr indent="0" marL="0">
+              <a:lnSpc>
+                <a:spcPct val="130000"/>
+              </a:lnSpc>
+              <a:buNone/>
+            </a:pPr>
+            <a:r>
+              <a:rPr lang="en-US" sz="1300" dirty="0">
+                <a:solidFill>
+                  <a:srgbClr val="E9EEF3"/>
+                </a:solidFill>
+                <a:latin typeface="Consolas" pitchFamily="34" charset="0"/>
+                <a:ea typeface="Consolas" pitchFamily="34" charset="-122"/>
+                <a:cs typeface="Consolas" pitchFamily="34" charset="-120"/>
+              </a:rPr>
+              <a:t>observado</a:t>
+            </a:r>
+            <a:pPr indent="0" marL="0">
+              <a:lnSpc>
+                <a:spcPct val="130000"/>
+              </a:lnSpc>
+              <a:buNone/>
+            </a:pPr>
+            <a:r>
+              <a:rPr lang="en-US" sz="1300" dirty="0">
+                <a:solidFill>
+                  <a:srgbClr val="E9EEF3"/>
+                </a:solidFill>
+                <a:latin typeface="Consolas" pitchFamily="34" charset="0"/>
+                <a:ea typeface="Consolas" pitchFamily="34" charset="-122"/>
+                <a:cs typeface="Consolas" pitchFamily="34" charset="-120"/>
+              </a:rPr>
+              <a:t> </a:t>
+            </a:r>
+            <a:pPr indent="0" marL="0">
+              <a:lnSpc>
+                <a:spcPct val="130000"/>
+              </a:lnSpc>
+              <a:buNone/>
+            </a:pPr>
+            <a:r>
+              <a:rPr lang="en-US" sz="1300" dirty="0">
+                <a:solidFill>
+                  <a:srgbClr val="E9EEF3"/>
+                </a:solidFill>
+                <a:latin typeface="Consolas" pitchFamily="34" charset="0"/>
+                <a:ea typeface="Consolas" pitchFamily="34" charset="-122"/>
+                <a:cs typeface="Consolas" pitchFamily="34" charset="-120"/>
+              </a:rPr>
+              <a:t>=</a:t>
+            </a:r>
+            <a:pPr indent="0" marL="0">
+              <a:lnSpc>
+                <a:spcPct val="130000"/>
+              </a:lnSpc>
+              <a:buNone/>
+            </a:pPr>
+            <a:r>
+              <a:rPr lang="en-US" sz="1300" dirty="0">
+                <a:solidFill>
+                  <a:srgbClr val="E9EEF3"/>
+                </a:solidFill>
+                <a:latin typeface="Consolas" pitchFamily="34" charset="0"/>
+                <a:ea typeface="Consolas" pitchFamily="34" charset="-122"/>
+                <a:cs typeface="Consolas" pitchFamily="34" charset="-120"/>
+              </a:rPr>
+              <a:t>=</a:t>
+            </a:r>
+            <a:pPr indent="0" marL="0">
+              <a:lnSpc>
+                <a:spcPct val="130000"/>
+              </a:lnSpc>
+              <a:buNone/>
+            </a:pPr>
+            <a:r>
+              <a:rPr lang="en-US" sz="1300" dirty="0">
+                <a:solidFill>
+                  <a:srgbClr val="E9EEF3"/>
+                </a:solidFill>
+                <a:latin typeface="Consolas" pitchFamily="34" charset="0"/>
+                <a:ea typeface="Consolas" pitchFamily="34" charset="-122"/>
+                <a:cs typeface="Consolas" pitchFamily="34" charset="-120"/>
+              </a:rPr>
+              <a:t> </a:t>
+            </a:r>
+            <a:pPr indent="0" marL="0">
+              <a:lnSpc>
+                <a:spcPct val="130000"/>
+              </a:lnSpc>
+              <a:buNone/>
+            </a:pPr>
+            <a:r>
+              <a:rPr lang="en-US" sz="1300" dirty="0">
+                <a:solidFill>
+                  <a:srgbClr val="E9EEF3"/>
+                </a:solidFill>
+                <a:latin typeface="Consolas" pitchFamily="34" charset="0"/>
+                <a:ea typeface="Consolas" pitchFamily="34" charset="-122"/>
+                <a:cs typeface="Consolas" pitchFamily="34" charset="-120"/>
+              </a:rPr>
+              <a:t>gerado</a:t>
+            </a:r>
+            <a:endParaRPr lang="en-US" sz="1300" dirty="0"/>
+          </a:p>
+        </p:txBody>
+      </p:sp>
+      <p:sp>
+        <p:nvSpPr>
+          <p:cNvPr id="11" name="TextBox 10"/>
+          <p:cNvSpPr txBox="1"/>
+          <p:nvPr/>
+        </p:nvSpPr>
+        <p:spPr>
+          <a:xfrm>
+            <a:off x="548640" y="3506360"/>
+            <a:ext cx="11094415" cy="274320"/>
+          </a:xfrm>
+          <a:prstGeom prst="rect">
+            <a:avLst/>
+          </a:prstGeom>
+          <a:noFill/>
+        </p:spPr>
+        <p:txBody>
+          <a:bodyPr wrap="square">
+            <a:spAutoFit/>
+          </a:bodyPr>
+          <a:lstStyle/>
+          <a:p>
+            <a:pPr algn="l"/>
+            <a:r>
+              <a:rPr sz="1100" b="1" i="0">
+                <a:solidFill>
+                  <a:srgbClr val="2C7A8C"/>
+                </a:solidFill>
+                <a:latin typeface="Calibri"/>
+              </a:rPr>
+              <a:t>RESULTADO DE CADA PARTE</a:t>
+            </a:r>
+          </a:p>
+        </p:txBody>
+      </p:sp>
+      <p:sp>
+        <p:nvSpPr>
+          <p:cNvPr id="12" name="Rounded Rectangle 11"/>
+          <p:cNvSpPr/>
+          <p:nvPr/>
+        </p:nvSpPr>
+        <p:spPr>
+          <a:xfrm>
+            <a:off x="548640" y="3826400"/>
+            <a:ext cx="11094415" cy="1234440"/>
+          </a:xfrm>
+          <a:prstGeom prst="roundRect">
+            <a:avLst>
+              <a:gd name="adj" fmla="val 7407"/>
+            </a:avLst>
+          </a:prstGeom>
+          <a:solidFill>
+            <a:srgbClr val="E9F2F3"/>
+          </a:solidFill>
+          <a:ln>
+            <a:noFill/>
+          </a:ln>
+          <a:effectLst/>
+        </p:spPr>
+        <p:style>
+          <a:lnRef idx="1">
+            <a:schemeClr val="accent1"/>
+          </a:lnRef>
+          <a:fillRef idx="3">
+            <a:schemeClr val="accent1"/>
+          </a:fillRef>
+          <a:effectRef idx="2">
+            <a:schemeClr val="accent1"/>
+          </a:effectRef>
+          <a:fontRef idx="minor">
+            <a:schemeClr val="lt1"/>
+          </a:fontRef>
+        </p:style>
+        <p:txBody>
+          <a:bodyPr rtlCol="0" anchor="ctr"/>
+          <a:lstStyle/>
+          <a:p>
+            <a:pPr algn="ctr"/>
+          </a:p>
+        </p:txBody>
+      </p:sp>
+      <p:sp>
+        <p:nvSpPr>
+          <p:cNvPr id="13" name="TextBox 12"/>
+          <p:cNvSpPr txBox="1"/>
+          <p:nvPr/>
+        </p:nvSpPr>
+        <p:spPr>
+          <a:xfrm>
+            <a:off x="822960" y="3963560"/>
+            <a:ext cx="10545775" cy="1097280"/>
+          </a:xfrm>
+          <a:prstGeom prst="rect">
+            <a:avLst/>
+          </a:prstGeom>
+          <a:noFill/>
+        </p:spPr>
+        <p:txBody>
+          <a:bodyPr wrap="square">
+            <a:spAutoFit/>
+          </a:bodyPr>
+          <a:lstStyle/>
+          <a:p>
+            <a:pPr>
+              <a:lnSpc>
+                <a:spcPct val="125000"/>
+              </a:lnSpc>
+            </a:pPr>
+            <a:r>
+              <a:rPr sz="1250" b="1">
+                <a:solidFill>
+                  <a:srgbClr val="2C7A8C"/>
+                </a:solidFill>
+                <a:latin typeface="Consolas"/>
+              </a:rPr>
+              <a:t>observado</a:t>
+            </a:r>
+            <a:r>
+              <a:rPr sz="1250" b="0">
+                <a:solidFill>
+                  <a:srgbClr val="1B2733"/>
+                </a:solidFill>
+                <a:latin typeface="Consolas"/>
+              </a:rPr>
+              <a:t>  →  [1, 4, 9, 16]</a:t>
+            </a:r>
+          </a:p>
+          <a:p>
+            <a:pPr>
+              <a:lnSpc>
+                <a:spcPct val="125000"/>
+              </a:lnSpc>
+            </a:pPr>
+            <a:r>
+              <a:rPr sz="1250" b="1">
+                <a:solidFill>
+                  <a:srgbClr val="2C7A8C"/>
+                </a:solidFill>
+                <a:latin typeface="Consolas"/>
+              </a:rPr>
+              <a:t>gerado</a:t>
+            </a:r>
+            <a:r>
+              <a:rPr sz="1250" b="0">
+                <a:solidFill>
+                  <a:srgbClr val="1B2733"/>
+                </a:solidFill>
+                <a:latin typeface="Consolas"/>
+              </a:rPr>
+              <a:t>  →  [1, 4, 9, 16]  (n² para n = 1, 2, 3, 4)</a:t>
+            </a:r>
+          </a:p>
+          <a:p>
+            <a:pPr>
+              <a:lnSpc>
+                <a:spcPct val="125000"/>
+              </a:lnSpc>
+            </a:pPr>
+            <a:r>
+              <a:rPr sz="1250" b="1">
+                <a:solidFill>
+                  <a:srgbClr val="2C7A8C"/>
+                </a:solidFill>
+                <a:latin typeface="Consolas"/>
+              </a:rPr>
+              <a:t>observado == gerado</a:t>
+            </a:r>
+            <a:r>
+              <a:rPr sz="1250" b="0">
+                <a:solidFill>
+                  <a:srgbClr val="1B2733"/>
+                </a:solidFill>
+                <a:latin typeface="Consolas"/>
+              </a:rPr>
+              <a:t>  →  true  (as duas listas são idênticas)</a:t>
+            </a:r>
+          </a:p>
+        </p:txBody>
+      </p:sp>
+      <p:sp>
+        <p:nvSpPr>
+          <p:cNvPr id="14" name="TextBox 13"/>
+          <p:cNvSpPr txBox="1"/>
+          <p:nvPr/>
+        </p:nvSpPr>
+        <p:spPr>
+          <a:xfrm>
+            <a:off x="548640" y="6473952"/>
+            <a:ext cx="5486400" cy="274320"/>
+          </a:xfrm>
+          <a:prstGeom prst="rect">
+            <a:avLst/>
+          </a:prstGeom>
+          <a:noFill/>
+        </p:spPr>
+        <p:txBody>
+          <a:bodyPr wrap="square">
+            <a:spAutoFit/>
+          </a:bodyPr>
+          <a:lstStyle/>
+          <a:p>
+            <a:pPr algn="l"/>
+            <a:r>
+              <a:rPr sz="1000" b="0" i="0">
+                <a:solidFill>
+                  <a:srgbClr val="9AA5B1"/>
+                </a:solidFill>
+                <a:latin typeface="Calibri"/>
+              </a:rPr>
+              <a:t>Aula 2 · Pensamento Indutivo</a:t>
+            </a:r>
+          </a:p>
+        </p:txBody>
+      </p:sp>
+      <p:sp>
+        <p:nvSpPr>
+          <p:cNvPr id="15" name="TextBox 14"/>
+          <p:cNvSpPr txBox="1"/>
+          <p:nvPr/>
+        </p:nvSpPr>
+        <p:spPr>
+          <a:xfrm>
+            <a:off x="10271455" y="6473952"/>
+            <a:ext cx="1371600" cy="274320"/>
+          </a:xfrm>
+          <a:prstGeom prst="rect">
+            <a:avLst/>
+          </a:prstGeom>
+          <a:noFill/>
+        </p:spPr>
+        <p:txBody>
+          <a:bodyPr wrap="square">
+            <a:spAutoFit/>
+          </a:bodyPr>
+          <a:lstStyle/>
+          <a:p>
+            <a:pPr algn="l"/>
+            <a:r>
+              <a:rPr sz="1000" b="0" i="0">
+                <a:solidFill>
+                  <a:srgbClr val="9AA5B1"/>
+                </a:solidFill>
+                <a:latin typeface="Calibri"/>
+              </a:rPr>
+              <a:t>14 / 27</a:t>
+            </a:r>
+          </a:p>
+        </p:txBody>
+      </p:sp>
+    </p:spTree>
+  </p:cSld>
+  <p:clrMapOvr>
+    <a:masterClrMapping/>
+  </p:clrMapOvr>
+</p:sld>
+</file>
+
+<file path=ppt/slides/slide25.xml><?xml version="1.0" encoding="utf-8"?>
+<p:sld xmlns:a="http://schemas.openxmlformats.org/drawingml/2006/main" xmlns:p="http://schemas.openxmlformats.org/presentationml/2006/main" xmlns:r="http://schemas.openxmlformats.org/officeDocument/2006/relationships">
+  <p:cSld>
+    <p:spTree>
+      <p:nvGrpSpPr>
+        <p:cNvPr id="1" name=""/>
+        <p:cNvGrpSpPr/>
+        <p:nvPr/>
+      </p:nvGrpSpPr>
+      <p:grpSpPr/>
+      <p:sp>
+        <p:nvSpPr>
+          <p:cNvPr id="2" name="TextBox 1"/>
+          <p:cNvSpPr txBox="1"/>
+          <p:nvPr/>
+        </p:nvSpPr>
+        <p:spPr>
+          <a:xfrm>
+            <a:off x="548640" y="457200"/>
+            <a:ext cx="11094415" cy="320040"/>
+          </a:xfrm>
+          <a:prstGeom prst="rect">
+            <a:avLst/>
+          </a:prstGeom>
+          <a:noFill/>
+        </p:spPr>
+        <p:txBody>
+          <a:bodyPr wrap="square">
+            <a:spAutoFit/>
+          </a:bodyPr>
+          <a:lstStyle/>
+          <a:p>
+            <a:pPr algn="l"/>
+            <a:r>
+              <a:rPr sz="1200" b="1" i="0">
+                <a:solidFill>
+                  <a:srgbClr val="2C7A8C"/>
+                </a:solidFill>
+                <a:latin typeface="Calibri"/>
+              </a:rPr>
+              <a:t>TAREFA 3 DE 10  ·  2.3  ·  RESULTADO</a:t>
+            </a:r>
+          </a:p>
+        </p:txBody>
+      </p:sp>
+      <p:sp>
+        <p:nvSpPr>
+          <p:cNvPr id="3" name="TextBox 2"/>
+          <p:cNvSpPr txBox="1"/>
+          <p:nvPr/>
+        </p:nvSpPr>
+        <p:spPr>
+          <a:xfrm>
+            <a:off x="548640" y="800000"/>
+            <a:ext cx="11094415" cy="700000"/>
+          </a:xfrm>
+          <a:prstGeom prst="rect">
+            <a:avLst/>
+          </a:prstGeom>
+          <a:noFill/>
+        </p:spPr>
+        <p:txBody>
+          <a:bodyPr wrap="square">
+            <a:spAutoFit/>
+          </a:bodyPr>
+          <a:lstStyle/>
+          <a:p>
+            <a:pPr algn="l"/>
+            <a:r>
+              <a:rPr sz="2500" b="1" i="0">
+                <a:solidFill>
+                  <a:srgbClr val="1B3A5C"/>
+                </a:solidFill>
+                <a:latin typeface="Cambria"/>
+              </a:rPr>
+              <a:t>O que cada parte devolve?</a:t>
+            </a:r>
+          </a:p>
+        </p:txBody>
+      </p:sp>
+      <p:sp>
+        <p:nvSpPr>
+          <p:cNvPr id="8" name="Text 6"/>
+          <p:cNvSpPr/>
+          <p:nvPr/>
+        </p:nvSpPr>
+        <p:spPr>
+          <a:xfrm>
+            <a:off x="548640" y="1650000"/>
+            <a:ext cx="11094415" cy="274320"/>
+          </a:xfrm>
+          <a:prstGeom prst="rect">
+            <a:avLst/>
+          </a:prstGeom>
+          <a:noFill/>
+          <a:ln/>
+        </p:spPr>
+        <p:txBody>
+          <a:bodyPr wrap="square" lIns="0" tIns="0" rIns="0" bIns="0" rtlCol="0" anchor="ctr"/>
+          <a:lstStyle/>
+          <a:p>
+            <a:pPr indent="0" marL="0">
+              <a:buNone/>
+            </a:pPr>
+            <a:r>
+              <a:rPr lang="en-US" sz="1150" b="1" spc="120" kern="0" dirty="0">
+                <a:solidFill>
+                  <a:srgbClr val="44546A"/>
+                </a:solidFill>
+                <a:latin typeface="Calibri" pitchFamily="34" charset="0"/>
+                <a:ea typeface="Calibri" pitchFamily="34" charset="-122"/>
+                <a:cs typeface="Calibri" pitchFamily="34" charset="-120"/>
+              </a:rPr>
+              <a:t>EXEMPLO EM JULIA</a:t>
+            </a:r>
+            <a:endParaRPr lang="en-US" sz="1150" dirty="0"/>
+          </a:p>
+        </p:txBody>
+      </p:sp>
+      <p:sp>
+        <p:nvSpPr>
+          <p:cNvPr id="9" name="Shape 7"/>
+          <p:cNvSpPr/>
+          <p:nvPr/>
+        </p:nvSpPr>
+        <p:spPr>
+          <a:xfrm>
+            <a:off x="548640" y="2015760"/>
+            <a:ext cx="11094415" cy="1160400"/>
+          </a:xfrm>
+          <a:prstGeom prst="roundRect">
+            <a:avLst>
+              <a:gd name="adj" fmla="val 3721"/>
+            </a:avLst>
+          </a:prstGeom>
+          <a:solidFill>
+            <a:srgbClr val="12233B"/>
+          </a:solidFill>
+          <a:ln/>
+          <a:effectLst>
+            <a:outerShdw sx="100000" sy="100000" kx="0" ky="0" algn="bl" rotWithShape="0" blurRad="76200" dist="25400" dir="5400000">
+              <a:srgbClr val="1B3A5C">
+                <a:alpha val="15000"/>
+              </a:srgbClr>
+            </a:outerShdw>
+          </a:effectLst>
+        </p:spPr>
+        <p:txBody>
+          <a:bodyPr/>
+          <a:p/>
+        </p:txBody>
+      </p:sp>
+      <p:sp>
+        <p:nvSpPr>
+          <p:cNvPr id="10" name="Text 8"/>
+          <p:cNvSpPr/>
+          <p:nvPr/>
+        </p:nvSpPr>
+        <p:spPr>
+          <a:xfrm>
+            <a:off x="804672" y="2253504"/>
+            <a:ext cx="10582351" cy="684912"/>
+          </a:xfrm>
+          <a:prstGeom prst="rect">
+            <a:avLst/>
+          </a:prstGeom>
+          <a:noFill/>
+          <a:ln/>
+        </p:spPr>
+        <p:txBody>
+          <a:bodyPr wrap="square" lIns="0" tIns="0" rIns="0" bIns="0" rtlCol="0" anchor="t"/>
+          <a:lstStyle/>
+          <a:p>
+            <a:pPr indent="0" marL="0">
+              <a:lnSpc>
+                <a:spcPct val="130000"/>
+              </a:lnSpc>
+              <a:buNone/>
+            </a:pPr>
+            <a:r>
+              <a:rPr lang="en-US" sz="1300" dirty="0">
+                <a:solidFill>
+                  <a:srgbClr val="E9EEF3"/>
+                </a:solidFill>
+                <a:latin typeface="Consolas" pitchFamily="34" charset="0"/>
+                <a:ea typeface="Consolas" pitchFamily="34" charset="-122"/>
+                <a:cs typeface="Consolas" pitchFamily="34" charset="-120"/>
+              </a:rPr>
+              <a:t>seq</a:t>
+            </a:r>
+            <a:pPr indent="0" marL="0">
+              <a:lnSpc>
+                <a:spcPct val="130000"/>
+              </a:lnSpc>
+              <a:buNone/>
+            </a:pPr>
+            <a:r>
+              <a:rPr lang="en-US" sz="1300" dirty="0">
+                <a:solidFill>
+                  <a:srgbClr val="E9EEF3"/>
+                </a:solidFill>
+                <a:latin typeface="Consolas" pitchFamily="34" charset="0"/>
+                <a:ea typeface="Consolas" pitchFamily="34" charset="-122"/>
+                <a:cs typeface="Consolas" pitchFamily="34" charset="-120"/>
+              </a:rPr>
+              <a:t> </a:t>
+            </a:r>
+            <a:pPr indent="0" marL="0">
+              <a:lnSpc>
+                <a:spcPct val="130000"/>
+              </a:lnSpc>
+              <a:buNone/>
+            </a:pPr>
+            <a:r>
+              <a:rPr lang="en-US" sz="1300" dirty="0">
+                <a:solidFill>
+                  <a:srgbClr val="E9EEF3"/>
+                </a:solidFill>
+                <a:latin typeface="Consolas" pitchFamily="34" charset="0"/>
+                <a:ea typeface="Consolas" pitchFamily="34" charset="-122"/>
+                <a:cs typeface="Consolas" pitchFamily="34" charset="-120"/>
+              </a:rPr>
+              <a:t>=</a:t>
+            </a:r>
+            <a:pPr indent="0" marL="0">
+              <a:lnSpc>
+                <a:spcPct val="130000"/>
+              </a:lnSpc>
+              <a:buNone/>
+            </a:pPr>
+            <a:r>
+              <a:rPr lang="en-US" sz="1300" dirty="0">
+                <a:solidFill>
+                  <a:srgbClr val="E9EEF3"/>
+                </a:solidFill>
+                <a:latin typeface="Consolas" pitchFamily="34" charset="0"/>
+                <a:ea typeface="Consolas" pitchFamily="34" charset="-122"/>
+                <a:cs typeface="Consolas" pitchFamily="34" charset="-120"/>
+              </a:rPr>
+              <a:t> </a:t>
+            </a:r>
+            <a:pPr indent="0" marL="0">
+              <a:lnSpc>
+                <a:spcPct val="130000"/>
+              </a:lnSpc>
+              <a:buNone/>
+            </a:pPr>
+            <a:r>
+              <a:rPr lang="en-US" sz="1300" dirty="0">
+                <a:solidFill>
+                  <a:srgbClr val="E9EEF3"/>
+                </a:solidFill>
+                <a:latin typeface="Consolas" pitchFamily="34" charset="0"/>
+                <a:ea typeface="Consolas" pitchFamily="34" charset="-122"/>
+                <a:cs typeface="Consolas" pitchFamily="34" charset="-120"/>
+              </a:rPr>
+              <a:t>[</a:t>
+            </a:r>
+            <a:pPr indent="0" marL="0">
+              <a:lnSpc>
+                <a:spcPct val="130000"/>
+              </a:lnSpc>
+              <a:buNone/>
+            </a:pPr>
+            <a:r>
+              <a:rPr lang="en-US" sz="1300" dirty="0">
+                <a:solidFill>
+                  <a:srgbClr val="F2C88F"/>
+                </a:solidFill>
+                <a:latin typeface="Consolas" pitchFamily="34" charset="0"/>
+                <a:ea typeface="Consolas" pitchFamily="34" charset="-122"/>
+                <a:cs typeface="Consolas" pitchFamily="34" charset="-120"/>
+              </a:rPr>
+              <a:t>1</a:t>
+            </a:r>
+            <a:pPr indent="0" marL="0">
+              <a:lnSpc>
+                <a:spcPct val="130000"/>
+              </a:lnSpc>
+              <a:buNone/>
+            </a:pPr>
+            <a:r>
+              <a:rPr lang="en-US" sz="1300" dirty="0">
+                <a:solidFill>
+                  <a:srgbClr val="E9EEF3"/>
+                </a:solidFill>
+                <a:latin typeface="Consolas" pitchFamily="34" charset="0"/>
+                <a:ea typeface="Consolas" pitchFamily="34" charset="-122"/>
+                <a:cs typeface="Consolas" pitchFamily="34" charset="-120"/>
+              </a:rPr>
+              <a:t>,</a:t>
+            </a:r>
+            <a:pPr indent="0" marL="0">
+              <a:lnSpc>
+                <a:spcPct val="130000"/>
+              </a:lnSpc>
+              <a:buNone/>
+            </a:pPr>
+            <a:r>
+              <a:rPr lang="en-US" sz="1300" dirty="0">
+                <a:solidFill>
+                  <a:srgbClr val="E9EEF3"/>
+                </a:solidFill>
+                <a:latin typeface="Consolas" pitchFamily="34" charset="0"/>
+                <a:ea typeface="Consolas" pitchFamily="34" charset="-122"/>
+                <a:cs typeface="Consolas" pitchFamily="34" charset="-120"/>
+              </a:rPr>
+              <a:t> </a:t>
+            </a:r>
+            <a:pPr indent="0" marL="0">
+              <a:lnSpc>
+                <a:spcPct val="130000"/>
+              </a:lnSpc>
+              <a:buNone/>
+            </a:pPr>
+            <a:r>
+              <a:rPr lang="en-US" sz="1300" dirty="0">
+                <a:solidFill>
+                  <a:srgbClr val="F2C88F"/>
+                </a:solidFill>
+                <a:latin typeface="Consolas" pitchFamily="34" charset="0"/>
+                <a:ea typeface="Consolas" pitchFamily="34" charset="-122"/>
+                <a:cs typeface="Consolas" pitchFamily="34" charset="-120"/>
+              </a:rPr>
+              <a:t>2</a:t>
+            </a:r>
+            <a:pPr indent="0" marL="0">
+              <a:lnSpc>
+                <a:spcPct val="130000"/>
+              </a:lnSpc>
+              <a:buNone/>
+            </a:pPr>
+            <a:r>
+              <a:rPr lang="en-US" sz="1300" dirty="0">
+                <a:solidFill>
+                  <a:srgbClr val="E9EEF3"/>
+                </a:solidFill>
+                <a:latin typeface="Consolas" pitchFamily="34" charset="0"/>
+                <a:ea typeface="Consolas" pitchFamily="34" charset="-122"/>
+                <a:cs typeface="Consolas" pitchFamily="34" charset="-120"/>
+              </a:rPr>
+              <a:t>,</a:t>
+            </a:r>
+            <a:pPr indent="0" marL="0">
+              <a:lnSpc>
+                <a:spcPct val="130000"/>
+              </a:lnSpc>
+              <a:buNone/>
+            </a:pPr>
+            <a:r>
+              <a:rPr lang="en-US" sz="1300" dirty="0">
+                <a:solidFill>
+                  <a:srgbClr val="E9EEF3"/>
+                </a:solidFill>
+                <a:latin typeface="Consolas" pitchFamily="34" charset="0"/>
+                <a:ea typeface="Consolas" pitchFamily="34" charset="-122"/>
+                <a:cs typeface="Consolas" pitchFamily="34" charset="-120"/>
+              </a:rPr>
+              <a:t> </a:t>
+            </a:r>
+            <a:pPr indent="0" marL="0">
+              <a:lnSpc>
+                <a:spcPct val="130000"/>
+              </a:lnSpc>
+              <a:buNone/>
+            </a:pPr>
+            <a:r>
+              <a:rPr lang="en-US" sz="1300" dirty="0">
+                <a:solidFill>
+                  <a:srgbClr val="F2C88F"/>
+                </a:solidFill>
+                <a:latin typeface="Consolas" pitchFamily="34" charset="0"/>
+                <a:ea typeface="Consolas" pitchFamily="34" charset="-122"/>
+                <a:cs typeface="Consolas" pitchFamily="34" charset="-120"/>
+              </a:rPr>
+              <a:t>4</a:t>
+            </a:r>
+            <a:pPr indent="0" marL="0">
+              <a:lnSpc>
+                <a:spcPct val="130000"/>
+              </a:lnSpc>
+              <a:buNone/>
+            </a:pPr>
+            <a:r>
+              <a:rPr lang="en-US" sz="1300" dirty="0">
+                <a:solidFill>
+                  <a:srgbClr val="E9EEF3"/>
+                </a:solidFill>
+                <a:latin typeface="Consolas" pitchFamily="34" charset="0"/>
+                <a:ea typeface="Consolas" pitchFamily="34" charset="-122"/>
+                <a:cs typeface="Consolas" pitchFamily="34" charset="-120"/>
+              </a:rPr>
+              <a:t>,</a:t>
+            </a:r>
+            <a:pPr indent="0" marL="0">
+              <a:lnSpc>
+                <a:spcPct val="130000"/>
+              </a:lnSpc>
+              <a:buNone/>
+            </a:pPr>
+            <a:r>
+              <a:rPr lang="en-US" sz="1300" dirty="0">
+                <a:solidFill>
+                  <a:srgbClr val="E9EEF3"/>
+                </a:solidFill>
+                <a:latin typeface="Consolas" pitchFamily="34" charset="0"/>
+                <a:ea typeface="Consolas" pitchFamily="34" charset="-122"/>
+                <a:cs typeface="Consolas" pitchFamily="34" charset="-120"/>
+              </a:rPr>
+              <a:t> </a:t>
+            </a:r>
+            <a:pPr indent="0" marL="0">
+              <a:lnSpc>
+                <a:spcPct val="130000"/>
+              </a:lnSpc>
+              <a:buNone/>
+            </a:pPr>
+            <a:r>
+              <a:rPr lang="en-US" sz="1300" dirty="0">
+                <a:solidFill>
+                  <a:srgbClr val="F2C88F"/>
+                </a:solidFill>
+                <a:latin typeface="Consolas" pitchFamily="34" charset="0"/>
+                <a:ea typeface="Consolas" pitchFamily="34" charset="-122"/>
+                <a:cs typeface="Consolas" pitchFamily="34" charset="-120"/>
+              </a:rPr>
+              <a:t>8</a:t>
+            </a:r>
+            <a:pPr indent="0" marL="0">
+              <a:lnSpc>
+                <a:spcPct val="130000"/>
+              </a:lnSpc>
+              <a:buNone/>
+            </a:pPr>
+            <a:r>
+              <a:rPr lang="en-US" sz="1300" dirty="0">
+                <a:solidFill>
+                  <a:srgbClr val="E9EEF3"/>
+                </a:solidFill>
+                <a:latin typeface="Consolas" pitchFamily="34" charset="0"/>
+                <a:ea typeface="Consolas" pitchFamily="34" charset="-122"/>
+                <a:cs typeface="Consolas" pitchFamily="34" charset="-120"/>
+              </a:rPr>
+              <a:t>,</a:t>
+            </a:r>
+            <a:pPr indent="0" marL="0">
+              <a:lnSpc>
+                <a:spcPct val="130000"/>
+              </a:lnSpc>
+              <a:buNone/>
+            </a:pPr>
+            <a:r>
+              <a:rPr lang="en-US" sz="1300" dirty="0">
+                <a:solidFill>
+                  <a:srgbClr val="E9EEF3"/>
+                </a:solidFill>
+                <a:latin typeface="Consolas" pitchFamily="34" charset="0"/>
+                <a:ea typeface="Consolas" pitchFamily="34" charset="-122"/>
+                <a:cs typeface="Consolas" pitchFamily="34" charset="-120"/>
+              </a:rPr>
+              <a:t> </a:t>
+            </a:r>
+            <a:pPr indent="0" marL="0">
+              <a:lnSpc>
+                <a:spcPct val="130000"/>
+              </a:lnSpc>
+              <a:buNone/>
+            </a:pPr>
+            <a:r>
+              <a:rPr lang="en-US" sz="1300" dirty="0">
+                <a:solidFill>
+                  <a:srgbClr val="F2C88F"/>
+                </a:solidFill>
+                <a:latin typeface="Consolas" pitchFamily="34" charset="0"/>
+                <a:ea typeface="Consolas" pitchFamily="34" charset="-122"/>
+                <a:cs typeface="Consolas" pitchFamily="34" charset="-120"/>
+              </a:rPr>
+              <a:t>15</a:t>
+            </a:r>
+            <a:pPr indent="0" marL="0">
+              <a:lnSpc>
+                <a:spcPct val="130000"/>
+              </a:lnSpc>
+              <a:buNone/>
+            </a:pPr>
+            <a:r>
+              <a:rPr lang="en-US" sz="1300" dirty="0">
+                <a:solidFill>
+                  <a:srgbClr val="E9EEF3"/>
+                </a:solidFill>
+                <a:latin typeface="Consolas" pitchFamily="34" charset="0"/>
+                <a:ea typeface="Consolas" pitchFamily="34" charset="-122"/>
+                <a:cs typeface="Consolas" pitchFamily="34" charset="-120"/>
+              </a:rPr>
+              <a:t>]</a:t>
+            </a:r>
+            <a:endParaRPr lang="en-US" sz="1300" dirty="0"/>
+          </a:p>
+          <a:p>
+            <a:pPr indent="0" marL="0">
+              <a:lnSpc>
+                <a:spcPct val="130000"/>
+              </a:lnSpc>
+              <a:buNone/>
+            </a:pPr>
+            <a:r>
+              <a:rPr lang="en-US" sz="1300" dirty="0">
+                <a:solidFill>
+                  <a:srgbClr val="E9EEF3"/>
+                </a:solidFill>
+                <a:latin typeface="Consolas" pitchFamily="34" charset="0"/>
+                <a:ea typeface="Consolas" pitchFamily="34" charset="-122"/>
+                <a:cs typeface="Consolas" pitchFamily="34" charset="-120"/>
+              </a:rPr>
+              <a:t>all</a:t>
+            </a:r>
+            <a:pPr indent="0" marL="0">
+              <a:lnSpc>
+                <a:spcPct val="130000"/>
+              </a:lnSpc>
+              <a:buNone/>
+            </a:pPr>
+            <a:r>
+              <a:rPr lang="en-US" sz="1300" dirty="0">
+                <a:solidFill>
+                  <a:srgbClr val="E9EEF3"/>
+                </a:solidFill>
+                <a:latin typeface="Consolas" pitchFamily="34" charset="0"/>
+                <a:ea typeface="Consolas" pitchFamily="34" charset="-122"/>
+                <a:cs typeface="Consolas" pitchFamily="34" charset="-120"/>
+              </a:rPr>
+              <a:t>(</a:t>
+            </a:r>
+            <a:pPr indent="0" marL="0">
+              <a:lnSpc>
+                <a:spcPct val="130000"/>
+              </a:lnSpc>
+              <a:buNone/>
+            </a:pPr>
+            <a:r>
+              <a:rPr lang="en-US" sz="1300" dirty="0">
+                <a:solidFill>
+                  <a:srgbClr val="E9EEF3"/>
+                </a:solidFill>
+                <a:latin typeface="Consolas" pitchFamily="34" charset="0"/>
+                <a:ea typeface="Consolas" pitchFamily="34" charset="-122"/>
+                <a:cs typeface="Consolas" pitchFamily="34" charset="-120"/>
+              </a:rPr>
+              <a:t>diff</a:t>
+            </a:r>
+            <a:pPr indent="0" marL="0">
+              <a:lnSpc>
+                <a:spcPct val="130000"/>
+              </a:lnSpc>
+              <a:buNone/>
+            </a:pPr>
+            <a:r>
+              <a:rPr lang="en-US" sz="1300" dirty="0">
+                <a:solidFill>
+                  <a:srgbClr val="E9EEF3"/>
+                </a:solidFill>
+                <a:latin typeface="Consolas" pitchFamily="34" charset="0"/>
+                <a:ea typeface="Consolas" pitchFamily="34" charset="-122"/>
+                <a:cs typeface="Consolas" pitchFamily="34" charset="-120"/>
+              </a:rPr>
+              <a:t>(</a:t>
+            </a:r>
+            <a:pPr indent="0" marL="0">
+              <a:lnSpc>
+                <a:spcPct val="130000"/>
+              </a:lnSpc>
+              <a:buNone/>
+            </a:pPr>
+            <a:r>
+              <a:rPr lang="en-US" sz="1300" dirty="0">
+                <a:solidFill>
+                  <a:srgbClr val="E9EEF3"/>
+                </a:solidFill>
+                <a:latin typeface="Consolas" pitchFamily="34" charset="0"/>
+                <a:ea typeface="Consolas" pitchFamily="34" charset="-122"/>
+                <a:cs typeface="Consolas" pitchFamily="34" charset="-120"/>
+              </a:rPr>
+              <a:t>seq</a:t>
+            </a:r>
+            <a:pPr indent="0" marL="0">
+              <a:lnSpc>
+                <a:spcPct val="130000"/>
+              </a:lnSpc>
+              <a:buNone/>
+            </a:pPr>
+            <a:r>
+              <a:rPr lang="en-US" sz="1300" dirty="0">
+                <a:solidFill>
+                  <a:srgbClr val="E9EEF3"/>
+                </a:solidFill>
+                <a:latin typeface="Consolas" pitchFamily="34" charset="0"/>
+                <a:ea typeface="Consolas" pitchFamily="34" charset="-122"/>
+                <a:cs typeface="Consolas" pitchFamily="34" charset="-120"/>
+              </a:rPr>
+              <a:t>)</a:t>
+            </a:r>
+            <a:pPr indent="0" marL="0">
+              <a:lnSpc>
+                <a:spcPct val="130000"/>
+              </a:lnSpc>
+              <a:buNone/>
+            </a:pPr>
+            <a:r>
+              <a:rPr lang="en-US" sz="1300" dirty="0">
+                <a:solidFill>
+                  <a:srgbClr val="E9EEF3"/>
+                </a:solidFill>
+                <a:latin typeface="Consolas" pitchFamily="34" charset="0"/>
+                <a:ea typeface="Consolas" pitchFamily="34" charset="-122"/>
+                <a:cs typeface="Consolas" pitchFamily="34" charset="-120"/>
+              </a:rPr>
+              <a:t> </a:t>
+            </a:r>
+            <a:pPr indent="0" marL="0">
+              <a:lnSpc>
+                <a:spcPct val="130000"/>
+              </a:lnSpc>
+              <a:buNone/>
+            </a:pPr>
+            <a:r>
+              <a:rPr lang="en-US" sz="1300" dirty="0">
+                <a:solidFill>
+                  <a:srgbClr val="E9EEF3"/>
+                </a:solidFill>
+                <a:latin typeface="Consolas" pitchFamily="34" charset="0"/>
+                <a:ea typeface="Consolas" pitchFamily="34" charset="-122"/>
+                <a:cs typeface="Consolas" pitchFamily="34" charset="-120"/>
+              </a:rPr>
+              <a:t>.</a:t>
+            </a:r>
+            <a:pPr indent="0" marL="0">
+              <a:lnSpc>
+                <a:spcPct val="130000"/>
+              </a:lnSpc>
+              <a:buNone/>
+            </a:pPr>
+            <a:r>
+              <a:rPr lang="en-US" sz="1300" dirty="0">
+                <a:solidFill>
+                  <a:srgbClr val="E9EEF3"/>
+                </a:solidFill>
+                <a:latin typeface="Consolas" pitchFamily="34" charset="0"/>
+                <a:ea typeface="Consolas" pitchFamily="34" charset="-122"/>
+                <a:cs typeface="Consolas" pitchFamily="34" charset="-120"/>
+              </a:rPr>
+              <a:t>=</a:t>
+            </a:r>
+            <a:pPr indent="0" marL="0">
+              <a:lnSpc>
+                <a:spcPct val="130000"/>
+              </a:lnSpc>
+              <a:buNone/>
+            </a:pPr>
+            <a:r>
+              <a:rPr lang="en-US" sz="1300" dirty="0">
+                <a:solidFill>
+                  <a:srgbClr val="E9EEF3"/>
+                </a:solidFill>
+                <a:latin typeface="Consolas" pitchFamily="34" charset="0"/>
+                <a:ea typeface="Consolas" pitchFamily="34" charset="-122"/>
+                <a:cs typeface="Consolas" pitchFamily="34" charset="-120"/>
+              </a:rPr>
+              <a:t>=</a:t>
+            </a:r>
+            <a:pPr indent="0" marL="0">
+              <a:lnSpc>
+                <a:spcPct val="130000"/>
+              </a:lnSpc>
+              <a:buNone/>
+            </a:pPr>
+            <a:r>
+              <a:rPr lang="en-US" sz="1300" dirty="0">
+                <a:solidFill>
+                  <a:srgbClr val="E9EEF3"/>
+                </a:solidFill>
+                <a:latin typeface="Consolas" pitchFamily="34" charset="0"/>
+                <a:ea typeface="Consolas" pitchFamily="34" charset="-122"/>
+                <a:cs typeface="Consolas" pitchFamily="34" charset="-120"/>
+              </a:rPr>
+              <a:t> </a:t>
+            </a:r>
+            <a:pPr indent="0" marL="0">
+              <a:lnSpc>
+                <a:spcPct val="130000"/>
+              </a:lnSpc>
+              <a:buNone/>
+            </a:pPr>
+            <a:r>
+              <a:rPr lang="en-US" sz="1300" dirty="0">
+                <a:solidFill>
+                  <a:srgbClr val="F2C88F"/>
+                </a:solidFill>
+                <a:latin typeface="Consolas" pitchFamily="34" charset="0"/>
+                <a:ea typeface="Consolas" pitchFamily="34" charset="-122"/>
+                <a:cs typeface="Consolas" pitchFamily="34" charset="-120"/>
+              </a:rPr>
+              <a:t>2</a:t>
+            </a:r>
+            <a:pPr indent="0" marL="0">
+              <a:lnSpc>
+                <a:spcPct val="130000"/>
+              </a:lnSpc>
+              <a:buNone/>
+            </a:pPr>
+            <a:r>
+              <a:rPr lang="en-US" sz="1300" dirty="0">
+                <a:solidFill>
+                  <a:srgbClr val="E9EEF3"/>
+                </a:solidFill>
+                <a:latin typeface="Consolas" pitchFamily="34" charset="0"/>
+                <a:ea typeface="Consolas" pitchFamily="34" charset="-122"/>
+                <a:cs typeface="Consolas" pitchFamily="34" charset="-120"/>
+              </a:rPr>
+              <a:t>)</a:t>
+            </a:r>
+            <a:endParaRPr lang="en-US" sz="1300" dirty="0"/>
+          </a:p>
+        </p:txBody>
+      </p:sp>
+      <p:sp>
+        <p:nvSpPr>
+          <p:cNvPr id="11" name="TextBox 10"/>
+          <p:cNvSpPr txBox="1"/>
+          <p:nvPr/>
+        </p:nvSpPr>
+        <p:spPr>
+          <a:xfrm>
+            <a:off x="548640" y="3176160"/>
+            <a:ext cx="11094415" cy="274320"/>
+          </a:xfrm>
+          <a:prstGeom prst="rect">
+            <a:avLst/>
+          </a:prstGeom>
+          <a:noFill/>
+        </p:spPr>
+        <p:txBody>
+          <a:bodyPr wrap="square">
+            <a:spAutoFit/>
+          </a:bodyPr>
+          <a:lstStyle/>
+          <a:p>
+            <a:pPr algn="l"/>
+            <a:r>
+              <a:rPr sz="1100" b="1" i="0">
+                <a:solidFill>
+                  <a:srgbClr val="2C7A8C"/>
+                </a:solidFill>
+                <a:latin typeface="Calibri"/>
+              </a:rPr>
+              <a:t>RESULTADO DE CADA PARTE</a:t>
+            </a:r>
+          </a:p>
+        </p:txBody>
+      </p:sp>
+      <p:sp>
+        <p:nvSpPr>
+          <p:cNvPr id="12" name="Rounded Rectangle 11"/>
+          <p:cNvSpPr/>
+          <p:nvPr/>
+        </p:nvSpPr>
+        <p:spPr>
+          <a:xfrm>
+            <a:off x="548640" y="3496200"/>
+            <a:ext cx="11094415" cy="1554480"/>
+          </a:xfrm>
+          <a:prstGeom prst="roundRect">
+            <a:avLst>
+              <a:gd name="adj" fmla="val 5882"/>
+            </a:avLst>
+          </a:prstGeom>
+          <a:solidFill>
+            <a:srgbClr val="E9F2F3"/>
+          </a:solidFill>
+          <a:ln>
+            <a:noFill/>
+          </a:ln>
+          <a:effectLst/>
+        </p:spPr>
+        <p:style>
+          <a:lnRef idx="1">
+            <a:schemeClr val="accent1"/>
+          </a:lnRef>
+          <a:fillRef idx="3">
+            <a:schemeClr val="accent1"/>
+          </a:fillRef>
+          <a:effectRef idx="2">
+            <a:schemeClr val="accent1"/>
+          </a:effectRef>
+          <a:fontRef idx="minor">
+            <a:schemeClr val="lt1"/>
+          </a:fontRef>
+        </p:style>
+        <p:txBody>
+          <a:bodyPr rtlCol="0" anchor="ctr"/>
+          <a:lstStyle/>
+          <a:p>
+            <a:pPr algn="ctr"/>
+          </a:p>
+        </p:txBody>
+      </p:sp>
+      <p:sp>
+        <p:nvSpPr>
+          <p:cNvPr id="13" name="TextBox 12"/>
+          <p:cNvSpPr txBox="1"/>
+          <p:nvPr/>
+        </p:nvSpPr>
+        <p:spPr>
+          <a:xfrm>
+            <a:off x="822960" y="3633360"/>
+            <a:ext cx="10545775" cy="1417320"/>
+          </a:xfrm>
+          <a:prstGeom prst="rect">
+            <a:avLst/>
+          </a:prstGeom>
+          <a:noFill/>
+        </p:spPr>
+        <p:txBody>
+          <a:bodyPr wrap="square">
+            <a:spAutoFit/>
+          </a:bodyPr>
+          <a:lstStyle/>
+          <a:p>
+            <a:pPr>
+              <a:lnSpc>
+                <a:spcPct val="125000"/>
+              </a:lnSpc>
+            </a:pPr>
+            <a:r>
+              <a:rPr sz="1250" b="1">
+                <a:solidFill>
+                  <a:srgbClr val="2C7A8C"/>
+                </a:solidFill>
+                <a:latin typeface="Consolas"/>
+              </a:rPr>
+              <a:t>seq</a:t>
+            </a:r>
+            <a:r>
+              <a:rPr sz="1250" b="0">
+                <a:solidFill>
+                  <a:srgbClr val="1B2733"/>
+                </a:solidFill>
+                <a:latin typeface="Consolas"/>
+              </a:rPr>
+              <a:t>  →  [1, 2, 4, 8, 15]</a:t>
+            </a:r>
+          </a:p>
+          <a:p>
+            <a:pPr>
+              <a:lnSpc>
+                <a:spcPct val="125000"/>
+              </a:lnSpc>
+            </a:pPr>
+            <a:r>
+              <a:rPr sz="1250" b="1">
+                <a:solidFill>
+                  <a:srgbClr val="2C7A8C"/>
+                </a:solidFill>
+                <a:latin typeface="Consolas"/>
+              </a:rPr>
+              <a:t>diff(seq)</a:t>
+            </a:r>
+            <a:r>
+              <a:rPr sz="1250" b="0">
+                <a:solidFill>
+                  <a:srgbClr val="1B2733"/>
+                </a:solidFill>
+                <a:latin typeface="Consolas"/>
+              </a:rPr>
+              <a:t>  →  [1, 2, 4, 7]  (diferenças entre termos vizinhos)</a:t>
+            </a:r>
+          </a:p>
+          <a:p>
+            <a:pPr>
+              <a:lnSpc>
+                <a:spcPct val="125000"/>
+              </a:lnSpc>
+            </a:pPr>
+            <a:r>
+              <a:rPr sz="1250" b="1">
+                <a:solidFill>
+                  <a:srgbClr val="2C7A8C"/>
+                </a:solidFill>
+                <a:latin typeface="Consolas"/>
+              </a:rPr>
+              <a:t>diff(seq) .== 2</a:t>
+            </a:r>
+            <a:r>
+              <a:rPr sz="1250" b="0">
+                <a:solidFill>
+                  <a:srgbClr val="1B2733"/>
+                </a:solidFill>
+                <a:latin typeface="Consolas"/>
+              </a:rPr>
+              <a:t>  →  [false, true, false, false]  (compara cada diferença com 2)</a:t>
+            </a:r>
+          </a:p>
+          <a:p>
+            <a:pPr>
+              <a:lnSpc>
+                <a:spcPct val="125000"/>
+              </a:lnSpc>
+            </a:pPr>
+            <a:r>
+              <a:rPr sz="1250" b="1">
+                <a:solidFill>
+                  <a:srgbClr val="2C7A8C"/>
+                </a:solidFill>
+                <a:latin typeface="Consolas"/>
+              </a:rPr>
+              <a:t>all(diff(seq) .== 2)</a:t>
+            </a:r>
+            <a:r>
+              <a:rPr sz="1250" b="0">
+                <a:solidFill>
+                  <a:srgbClr val="1B2733"/>
+                </a:solidFill>
+                <a:latin typeface="Consolas"/>
+              </a:rPr>
+              <a:t>  →  false  (nem toda diferença é 2 — a hipótese não se sustenta)</a:t>
+            </a:r>
+          </a:p>
+        </p:txBody>
+      </p:sp>
+      <p:sp>
+        <p:nvSpPr>
+          <p:cNvPr id="14" name="TextBox 13"/>
+          <p:cNvSpPr txBox="1"/>
+          <p:nvPr/>
+        </p:nvSpPr>
+        <p:spPr>
+          <a:xfrm>
+            <a:off x="548640" y="6473952"/>
+            <a:ext cx="5486400" cy="274320"/>
+          </a:xfrm>
+          <a:prstGeom prst="rect">
+            <a:avLst/>
+          </a:prstGeom>
+          <a:noFill/>
+        </p:spPr>
+        <p:txBody>
+          <a:bodyPr wrap="square">
+            <a:spAutoFit/>
+          </a:bodyPr>
+          <a:lstStyle/>
+          <a:p>
+            <a:pPr algn="l"/>
+            <a:r>
+              <a:rPr sz="1000" b="0" i="0">
+                <a:solidFill>
+                  <a:srgbClr val="9AA5B1"/>
+                </a:solidFill>
+                <a:latin typeface="Calibri"/>
+              </a:rPr>
+              <a:t>Aula 2 · Pensamento Indutivo</a:t>
+            </a:r>
+          </a:p>
+        </p:txBody>
+      </p:sp>
+      <p:sp>
+        <p:nvSpPr>
+          <p:cNvPr id="15" name="TextBox 14"/>
+          <p:cNvSpPr txBox="1"/>
+          <p:nvPr/>
+        </p:nvSpPr>
+        <p:spPr>
+          <a:xfrm>
+            <a:off x="10271455" y="6473952"/>
+            <a:ext cx="1371600" cy="274320"/>
+          </a:xfrm>
+          <a:prstGeom prst="rect">
+            <a:avLst/>
+          </a:prstGeom>
+          <a:noFill/>
+        </p:spPr>
+        <p:txBody>
+          <a:bodyPr wrap="square">
+            <a:spAutoFit/>
+          </a:bodyPr>
+          <a:lstStyle/>
+          <a:p>
+            <a:pPr algn="l"/>
+            <a:r>
+              <a:rPr sz="1000" b="0" i="0">
+                <a:solidFill>
+                  <a:srgbClr val="9AA5B1"/>
+                </a:solidFill>
+                <a:latin typeface="Calibri"/>
+              </a:rPr>
+              <a:t>12 / 27</a:t>
+            </a:r>
+          </a:p>
+        </p:txBody>
+      </p:sp>
+    </p:spTree>
+  </p:cSld>
+  <p:clrMapOvr>
+    <a:masterClrMapping/>
+  </p:clrMapOvr>
+</p:sld>
+</file>
+
+<file path=ppt/slides/slide26.xml><?xml version="1.0" encoding="utf-8"?>
+<p:sld xmlns:a="http://schemas.openxmlformats.org/drawingml/2006/main" xmlns:p="http://schemas.openxmlformats.org/presentationml/2006/main" xmlns:r="http://schemas.openxmlformats.org/officeDocument/2006/relationships">
+  <p:cSld>
+    <p:spTree>
+      <p:nvGrpSpPr>
+        <p:cNvPr id="1" name=""/>
+        <p:cNvGrpSpPr/>
+        <p:nvPr/>
+      </p:nvGrpSpPr>
+      <p:grpSpPr/>
+      <p:sp>
+        <p:nvSpPr>
+          <p:cNvPr id="2" name="TextBox 1"/>
+          <p:cNvSpPr txBox="1"/>
+          <p:nvPr/>
+        </p:nvSpPr>
+        <p:spPr>
+          <a:xfrm>
+            <a:off x="548640" y="457200"/>
+            <a:ext cx="11094415" cy="320040"/>
+          </a:xfrm>
+          <a:prstGeom prst="rect">
+            <a:avLst/>
+          </a:prstGeom>
+          <a:noFill/>
+        </p:spPr>
+        <p:txBody>
+          <a:bodyPr wrap="square">
+            <a:spAutoFit/>
+          </a:bodyPr>
+          <a:lstStyle/>
+          <a:p>
+            <a:pPr algn="l"/>
+            <a:r>
+              <a:rPr sz="1200" b="1" i="0">
+                <a:solidFill>
+                  <a:srgbClr val="2C7A8C"/>
+                </a:solidFill>
+                <a:latin typeface="Calibri"/>
+              </a:rPr>
+              <a:t>TAREFA 2 DE 10  ·  2.2  ·  RESULTADO</a:t>
+            </a:r>
+          </a:p>
+        </p:txBody>
+      </p:sp>
+      <p:sp>
+        <p:nvSpPr>
+          <p:cNvPr id="3" name="TextBox 2"/>
+          <p:cNvSpPr txBox="1"/>
+          <p:nvPr/>
+        </p:nvSpPr>
+        <p:spPr>
+          <a:xfrm>
+            <a:off x="548640" y="800000"/>
+            <a:ext cx="11094415" cy="700000"/>
+          </a:xfrm>
+          <a:prstGeom prst="rect">
+            <a:avLst/>
+          </a:prstGeom>
+          <a:noFill/>
+        </p:spPr>
+        <p:txBody>
+          <a:bodyPr wrap="square">
+            <a:spAutoFit/>
+          </a:bodyPr>
+          <a:lstStyle/>
+          <a:p>
+            <a:pPr algn="l"/>
+            <a:r>
+              <a:rPr sz="2500" b="1" i="0">
+                <a:solidFill>
+                  <a:srgbClr val="1B3A5C"/>
+                </a:solidFill>
+                <a:latin typeface="Cambria"/>
+              </a:rPr>
+              <a:t>O que cada parte devolve?</a:t>
+            </a:r>
+          </a:p>
+        </p:txBody>
+      </p:sp>
+      <p:sp>
+        <p:nvSpPr>
+          <p:cNvPr id="8" name="Text 6"/>
+          <p:cNvSpPr/>
+          <p:nvPr/>
+        </p:nvSpPr>
+        <p:spPr>
+          <a:xfrm>
+            <a:off x="548640" y="1650000"/>
+            <a:ext cx="11094415" cy="274320"/>
+          </a:xfrm>
+          <a:prstGeom prst="rect">
+            <a:avLst/>
+          </a:prstGeom>
+          <a:noFill/>
+          <a:ln/>
+        </p:spPr>
+        <p:txBody>
+          <a:bodyPr wrap="square" lIns="0" tIns="0" rIns="0" bIns="0" rtlCol="0" anchor="ctr"/>
+          <a:lstStyle/>
+          <a:p>
+            <a:pPr indent="0" marL="0">
+              <a:buNone/>
+            </a:pPr>
+            <a:r>
+              <a:rPr lang="en-US" sz="1150" b="1" spc="120" kern="0" dirty="0">
+                <a:solidFill>
+                  <a:srgbClr val="44546A"/>
+                </a:solidFill>
+                <a:latin typeface="Calibri" pitchFamily="34" charset="0"/>
+                <a:ea typeface="Calibri" pitchFamily="34" charset="-122"/>
+                <a:cs typeface="Calibri" pitchFamily="34" charset="-120"/>
+              </a:rPr>
+              <a:t>EXEMPLO EM JULIA</a:t>
+            </a:r>
+            <a:endParaRPr lang="en-US" sz="1150" dirty="0"/>
+          </a:p>
+        </p:txBody>
+      </p:sp>
+      <p:sp>
+        <p:nvSpPr>
+          <p:cNvPr id="9" name="Shape 7"/>
+          <p:cNvSpPr/>
+          <p:nvPr/>
+        </p:nvSpPr>
+        <p:spPr>
+          <a:xfrm>
+            <a:off x="548640" y="2015760"/>
+            <a:ext cx="11094415" cy="1160400"/>
+          </a:xfrm>
+          <a:prstGeom prst="roundRect">
+            <a:avLst>
+              <a:gd name="adj" fmla="val 3721"/>
+            </a:avLst>
+          </a:prstGeom>
+          <a:solidFill>
+            <a:srgbClr val="12233B"/>
+          </a:solidFill>
+          <a:ln/>
+          <a:effectLst>
+            <a:outerShdw sx="100000" sy="100000" kx="0" ky="0" algn="bl" rotWithShape="0" blurRad="76200" dist="25400" dir="5400000">
+              <a:srgbClr val="1B3A5C">
+                <a:alpha val="15000"/>
+              </a:srgbClr>
+            </a:outerShdw>
+          </a:effectLst>
+        </p:spPr>
+        <p:txBody>
+          <a:bodyPr/>
+          <a:p/>
+        </p:txBody>
+      </p:sp>
+      <p:sp>
+        <p:nvSpPr>
+          <p:cNvPr id="10" name="Text 8"/>
+          <p:cNvSpPr/>
+          <p:nvPr/>
+        </p:nvSpPr>
+        <p:spPr>
+          <a:xfrm>
+            <a:off x="804672" y="2253504"/>
+            <a:ext cx="10582351" cy="684912"/>
+          </a:xfrm>
+          <a:prstGeom prst="rect">
+            <a:avLst/>
+          </a:prstGeom>
+          <a:noFill/>
+          <a:ln/>
+        </p:spPr>
+        <p:txBody>
+          <a:bodyPr wrap="square" lIns="0" tIns="0" rIns="0" bIns="0" rtlCol="0" anchor="t"/>
+          <a:lstStyle/>
+          <a:p>
+            <a:pPr indent="0" marL="0">
+              <a:lnSpc>
+                <a:spcPct val="130000"/>
+              </a:lnSpc>
+              <a:buNone/>
+            </a:pPr>
+            <a:r>
+              <a:rPr lang="en-US" sz="1300" dirty="0">
+                <a:solidFill>
+                  <a:srgbClr val="E9EEF3"/>
+                </a:solidFill>
+                <a:latin typeface="Consolas" pitchFamily="34" charset="0"/>
+                <a:ea typeface="Consolas" pitchFamily="34" charset="-122"/>
+                <a:cs typeface="Consolas" pitchFamily="34" charset="-120"/>
+              </a:rPr>
+              <a:t>seq</a:t>
+            </a:r>
+            <a:pPr indent="0" marL="0">
+              <a:lnSpc>
+                <a:spcPct val="130000"/>
+              </a:lnSpc>
+              <a:buNone/>
+            </a:pPr>
+            <a:r>
+              <a:rPr lang="en-US" sz="1300" dirty="0">
+                <a:solidFill>
+                  <a:srgbClr val="E9EEF3"/>
+                </a:solidFill>
+                <a:latin typeface="Consolas" pitchFamily="34" charset="0"/>
+                <a:ea typeface="Consolas" pitchFamily="34" charset="-122"/>
+                <a:cs typeface="Consolas" pitchFamily="34" charset="-120"/>
+              </a:rPr>
+              <a:t> </a:t>
+            </a:r>
+            <a:pPr indent="0" marL="0">
+              <a:lnSpc>
+                <a:spcPct val="130000"/>
+              </a:lnSpc>
+              <a:buNone/>
+            </a:pPr>
+            <a:r>
+              <a:rPr lang="en-US" sz="1300" dirty="0">
+                <a:solidFill>
+                  <a:srgbClr val="E9EEF3"/>
+                </a:solidFill>
+                <a:latin typeface="Consolas" pitchFamily="34" charset="0"/>
+                <a:ea typeface="Consolas" pitchFamily="34" charset="-122"/>
+                <a:cs typeface="Consolas" pitchFamily="34" charset="-120"/>
+              </a:rPr>
+              <a:t>=</a:t>
+            </a:r>
+            <a:pPr indent="0" marL="0">
+              <a:lnSpc>
+                <a:spcPct val="130000"/>
+              </a:lnSpc>
+              <a:buNone/>
+            </a:pPr>
+            <a:r>
+              <a:rPr lang="en-US" sz="1300" dirty="0">
+                <a:solidFill>
+                  <a:srgbClr val="E9EEF3"/>
+                </a:solidFill>
+                <a:latin typeface="Consolas" pitchFamily="34" charset="0"/>
+                <a:ea typeface="Consolas" pitchFamily="34" charset="-122"/>
+                <a:cs typeface="Consolas" pitchFamily="34" charset="-120"/>
+              </a:rPr>
+              <a:t> </a:t>
+            </a:r>
+            <a:pPr indent="0" marL="0">
+              <a:lnSpc>
+                <a:spcPct val="130000"/>
+              </a:lnSpc>
+              <a:buNone/>
+            </a:pPr>
+            <a:r>
+              <a:rPr lang="en-US" sz="1300" dirty="0">
+                <a:solidFill>
+                  <a:srgbClr val="E9EEF3"/>
+                </a:solidFill>
+                <a:latin typeface="Consolas" pitchFamily="34" charset="0"/>
+                <a:ea typeface="Consolas" pitchFamily="34" charset="-122"/>
+                <a:cs typeface="Consolas" pitchFamily="34" charset="-120"/>
+              </a:rPr>
+              <a:t>[</a:t>
+            </a:r>
+            <a:pPr indent="0" marL="0">
+              <a:lnSpc>
+                <a:spcPct val="130000"/>
+              </a:lnSpc>
+              <a:buNone/>
+            </a:pPr>
+            <a:r>
+              <a:rPr lang="en-US" sz="1300" dirty="0">
+                <a:solidFill>
+                  <a:srgbClr val="F2C88F"/>
+                </a:solidFill>
+                <a:latin typeface="Consolas" pitchFamily="34" charset="0"/>
+                <a:ea typeface="Consolas" pitchFamily="34" charset="-122"/>
+                <a:cs typeface="Consolas" pitchFamily="34" charset="-120"/>
+              </a:rPr>
+              <a:t>3</a:t>
+            </a:r>
+            <a:pPr indent="0" marL="0">
+              <a:lnSpc>
+                <a:spcPct val="130000"/>
+              </a:lnSpc>
+              <a:buNone/>
+            </a:pPr>
+            <a:r>
+              <a:rPr lang="en-US" sz="1300" dirty="0">
+                <a:solidFill>
+                  <a:srgbClr val="E9EEF3"/>
+                </a:solidFill>
+                <a:latin typeface="Consolas" pitchFamily="34" charset="0"/>
+                <a:ea typeface="Consolas" pitchFamily="34" charset="-122"/>
+                <a:cs typeface="Consolas" pitchFamily="34" charset="-120"/>
+              </a:rPr>
+              <a:t>,</a:t>
+            </a:r>
+            <a:pPr indent="0" marL="0">
+              <a:lnSpc>
+                <a:spcPct val="130000"/>
+              </a:lnSpc>
+              <a:buNone/>
+            </a:pPr>
+            <a:r>
+              <a:rPr lang="en-US" sz="1300" dirty="0">
+                <a:solidFill>
+                  <a:srgbClr val="E9EEF3"/>
+                </a:solidFill>
+                <a:latin typeface="Consolas" pitchFamily="34" charset="0"/>
+                <a:ea typeface="Consolas" pitchFamily="34" charset="-122"/>
+                <a:cs typeface="Consolas" pitchFamily="34" charset="-120"/>
+              </a:rPr>
+              <a:t> </a:t>
+            </a:r>
+            <a:pPr indent="0" marL="0">
+              <a:lnSpc>
+                <a:spcPct val="130000"/>
+              </a:lnSpc>
+              <a:buNone/>
+            </a:pPr>
+            <a:r>
+              <a:rPr lang="en-US" sz="1300" dirty="0">
+                <a:solidFill>
+                  <a:srgbClr val="F2C88F"/>
+                </a:solidFill>
+                <a:latin typeface="Consolas" pitchFamily="34" charset="0"/>
+                <a:ea typeface="Consolas" pitchFamily="34" charset="-122"/>
+                <a:cs typeface="Consolas" pitchFamily="34" charset="-120"/>
+              </a:rPr>
+              <a:t>6</a:t>
+            </a:r>
+            <a:pPr indent="0" marL="0">
+              <a:lnSpc>
+                <a:spcPct val="130000"/>
+              </a:lnSpc>
+              <a:buNone/>
+            </a:pPr>
+            <a:r>
+              <a:rPr lang="en-US" sz="1300" dirty="0">
+                <a:solidFill>
+                  <a:srgbClr val="E9EEF3"/>
+                </a:solidFill>
+                <a:latin typeface="Consolas" pitchFamily="34" charset="0"/>
+                <a:ea typeface="Consolas" pitchFamily="34" charset="-122"/>
+                <a:cs typeface="Consolas" pitchFamily="34" charset="-120"/>
+              </a:rPr>
+              <a:t>,</a:t>
+            </a:r>
+            <a:pPr indent="0" marL="0">
+              <a:lnSpc>
+                <a:spcPct val="130000"/>
+              </a:lnSpc>
+              <a:buNone/>
+            </a:pPr>
+            <a:r>
+              <a:rPr lang="en-US" sz="1300" dirty="0">
+                <a:solidFill>
+                  <a:srgbClr val="E9EEF3"/>
+                </a:solidFill>
+                <a:latin typeface="Consolas" pitchFamily="34" charset="0"/>
+                <a:ea typeface="Consolas" pitchFamily="34" charset="-122"/>
+                <a:cs typeface="Consolas" pitchFamily="34" charset="-120"/>
+              </a:rPr>
+              <a:t> </a:t>
+            </a:r>
+            <a:pPr indent="0" marL="0">
+              <a:lnSpc>
+                <a:spcPct val="130000"/>
+              </a:lnSpc>
+              <a:buNone/>
+            </a:pPr>
+            <a:r>
+              <a:rPr lang="en-US" sz="1300" dirty="0">
+                <a:solidFill>
+                  <a:srgbClr val="F2C88F"/>
+                </a:solidFill>
+                <a:latin typeface="Consolas" pitchFamily="34" charset="0"/>
+                <a:ea typeface="Consolas" pitchFamily="34" charset="-122"/>
+                <a:cs typeface="Consolas" pitchFamily="34" charset="-120"/>
+              </a:rPr>
+              <a:t>9</a:t>
+            </a:r>
+            <a:pPr indent="0" marL="0">
+              <a:lnSpc>
+                <a:spcPct val="130000"/>
+              </a:lnSpc>
+              <a:buNone/>
+            </a:pPr>
+            <a:r>
+              <a:rPr lang="en-US" sz="1300" dirty="0">
+                <a:solidFill>
+                  <a:srgbClr val="E9EEF3"/>
+                </a:solidFill>
+                <a:latin typeface="Consolas" pitchFamily="34" charset="0"/>
+                <a:ea typeface="Consolas" pitchFamily="34" charset="-122"/>
+                <a:cs typeface="Consolas" pitchFamily="34" charset="-120"/>
+              </a:rPr>
+              <a:t>,</a:t>
+            </a:r>
+            <a:pPr indent="0" marL="0">
+              <a:lnSpc>
+                <a:spcPct val="130000"/>
+              </a:lnSpc>
+              <a:buNone/>
+            </a:pPr>
+            <a:r>
+              <a:rPr lang="en-US" sz="1300" dirty="0">
+                <a:solidFill>
+                  <a:srgbClr val="E9EEF3"/>
+                </a:solidFill>
+                <a:latin typeface="Consolas" pitchFamily="34" charset="0"/>
+                <a:ea typeface="Consolas" pitchFamily="34" charset="-122"/>
+                <a:cs typeface="Consolas" pitchFamily="34" charset="-120"/>
+              </a:rPr>
+              <a:t> </a:t>
+            </a:r>
+            <a:pPr indent="0" marL="0">
+              <a:lnSpc>
+                <a:spcPct val="130000"/>
+              </a:lnSpc>
+              <a:buNone/>
+            </a:pPr>
+            <a:r>
+              <a:rPr lang="en-US" sz="1300" dirty="0">
+                <a:solidFill>
+                  <a:srgbClr val="F2C88F"/>
+                </a:solidFill>
+                <a:latin typeface="Consolas" pitchFamily="34" charset="0"/>
+                <a:ea typeface="Consolas" pitchFamily="34" charset="-122"/>
+                <a:cs typeface="Consolas" pitchFamily="34" charset="-120"/>
+              </a:rPr>
+              <a:t>12</a:t>
+            </a:r>
+            <a:pPr indent="0" marL="0">
+              <a:lnSpc>
+                <a:spcPct val="130000"/>
+              </a:lnSpc>
+              <a:buNone/>
+            </a:pPr>
+            <a:r>
+              <a:rPr lang="en-US" sz="1300" dirty="0">
+                <a:solidFill>
+                  <a:srgbClr val="E9EEF3"/>
+                </a:solidFill>
+                <a:latin typeface="Consolas" pitchFamily="34" charset="0"/>
+                <a:ea typeface="Consolas" pitchFamily="34" charset="-122"/>
+                <a:cs typeface="Consolas" pitchFamily="34" charset="-120"/>
+              </a:rPr>
+              <a:t>]</a:t>
+            </a:r>
+            <a:endParaRPr lang="en-US" sz="1300" dirty="0"/>
+          </a:p>
+          <a:p>
+            <a:pPr indent="0" marL="0">
+              <a:lnSpc>
+                <a:spcPct val="130000"/>
+              </a:lnSpc>
+              <a:buNone/>
+            </a:pPr>
+            <a:r>
+              <a:rPr lang="en-US" sz="1300" dirty="0">
+                <a:solidFill>
+                  <a:srgbClr val="E9EEF3"/>
+                </a:solidFill>
+                <a:latin typeface="Consolas" pitchFamily="34" charset="0"/>
+                <a:ea typeface="Consolas" pitchFamily="34" charset="-122"/>
+                <a:cs typeface="Consolas" pitchFamily="34" charset="-120"/>
+              </a:rPr>
+              <a:t>dif</a:t>
+            </a:r>
+            <a:pPr indent="0" marL="0">
+              <a:lnSpc>
+                <a:spcPct val="130000"/>
+              </a:lnSpc>
+              <a:buNone/>
+            </a:pPr>
+            <a:r>
+              <a:rPr lang="en-US" sz="1300" dirty="0">
+                <a:solidFill>
+                  <a:srgbClr val="E9EEF3"/>
+                </a:solidFill>
+                <a:latin typeface="Consolas" pitchFamily="34" charset="0"/>
+                <a:ea typeface="Consolas" pitchFamily="34" charset="-122"/>
+                <a:cs typeface="Consolas" pitchFamily="34" charset="-120"/>
+              </a:rPr>
+              <a:t> </a:t>
+            </a:r>
+            <a:pPr indent="0" marL="0">
+              <a:lnSpc>
+                <a:spcPct val="130000"/>
+              </a:lnSpc>
+              <a:buNone/>
+            </a:pPr>
+            <a:r>
+              <a:rPr lang="en-US" sz="1300" dirty="0">
+                <a:solidFill>
+                  <a:srgbClr val="E9EEF3"/>
+                </a:solidFill>
+                <a:latin typeface="Consolas" pitchFamily="34" charset="0"/>
+                <a:ea typeface="Consolas" pitchFamily="34" charset="-122"/>
+                <a:cs typeface="Consolas" pitchFamily="34" charset="-120"/>
+              </a:rPr>
+              <a:t>=</a:t>
+            </a:r>
+            <a:pPr indent="0" marL="0">
+              <a:lnSpc>
+                <a:spcPct val="130000"/>
+              </a:lnSpc>
+              <a:buNone/>
+            </a:pPr>
+            <a:r>
+              <a:rPr lang="en-US" sz="1300" dirty="0">
+                <a:solidFill>
+                  <a:srgbClr val="E9EEF3"/>
+                </a:solidFill>
+                <a:latin typeface="Consolas" pitchFamily="34" charset="0"/>
+                <a:ea typeface="Consolas" pitchFamily="34" charset="-122"/>
+                <a:cs typeface="Consolas" pitchFamily="34" charset="-120"/>
+              </a:rPr>
+              <a:t> </a:t>
+            </a:r>
+            <a:pPr indent="0" marL="0">
+              <a:lnSpc>
+                <a:spcPct val="130000"/>
+              </a:lnSpc>
+              <a:buNone/>
+            </a:pPr>
+            <a:r>
+              <a:rPr lang="en-US" sz="1300" dirty="0">
+                <a:solidFill>
+                  <a:srgbClr val="E9EEF3"/>
+                </a:solidFill>
+                <a:latin typeface="Consolas" pitchFamily="34" charset="0"/>
+                <a:ea typeface="Consolas" pitchFamily="34" charset="-122"/>
+                <a:cs typeface="Consolas" pitchFamily="34" charset="-120"/>
+              </a:rPr>
+              <a:t>diff</a:t>
+            </a:r>
+            <a:pPr indent="0" marL="0">
+              <a:lnSpc>
+                <a:spcPct val="130000"/>
+              </a:lnSpc>
+              <a:buNone/>
+            </a:pPr>
+            <a:r>
+              <a:rPr lang="en-US" sz="1300" dirty="0">
+                <a:solidFill>
+                  <a:srgbClr val="E9EEF3"/>
+                </a:solidFill>
+                <a:latin typeface="Consolas" pitchFamily="34" charset="0"/>
+                <a:ea typeface="Consolas" pitchFamily="34" charset="-122"/>
+                <a:cs typeface="Consolas" pitchFamily="34" charset="-120"/>
+              </a:rPr>
+              <a:t>(</a:t>
+            </a:r>
+            <a:pPr indent="0" marL="0">
+              <a:lnSpc>
+                <a:spcPct val="130000"/>
+              </a:lnSpc>
+              <a:buNone/>
+            </a:pPr>
+            <a:r>
+              <a:rPr lang="en-US" sz="1300" dirty="0">
+                <a:solidFill>
+                  <a:srgbClr val="E9EEF3"/>
+                </a:solidFill>
+                <a:latin typeface="Consolas" pitchFamily="34" charset="0"/>
+                <a:ea typeface="Consolas" pitchFamily="34" charset="-122"/>
+                <a:cs typeface="Consolas" pitchFamily="34" charset="-120"/>
+              </a:rPr>
+              <a:t>seq</a:t>
+            </a:r>
+            <a:pPr indent="0" marL="0">
+              <a:lnSpc>
+                <a:spcPct val="130000"/>
+              </a:lnSpc>
+              <a:buNone/>
+            </a:pPr>
+            <a:r>
+              <a:rPr lang="en-US" sz="1300" dirty="0">
+                <a:solidFill>
+                  <a:srgbClr val="E9EEF3"/>
+                </a:solidFill>
+                <a:latin typeface="Consolas" pitchFamily="34" charset="0"/>
+                <a:ea typeface="Consolas" pitchFamily="34" charset="-122"/>
+                <a:cs typeface="Consolas" pitchFamily="34" charset="-120"/>
+              </a:rPr>
+              <a:t>)</a:t>
+            </a:r>
+            <a:endParaRPr lang="en-US" sz="1300" dirty="0"/>
+          </a:p>
+        </p:txBody>
+      </p:sp>
+      <p:sp>
+        <p:nvSpPr>
+          <p:cNvPr id="11" name="TextBox 10"/>
+          <p:cNvSpPr txBox="1"/>
+          <p:nvPr/>
+        </p:nvSpPr>
+        <p:spPr>
+          <a:xfrm>
+            <a:off x="548640" y="3176160"/>
+            <a:ext cx="11094415" cy="274320"/>
+          </a:xfrm>
+          <a:prstGeom prst="rect">
+            <a:avLst/>
+          </a:prstGeom>
+          <a:noFill/>
+        </p:spPr>
+        <p:txBody>
+          <a:bodyPr wrap="square">
+            <a:spAutoFit/>
+          </a:bodyPr>
+          <a:lstStyle/>
+          <a:p>
+            <a:pPr algn="l"/>
+            <a:r>
+              <a:rPr sz="1100" b="1" i="0">
+                <a:solidFill>
+                  <a:srgbClr val="2C7A8C"/>
+                </a:solidFill>
+                <a:latin typeface="Calibri"/>
+              </a:rPr>
+              <a:t>RESULTADO DE CADA PARTE</a:t>
+            </a:r>
+          </a:p>
+        </p:txBody>
+      </p:sp>
+      <p:sp>
+        <p:nvSpPr>
+          <p:cNvPr id="12" name="Rounded Rectangle 11"/>
+          <p:cNvSpPr/>
+          <p:nvPr/>
+        </p:nvSpPr>
+        <p:spPr>
+          <a:xfrm>
+            <a:off x="548640" y="3496200"/>
+            <a:ext cx="11094415" cy="1234440"/>
+          </a:xfrm>
+          <a:prstGeom prst="roundRect">
+            <a:avLst>
+              <a:gd name="adj" fmla="val 7407"/>
+            </a:avLst>
+          </a:prstGeom>
+          <a:solidFill>
+            <a:srgbClr val="E9F2F3"/>
+          </a:solidFill>
+          <a:ln>
+            <a:noFill/>
+          </a:ln>
+          <a:effectLst/>
+        </p:spPr>
+        <p:style>
+          <a:lnRef idx="1">
+            <a:schemeClr val="accent1"/>
+          </a:lnRef>
+          <a:fillRef idx="3">
+            <a:schemeClr val="accent1"/>
+          </a:fillRef>
+          <a:effectRef idx="2">
+            <a:schemeClr val="accent1"/>
+          </a:effectRef>
+          <a:fontRef idx="minor">
+            <a:schemeClr val="lt1"/>
+          </a:fontRef>
+        </p:style>
+        <p:txBody>
+          <a:bodyPr rtlCol="0" anchor="ctr"/>
+          <a:lstStyle/>
+          <a:p>
+            <a:pPr algn="ctr"/>
+          </a:p>
+        </p:txBody>
+      </p:sp>
+      <p:sp>
+        <p:nvSpPr>
+          <p:cNvPr id="13" name="TextBox 12"/>
+          <p:cNvSpPr txBox="1"/>
+          <p:nvPr/>
+        </p:nvSpPr>
+        <p:spPr>
+          <a:xfrm>
+            <a:off x="822960" y="3633360"/>
+            <a:ext cx="10545775" cy="1097280"/>
+          </a:xfrm>
+          <a:prstGeom prst="rect">
+            <a:avLst/>
+          </a:prstGeom>
+          <a:noFill/>
+        </p:spPr>
+        <p:txBody>
+          <a:bodyPr wrap="square">
+            <a:spAutoFit/>
+          </a:bodyPr>
+          <a:lstStyle/>
+          <a:p>
+            <a:pPr>
+              <a:lnSpc>
+                <a:spcPct val="125000"/>
+              </a:lnSpc>
+            </a:pPr>
+            <a:r>
+              <a:rPr sz="1250" b="1">
+                <a:solidFill>
+                  <a:srgbClr val="2C7A8C"/>
+                </a:solidFill>
+                <a:latin typeface="Consolas"/>
+              </a:rPr>
+              <a:t>seq</a:t>
+            </a:r>
+            <a:r>
+              <a:rPr sz="1250" b="0">
+                <a:solidFill>
+                  <a:srgbClr val="1B2733"/>
+                </a:solidFill>
+                <a:latin typeface="Consolas"/>
+              </a:rPr>
+              <a:t>  →  [3, 6, 9, 12]</a:t>
+            </a:r>
+          </a:p>
+          <a:p>
+            <a:pPr>
+              <a:lnSpc>
+                <a:spcPct val="125000"/>
+              </a:lnSpc>
+            </a:pPr>
+            <a:r>
+              <a:rPr sz="1250" b="1">
+                <a:solidFill>
+                  <a:srgbClr val="2C7A8C"/>
+                </a:solidFill>
+                <a:latin typeface="Consolas"/>
+              </a:rPr>
+              <a:t>diff(seq)</a:t>
+            </a:r>
+            <a:r>
+              <a:rPr sz="1250" b="0">
+                <a:solidFill>
+                  <a:srgbClr val="1B2733"/>
+                </a:solidFill>
+                <a:latin typeface="Consolas"/>
+              </a:rPr>
+              <a:t>  →  [3, 3, 3]  (diferença entre cada termo e o anterior)</a:t>
+            </a:r>
+          </a:p>
+          <a:p>
+            <a:pPr>
+              <a:lnSpc>
+                <a:spcPct val="125000"/>
+              </a:lnSpc>
+            </a:pPr>
+            <a:r>
+              <a:rPr sz="1250" b="1">
+                <a:solidFill>
+                  <a:srgbClr val="2C7A8C"/>
+                </a:solidFill>
+                <a:latin typeface="Consolas"/>
+              </a:rPr>
+              <a:t>dif</a:t>
+            </a:r>
+            <a:r>
+              <a:rPr sz="1250" b="0">
+                <a:solidFill>
+                  <a:srgbClr val="1B2733"/>
+                </a:solidFill>
+                <a:latin typeface="Consolas"/>
+              </a:rPr>
+              <a:t>  →  [3, 3, 3]</a:t>
+            </a:r>
+          </a:p>
+        </p:txBody>
+      </p:sp>
+      <p:sp>
+        <p:nvSpPr>
+          <p:cNvPr id="14" name="TextBox 13"/>
+          <p:cNvSpPr txBox="1"/>
+          <p:nvPr/>
+        </p:nvSpPr>
+        <p:spPr>
+          <a:xfrm>
+            <a:off x="548640" y="6473952"/>
+            <a:ext cx="5486400" cy="274320"/>
+          </a:xfrm>
+          <a:prstGeom prst="rect">
+            <a:avLst/>
+          </a:prstGeom>
+          <a:noFill/>
+        </p:spPr>
+        <p:txBody>
+          <a:bodyPr wrap="square">
+            <a:spAutoFit/>
+          </a:bodyPr>
+          <a:lstStyle/>
+          <a:p>
+            <a:pPr algn="l"/>
+            <a:r>
+              <a:rPr sz="1000" b="0" i="0">
+                <a:solidFill>
+                  <a:srgbClr val="9AA5B1"/>
+                </a:solidFill>
+                <a:latin typeface="Calibri"/>
+              </a:rPr>
+              <a:t>Aula 2 · Pensamento Indutivo</a:t>
+            </a:r>
+          </a:p>
+        </p:txBody>
+      </p:sp>
+      <p:sp>
+        <p:nvSpPr>
+          <p:cNvPr id="15" name="TextBox 14"/>
+          <p:cNvSpPr txBox="1"/>
+          <p:nvPr/>
+        </p:nvSpPr>
+        <p:spPr>
+          <a:xfrm>
+            <a:off x="10271455" y="6473952"/>
+            <a:ext cx="1371600" cy="274320"/>
+          </a:xfrm>
+          <a:prstGeom prst="rect">
+            <a:avLst/>
+          </a:prstGeom>
+          <a:noFill/>
+        </p:spPr>
+        <p:txBody>
+          <a:bodyPr wrap="square">
+            <a:spAutoFit/>
+          </a:bodyPr>
+          <a:lstStyle/>
+          <a:p>
+            <a:pPr algn="l"/>
+            <a:r>
+              <a:rPr sz="1000" b="0" i="0">
+                <a:solidFill>
+                  <a:srgbClr val="9AA5B1"/>
+                </a:solidFill>
+                <a:latin typeface="Calibri"/>
+              </a:rPr>
+              <a:t>10 / 27</a:t>
+            </a:r>
+          </a:p>
+        </p:txBody>
+      </p:sp>
+    </p:spTree>
+  </p:cSld>
+  <p:clrMapOvr>
+    <a:masterClrMapping/>
+  </p:clrMapOvr>
+</p:sld>
+</file>
+
+<file path=ppt/slides/slide27.xml><?xml version="1.0" encoding="utf-8"?>
+<p:sld xmlns:a="http://schemas.openxmlformats.org/drawingml/2006/main" xmlns:p="http://schemas.openxmlformats.org/presentationml/2006/main" xmlns:r="http://schemas.openxmlformats.org/officeDocument/2006/relationships">
+  <p:cSld>
+    <p:spTree>
+      <p:nvGrpSpPr>
+        <p:cNvPr id="1" name=""/>
+        <p:cNvGrpSpPr/>
+        <p:nvPr/>
+      </p:nvGrpSpPr>
+      <p:grpSpPr/>
+      <p:sp>
+        <p:nvSpPr>
+          <p:cNvPr id="2" name="TextBox 1"/>
+          <p:cNvSpPr txBox="1"/>
+          <p:nvPr/>
+        </p:nvSpPr>
+        <p:spPr>
+          <a:xfrm>
+            <a:off x="548640" y="457200"/>
+            <a:ext cx="11094415" cy="320040"/>
+          </a:xfrm>
+          <a:prstGeom prst="rect">
+            <a:avLst/>
+          </a:prstGeom>
+          <a:noFill/>
+        </p:spPr>
+        <p:txBody>
+          <a:bodyPr wrap="square">
+            <a:spAutoFit/>
+          </a:bodyPr>
+          <a:lstStyle/>
+          <a:p>
+            <a:pPr algn="l"/>
+            <a:r>
+              <a:rPr sz="1200" b="1" i="0">
+                <a:solidFill>
+                  <a:srgbClr val="2C7A8C"/>
+                </a:solidFill>
+                <a:latin typeface="Calibri"/>
+              </a:rPr>
+              <a:t>TAREFA 1 DE 10  ·  2.1  ·  RESULTADO</a:t>
+            </a:r>
+          </a:p>
+        </p:txBody>
+      </p:sp>
+      <p:sp>
+        <p:nvSpPr>
+          <p:cNvPr id="3" name="TextBox 2"/>
+          <p:cNvSpPr txBox="1"/>
+          <p:nvPr/>
+        </p:nvSpPr>
+        <p:spPr>
+          <a:xfrm>
+            <a:off x="548640" y="800000"/>
+            <a:ext cx="11094415" cy="700000"/>
+          </a:xfrm>
+          <a:prstGeom prst="rect">
+            <a:avLst/>
+          </a:prstGeom>
+          <a:noFill/>
+        </p:spPr>
+        <p:txBody>
+          <a:bodyPr wrap="square">
+            <a:spAutoFit/>
+          </a:bodyPr>
+          <a:lstStyle/>
+          <a:p>
+            <a:pPr algn="l"/>
+            <a:r>
+              <a:rPr sz="2500" b="1" i="0">
+                <a:solidFill>
+                  <a:srgbClr val="1B3A5C"/>
+                </a:solidFill>
+                <a:latin typeface="Cambria"/>
+              </a:rPr>
+              <a:t>O que cada parte devolve?</a:t>
+            </a:r>
+          </a:p>
+        </p:txBody>
+      </p:sp>
+      <p:sp>
+        <p:nvSpPr>
+          <p:cNvPr id="8" name="Text 6"/>
+          <p:cNvSpPr/>
+          <p:nvPr/>
+        </p:nvSpPr>
+        <p:spPr>
+          <a:xfrm>
+            <a:off x="548640" y="1650000"/>
+            <a:ext cx="11094415" cy="274320"/>
+          </a:xfrm>
+          <a:prstGeom prst="rect">
+            <a:avLst/>
+          </a:prstGeom>
+          <a:noFill/>
+          <a:ln/>
+        </p:spPr>
+        <p:txBody>
+          <a:bodyPr wrap="square" lIns="0" tIns="0" rIns="0" bIns="0" rtlCol="0" anchor="ctr"/>
+          <a:lstStyle/>
+          <a:p>
+            <a:pPr indent="0" marL="0">
+              <a:buNone/>
+            </a:pPr>
+            <a:r>
+              <a:rPr lang="en-US" sz="1150" b="1" spc="120" kern="0" dirty="0">
+                <a:solidFill>
+                  <a:srgbClr val="44546A"/>
+                </a:solidFill>
+                <a:latin typeface="Calibri" pitchFamily="34" charset="0"/>
+                <a:ea typeface="Calibri" pitchFamily="34" charset="-122"/>
+                <a:cs typeface="Calibri" pitchFamily="34" charset="-120"/>
+              </a:rPr>
+              <a:t>EXEMPLO EM JULIA</a:t>
+            </a:r>
+            <a:endParaRPr lang="en-US" sz="1150" dirty="0"/>
+          </a:p>
+        </p:txBody>
+      </p:sp>
+      <p:sp>
+        <p:nvSpPr>
+          <p:cNvPr id="9" name="Shape 7"/>
+          <p:cNvSpPr/>
+          <p:nvPr/>
+        </p:nvSpPr>
+        <p:spPr>
+          <a:xfrm>
+            <a:off x="548640" y="2015760"/>
+            <a:ext cx="11094415" cy="1490600"/>
+          </a:xfrm>
+          <a:prstGeom prst="roundRect">
+            <a:avLst>
+              <a:gd name="adj" fmla="val 3721"/>
+            </a:avLst>
+          </a:prstGeom>
+          <a:solidFill>
+            <a:srgbClr val="12233B"/>
+          </a:solidFill>
+          <a:ln/>
+          <a:effectLst>
+            <a:outerShdw sx="100000" sy="100000" kx="0" ky="0" algn="bl" rotWithShape="0" blurRad="76200" dist="25400" dir="5400000">
+              <a:srgbClr val="1B3A5C">
+                <a:alpha val="15000"/>
+              </a:srgbClr>
+            </a:outerShdw>
+          </a:effectLst>
+        </p:spPr>
+        <p:txBody>
+          <a:bodyPr/>
+          <a:p/>
+        </p:txBody>
+      </p:sp>
+      <p:sp>
+        <p:nvSpPr>
+          <p:cNvPr id="10" name="Text 8"/>
+          <p:cNvSpPr/>
+          <p:nvPr/>
+        </p:nvSpPr>
+        <p:spPr>
+          <a:xfrm>
+            <a:off x="804672" y="2253504"/>
+            <a:ext cx="10582351" cy="1015112"/>
+          </a:xfrm>
+          <a:prstGeom prst="rect">
+            <a:avLst/>
+          </a:prstGeom>
+          <a:noFill/>
+          <a:ln/>
+        </p:spPr>
+        <p:txBody>
+          <a:bodyPr wrap="square" lIns="0" tIns="0" rIns="0" bIns="0" rtlCol="0" anchor="t"/>
+          <a:lstStyle/>
+          <a:p>
+            <a:pPr indent="0" marL="0">
+              <a:lnSpc>
+                <a:spcPct val="130000"/>
+              </a:lnSpc>
+              <a:buNone/>
+            </a:pPr>
+            <a:r>
+              <a:rPr lang="en-US" sz="1300" dirty="0">
+                <a:solidFill>
+                  <a:srgbClr val="E9EEF3"/>
+                </a:solidFill>
+                <a:latin typeface="Consolas" pitchFamily="34" charset="0"/>
+                <a:ea typeface="Consolas" pitchFamily="34" charset="-122"/>
+                <a:cs typeface="Consolas" pitchFamily="34" charset="-120"/>
+              </a:rPr>
+              <a:t>seq</a:t>
+            </a:r>
+            <a:pPr indent="0" marL="0">
+              <a:lnSpc>
+                <a:spcPct val="130000"/>
+              </a:lnSpc>
+              <a:buNone/>
+            </a:pPr>
+            <a:r>
+              <a:rPr lang="en-US" sz="1300" dirty="0">
+                <a:solidFill>
+                  <a:srgbClr val="E9EEF3"/>
+                </a:solidFill>
+                <a:latin typeface="Consolas" pitchFamily="34" charset="0"/>
+                <a:ea typeface="Consolas" pitchFamily="34" charset="-122"/>
+                <a:cs typeface="Consolas" pitchFamily="34" charset="-120"/>
+              </a:rPr>
+              <a:t> </a:t>
+            </a:r>
+            <a:pPr indent="0" marL="0">
+              <a:lnSpc>
+                <a:spcPct val="130000"/>
+              </a:lnSpc>
+              <a:buNone/>
+            </a:pPr>
+            <a:r>
+              <a:rPr lang="en-US" sz="1300" dirty="0">
+                <a:solidFill>
+                  <a:srgbClr val="E9EEF3"/>
+                </a:solidFill>
+                <a:latin typeface="Consolas" pitchFamily="34" charset="0"/>
+                <a:ea typeface="Consolas" pitchFamily="34" charset="-122"/>
+                <a:cs typeface="Consolas" pitchFamily="34" charset="-120"/>
+              </a:rPr>
+              <a:t>=</a:t>
+            </a:r>
+            <a:pPr indent="0" marL="0">
+              <a:lnSpc>
+                <a:spcPct val="130000"/>
+              </a:lnSpc>
+              <a:buNone/>
+            </a:pPr>
+            <a:r>
+              <a:rPr lang="en-US" sz="1300" dirty="0">
+                <a:solidFill>
+                  <a:srgbClr val="E9EEF3"/>
+                </a:solidFill>
+                <a:latin typeface="Consolas" pitchFamily="34" charset="0"/>
+                <a:ea typeface="Consolas" pitchFamily="34" charset="-122"/>
+                <a:cs typeface="Consolas" pitchFamily="34" charset="-120"/>
+              </a:rPr>
+              <a:t> </a:t>
+            </a:r>
+            <a:pPr indent="0" marL="0">
+              <a:lnSpc>
+                <a:spcPct val="130000"/>
+              </a:lnSpc>
+              <a:buNone/>
+            </a:pPr>
+            <a:r>
+              <a:rPr lang="en-US" sz="1300" dirty="0">
+                <a:solidFill>
+                  <a:srgbClr val="E9EEF3"/>
+                </a:solidFill>
+                <a:latin typeface="Consolas" pitchFamily="34" charset="0"/>
+                <a:ea typeface="Consolas" pitchFamily="34" charset="-122"/>
+                <a:cs typeface="Consolas" pitchFamily="34" charset="-120"/>
+              </a:rPr>
+              <a:t>[</a:t>
+            </a:r>
+            <a:pPr indent="0" marL="0">
+              <a:lnSpc>
+                <a:spcPct val="130000"/>
+              </a:lnSpc>
+              <a:buNone/>
+            </a:pPr>
+            <a:r>
+              <a:rPr lang="en-US" sz="1300" dirty="0">
+                <a:solidFill>
+                  <a:srgbClr val="F2C88F"/>
+                </a:solidFill>
+                <a:latin typeface="Consolas" pitchFamily="34" charset="0"/>
+                <a:ea typeface="Consolas" pitchFamily="34" charset="-122"/>
+                <a:cs typeface="Consolas" pitchFamily="34" charset="-120"/>
+              </a:rPr>
+              <a:t>2</a:t>
+            </a:r>
+            <a:pPr indent="0" marL="0">
+              <a:lnSpc>
+                <a:spcPct val="130000"/>
+              </a:lnSpc>
+              <a:buNone/>
+            </a:pPr>
+            <a:r>
+              <a:rPr lang="en-US" sz="1300" dirty="0">
+                <a:solidFill>
+                  <a:srgbClr val="E9EEF3"/>
+                </a:solidFill>
+                <a:latin typeface="Consolas" pitchFamily="34" charset="0"/>
+                <a:ea typeface="Consolas" pitchFamily="34" charset="-122"/>
+                <a:cs typeface="Consolas" pitchFamily="34" charset="-120"/>
+              </a:rPr>
+              <a:t>,</a:t>
+            </a:r>
+            <a:pPr indent="0" marL="0">
+              <a:lnSpc>
+                <a:spcPct val="130000"/>
+              </a:lnSpc>
+              <a:buNone/>
+            </a:pPr>
+            <a:r>
+              <a:rPr lang="en-US" sz="1300" dirty="0">
+                <a:solidFill>
+                  <a:srgbClr val="E9EEF3"/>
+                </a:solidFill>
+                <a:latin typeface="Consolas" pitchFamily="34" charset="0"/>
+                <a:ea typeface="Consolas" pitchFamily="34" charset="-122"/>
+                <a:cs typeface="Consolas" pitchFamily="34" charset="-120"/>
+              </a:rPr>
+              <a:t> </a:t>
+            </a:r>
+            <a:pPr indent="0" marL="0">
+              <a:lnSpc>
+                <a:spcPct val="130000"/>
+              </a:lnSpc>
+              <a:buNone/>
+            </a:pPr>
+            <a:r>
+              <a:rPr lang="en-US" sz="1300" dirty="0">
+                <a:solidFill>
+                  <a:srgbClr val="F2C88F"/>
+                </a:solidFill>
+                <a:latin typeface="Consolas" pitchFamily="34" charset="0"/>
+                <a:ea typeface="Consolas" pitchFamily="34" charset="-122"/>
+                <a:cs typeface="Consolas" pitchFamily="34" charset="-120"/>
+              </a:rPr>
+              <a:t>4</a:t>
+            </a:r>
+            <a:pPr indent="0" marL="0">
+              <a:lnSpc>
+                <a:spcPct val="130000"/>
+              </a:lnSpc>
+              <a:buNone/>
+            </a:pPr>
+            <a:r>
+              <a:rPr lang="en-US" sz="1300" dirty="0">
+                <a:solidFill>
+                  <a:srgbClr val="E9EEF3"/>
+                </a:solidFill>
+                <a:latin typeface="Consolas" pitchFamily="34" charset="0"/>
+                <a:ea typeface="Consolas" pitchFamily="34" charset="-122"/>
+                <a:cs typeface="Consolas" pitchFamily="34" charset="-120"/>
+              </a:rPr>
+              <a:t>,</a:t>
+            </a:r>
+            <a:pPr indent="0" marL="0">
+              <a:lnSpc>
+                <a:spcPct val="130000"/>
+              </a:lnSpc>
+              <a:buNone/>
+            </a:pPr>
+            <a:r>
+              <a:rPr lang="en-US" sz="1300" dirty="0">
+                <a:solidFill>
+                  <a:srgbClr val="E9EEF3"/>
+                </a:solidFill>
+                <a:latin typeface="Consolas" pitchFamily="34" charset="0"/>
+                <a:ea typeface="Consolas" pitchFamily="34" charset="-122"/>
+                <a:cs typeface="Consolas" pitchFamily="34" charset="-120"/>
+              </a:rPr>
+              <a:t> </a:t>
+            </a:r>
+            <a:pPr indent="0" marL="0">
+              <a:lnSpc>
+                <a:spcPct val="130000"/>
+              </a:lnSpc>
+              <a:buNone/>
+            </a:pPr>
+            <a:r>
+              <a:rPr lang="en-US" sz="1300" dirty="0">
+                <a:solidFill>
+                  <a:srgbClr val="F2C88F"/>
+                </a:solidFill>
+                <a:latin typeface="Consolas" pitchFamily="34" charset="0"/>
+                <a:ea typeface="Consolas" pitchFamily="34" charset="-122"/>
+                <a:cs typeface="Consolas" pitchFamily="34" charset="-120"/>
+              </a:rPr>
+              <a:t>8</a:t>
+            </a:r>
+            <a:pPr indent="0" marL="0">
+              <a:lnSpc>
+                <a:spcPct val="130000"/>
+              </a:lnSpc>
+              <a:buNone/>
+            </a:pPr>
+            <a:r>
+              <a:rPr lang="en-US" sz="1300" dirty="0">
+                <a:solidFill>
+                  <a:srgbClr val="E9EEF3"/>
+                </a:solidFill>
+                <a:latin typeface="Consolas" pitchFamily="34" charset="0"/>
+                <a:ea typeface="Consolas" pitchFamily="34" charset="-122"/>
+                <a:cs typeface="Consolas" pitchFamily="34" charset="-120"/>
+              </a:rPr>
+              <a:t>,</a:t>
+            </a:r>
+            <a:pPr indent="0" marL="0">
+              <a:lnSpc>
+                <a:spcPct val="130000"/>
+              </a:lnSpc>
+              <a:buNone/>
+            </a:pPr>
+            <a:r>
+              <a:rPr lang="en-US" sz="1300" dirty="0">
+                <a:solidFill>
+                  <a:srgbClr val="E9EEF3"/>
+                </a:solidFill>
+                <a:latin typeface="Consolas" pitchFamily="34" charset="0"/>
+                <a:ea typeface="Consolas" pitchFamily="34" charset="-122"/>
+                <a:cs typeface="Consolas" pitchFamily="34" charset="-120"/>
+              </a:rPr>
+              <a:t> </a:t>
+            </a:r>
+            <a:pPr indent="0" marL="0">
+              <a:lnSpc>
+                <a:spcPct val="130000"/>
+              </a:lnSpc>
+              <a:buNone/>
+            </a:pPr>
+            <a:r>
+              <a:rPr lang="en-US" sz="1300" dirty="0">
+                <a:solidFill>
+                  <a:srgbClr val="F2C88F"/>
+                </a:solidFill>
+                <a:latin typeface="Consolas" pitchFamily="34" charset="0"/>
+                <a:ea typeface="Consolas" pitchFamily="34" charset="-122"/>
+                <a:cs typeface="Consolas" pitchFamily="34" charset="-120"/>
+              </a:rPr>
+              <a:t>16</a:t>
+            </a:r>
+            <a:pPr indent="0" marL="0">
+              <a:lnSpc>
+                <a:spcPct val="130000"/>
+              </a:lnSpc>
+              <a:buNone/>
+            </a:pPr>
+            <a:r>
+              <a:rPr lang="en-US" sz="1300" dirty="0">
+                <a:solidFill>
+                  <a:srgbClr val="E9EEF3"/>
+                </a:solidFill>
+                <a:latin typeface="Consolas" pitchFamily="34" charset="0"/>
+                <a:ea typeface="Consolas" pitchFamily="34" charset="-122"/>
+                <a:cs typeface="Consolas" pitchFamily="34" charset="-120"/>
+              </a:rPr>
+              <a:t>]</a:t>
+            </a:r>
+            <a:endParaRPr lang="en-US" sz="1300" dirty="0"/>
+          </a:p>
+          <a:p>
+            <a:pPr indent="0" marL="0">
+              <a:lnSpc>
+                <a:spcPct val="130000"/>
+              </a:lnSpc>
+              <a:buNone/>
+            </a:pPr>
+            <a:r>
+              <a:rPr lang="en-US" sz="1300" dirty="0">
+                <a:solidFill>
+                  <a:srgbClr val="E9EEF3"/>
+                </a:solidFill>
+                <a:latin typeface="Consolas" pitchFamily="34" charset="0"/>
+                <a:ea typeface="Consolas" pitchFamily="34" charset="-122"/>
+                <a:cs typeface="Consolas" pitchFamily="34" charset="-120"/>
+              </a:rPr>
+              <a:t>proximo</a:t>
+            </a:r>
+            <a:pPr indent="0" marL="0">
+              <a:lnSpc>
+                <a:spcPct val="130000"/>
+              </a:lnSpc>
+              <a:buNone/>
+            </a:pPr>
+            <a:r>
+              <a:rPr lang="en-US" sz="1300" dirty="0">
+                <a:solidFill>
+                  <a:srgbClr val="E9EEF3"/>
+                </a:solidFill>
+                <a:latin typeface="Consolas" pitchFamily="34" charset="0"/>
+                <a:ea typeface="Consolas" pitchFamily="34" charset="-122"/>
+                <a:cs typeface="Consolas" pitchFamily="34" charset="-120"/>
+              </a:rPr>
+              <a:t> </a:t>
+            </a:r>
+            <a:pPr indent="0" marL="0">
+              <a:lnSpc>
+                <a:spcPct val="130000"/>
+              </a:lnSpc>
+              <a:buNone/>
+            </a:pPr>
+            <a:r>
+              <a:rPr lang="en-US" sz="1300" dirty="0">
+                <a:solidFill>
+                  <a:srgbClr val="E9EEF3"/>
+                </a:solidFill>
+                <a:latin typeface="Consolas" pitchFamily="34" charset="0"/>
+                <a:ea typeface="Consolas" pitchFamily="34" charset="-122"/>
+                <a:cs typeface="Consolas" pitchFamily="34" charset="-120"/>
+              </a:rPr>
+              <a:t>=</a:t>
+            </a:r>
+            <a:pPr indent="0" marL="0">
+              <a:lnSpc>
+                <a:spcPct val="130000"/>
+              </a:lnSpc>
+              <a:buNone/>
+            </a:pPr>
+            <a:r>
+              <a:rPr lang="en-US" sz="1300" dirty="0">
+                <a:solidFill>
+                  <a:srgbClr val="E9EEF3"/>
+                </a:solidFill>
+                <a:latin typeface="Consolas" pitchFamily="34" charset="0"/>
+                <a:ea typeface="Consolas" pitchFamily="34" charset="-122"/>
+                <a:cs typeface="Consolas" pitchFamily="34" charset="-120"/>
+              </a:rPr>
+              <a:t> </a:t>
+            </a:r>
+            <a:pPr indent="0" marL="0">
+              <a:lnSpc>
+                <a:spcPct val="130000"/>
+              </a:lnSpc>
+              <a:buNone/>
+            </a:pPr>
+            <a:r>
+              <a:rPr lang="en-US" sz="1300" dirty="0">
+                <a:solidFill>
+                  <a:srgbClr val="F2C88F"/>
+                </a:solidFill>
+                <a:latin typeface="Consolas" pitchFamily="34" charset="0"/>
+                <a:ea typeface="Consolas" pitchFamily="34" charset="-122"/>
+                <a:cs typeface="Consolas" pitchFamily="34" charset="-120"/>
+              </a:rPr>
+              <a:t>32</a:t>
+            </a:r>
+            <a:endParaRPr lang="en-US" sz="1300" dirty="0"/>
+          </a:p>
+          <a:p>
+            <a:pPr indent="0" marL="0">
+              <a:lnSpc>
+                <a:spcPct val="130000"/>
+              </a:lnSpc>
+              <a:buNone/>
+            </a:pPr>
+            <a:r>
+              <a:rPr lang="en-US" sz="1300" dirty="0">
+                <a:solidFill>
+                  <a:srgbClr val="E9EEF3"/>
+                </a:solidFill>
+                <a:latin typeface="Consolas" pitchFamily="34" charset="0"/>
+                <a:ea typeface="Consolas" pitchFamily="34" charset="-122"/>
+                <a:cs typeface="Consolas" pitchFamily="34" charset="-120"/>
+              </a:rPr>
+              <a:t>hipotese</a:t>
+            </a:r>
+            <a:pPr indent="0" marL="0">
+              <a:lnSpc>
+                <a:spcPct val="130000"/>
+              </a:lnSpc>
+              <a:buNone/>
+            </a:pPr>
+            <a:r>
+              <a:rPr lang="en-US" sz="1300" dirty="0">
+                <a:solidFill>
+                  <a:srgbClr val="E9EEF3"/>
+                </a:solidFill>
+                <a:latin typeface="Consolas" pitchFamily="34" charset="0"/>
+                <a:ea typeface="Consolas" pitchFamily="34" charset="-122"/>
+                <a:cs typeface="Consolas" pitchFamily="34" charset="-120"/>
+              </a:rPr>
+              <a:t> </a:t>
+            </a:r>
+            <a:pPr indent="0" marL="0">
+              <a:lnSpc>
+                <a:spcPct val="130000"/>
+              </a:lnSpc>
+              <a:buNone/>
+            </a:pPr>
+            <a:r>
+              <a:rPr lang="en-US" sz="1300" dirty="0">
+                <a:solidFill>
+                  <a:srgbClr val="E9EEF3"/>
+                </a:solidFill>
+                <a:latin typeface="Consolas" pitchFamily="34" charset="0"/>
+                <a:ea typeface="Consolas" pitchFamily="34" charset="-122"/>
+                <a:cs typeface="Consolas" pitchFamily="34" charset="-120"/>
+              </a:rPr>
+              <a:t>=</a:t>
+            </a:r>
+            <a:pPr indent="0" marL="0">
+              <a:lnSpc>
+                <a:spcPct val="130000"/>
+              </a:lnSpc>
+              <a:buNone/>
+            </a:pPr>
+            <a:r>
+              <a:rPr lang="en-US" sz="1300" dirty="0">
+                <a:solidFill>
+                  <a:srgbClr val="E9EEF3"/>
+                </a:solidFill>
+                <a:latin typeface="Consolas" pitchFamily="34" charset="0"/>
+                <a:ea typeface="Consolas" pitchFamily="34" charset="-122"/>
+                <a:cs typeface="Consolas" pitchFamily="34" charset="-120"/>
+              </a:rPr>
+              <a:t> </a:t>
+            </a:r>
+            <a:pPr indent="0" marL="0">
+              <a:lnSpc>
+                <a:spcPct val="130000"/>
+              </a:lnSpc>
+              <a:buNone/>
+            </a:pPr>
+            <a:r>
+              <a:rPr lang="en-US" sz="1300" dirty="0">
+                <a:solidFill>
+                  <a:srgbClr val="8FD6C4"/>
+                </a:solidFill>
+                <a:latin typeface="Consolas" pitchFamily="34" charset="0"/>
+                <a:ea typeface="Consolas" pitchFamily="34" charset="-122"/>
+                <a:cs typeface="Consolas" pitchFamily="34" charset="-120"/>
+              </a:rPr>
+              <a:t>"multiplicar por 2"</a:t>
+            </a:r>
+            <a:endParaRPr lang="en-US" sz="1300" dirty="0"/>
+          </a:p>
+        </p:txBody>
+      </p:sp>
+      <p:sp>
+        <p:nvSpPr>
+          <p:cNvPr id="11" name="TextBox 10"/>
+          <p:cNvSpPr txBox="1"/>
+          <p:nvPr/>
+        </p:nvSpPr>
+        <p:spPr>
+          <a:xfrm>
+            <a:off x="548640" y="3506360"/>
+            <a:ext cx="11094415" cy="274320"/>
+          </a:xfrm>
+          <a:prstGeom prst="rect">
+            <a:avLst/>
+          </a:prstGeom>
+          <a:noFill/>
+        </p:spPr>
+        <p:txBody>
+          <a:bodyPr wrap="square">
+            <a:spAutoFit/>
+          </a:bodyPr>
+          <a:lstStyle/>
+          <a:p>
+            <a:pPr algn="l"/>
+            <a:r>
+              <a:rPr sz="1100" b="1" i="0">
+                <a:solidFill>
+                  <a:srgbClr val="2C7A8C"/>
+                </a:solidFill>
+                <a:latin typeface="Calibri"/>
+              </a:rPr>
+              <a:t>RESULTADO DE CADA PARTE</a:t>
+            </a:r>
+          </a:p>
+        </p:txBody>
+      </p:sp>
+      <p:sp>
+        <p:nvSpPr>
+          <p:cNvPr id="12" name="Rounded Rectangle 11"/>
+          <p:cNvSpPr/>
+          <p:nvPr/>
+        </p:nvSpPr>
+        <p:spPr>
+          <a:xfrm>
+            <a:off x="548640" y="3826400"/>
+            <a:ext cx="11094415" cy="1234440"/>
+          </a:xfrm>
+          <a:prstGeom prst="roundRect">
+            <a:avLst>
+              <a:gd name="adj" fmla="val 7407"/>
+            </a:avLst>
+          </a:prstGeom>
+          <a:solidFill>
+            <a:srgbClr val="E9F2F3"/>
+          </a:solidFill>
+          <a:ln>
+            <a:noFill/>
+          </a:ln>
+          <a:effectLst/>
+        </p:spPr>
+        <p:style>
+          <a:lnRef idx="1">
+            <a:schemeClr val="accent1"/>
+          </a:lnRef>
+          <a:fillRef idx="3">
+            <a:schemeClr val="accent1"/>
+          </a:fillRef>
+          <a:effectRef idx="2">
+            <a:schemeClr val="accent1"/>
+          </a:effectRef>
+          <a:fontRef idx="minor">
+            <a:schemeClr val="lt1"/>
+          </a:fontRef>
+        </p:style>
+        <p:txBody>
+          <a:bodyPr rtlCol="0" anchor="ctr"/>
+          <a:lstStyle/>
+          <a:p>
+            <a:pPr algn="ctr"/>
+          </a:p>
+        </p:txBody>
+      </p:sp>
+      <p:sp>
+        <p:nvSpPr>
+          <p:cNvPr id="13" name="TextBox 12"/>
+          <p:cNvSpPr txBox="1"/>
+          <p:nvPr/>
+        </p:nvSpPr>
+        <p:spPr>
+          <a:xfrm>
+            <a:off x="822960" y="3963560"/>
+            <a:ext cx="10545775" cy="1097280"/>
+          </a:xfrm>
+          <a:prstGeom prst="rect">
+            <a:avLst/>
+          </a:prstGeom>
+          <a:noFill/>
+        </p:spPr>
+        <p:txBody>
+          <a:bodyPr wrap="square">
+            <a:spAutoFit/>
+          </a:bodyPr>
+          <a:lstStyle/>
+          <a:p>
+            <a:pPr>
+              <a:lnSpc>
+                <a:spcPct val="125000"/>
+              </a:lnSpc>
+            </a:pPr>
+            <a:r>
+              <a:rPr sz="1250" b="1">
+                <a:solidFill>
+                  <a:srgbClr val="2C7A8C"/>
+                </a:solidFill>
+                <a:latin typeface="Consolas"/>
+              </a:rPr>
+              <a:t>seq</a:t>
+            </a:r>
+            <a:r>
+              <a:rPr sz="1250" b="0">
+                <a:solidFill>
+                  <a:srgbClr val="1B2733"/>
+                </a:solidFill>
+                <a:latin typeface="Consolas"/>
+              </a:rPr>
+              <a:t>  →  [2, 4, 8, 16]</a:t>
+            </a:r>
+          </a:p>
+          <a:p>
+            <a:pPr>
+              <a:lnSpc>
+                <a:spcPct val="125000"/>
+              </a:lnSpc>
+            </a:pPr>
+            <a:r>
+              <a:rPr sz="1250" b="1">
+                <a:solidFill>
+                  <a:srgbClr val="2C7A8C"/>
+                </a:solidFill>
+                <a:latin typeface="Consolas"/>
+              </a:rPr>
+              <a:t>proximo</a:t>
+            </a:r>
+            <a:r>
+              <a:rPr sz="1250" b="0">
+                <a:solidFill>
+                  <a:srgbClr val="1B2733"/>
+                </a:solidFill>
+                <a:latin typeface="Consolas"/>
+              </a:rPr>
+              <a:t>  →  32  (a próxima saída prevista pela hipótese)</a:t>
+            </a:r>
+          </a:p>
+          <a:p>
+            <a:pPr>
+              <a:lnSpc>
+                <a:spcPct val="125000"/>
+              </a:lnSpc>
+            </a:pPr>
+            <a:r>
+              <a:rPr sz="1250" b="1">
+                <a:solidFill>
+                  <a:srgbClr val="2C7A8C"/>
+                </a:solidFill>
+                <a:latin typeface="Consolas"/>
+              </a:rPr>
+              <a:t>hipotese</a:t>
+            </a:r>
+            <a:r>
+              <a:rPr sz="1250" b="0">
+                <a:solidFill>
+                  <a:srgbClr val="1B2733"/>
+                </a:solidFill>
+                <a:latin typeface="Consolas"/>
+              </a:rPr>
+              <a:t>  →  "multiplicar por 2"</a:t>
+            </a:r>
+          </a:p>
+        </p:txBody>
+      </p:sp>
+      <p:sp>
+        <p:nvSpPr>
+          <p:cNvPr id="14" name="TextBox 13"/>
+          <p:cNvSpPr txBox="1"/>
+          <p:nvPr/>
+        </p:nvSpPr>
+        <p:spPr>
+          <a:xfrm>
+            <a:off x="548640" y="6473952"/>
+            <a:ext cx="5486400" cy="274320"/>
+          </a:xfrm>
+          <a:prstGeom prst="rect">
+            <a:avLst/>
+          </a:prstGeom>
+          <a:noFill/>
+        </p:spPr>
+        <p:txBody>
+          <a:bodyPr wrap="square">
+            <a:spAutoFit/>
+          </a:bodyPr>
+          <a:lstStyle/>
+          <a:p>
+            <a:pPr algn="l"/>
+            <a:r>
+              <a:rPr sz="1000" b="0" i="0">
+                <a:solidFill>
+                  <a:srgbClr val="9AA5B1"/>
+                </a:solidFill>
+                <a:latin typeface="Calibri"/>
+              </a:rPr>
+              <a:t>Aula 2 · Pensamento Indutivo</a:t>
+            </a:r>
+          </a:p>
+        </p:txBody>
+      </p:sp>
+      <p:sp>
+        <p:nvSpPr>
+          <p:cNvPr id="15" name="TextBox 14"/>
+          <p:cNvSpPr txBox="1"/>
+          <p:nvPr/>
+        </p:nvSpPr>
+        <p:spPr>
+          <a:xfrm>
+            <a:off x="10271455" y="6473952"/>
+            <a:ext cx="1371600" cy="274320"/>
+          </a:xfrm>
+          <a:prstGeom prst="rect">
+            <a:avLst/>
+          </a:prstGeom>
+          <a:noFill/>
+        </p:spPr>
+        <p:txBody>
+          <a:bodyPr wrap="square">
+            <a:spAutoFit/>
+          </a:bodyPr>
+          <a:lstStyle/>
+          <a:p>
+            <a:pPr algn="l"/>
+            <a:r>
+              <a:rPr sz="1000" b="0" i="0">
+                <a:solidFill>
+                  <a:srgbClr val="9AA5B1"/>
+                </a:solidFill>
+                <a:latin typeface="Calibri"/>
+              </a:rPr>
+              <a:t>08 / 27</a:t>
+            </a:r>
           </a:p>
         </p:txBody>
       </p:sp>
@@ -13600,7 +23291,7 @@
                 <a:ea typeface="Calibri" pitchFamily="34" charset="-122"/>
                 <a:cs typeface="Calibri" pitchFamily="34" charset="-120"/>
               </a:rPr>
-              <a:t>03 / 17</a:t>
+              <a:t>03 / 27</a:t>
             </a:r>
             <a:endParaRPr lang="en-US" sz="1000" dirty="0"/>
           </a:p>
@@ -14163,7 +23854,7 @@
                 <a:ea typeface="Calibri" pitchFamily="34" charset="-122"/>
                 <a:cs typeface="Calibri" pitchFamily="34" charset="-120"/>
               </a:rPr>
-              <a:t>04 / 17</a:t>
+              <a:t>04 / 27</a:t>
             </a:r>
             <a:endParaRPr lang="en-US" sz="1000" dirty="0"/>
           </a:p>
@@ -14684,7 +24375,7 @@
                 <a:ea typeface="Calibri" pitchFamily="34" charset="-122"/>
                 <a:cs typeface="Calibri" pitchFamily="34" charset="-120"/>
               </a:rPr>
-              <a:t>05 / 17</a:t>
+              <a:t>05 / 27</a:t>
             </a:r>
             <a:endParaRPr lang="en-US" sz="1000" dirty="0"/>
           </a:p>
@@ -15138,7 +24829,7 @@
                 <a:ea typeface="Calibri" pitchFamily="34" charset="-122"/>
                 <a:cs typeface="Calibri" pitchFamily="34" charset="-120"/>
               </a:rPr>
-              <a:t>06 / 17</a:t>
+              <a:t>06 / 27</a:t>
             </a:r>
             <a:endParaRPr lang="en-US" sz="1000" dirty="0"/>
           </a:p>
@@ -16376,7 +26067,7 @@
                 <a:ea typeface="Calibri" pitchFamily="34" charset="-122"/>
                 <a:cs typeface="Calibri" pitchFamily="34" charset="-120"/>
               </a:rPr>
-              <a:t>07 / 17</a:t>
+              <a:t>07 / 27</a:t>
             </a:r>
             <a:endParaRPr lang="en-US" sz="1000" dirty="0"/>
           </a:p>
@@ -17577,7 +27268,7 @@
                 <a:ea typeface="Calibri" pitchFamily="34" charset="-122"/>
                 <a:cs typeface="Calibri" pitchFamily="34" charset="-120"/>
               </a:rPr>
-              <a:t>08 / 17</a:t>
+              <a:t>09 / 27</a:t>
             </a:r>
             <a:endParaRPr lang="en-US" sz="1000" dirty="0"/>
           </a:p>
@@ -18914,7 +28605,7 @@
                 <a:ea typeface="Calibri" pitchFamily="34" charset="-122"/>
                 <a:cs typeface="Calibri" pitchFamily="34" charset="-120"/>
               </a:rPr>
-              <a:t>09 / 17</a:t>
+              <a:t>11 / 27</a:t>
             </a:r>
             <a:endParaRPr lang="en-US" sz="1000" dirty="0"/>
           </a:p>
